--- a/public/documents/countries/gabon.pptx
+++ b/public/documents/countries/gabon.pptx
@@ -117,7 +117,7 @@
 </p:presentation>
 </file>
 
-<file path=ppt/charts/chart19.xml><?xml version="1.0" encoding="utf-8"?>
+<file path=ppt/charts/chart1.xml><?xml version="1.0" encoding="utf-8"?>
 <c:chartSpace xmlns:c="http://schemas.openxmlformats.org/drawingml/2006/chart" xmlns:a="http://schemas.openxmlformats.org/drawingml/2006/main" xmlns:r="http://schemas.openxmlformats.org/officeDocument/2006/relationships">
   <c:date1904 val="0"/>
   <c:roundedCorners val="1"/>
@@ -362,7 +362,7 @@
 </c:chartSpace>
 </file>
 
-<file path=ppt/charts/chart20.xml><?xml version="1.0" encoding="utf-8"?>
+<file path=ppt/charts/chart2.xml><?xml version="1.0" encoding="utf-8"?>
 <c:chartSpace xmlns:c="http://schemas.openxmlformats.org/drawingml/2006/chart" xmlns:a="http://schemas.openxmlformats.org/drawingml/2006/main" xmlns:r="http://schemas.openxmlformats.org/officeDocument/2006/relationships">
   <c:date1904 val="0"/>
   <c:roundedCorners val="1"/>
@@ -670,7 +670,7 @@
 </c:chartSpace>
 </file>
 
-<file path=ppt/charts/chart21.xml><?xml version="1.0" encoding="utf-8"?>
+<file path=ppt/charts/chart3.xml><?xml version="1.0" encoding="utf-8"?>
 <c:chartSpace xmlns:c="http://schemas.openxmlformats.org/drawingml/2006/chart" xmlns:a="http://schemas.openxmlformats.org/drawingml/2006/main" xmlns:r="http://schemas.openxmlformats.org/officeDocument/2006/relationships">
   <c:date1904 val="0"/>
   <c:roundedCorners val="1"/>
@@ -2650,6 +2650,13 @@
 <file path=ppt/slides/slide1.xml><?xml version="1.0" encoding="utf-8"?>
 <p:sld xmlns:a="http://schemas.openxmlformats.org/drawingml/2006/main" xmlns:r="http://schemas.openxmlformats.org/officeDocument/2006/relationships" xmlns:p="http://schemas.openxmlformats.org/presentationml/2006/main">
   <p:cSld name="Slide 1">
+    <p:bg>
+      <p:bgPr>
+        <a:solidFill>
+          <a:srgbClr val="0D0D0D"/>
+        </a:solidFill>
+      </p:bgPr>
+    </p:bg>
     <p:spTree>
       <p:nvGrpSpPr>
         <p:cNvPr id="1" name=""/>
@@ -2680,79 +2687,172 @@
         </p:blipFill>
         <p:spPr>
           <a:xfrm>
+            <a:off x="6272784" y="0"/>
+            <a:ext cx="5918911" cy="6858000"/>
+          </a:xfrm>
+          <a:prstGeom prst="rect">
+            <a:avLst/>
+          </a:prstGeom>
+        </p:spPr>
+      </p:pic>
+      <p:sp>
+        <p:nvSpPr>
+          <p:cNvPr id="3" name="Shape 0"/>
+          <p:cNvSpPr/>
+          <p:nvPr/>
+        </p:nvSpPr>
+        <p:spPr>
+          <a:xfrm>
             <a:off x="0" y="0"/>
-            <a:ext cx="12191695" cy="6858000"/>
+            <a:ext cx="6272784" cy="6858000"/>
+          </a:xfrm>
+          <a:prstGeom prst="rect">
+            <a:avLst/>
+          </a:prstGeom>
+          <a:solidFill>
+            <a:srgbClr val="0D0D0D"/>
+          </a:solidFill>
+          <a:ln/>
+        </p:spPr>
+      </p:sp>
+      <p:sp>
+        <p:nvSpPr>
+          <p:cNvPr id="4" name="Text 1"/>
+          <p:cNvSpPr txBox="1"/>
+          <p:nvPr/>
+        </p:nvSpPr>
+        <p:spPr>
+          <a:xfrm>
+            <a:off x="658368" y="566928"/>
+            <a:ext cx="4041648" cy="292608"/>
+          </a:xfrm>
+          <a:prstGeom prst="rect">
+            <a:avLst/>
+          </a:prstGeom>
+          <a:noFill/>
+          <a:ln/>
+        </p:spPr>
+        <p:txBody>
+          <a:bodyPr wrap="square" lIns="0" tIns="0" rIns="0" bIns="0" rtlCol="0" anchor="ctr"/>
+          <a:lstStyle/>
+          <a:p>
+            <a:pPr algn="l" indent="0" marL="0">
+              <a:buNone/>
+            </a:pPr>
+            <a:r>
+              <a:rPr lang="en-US" sz="1100" b="1" spc="80" kern="0" dirty="0">
+                <a:solidFill>
+                  <a:srgbClr val="8BC34A"/>
+                </a:solidFill>
+                <a:latin typeface="Calibri" pitchFamily="34" charset="0"/>
+                <a:ea typeface="Calibri" pitchFamily="34" charset="-122"/>
+                <a:cs typeface="Calibri" pitchFamily="34" charset="-120"/>
+              </a:rPr>
+              <a:t>GREEN SOLUTIONS GROUP</a:t>
+            </a:r>
+            <a:endParaRPr lang="en-US" sz="1100" dirty="0"/>
+          </a:p>
+        </p:txBody>
+      </p:sp>
+      <p:pic>
+        <p:nvPicPr>
+          <p:cNvPr id="5" name="Image 1" descr="C:\Users\Utilisateur\dev\green-solutions-web\public\images\logo-icon.png">    </p:cNvPr>
+          <p:cNvPicPr>
+            <a:picLocks noChangeAspect="1"/>
+          </p:cNvPicPr>
+          <p:nvPr/>
+        </p:nvPicPr>
+        <p:blipFill>
+          <a:blip r:embed="rId2"/>
+          <a:stretch>
+            <a:fillRect/>
+          </a:stretch>
+        </p:blipFill>
+        <p:spPr>
+          <a:xfrm>
+            <a:off x="5010912" y="457200"/>
+            <a:ext cx="603504" cy="603504"/>
           </a:xfrm>
           <a:prstGeom prst="rect">
             <a:avLst/>
           </a:prstGeom>
         </p:spPr>
       </p:pic>
-      <p:sp>
-        <p:nvSpPr>
-          <p:cNvPr id="3" name="Text 0"/>
-          <p:cNvSpPr txBox="1"/>
-          <p:nvPr/>
-        </p:nvSpPr>
-        <p:spPr>
-          <a:xfrm>
-            <a:off x="777240" y="1965960"/>
-            <a:ext cx="10058400" cy="320040"/>
-          </a:xfrm>
-          <a:prstGeom prst="rect">
-            <a:avLst/>
-          </a:prstGeom>
-          <a:noFill/>
-          <a:ln/>
-        </p:spPr>
-        <p:txBody>
-          <a:bodyPr wrap="square" lIns="0" tIns="0" rIns="0" bIns="0" rtlCol="0" anchor="ctr"/>
+      <p:pic>
+        <p:nvPicPr>
+          <p:cNvPr id="6" name="Image 2" descr="C:\Users\Utilisateur\dev\green-solutions-web\scripts\dossiers\drapeaux\gabon.png">    </p:cNvPr>
+          <p:cNvPicPr>
+            <a:picLocks noChangeAspect="1"/>
+          </p:cNvPicPr>
+          <p:nvPr/>
+        </p:nvPicPr>
+        <p:blipFill>
+          <a:blip r:embed="rId3"/>
+          <a:stretch>
+            <a:fillRect/>
+          </a:stretch>
+        </p:blipFill>
+        <p:spPr>
+          <a:xfrm>
+            <a:off x="3648456" y="1389888"/>
+            <a:ext cx="1965960" cy="1310640"/>
+          </a:xfrm>
+          <a:prstGeom prst="rect">
+            <a:avLst/>
+          </a:prstGeom>
+        </p:spPr>
+      </p:pic>
+      <p:sp>
+        <p:nvSpPr>
+          <p:cNvPr id="7" name="Shape 2"/>
+          <p:cNvSpPr/>
+          <p:nvPr/>
+        </p:nvSpPr>
+        <p:spPr>
+          <a:xfrm>
+            <a:off x="3648456" y="1389888"/>
+            <a:ext cx="1965960" cy="1310640"/>
+          </a:xfrm>
+          <a:prstGeom prst="rect">
+            <a:avLst/>
+          </a:prstGeom>
+          <a:ln w="9525">
+            <a:solidFill>
+              <a:srgbClr val="3A3A3A"/>
+            </a:solidFill>
+            <a:prstDash val="solid"/>
+          </a:ln>
+        </p:spPr>
+      </p:sp>
+      <p:sp>
+        <p:nvSpPr>
+          <p:cNvPr id="8" name="Text 3"/>
+          <p:cNvSpPr txBox="1"/>
+          <p:nvPr/>
+        </p:nvSpPr>
+        <p:spPr>
+          <a:xfrm>
+            <a:off x="658368" y="1298448"/>
+            <a:ext cx="2761488" cy="1234440"/>
+          </a:xfrm>
+          <a:prstGeom prst="rect">
+            <a:avLst/>
+          </a:prstGeom>
+          <a:noFill/>
+          <a:ln/>
+        </p:spPr>
+        <p:txBody>
+          <a:bodyPr wrap="square" lIns="0" tIns="0" rIns="0" bIns="0" rtlCol="0" anchor="t"/>
           <a:lstStyle/>
           <a:p>
             <a:pPr algn="l" indent="0" marL="0">
-              <a:buNone/>
-            </a:pPr>
-            <a:r>
-              <a:rPr lang="en-US" sz="1300" b="1" spc="250" kern="0" dirty="0">
-                <a:solidFill>
-                  <a:srgbClr val="E0A33E"/>
-                </a:solidFill>
-                <a:latin typeface="Calibri" pitchFamily="34" charset="0"/>
-                <a:ea typeface="Calibri" pitchFamily="34" charset="-122"/>
-                <a:cs typeface="Calibri" pitchFamily="34" charset="-120"/>
-              </a:rPr>
-              <a:t>DOSSIER DE MARCHÉ</a:t>
-            </a:r>
-            <a:endParaRPr lang="en-US" sz="1300" dirty="0"/>
-          </a:p>
-        </p:txBody>
-      </p:sp>
-      <p:sp>
-        <p:nvSpPr>
-          <p:cNvPr id="4" name="Text 1"/>
-          <p:cNvSpPr txBox="1"/>
-          <p:nvPr/>
-        </p:nvSpPr>
-        <p:spPr>
-          <a:xfrm>
-            <a:off x="777240" y="2377440"/>
-            <a:ext cx="10241280" cy="1371600"/>
-          </a:xfrm>
-          <a:prstGeom prst="rect">
-            <a:avLst/>
-          </a:prstGeom>
-          <a:noFill/>
-          <a:ln/>
-        </p:spPr>
-        <p:txBody>
-          <a:bodyPr wrap="square" lIns="0" tIns="0" rIns="0" bIns="0" rtlCol="0" anchor="ctr"/>
-          <a:lstStyle/>
-          <a:p>
-            <a:pPr algn="l" indent="0" marL="0">
-              <a:buNone/>
-            </a:pPr>
-            <a:r>
-              <a:rPr lang="en-US" sz="4200" b="1" dirty="0">
+              <a:lnSpc>
+                <a:spcPct val="110000"/>
+              </a:lnSpc>
+              <a:buNone/>
+            </a:pPr>
+            <a:r>
+              <a:rPr lang="en-US" sz="2800" b="1" dirty="0">
                 <a:solidFill>
                   <a:srgbClr val="FFFFFF"/>
                 </a:solidFill>
@@ -2760,22 +2860,42 @@
                 <a:ea typeface="Cambria" pitchFamily="34" charset="-122"/>
                 <a:cs typeface="Cambria" pitchFamily="34" charset="-120"/>
               </a:rPr>
-              <a:t>Gabon</a:t>
-            </a:r>
-            <a:endParaRPr lang="en-US" sz="4200" dirty="0"/>
-          </a:p>
-        </p:txBody>
-      </p:sp>
-      <p:sp>
-        <p:nvSpPr>
-          <p:cNvPr id="5" name="Text 2"/>
-          <p:cNvSpPr txBox="1"/>
-          <p:nvPr/>
-        </p:nvSpPr>
-        <p:spPr>
-          <a:xfrm>
-            <a:off x="777240" y="3840480"/>
-            <a:ext cx="8686800" cy="822960"/>
+              <a:t>RÉPUBLIQUE GABONAISE</a:t>
+            </a:r>
+            <a:endParaRPr lang="en-US" sz="2800" dirty="0"/>
+          </a:p>
+        </p:txBody>
+      </p:sp>
+      <p:sp>
+        <p:nvSpPr>
+          <p:cNvPr id="9" name="Shape 4"/>
+          <p:cNvSpPr/>
+          <p:nvPr/>
+        </p:nvSpPr>
+        <p:spPr>
+          <a:xfrm>
+            <a:off x="658368" y="2889504"/>
+            <a:ext cx="2788920" cy="45720"/>
+          </a:xfrm>
+          <a:prstGeom prst="rect">
+            <a:avLst/>
+          </a:prstGeom>
+          <a:solidFill>
+            <a:srgbClr val="E0A33E"/>
+          </a:solidFill>
+          <a:ln/>
+        </p:spPr>
+      </p:sp>
+      <p:sp>
+        <p:nvSpPr>
+          <p:cNvPr id="10" name="Text 5"/>
+          <p:cNvSpPr txBox="1"/>
+          <p:nvPr/>
+        </p:nvSpPr>
+        <p:spPr>
+          <a:xfrm>
+            <a:off x="658368" y="3163824"/>
+            <a:ext cx="4956048" cy="384048"/>
           </a:xfrm>
           <a:prstGeom prst="rect">
             <a:avLst/>
@@ -2785,20 +2905,57 @@
         </p:spPr>
         <p:txBody>
           <a:bodyPr wrap="square" lIns="0" tIns="0" rIns="0" bIns="0" rtlCol="0" anchor="ctr"/>
+          <a:lstStyle/>
+          <a:p>
+            <a:pPr algn="l" indent="0" marL="0">
+              <a:buNone/>
+            </a:pPr>
+            <a:r>
+              <a:rPr lang="en-US" sz="1600" b="1" dirty="0">
+                <a:solidFill>
+                  <a:srgbClr val="E0A33E"/>
+                </a:solidFill>
+                <a:latin typeface="Cambria" pitchFamily="34" charset="0"/>
+                <a:ea typeface="Cambria" pitchFamily="34" charset="-122"/>
+                <a:cs typeface="Cambria" pitchFamily="34" charset="-120"/>
+              </a:rPr>
+              <a:t>Libreville · 2026</a:t>
+            </a:r>
+            <a:endParaRPr lang="en-US" sz="1600" dirty="0"/>
+          </a:p>
+        </p:txBody>
+      </p:sp>
+      <p:sp>
+        <p:nvSpPr>
+          <p:cNvPr id="11" name="Text 6"/>
+          <p:cNvSpPr txBox="1"/>
+          <p:nvPr/>
+        </p:nvSpPr>
+        <p:spPr>
+          <a:xfrm>
+            <a:off x="658368" y="3767328"/>
+            <a:ext cx="4956048" cy="914400"/>
+          </a:xfrm>
+          <a:prstGeom prst="rect">
+            <a:avLst/>
+          </a:prstGeom>
+          <a:noFill/>
+          <a:ln/>
+        </p:spPr>
+        <p:txBody>
+          <a:bodyPr wrap="square" lIns="0" tIns="0" rIns="0" bIns="0" rtlCol="0" anchor="t"/>
           <a:lstStyle/>
           <a:p>
             <a:pPr algn="l" indent="0" marL="0">
               <a:lnSpc>
-                <a:spcPct val="125000"/>
+                <a:spcPct val="128000"/>
               </a:lnSpc>
               <a:buNone/>
             </a:pPr>
             <a:r>
-              <a:rPr lang="en-US" sz="1600" dirty="0">
-                <a:solidFill>
-                  <a:srgbClr val="FFFFFF">
-                    <a:alpha val="88000"/>
-                  </a:srgbClr>
+              <a:rPr lang="en-US" sz="1450" dirty="0">
+                <a:solidFill>
+                  <a:srgbClr val="FFFFFF"/>
                 </a:solidFill>
                 <a:latin typeface="Calibri" pitchFamily="34" charset="0"/>
                 <a:ea typeface="Calibri" pitchFamily="34" charset="-122"/>
@@ -2806,21 +2963,19 @@
               </a:rPr>
               <a:t>Vivrier, maraîchage péri-urbain et plantations industrielles sur sols lessivés.</a:t>
             </a:r>
-            <a:endParaRPr lang="en-US" sz="1600" dirty="0"/>
+            <a:endParaRPr lang="en-US" sz="1450" dirty="0"/>
           </a:p>
           <a:p>
             <a:pPr algn="l" indent="0" marL="0">
               <a:lnSpc>
-                <a:spcPct val="125000"/>
+                <a:spcPct val="128000"/>
               </a:lnSpc>
               <a:buNone/>
             </a:pPr>
             <a:r>
-              <a:rPr lang="en-US" sz="1600" dirty="0">
-                <a:solidFill>
-                  <a:srgbClr val="FFFFFF">
-                    <a:alpha val="88000"/>
-                  </a:srgbClr>
+              <a:rPr lang="en-US" sz="1450" dirty="0">
+                <a:solidFill>
+                  <a:srgbClr val="FFFFFF"/>
                 </a:solidFill>
                 <a:latin typeface="Calibri" pitchFamily="34" charset="0"/>
                 <a:ea typeface="Calibri" pitchFamily="34" charset="-122"/>
@@ -2828,20 +2983,20 @@
               </a:rPr>
               <a:t>Ce que l'hydro-rétention change quand la pluie s'arrête quatre mois.</a:t>
             </a:r>
-            <a:endParaRPr lang="en-US" sz="1600" dirty="0"/>
-          </a:p>
-        </p:txBody>
-      </p:sp>
-      <p:sp>
-        <p:nvSpPr>
-          <p:cNvPr id="6" name="Text 3"/>
-          <p:cNvSpPr txBox="1"/>
-          <p:nvPr/>
-        </p:nvSpPr>
-        <p:spPr>
-          <a:xfrm>
-            <a:off x="777240" y="5989320"/>
-            <a:ext cx="10058400" cy="320040"/>
+            <a:endParaRPr lang="en-US" sz="1450" dirty="0"/>
+          </a:p>
+        </p:txBody>
+      </p:sp>
+      <p:sp>
+        <p:nvSpPr>
+          <p:cNvPr id="12" name="Text 7"/>
+          <p:cNvSpPr txBox="1"/>
+          <p:nvPr/>
+        </p:nvSpPr>
+        <p:spPr>
+          <a:xfrm>
+            <a:off x="658368" y="4892040"/>
+            <a:ext cx="4956048" cy="347472"/>
           </a:xfrm>
           <a:prstGeom prst="rect">
             <a:avLst/>
@@ -2857,19 +3012,56 @@
               <a:buNone/>
             </a:pPr>
             <a:r>
-              <a:rPr lang="en-US" sz="1100" dirty="0">
-                <a:solidFill>
-                  <a:srgbClr val="FFFFFF">
-                    <a:alpha val="65000"/>
-                  </a:srgbClr>
-                </a:solidFill>
-                <a:latin typeface="Calibri" pitchFamily="34" charset="0"/>
-                <a:ea typeface="Calibri" pitchFamily="34" charset="-122"/>
-                <a:cs typeface="Calibri" pitchFamily="34" charset="-120"/>
-              </a:rPr>
-              <a:t>Green Solutions · contact@evergreen-ecosorb.com</a:t>
+              <a:rPr lang="en-US" sz="1100" b="1" dirty="0">
+                <a:solidFill>
+                  <a:srgbClr val="8BC34A"/>
+                </a:solidFill>
+                <a:latin typeface="Calibri" pitchFamily="34" charset="0"/>
+                <a:ea typeface="Calibri" pitchFamily="34" charset="-122"/>
+                <a:cs typeface="Calibri" pitchFamily="34" charset="-120"/>
+              </a:rPr>
+              <a:t>ECOSORB® · ECOFERT® · NAPEMA® · PAULOWNIA</a:t>
             </a:r>
             <a:endParaRPr lang="en-US" sz="1100" dirty="0"/>
+          </a:p>
+        </p:txBody>
+      </p:sp>
+      <p:sp>
+        <p:nvSpPr>
+          <p:cNvPr id="13" name="Text 8"/>
+          <p:cNvSpPr txBox="1"/>
+          <p:nvPr/>
+        </p:nvSpPr>
+        <p:spPr>
+          <a:xfrm>
+            <a:off x="658368" y="6053328"/>
+            <a:ext cx="4956048" cy="310896"/>
+          </a:xfrm>
+          <a:prstGeom prst="rect">
+            <a:avLst/>
+          </a:prstGeom>
+          <a:noFill/>
+          <a:ln/>
+        </p:spPr>
+        <p:txBody>
+          <a:bodyPr wrap="square" lIns="0" tIns="0" rIns="0" bIns="0" rtlCol="0" anchor="ctr"/>
+          <a:lstStyle/>
+          <a:p>
+            <a:pPr algn="l" indent="0" marL="0">
+              <a:buNone/>
+            </a:pPr>
+            <a:r>
+              <a:rPr lang="en-US" sz="850" dirty="0">
+                <a:solidFill>
+                  <a:srgbClr val="9A9A9A"/>
+                </a:solidFill>
+                <a:latin typeface="Calibri" pitchFamily="34" charset="0"/>
+                <a:ea typeface="Calibri" pitchFamily="34" charset="-122"/>
+                <a:cs typeface="Calibri" pitchFamily="34" charset="-120"/>
+              </a:rPr>
+              <a:t>Septembre 2026 · Document confidentiel · À l'usage exclusif du destinataire</a:t>
+            </a:r>
+            <a:endParaRPr lang="en-US" sz="850" dirty="0"/>
           </a:p>
         </p:txBody>
       </p:sp>

--- a/public/documents/countries/gabon.pptx
+++ b/public/documents/countries/gabon.pptx
@@ -117,7 +117,7 @@
 </p:presentation>
 </file>
 
-<file path=ppt/charts/chart1.xml><?xml version="1.0" encoding="utf-8"?>
+<file path=ppt/charts/chart25.xml><?xml version="1.0" encoding="utf-8"?>
 <c:chartSpace xmlns:c="http://schemas.openxmlformats.org/drawingml/2006/chart" xmlns:a="http://schemas.openxmlformats.org/drawingml/2006/main" xmlns:r="http://schemas.openxmlformats.org/officeDocument/2006/relationships">
   <c:date1904 val="0"/>
   <c:roundedCorners val="1"/>
@@ -362,7 +362,7 @@
 </c:chartSpace>
 </file>
 
-<file path=ppt/charts/chart2.xml><?xml version="1.0" encoding="utf-8"?>
+<file path=ppt/charts/chart26.xml><?xml version="1.0" encoding="utf-8"?>
 <c:chartSpace xmlns:c="http://schemas.openxmlformats.org/drawingml/2006/chart" xmlns:a="http://schemas.openxmlformats.org/drawingml/2006/main" xmlns:r="http://schemas.openxmlformats.org/officeDocument/2006/relationships">
   <c:date1904 val="0"/>
   <c:roundedCorners val="1"/>
@@ -670,7 +670,7 @@
 </c:chartSpace>
 </file>
 
-<file path=ppt/charts/chart3.xml><?xml version="1.0" encoding="utf-8"?>
+<file path=ppt/charts/chart27.xml><?xml version="1.0" encoding="utf-8"?>
 <c:chartSpace xmlns:c="http://schemas.openxmlformats.org/drawingml/2006/chart" xmlns:a="http://schemas.openxmlformats.org/drawingml/2006/main" xmlns:r="http://schemas.openxmlformats.org/officeDocument/2006/relationships">
   <c:date1904 val="0"/>
   <c:roundedCorners val="1"/>
@@ -3842,9 +3842,35 @@
           </a:p>
         </p:txBody>
       </p:sp>
-      <p:sp>
-        <p:nvSpPr>
-          <p:cNvPr id="6" name="Text 3"/>
+      <p:pic>
+        <p:nvPicPr>
+          <p:cNvPr id="6" name="Image 1" descr="C:\Users\Utilisateur\dev\green-solutions-web\scripts\dossiers\sceau-aim-clair.png">    </p:cNvPr>
+          <p:cNvPicPr>
+            <a:picLocks noChangeAspect="1"/>
+          </p:cNvPicPr>
+          <p:nvPr/>
+        </p:nvPicPr>
+        <p:blipFill>
+          <a:blip r:embed="rId2">
+            <a:alphaModFix amt="85000"/>
+          </a:blip>
+          <a:stretch>
+            <a:fillRect/>
+          </a:stretch>
+        </p:blipFill>
+        <p:spPr>
+          <a:xfrm>
+            <a:off x="10637215" y="5193792"/>
+            <a:ext cx="1051560" cy="1051560"/>
+          </a:xfrm>
+          <a:prstGeom prst="rect">
+            <a:avLst/>
+          </a:prstGeom>
+        </p:spPr>
+      </p:pic>
+      <p:sp>
+        <p:nvSpPr>
+          <p:cNvPr id="7" name="Text 3"/>
           <p:cNvSpPr txBox="1"/>
           <p:nvPr/>
         </p:nvSpPr>
@@ -3885,7 +3911,7 @@
       </p:sp>
       <p:sp>
         <p:nvSpPr>
-          <p:cNvPr id="7" name="Text 4"/>
+          <p:cNvPr id="8" name="Text 4"/>
           <p:cNvSpPr txBox="1"/>
           <p:nvPr/>
         </p:nvSpPr>

--- a/public/documents/countries/gabon.pptx
+++ b/public/documents/countries/gabon.pptx
@@ -16,9 +16,16 @@
     <p:sldId id="264" r:id="rId10"/>
     <p:sldId id="265" r:id="rId11"/>
     <p:sldId id="266" r:id="rId12"/>
+    <p:sldId id="267" r:id="rId13"/>
+    <p:sldId id="268" r:id="rId14"/>
+    <p:sldId id="269" r:id="rId15"/>
+    <p:sldId id="270" r:id="rId16"/>
+    <p:sldId id="271" r:id="rId17"/>
+    <p:sldId id="272" r:id="rId18"/>
+    <p:sldId id="273" r:id="rId19"/>
   </p:sldIdLst>
   <p:notesMasterIdLst>
-    <p:notesMasterId r:id="rId13"/>
+    <p:notesMasterId r:id="rId20"/>
   </p:notesMasterIdLst>
   <p:sldSz cx="12192000" cy="6858000"/>
   <p:notesSz cx="6858000" cy="12192000"/>
@@ -117,7 +124,7 @@
 </p:presentation>
 </file>
 
-<file path=ppt/charts/chart25.xml><?xml version="1.0" encoding="utf-8"?>
+<file path=ppt/charts/chart33.xml><?xml version="1.0" encoding="utf-8"?>
 <c:chartSpace xmlns:c="http://schemas.openxmlformats.org/drawingml/2006/chart" xmlns:a="http://schemas.openxmlformats.org/drawingml/2006/main" xmlns:r="http://schemas.openxmlformats.org/officeDocument/2006/relationships">
   <c:date1904 val="0"/>
   <c:roundedCorners val="1"/>
@@ -362,7 +369,7 @@
 </c:chartSpace>
 </file>
 
-<file path=ppt/charts/chart26.xml><?xml version="1.0" encoding="utf-8"?>
+<file path=ppt/charts/chart34.xml><?xml version="1.0" encoding="utf-8"?>
 <c:chartSpace xmlns:c="http://schemas.openxmlformats.org/drawingml/2006/chart" xmlns:a="http://schemas.openxmlformats.org/drawingml/2006/main" xmlns:r="http://schemas.openxmlformats.org/officeDocument/2006/relationships">
   <c:date1904 val="0"/>
   <c:roundedCorners val="1"/>
@@ -670,7 +677,372 @@
 </c:chartSpace>
 </file>
 
-<file path=ppt/charts/chart27.xml><?xml version="1.0" encoding="utf-8"?>
+<file path=ppt/charts/chart35.xml><?xml version="1.0" encoding="utf-8"?>
+<c:chartSpace xmlns:c="http://schemas.openxmlformats.org/drawingml/2006/chart" xmlns:a="http://schemas.openxmlformats.org/drawingml/2006/main" xmlns:r="http://schemas.openxmlformats.org/officeDocument/2006/relationships">
+  <c:date1904 val="0"/>
+  <c:roundedCorners val="1"/>
+  <c:chart>
+    <c:autoTitleDeleted val="1"/>
+    <c:plotArea>
+      <c:layout/>
+      <c:barChart>
+        <c:barDir val="col"/>
+        <c:grouping val="clustered"/>
+        <c:varyColors val="0"/>
+        <c:ser>
+          <c:idx val="0"/>
+          <c:order val="0"/>
+          <c:tx>
+            <c:strRef>
+              <c:f>Sheet1!$B$1</c:f>
+              <c:strCache>
+                <c:ptCount val="1"/>
+                <c:pt idx="0">
+                  <c:v>Bas de fourchette (%)</c:v>
+                </c:pt>
+              </c:strCache>
+            </c:strRef>
+          </c:tx>
+          <c:spPr>
+            <a:solidFill>
+              <a:srgbClr val="1C5A73"/>
+            </a:solidFill>
+            <a:effectLst/>
+          </c:spPr>
+          <c:invertIfNegative val="0"/>
+          <c:dLbls>
+            <c:numFmt formatCode="[$-40C]0&quot;%&quot;" sourceLinked="0"/>
+            <c:txPr>
+              <a:bodyPr/>
+              <a:lstStyle/>
+              <a:p>
+                <a:pPr>
+                  <a:defRPr b="0" i="0" strike="noStrike" sz="1100" u="none">
+                    <a:solidFill>
+                      <a:srgbClr val="0E3546"/>
+                    </a:solidFill>
+                    <a:latin typeface="Calibri"/>
+                  </a:defRPr>
+                </a:pPr>
+              </a:p>
+            </c:txPr>
+            <c:showLegendKey val="0"/>
+            <c:showVal val="1"/>
+            <c:showCatName val="0"/>
+            <c:showSerName val="0"/>
+            <c:showPercent val="0"/>
+            <c:showBubbleSize val="0"/>
+            <c:showLeaderLines val="0"/>
+          </c:dLbls>
+          <c:cat>
+            <c:multiLvlStrRef>
+              <c:f>Sheet1!$A$2:$A$6</c:f>
+              <c:multiLvlStrCache>
+                <c:ptCount val="5"/>
+                <c:lvl>
+                  <c:pt idx="0">
+                    <c:v>Bananes</c:v>
+                  </c:pt>
+                  <c:pt idx="1">
+                    <c:v>Tomates</c:v>
+                  </c:pt>
+                  <c:pt idx="2">
+                    <c:v>Manioc</c:v>
+                  </c:pt>
+                  <c:pt idx="3">
+                    <c:v>Aubergines</c:v>
+                  </c:pt>
+                  <c:pt idx="4">
+                    <c:v>Canne à sucre</c:v>
+                  </c:pt>
+                </c:lvl>
+              </c:multiLvlStrCache>
+            </c:multiLvlStrRef>
+          </c:cat>
+          <c:val>
+            <c:numRef>
+              <c:f>Sheet1!$B$2:$B$6</c:f>
+              <c:numCache>
+                <c:formatCode>General</c:formatCode>
+                <c:ptCount val="5"/>
+                <c:pt idx="0">
+                  <c:v>15</c:v>
+                </c:pt>
+                <c:pt idx="1">
+                  <c:v>30</c:v>
+                </c:pt>
+                <c:pt idx="2">
+                  <c:v>20</c:v>
+                </c:pt>
+                <c:pt idx="3">
+                  <c:v>20</c:v>
+                </c:pt>
+                <c:pt idx="4">
+                  <c:v>10</c:v>
+                </c:pt>
+              </c:numCache>
+            </c:numRef>
+          </c:val>
+        </c:ser>
+        <c:ser>
+          <c:idx val="1"/>
+          <c:order val="1"/>
+          <c:tx>
+            <c:strRef>
+              <c:f>Sheet1!$C$1</c:f>
+              <c:strCache>
+                <c:ptCount val="1"/>
+                <c:pt idx="0">
+                  <c:v>Haut de fourchette (%)</c:v>
+                </c:pt>
+              </c:strCache>
+            </c:strRef>
+          </c:tx>
+          <c:spPr>
+            <a:solidFill>
+              <a:srgbClr val="E0A33E"/>
+            </a:solidFill>
+            <a:effectLst/>
+          </c:spPr>
+          <c:invertIfNegative val="0"/>
+          <c:dLbls>
+            <c:numFmt formatCode="[$-40C]0&quot;%&quot;" sourceLinked="0"/>
+            <c:txPr>
+              <a:bodyPr/>
+              <a:lstStyle/>
+              <a:p>
+                <a:pPr>
+                  <a:defRPr b="0" i="0" strike="noStrike" sz="1100" u="none">
+                    <a:solidFill>
+                      <a:srgbClr val="0E3546"/>
+                    </a:solidFill>
+                    <a:latin typeface="Calibri"/>
+                  </a:defRPr>
+                </a:pPr>
+              </a:p>
+            </c:txPr>
+            <c:showLegendKey val="0"/>
+            <c:showVal val="1"/>
+            <c:showCatName val="0"/>
+            <c:showSerName val="0"/>
+            <c:showPercent val="0"/>
+            <c:showBubbleSize val="0"/>
+            <c:showLeaderLines val="0"/>
+          </c:dLbls>
+          <c:cat>
+            <c:multiLvlStrRef>
+              <c:f>Sheet1!$A$2:$A$6</c:f>
+              <c:multiLvlStrCache>
+                <c:ptCount val="5"/>
+                <c:lvl>
+                  <c:pt idx="0">
+                    <c:v>Bananes</c:v>
+                  </c:pt>
+                  <c:pt idx="1">
+                    <c:v>Tomates</c:v>
+                  </c:pt>
+                  <c:pt idx="2">
+                    <c:v>Manioc</c:v>
+                  </c:pt>
+                  <c:pt idx="3">
+                    <c:v>Aubergines</c:v>
+                  </c:pt>
+                  <c:pt idx="4">
+                    <c:v>Canne à sucre</c:v>
+                  </c:pt>
+                </c:lvl>
+              </c:multiLvlStrCache>
+            </c:multiLvlStrRef>
+          </c:cat>
+          <c:val>
+            <c:numRef>
+              <c:f>Sheet1!$C$2:$C$6</c:f>
+              <c:numCache>
+                <c:formatCode>General</c:formatCode>
+                <c:ptCount val="5"/>
+                <c:pt idx="0">
+                  <c:v>30</c:v>
+                </c:pt>
+                <c:pt idx="1">
+                  <c:v>50</c:v>
+                </c:pt>
+                <c:pt idx="2">
+                  <c:v>40</c:v>
+                </c:pt>
+                <c:pt idx="3">
+                  <c:v>35</c:v>
+                </c:pt>
+                <c:pt idx="4">
+                  <c:v>20</c:v>
+                </c:pt>
+              </c:numCache>
+            </c:numRef>
+          </c:val>
+        </c:ser>
+        <c:dLbls>
+          <c:numFmt formatCode="[$-40C]0&quot;%&quot;" sourceLinked="0"/>
+          <c:txPr>
+            <a:bodyPr/>
+            <a:lstStyle/>
+            <a:p>
+              <a:pPr>
+                <a:defRPr b="0" i="0" strike="noStrike" sz="1100" u="none">
+                  <a:solidFill>
+                    <a:srgbClr val="0E3546"/>
+                  </a:solidFill>
+                  <a:latin typeface="Calibri"/>
+                </a:defRPr>
+              </a:pPr>
+            </a:p>
+          </c:txPr>
+          <c:showLegendKey val="0"/>
+          <c:showVal val="1"/>
+          <c:showCatName val="0"/>
+          <c:showSerName val="0"/>
+          <c:showPercent val="0"/>
+          <c:showBubbleSize val="0"/>
+          <c:showLeaderLines val="0"/>
+        </c:dLbls>
+        <c:gapWidth val="150"/>
+        <c:overlap val="0"/>
+        <c:axId val="2094734554"/>
+        <c:axId val="2094734552"/>
+        <c:axId val="2094734556"/>
+      </c:barChart>
+      <c:catAx>
+        <c:axId val="2094734554"/>
+        <c:scaling>
+          <c:orientation val="minMax"/>
+        </c:scaling>
+        <c:delete val="0"/>
+        <c:axPos val="b"/>
+        <c:numFmt formatCode="General" sourceLinked="1"/>
+        <c:majorTickMark val="out"/>
+        <c:minorTickMark val="none"/>
+        <c:tickLblPos val="low"/>
+        <c:spPr>
+          <a:ln w="12700" cap="flat">
+            <a:solidFill>
+              <a:srgbClr val="888888"/>
+            </a:solidFill>
+            <a:prstDash val="solid"/>
+            <a:round/>
+          </a:ln>
+        </c:spPr>
+        <c:txPr>
+          <a:bodyPr/>
+          <a:lstStyle/>
+          <a:p>
+            <a:pPr>
+              <a:defRPr sz="1100" b="0" i="0" u="none" strike="noStrike">
+                <a:solidFill>
+                  <a:srgbClr val="6C8089"/>
+                </a:solidFill>
+                <a:latin typeface="Calibri"/>
+              </a:defRPr>
+            </a:pPr>
+            <a:endParaRPr lang="en-US"/>
+          </a:p>
+        </c:txPr>
+        <c:crossAx val="2094734552"/>
+        <c:crosses val="autoZero"/>
+        <c:auto val="1"/>
+        <c:lblAlgn val="ctr"/>
+        <c:noMultiLvlLbl val="1"/>
+      </c:catAx>
+      <c:valAx>
+        <c:axId val="2094734552"/>
+        <c:scaling>
+          <c:orientation val="minMax"/>
+          <c:min val="0"/>
+        </c:scaling>
+        <c:delete val="0"/>
+        <c:axPos val="l"/>
+        <c:majorGridlines>
+          <c:spPr>
+            <a:ln w="9525" cap="flat">
+              <a:solidFill>
+                <a:srgbClr val="D6E2E7"/>
+              </a:solidFill>
+              <a:prstDash val="solid"/>
+              <a:round/>
+            </a:ln>
+          </c:spPr>
+        </c:majorGridlines>
+        <c:numFmt formatCode="General" sourceLinked="0"/>
+        <c:majorTickMark val="out"/>
+        <c:minorTickMark val="none"/>
+        <c:tickLblPos val="nextTo"/>
+        <c:spPr>
+          <a:ln w="12700" cap="flat">
+            <a:solidFill>
+              <a:srgbClr val="888888"/>
+            </a:solidFill>
+            <a:prstDash val="solid"/>
+            <a:round/>
+          </a:ln>
+        </c:spPr>
+        <c:txPr>
+          <a:bodyPr/>
+          <a:lstStyle/>
+          <a:p>
+            <a:pPr>
+              <a:defRPr sz="1100" b="0" i="0" u="none" strike="noStrike">
+                <a:solidFill>
+                  <a:srgbClr val="6C8089"/>
+                </a:solidFill>
+                <a:latin typeface="Calibri"/>
+              </a:defRPr>
+            </a:pPr>
+            <a:endParaRPr lang="en-US"/>
+          </a:p>
+        </c:txPr>
+        <c:crossAx val="2094734554"/>
+        <c:crosses val="autoZero"/>
+        <c:crossBetween val="between"/>
+      </c:valAx>
+      <c:spPr>
+        <a:noFill/>
+        <a:ln>
+          <a:noFill/>
+        </a:ln>
+        <a:effectLst/>
+      </c:spPr>
+    </c:plotArea>
+    <c:legend>
+      <c:legendPos val="b"/>
+      <c:overlay val="0"/>
+      <c:txPr>
+        <a:bodyPr/>
+        <a:lstStyle/>
+        <a:p>
+          <a:pPr>
+            <a:defRPr sz="1100">
+              <a:latin typeface="Calibri"/>
+              <a:cs typeface="Calibri"/>
+            </a:defRPr>
+          </a:pPr>
+          <a:endParaRPr lang="en-US"/>
+        </a:p>
+      </c:txPr>
+    </c:legend>
+    <c:plotVisOnly val="1"/>
+    <c:dispBlanksAs val="span"/>
+  </c:chart>
+  <c:spPr>
+    <a:noFill/>
+    <a:ln>
+      <a:noFill/>
+    </a:ln>
+    <a:effectLst/>
+  </c:spPr>
+  <c:externalData r:id="rId1">
+    <c:autoUpdate val="0"/>
+  </c:externalData>
+</c:chartSpace>
+</file>
+
+<file path=ppt/charts/chart36.xml><?xml version="1.0" encoding="utf-8"?>
 <c:chartSpace xmlns:c="http://schemas.openxmlformats.org/drawingml/2006/chart" xmlns:a="http://schemas.openxmlformats.org/drawingml/2006/main" xmlns:r="http://schemas.openxmlformats.org/officeDocument/2006/relationships">
   <c:date1904 val="0"/>
   <c:roundedCorners val="1"/>
@@ -1618,6 +1990,622 @@
             <a:fld id="{F7021451-1387-4CA6-816F-3879F97B5CBC}" type="slidenum">
               <a:rPr lang="en-US"/>
               <a:t>11</a:t>
+            </a:fld>
+            <a:endParaRPr lang="en-US"/>
+          </a:p>
+        </p:txBody>
+      </p:sp>
+    </p:spTree>
+    <p:extLst>
+      <p:ext uri="{BB962C8B-B14F-4D97-AF65-F5344CB8AC3E}">
+        <p14:creationId xmlns:p14="http://schemas.microsoft.com/office/powerpoint/2010/main" val="1024086991"/>
+      </p:ext>
+    </p:extLst>
+  </p:cSld>
+  <p:clrMapOvr>
+    <a:masterClrMapping/>
+  </p:clrMapOvr>
+</p:notes>
+</file>
+
+<file path=ppt/notesSlides/notesSlide12.xml><?xml version="1.0" encoding="utf-8"?>
+<p:notes xmlns:a="http://schemas.openxmlformats.org/drawingml/2006/main" xmlns:r="http://schemas.openxmlformats.org/officeDocument/2006/relationships" xmlns:p="http://schemas.openxmlformats.org/presentationml/2006/main">
+  <p:cSld>
+    <p:spTree>
+      <p:nvGrpSpPr>
+        <p:cNvPr id="1" name=""/>
+        <p:cNvGrpSpPr/>
+        <p:nvPr/>
+      </p:nvGrpSpPr>
+      <p:grpSpPr>
+        <a:xfrm>
+          <a:off x="0" y="0"/>
+          <a:ext cx="0" cy="0"/>
+          <a:chOff x="0" y="0"/>
+          <a:chExt cx="0" cy="0"/>
+        </a:xfrm>
+      </p:grpSpPr>
+      <p:sp>
+        <p:nvSpPr>
+          <p:cNvPr id="2" name="Slide Image Placeholder 1"/>
+          <p:cNvSpPr>
+            <a:spLocks noGrp="1" noRot="1" noChangeAspect="1"/>
+          </p:cNvSpPr>
+          <p:nvPr>
+            <p:ph type="sldImg"/>
+          </p:nvPr>
+        </p:nvSpPr>
+        <p:spPr/>
+      </p:sp>
+      <p:sp>
+        <p:nvSpPr>
+          <p:cNvPr id="3" name="Notes Placeholder 2"/>
+          <p:cNvSpPr>
+            <a:spLocks noGrp="1"/>
+          </p:cNvSpPr>
+          <p:nvPr>
+            <p:ph type="body" idx="1"/>
+          </p:nvPr>
+        </p:nvSpPr>
+        <p:spPr/>
+        <p:txBody>
+          <a:bodyPr/>
+          <a:lstStyle/>
+          <a:p>
+            <a:r>
+              <a:rPr lang="en-US" dirty="0"/>
+              <a:t/>
+            </a:r>
+            <a:endParaRPr lang="en-US" dirty="0"/>
+          </a:p>
+        </p:txBody>
+      </p:sp>
+      <p:sp>
+        <p:nvSpPr>
+          <p:cNvPr id="4" name="Slide Number Placeholder 3"/>
+          <p:cNvSpPr>
+            <a:spLocks noGrp="1"/>
+          </p:cNvSpPr>
+          <p:nvPr>
+            <p:ph type="sldNum" sz="quarter" idx="10"/>
+          </p:nvPr>
+        </p:nvSpPr>
+        <p:spPr/>
+        <p:txBody>
+          <a:bodyPr/>
+          <a:lstStyle/>
+          <a:p>
+            <a:fld id="{F7021451-1387-4CA6-816F-3879F97B5CBC}" type="slidenum">
+              <a:rPr lang="en-US"/>
+              <a:t>12</a:t>
+            </a:fld>
+            <a:endParaRPr lang="en-US"/>
+          </a:p>
+        </p:txBody>
+      </p:sp>
+    </p:spTree>
+    <p:extLst>
+      <p:ext uri="{BB962C8B-B14F-4D97-AF65-F5344CB8AC3E}">
+        <p14:creationId xmlns:p14="http://schemas.microsoft.com/office/powerpoint/2010/main" val="1024086991"/>
+      </p:ext>
+    </p:extLst>
+  </p:cSld>
+  <p:clrMapOvr>
+    <a:masterClrMapping/>
+  </p:clrMapOvr>
+</p:notes>
+</file>
+
+<file path=ppt/notesSlides/notesSlide13.xml><?xml version="1.0" encoding="utf-8"?>
+<p:notes xmlns:a="http://schemas.openxmlformats.org/drawingml/2006/main" xmlns:r="http://schemas.openxmlformats.org/officeDocument/2006/relationships" xmlns:p="http://schemas.openxmlformats.org/presentationml/2006/main">
+  <p:cSld>
+    <p:spTree>
+      <p:nvGrpSpPr>
+        <p:cNvPr id="1" name=""/>
+        <p:cNvGrpSpPr/>
+        <p:nvPr/>
+      </p:nvGrpSpPr>
+      <p:grpSpPr>
+        <a:xfrm>
+          <a:off x="0" y="0"/>
+          <a:ext cx="0" cy="0"/>
+          <a:chOff x="0" y="0"/>
+          <a:chExt cx="0" cy="0"/>
+        </a:xfrm>
+      </p:grpSpPr>
+      <p:sp>
+        <p:nvSpPr>
+          <p:cNvPr id="2" name="Slide Image Placeholder 1"/>
+          <p:cNvSpPr>
+            <a:spLocks noGrp="1" noRot="1" noChangeAspect="1"/>
+          </p:cNvSpPr>
+          <p:nvPr>
+            <p:ph type="sldImg"/>
+          </p:nvPr>
+        </p:nvSpPr>
+        <p:spPr/>
+      </p:sp>
+      <p:sp>
+        <p:nvSpPr>
+          <p:cNvPr id="3" name="Notes Placeholder 2"/>
+          <p:cNvSpPr>
+            <a:spLocks noGrp="1"/>
+          </p:cNvSpPr>
+          <p:nvPr>
+            <p:ph type="body" idx="1"/>
+          </p:nvPr>
+        </p:nvSpPr>
+        <p:spPr/>
+        <p:txBody>
+          <a:bodyPr/>
+          <a:lstStyle/>
+          <a:p>
+            <a:r>
+              <a:rPr lang="en-US" dirty="0"/>
+              <a:t/>
+            </a:r>
+            <a:endParaRPr lang="en-US" dirty="0"/>
+          </a:p>
+        </p:txBody>
+      </p:sp>
+      <p:sp>
+        <p:nvSpPr>
+          <p:cNvPr id="4" name="Slide Number Placeholder 3"/>
+          <p:cNvSpPr>
+            <a:spLocks noGrp="1"/>
+          </p:cNvSpPr>
+          <p:nvPr>
+            <p:ph type="sldNum" sz="quarter" idx="10"/>
+          </p:nvPr>
+        </p:nvSpPr>
+        <p:spPr/>
+        <p:txBody>
+          <a:bodyPr/>
+          <a:lstStyle/>
+          <a:p>
+            <a:fld id="{F7021451-1387-4CA6-816F-3879F97B5CBC}" type="slidenum">
+              <a:rPr lang="en-US"/>
+              <a:t>13</a:t>
+            </a:fld>
+            <a:endParaRPr lang="en-US"/>
+          </a:p>
+        </p:txBody>
+      </p:sp>
+    </p:spTree>
+    <p:extLst>
+      <p:ext uri="{BB962C8B-B14F-4D97-AF65-F5344CB8AC3E}">
+        <p14:creationId xmlns:p14="http://schemas.microsoft.com/office/powerpoint/2010/main" val="1024086991"/>
+      </p:ext>
+    </p:extLst>
+  </p:cSld>
+  <p:clrMapOvr>
+    <a:masterClrMapping/>
+  </p:clrMapOvr>
+</p:notes>
+</file>
+
+<file path=ppt/notesSlides/notesSlide14.xml><?xml version="1.0" encoding="utf-8"?>
+<p:notes xmlns:a="http://schemas.openxmlformats.org/drawingml/2006/main" xmlns:r="http://schemas.openxmlformats.org/officeDocument/2006/relationships" xmlns:p="http://schemas.openxmlformats.org/presentationml/2006/main">
+  <p:cSld>
+    <p:spTree>
+      <p:nvGrpSpPr>
+        <p:cNvPr id="1" name=""/>
+        <p:cNvGrpSpPr/>
+        <p:nvPr/>
+      </p:nvGrpSpPr>
+      <p:grpSpPr>
+        <a:xfrm>
+          <a:off x="0" y="0"/>
+          <a:ext cx="0" cy="0"/>
+          <a:chOff x="0" y="0"/>
+          <a:chExt cx="0" cy="0"/>
+        </a:xfrm>
+      </p:grpSpPr>
+      <p:sp>
+        <p:nvSpPr>
+          <p:cNvPr id="2" name="Slide Image Placeholder 1"/>
+          <p:cNvSpPr>
+            <a:spLocks noGrp="1" noRot="1" noChangeAspect="1"/>
+          </p:cNvSpPr>
+          <p:nvPr>
+            <p:ph type="sldImg"/>
+          </p:nvPr>
+        </p:nvSpPr>
+        <p:spPr/>
+      </p:sp>
+      <p:sp>
+        <p:nvSpPr>
+          <p:cNvPr id="3" name="Notes Placeholder 2"/>
+          <p:cNvSpPr>
+            <a:spLocks noGrp="1"/>
+          </p:cNvSpPr>
+          <p:nvPr>
+            <p:ph type="body" idx="1"/>
+          </p:nvPr>
+        </p:nvSpPr>
+        <p:spPr/>
+        <p:txBody>
+          <a:bodyPr/>
+          <a:lstStyle/>
+          <a:p>
+            <a:r>
+              <a:rPr lang="en-US" dirty="0"/>
+              <a:t/>
+            </a:r>
+            <a:endParaRPr lang="en-US" dirty="0"/>
+          </a:p>
+        </p:txBody>
+      </p:sp>
+      <p:sp>
+        <p:nvSpPr>
+          <p:cNvPr id="4" name="Slide Number Placeholder 3"/>
+          <p:cNvSpPr>
+            <a:spLocks noGrp="1"/>
+          </p:cNvSpPr>
+          <p:nvPr>
+            <p:ph type="sldNum" sz="quarter" idx="10"/>
+          </p:nvPr>
+        </p:nvSpPr>
+        <p:spPr/>
+        <p:txBody>
+          <a:bodyPr/>
+          <a:lstStyle/>
+          <a:p>
+            <a:fld id="{F7021451-1387-4CA6-816F-3879F97B5CBC}" type="slidenum">
+              <a:rPr lang="en-US"/>
+              <a:t>14</a:t>
+            </a:fld>
+            <a:endParaRPr lang="en-US"/>
+          </a:p>
+        </p:txBody>
+      </p:sp>
+    </p:spTree>
+    <p:extLst>
+      <p:ext uri="{BB962C8B-B14F-4D97-AF65-F5344CB8AC3E}">
+        <p14:creationId xmlns:p14="http://schemas.microsoft.com/office/powerpoint/2010/main" val="1024086991"/>
+      </p:ext>
+    </p:extLst>
+  </p:cSld>
+  <p:clrMapOvr>
+    <a:masterClrMapping/>
+  </p:clrMapOvr>
+</p:notes>
+</file>
+
+<file path=ppt/notesSlides/notesSlide15.xml><?xml version="1.0" encoding="utf-8"?>
+<p:notes xmlns:a="http://schemas.openxmlformats.org/drawingml/2006/main" xmlns:r="http://schemas.openxmlformats.org/officeDocument/2006/relationships" xmlns:p="http://schemas.openxmlformats.org/presentationml/2006/main">
+  <p:cSld>
+    <p:spTree>
+      <p:nvGrpSpPr>
+        <p:cNvPr id="1" name=""/>
+        <p:cNvGrpSpPr/>
+        <p:nvPr/>
+      </p:nvGrpSpPr>
+      <p:grpSpPr>
+        <a:xfrm>
+          <a:off x="0" y="0"/>
+          <a:ext cx="0" cy="0"/>
+          <a:chOff x="0" y="0"/>
+          <a:chExt cx="0" cy="0"/>
+        </a:xfrm>
+      </p:grpSpPr>
+      <p:sp>
+        <p:nvSpPr>
+          <p:cNvPr id="2" name="Slide Image Placeholder 1"/>
+          <p:cNvSpPr>
+            <a:spLocks noGrp="1" noRot="1" noChangeAspect="1"/>
+          </p:cNvSpPr>
+          <p:nvPr>
+            <p:ph type="sldImg"/>
+          </p:nvPr>
+        </p:nvSpPr>
+        <p:spPr/>
+      </p:sp>
+      <p:sp>
+        <p:nvSpPr>
+          <p:cNvPr id="3" name="Notes Placeholder 2"/>
+          <p:cNvSpPr>
+            <a:spLocks noGrp="1"/>
+          </p:cNvSpPr>
+          <p:nvPr>
+            <p:ph type="body" idx="1"/>
+          </p:nvPr>
+        </p:nvSpPr>
+        <p:spPr/>
+        <p:txBody>
+          <a:bodyPr/>
+          <a:lstStyle/>
+          <a:p>
+            <a:r>
+              <a:rPr lang="en-US" dirty="0"/>
+              <a:t/>
+            </a:r>
+            <a:endParaRPr lang="en-US" dirty="0"/>
+          </a:p>
+        </p:txBody>
+      </p:sp>
+      <p:sp>
+        <p:nvSpPr>
+          <p:cNvPr id="4" name="Slide Number Placeholder 3"/>
+          <p:cNvSpPr>
+            <a:spLocks noGrp="1"/>
+          </p:cNvSpPr>
+          <p:nvPr>
+            <p:ph type="sldNum" sz="quarter" idx="10"/>
+          </p:nvPr>
+        </p:nvSpPr>
+        <p:spPr/>
+        <p:txBody>
+          <a:bodyPr/>
+          <a:lstStyle/>
+          <a:p>
+            <a:fld id="{F7021451-1387-4CA6-816F-3879F97B5CBC}" type="slidenum">
+              <a:rPr lang="en-US"/>
+              <a:t>15</a:t>
+            </a:fld>
+            <a:endParaRPr lang="en-US"/>
+          </a:p>
+        </p:txBody>
+      </p:sp>
+    </p:spTree>
+    <p:extLst>
+      <p:ext uri="{BB962C8B-B14F-4D97-AF65-F5344CB8AC3E}">
+        <p14:creationId xmlns:p14="http://schemas.microsoft.com/office/powerpoint/2010/main" val="1024086991"/>
+      </p:ext>
+    </p:extLst>
+  </p:cSld>
+  <p:clrMapOvr>
+    <a:masterClrMapping/>
+  </p:clrMapOvr>
+</p:notes>
+</file>
+
+<file path=ppt/notesSlides/notesSlide16.xml><?xml version="1.0" encoding="utf-8"?>
+<p:notes xmlns:a="http://schemas.openxmlformats.org/drawingml/2006/main" xmlns:r="http://schemas.openxmlformats.org/officeDocument/2006/relationships" xmlns:p="http://schemas.openxmlformats.org/presentationml/2006/main">
+  <p:cSld>
+    <p:spTree>
+      <p:nvGrpSpPr>
+        <p:cNvPr id="1" name=""/>
+        <p:cNvGrpSpPr/>
+        <p:nvPr/>
+      </p:nvGrpSpPr>
+      <p:grpSpPr>
+        <a:xfrm>
+          <a:off x="0" y="0"/>
+          <a:ext cx="0" cy="0"/>
+          <a:chOff x="0" y="0"/>
+          <a:chExt cx="0" cy="0"/>
+        </a:xfrm>
+      </p:grpSpPr>
+      <p:sp>
+        <p:nvSpPr>
+          <p:cNvPr id="2" name="Slide Image Placeholder 1"/>
+          <p:cNvSpPr>
+            <a:spLocks noGrp="1" noRot="1" noChangeAspect="1"/>
+          </p:cNvSpPr>
+          <p:nvPr>
+            <p:ph type="sldImg"/>
+          </p:nvPr>
+        </p:nvSpPr>
+        <p:spPr/>
+      </p:sp>
+      <p:sp>
+        <p:nvSpPr>
+          <p:cNvPr id="3" name="Notes Placeholder 2"/>
+          <p:cNvSpPr>
+            <a:spLocks noGrp="1"/>
+          </p:cNvSpPr>
+          <p:nvPr>
+            <p:ph type="body" idx="1"/>
+          </p:nvPr>
+        </p:nvSpPr>
+        <p:spPr/>
+        <p:txBody>
+          <a:bodyPr/>
+          <a:lstStyle/>
+          <a:p>
+            <a:r>
+              <a:rPr lang="en-US" dirty="0"/>
+              <a:t/>
+            </a:r>
+            <a:endParaRPr lang="en-US" dirty="0"/>
+          </a:p>
+        </p:txBody>
+      </p:sp>
+      <p:sp>
+        <p:nvSpPr>
+          <p:cNvPr id="4" name="Slide Number Placeholder 3"/>
+          <p:cNvSpPr>
+            <a:spLocks noGrp="1"/>
+          </p:cNvSpPr>
+          <p:nvPr>
+            <p:ph type="sldNum" sz="quarter" idx="10"/>
+          </p:nvPr>
+        </p:nvSpPr>
+        <p:spPr/>
+        <p:txBody>
+          <a:bodyPr/>
+          <a:lstStyle/>
+          <a:p>
+            <a:fld id="{F7021451-1387-4CA6-816F-3879F97B5CBC}" type="slidenum">
+              <a:rPr lang="en-US"/>
+              <a:t>16</a:t>
+            </a:fld>
+            <a:endParaRPr lang="en-US"/>
+          </a:p>
+        </p:txBody>
+      </p:sp>
+    </p:spTree>
+    <p:extLst>
+      <p:ext uri="{BB962C8B-B14F-4D97-AF65-F5344CB8AC3E}">
+        <p14:creationId xmlns:p14="http://schemas.microsoft.com/office/powerpoint/2010/main" val="1024086991"/>
+      </p:ext>
+    </p:extLst>
+  </p:cSld>
+  <p:clrMapOvr>
+    <a:masterClrMapping/>
+  </p:clrMapOvr>
+</p:notes>
+</file>
+
+<file path=ppt/notesSlides/notesSlide17.xml><?xml version="1.0" encoding="utf-8"?>
+<p:notes xmlns:a="http://schemas.openxmlformats.org/drawingml/2006/main" xmlns:r="http://schemas.openxmlformats.org/officeDocument/2006/relationships" xmlns:p="http://schemas.openxmlformats.org/presentationml/2006/main">
+  <p:cSld>
+    <p:spTree>
+      <p:nvGrpSpPr>
+        <p:cNvPr id="1" name=""/>
+        <p:cNvGrpSpPr/>
+        <p:nvPr/>
+      </p:nvGrpSpPr>
+      <p:grpSpPr>
+        <a:xfrm>
+          <a:off x="0" y="0"/>
+          <a:ext cx="0" cy="0"/>
+          <a:chOff x="0" y="0"/>
+          <a:chExt cx="0" cy="0"/>
+        </a:xfrm>
+      </p:grpSpPr>
+      <p:sp>
+        <p:nvSpPr>
+          <p:cNvPr id="2" name="Slide Image Placeholder 1"/>
+          <p:cNvSpPr>
+            <a:spLocks noGrp="1" noRot="1" noChangeAspect="1"/>
+          </p:cNvSpPr>
+          <p:nvPr>
+            <p:ph type="sldImg"/>
+          </p:nvPr>
+        </p:nvSpPr>
+        <p:spPr/>
+      </p:sp>
+      <p:sp>
+        <p:nvSpPr>
+          <p:cNvPr id="3" name="Notes Placeholder 2"/>
+          <p:cNvSpPr>
+            <a:spLocks noGrp="1"/>
+          </p:cNvSpPr>
+          <p:nvPr>
+            <p:ph type="body" idx="1"/>
+          </p:nvPr>
+        </p:nvSpPr>
+        <p:spPr/>
+        <p:txBody>
+          <a:bodyPr/>
+          <a:lstStyle/>
+          <a:p>
+            <a:r>
+              <a:rPr lang="en-US" dirty="0"/>
+              <a:t/>
+            </a:r>
+            <a:endParaRPr lang="en-US" dirty="0"/>
+          </a:p>
+        </p:txBody>
+      </p:sp>
+      <p:sp>
+        <p:nvSpPr>
+          <p:cNvPr id="4" name="Slide Number Placeholder 3"/>
+          <p:cNvSpPr>
+            <a:spLocks noGrp="1"/>
+          </p:cNvSpPr>
+          <p:nvPr>
+            <p:ph type="sldNum" sz="quarter" idx="10"/>
+          </p:nvPr>
+        </p:nvSpPr>
+        <p:spPr/>
+        <p:txBody>
+          <a:bodyPr/>
+          <a:lstStyle/>
+          <a:p>
+            <a:fld id="{F7021451-1387-4CA6-816F-3879F97B5CBC}" type="slidenum">
+              <a:rPr lang="en-US"/>
+              <a:t>17</a:t>
+            </a:fld>
+            <a:endParaRPr lang="en-US"/>
+          </a:p>
+        </p:txBody>
+      </p:sp>
+    </p:spTree>
+    <p:extLst>
+      <p:ext uri="{BB962C8B-B14F-4D97-AF65-F5344CB8AC3E}">
+        <p14:creationId xmlns:p14="http://schemas.microsoft.com/office/powerpoint/2010/main" val="1024086991"/>
+      </p:ext>
+    </p:extLst>
+  </p:cSld>
+  <p:clrMapOvr>
+    <a:masterClrMapping/>
+  </p:clrMapOvr>
+</p:notes>
+</file>
+
+<file path=ppt/notesSlides/notesSlide18.xml><?xml version="1.0" encoding="utf-8"?>
+<p:notes xmlns:a="http://schemas.openxmlformats.org/drawingml/2006/main" xmlns:r="http://schemas.openxmlformats.org/officeDocument/2006/relationships" xmlns:p="http://schemas.openxmlformats.org/presentationml/2006/main">
+  <p:cSld>
+    <p:spTree>
+      <p:nvGrpSpPr>
+        <p:cNvPr id="1" name=""/>
+        <p:cNvGrpSpPr/>
+        <p:nvPr/>
+      </p:nvGrpSpPr>
+      <p:grpSpPr>
+        <a:xfrm>
+          <a:off x="0" y="0"/>
+          <a:ext cx="0" cy="0"/>
+          <a:chOff x="0" y="0"/>
+          <a:chExt cx="0" cy="0"/>
+        </a:xfrm>
+      </p:grpSpPr>
+      <p:sp>
+        <p:nvSpPr>
+          <p:cNvPr id="2" name="Slide Image Placeholder 1"/>
+          <p:cNvSpPr>
+            <a:spLocks noGrp="1" noRot="1" noChangeAspect="1"/>
+          </p:cNvSpPr>
+          <p:nvPr>
+            <p:ph type="sldImg"/>
+          </p:nvPr>
+        </p:nvSpPr>
+        <p:spPr/>
+      </p:sp>
+      <p:sp>
+        <p:nvSpPr>
+          <p:cNvPr id="3" name="Notes Placeholder 2"/>
+          <p:cNvSpPr>
+            <a:spLocks noGrp="1"/>
+          </p:cNvSpPr>
+          <p:nvPr>
+            <p:ph type="body" idx="1"/>
+          </p:nvPr>
+        </p:nvSpPr>
+        <p:spPr/>
+        <p:txBody>
+          <a:bodyPr/>
+          <a:lstStyle/>
+          <a:p>
+            <a:r>
+              <a:rPr lang="en-US" dirty="0"/>
+              <a:t/>
+            </a:r>
+            <a:endParaRPr lang="en-US" dirty="0"/>
+          </a:p>
+        </p:txBody>
+      </p:sp>
+      <p:sp>
+        <p:nvSpPr>
+          <p:cNvPr id="4" name="Slide Number Placeholder 3"/>
+          <p:cNvSpPr>
+            <a:spLocks noGrp="1"/>
+          </p:cNvSpPr>
+          <p:nvPr>
+            <p:ph type="sldNum" sz="quarter" idx="10"/>
+          </p:nvPr>
+        </p:nvSpPr>
+        <p:spPr/>
+        <p:txBody>
+          <a:bodyPr/>
+          <a:lstStyle/>
+          <a:p>
+            <a:fld id="{F7021451-1387-4CA6-816F-3879F97B5CBC}" type="slidenum">
+              <a:rPr lang="en-US"/>
+              <a:t>18</a:t>
             </a:fld>
             <a:endParaRPr lang="en-US"/>
           </a:p>
@@ -3130,7 +4118,7 @@
                 <a:ea typeface="Calibri" pitchFamily="34" charset="-122"/>
                 <a:cs typeface="Calibri" pitchFamily="34" charset="-120"/>
               </a:rPr>
-              <a:t>CE QU'IL FAUT ANTICIPER</a:t>
+              <a:t>NOTRE RÉPONSE</a:t>
             </a:r>
             <a:endParaRPr lang="en-US" sz="1150" dirty="0"/>
           </a:p>
@@ -3169,7 +4157,7 @@
                 <a:ea typeface="Cambria" pitchFamily="34" charset="-122"/>
                 <a:cs typeface="Cambria" pitchFamily="34" charset="-120"/>
               </a:rPr>
-              <a:t>Risques identifiés et réponses</a:t>
+              <a:t>Retenir l'eau, nourrir sans lessiver</a:t>
             </a:r>
             <a:endParaRPr lang="en-US" sz="3000" dirty="0"/>
           </a:p>
@@ -3208,7 +4196,7 @@
                 <a:ea typeface="Cambria" pitchFamily="34" charset="-122"/>
                 <a:cs typeface="Cambria" pitchFamily="34" charset="-120"/>
               </a:rPr>
-              <a:t>Risques</a:t>
+              <a:t>EVERGREEN® — retenir l'eau</a:t>
             </a:r>
             <a:endParaRPr lang="en-US" sz="1600" dirty="0"/>
           </a:p>
@@ -3254,7 +4242,7 @@
                 <a:ea typeface="Calibri" pitchFamily="34" charset="-122"/>
                 <a:cs typeface="Calibri" pitchFamily="34" charset="-120"/>
               </a:rPr>
-              <a:t>Marché intérieur étroit : environ 2,4 millions d'habitants et des exploitations vivrières de très petite taille.</a:t>
+              <a:t>Hydro-rétenteur à base de potassium, placé dans la zone racinaire à la plantation ou à la reprise.</a:t>
             </a:r>
             <a:endParaRPr lang="en-US" sz="1350" dirty="0"/>
           </a:p>
@@ -3278,7 +4266,7 @@
                 <a:ea typeface="Calibri" pitchFamily="34" charset="-122"/>
                 <a:cs typeface="Calibri" pitchFamily="34" charset="-120"/>
               </a:rPr>
-              <a:t>Logistique intérieure difficile en saison des pluies, qui renchérit la distribution hors des axes principaux.</a:t>
+              <a:t>Capte l'eau de pluie ou d'irrigation et la restitue progressivement, ce qui lisse l'écart entre une averse tropicale et quatre mois sans pluie.</a:t>
             </a:r>
             <a:endParaRPr lang="en-US" sz="1350" dirty="0"/>
           </a:p>
@@ -3302,7 +4290,7 @@
                 <a:ea typeface="Calibri" pitchFamily="34" charset="-122"/>
                 <a:cs typeface="Calibri" pitchFamily="34" charset="-120"/>
               </a:rPr>
-              <a:t>Pluviométrie abondante : un essai conduit hors saison sèche masque l'intérêt du produit.</a:t>
+              <a:t>Capacité d'absorption de l'ordre de 300 fois son poids ; durée d'effet utile de 3 à 4 ans dans le sol.</a:t>
             </a:r>
             <a:endParaRPr lang="en-US" sz="1350" dirty="0"/>
           </a:p>
@@ -3326,7 +4314,7 @@
                 <a:ea typeface="Calibri" pitchFamily="34" charset="-122"/>
                 <a:cs typeface="Calibri" pitchFamily="34" charset="-120"/>
               </a:rPr>
-              <a:t>Produit peu connu, parfois confondu avec les polymères à base de sodium vendus en jardinerie.</a:t>
+              <a:t>Se dégrade de 20 à 25 % par an, sans accumulation ni risque de surdosage.</a:t>
             </a:r>
             <a:endParaRPr lang="en-US" sz="1350" dirty="0"/>
           </a:p>
@@ -3365,7 +4353,7 @@
                 <a:ea typeface="Cambria" pitchFamily="34" charset="-122"/>
                 <a:cs typeface="Cambria" pitchFamily="34" charset="-120"/>
               </a:rPr>
-              <a:t>Réponses</a:t>
+              <a:t>ECOFERT® — nourrir sans épuiser</a:t>
             </a:r>
             <a:endParaRPr lang="en-US" sz="1600" dirty="0"/>
           </a:p>
@@ -3411,7 +4399,7 @@
                 <a:ea typeface="Calibri" pitchFamily="34" charset="-122"/>
                 <a:cs typeface="Calibri" pitchFamily="34" charset="-120"/>
               </a:rPr>
-              <a:t>Concentrer les premiers volumes sur les plantations industrielles et les coopératives maraîchères péri-urbaines.</a:t>
+              <a:t>Fertilisant en microdoses d'acides aminés, azote, phosphore et potassium, issu de ressources renouvelables.</a:t>
             </a:r>
             <a:endParaRPr lang="en-US" sz="1350" dirty="0"/>
           </a:p>
@@ -3435,7 +4423,7 @@
                 <a:ea typeface="Calibri" pitchFamily="34" charset="-122"/>
                 <a:cs typeface="Calibri" pitchFamily="34" charset="-120"/>
               </a:rPr>
-              <a:t>Grouper les commandes sur un conteneur via le port d'Owendo, avec un stock tampon à Libreville.</a:t>
+              <a:t>Non chélatant : il n'appauvrit pas le complexe argilo-humique, déjà fragile sur sols ferralitiques acides.</a:t>
             </a:r>
             <a:endParaRPr lang="en-US" sz="1350" dirty="0"/>
           </a:p>
@@ -3459,7 +4447,7 @@
                 <a:ea typeface="Calibri" pitchFamily="34" charset="-122"/>
                 <a:cs typeface="Calibri" pitchFamily="34" charset="-120"/>
               </a:rPr>
-              <a:t>Programmer systématiquement l'essai de mai à octobre, pour couvrir la grande saison sèche.</a:t>
+              <a:t>Certifié SOHISCERT et EU Bio, utilisé dans 60 pays — argument utile pour les filières palme et hévéa exportatrices.</a:t>
             </a:r>
             <a:endParaRPr lang="en-US" sz="1350" dirty="0"/>
           </a:p>
@@ -3483,7 +4471,7 @@
                 <a:ea typeface="Calibri" pitchFamily="34" charset="-122"/>
                 <a:cs typeface="Calibri" pitchFamily="34" charset="-120"/>
               </a:rPr>
-              <a:t>Documenter la formulation potassique, sans sodium, compatible avec les cultures alimentaires.</a:t>
+              <a:t>1 à 4 flacons de 140 ml par hectare, compatibles avec un pulvérisateur à dos comme avec la fertirrigation.</a:t>
             </a:r>
             <a:endParaRPr lang="en-US" sz="1350" dirty="0"/>
           </a:p>
@@ -3552,7 +4540,7 @@
                 <a:ea typeface="Calibri" pitchFamily="34" charset="-122"/>
                 <a:cs typeface="Calibri" pitchFamily="34" charset="-120"/>
               </a:rPr>
-              <a:t>Analyse acrylamide (laboratoire Polymex, ISO 9001, teneur inférieure à 3,0 µg/g) et screening REACH / SVHC (SGS) disponibles sur demande, ainsi que le certificat SOHISCERT valable jusqu'au 4 septembre 2027.</a:t>
+              <a:t>Les deux produits se vendent séparément mais ont été conçus pour se renforcer : l'hydro-rétenteur prolonge la disponibilité de l'eau, le fertilisant valorise cette eau sans ajouter à la charge saline d'un sol déjà lessivé.</a:t>
             </a:r>
             <a:endParaRPr lang="en-US" sz="1100" dirty="0"/>
           </a:p>
@@ -3651,6 +4639,4717 @@
 <file path=ppt/slides/slide11.xml><?xml version="1.0" encoding="utf-8"?>
 <p:sld xmlns:a="http://schemas.openxmlformats.org/drawingml/2006/main" xmlns:r="http://schemas.openxmlformats.org/officeDocument/2006/relationships" xmlns:p="http://schemas.openxmlformats.org/presentationml/2006/main">
   <p:cSld name="Slide 11">
+    <p:bg>
+      <p:bgPr>
+        <a:solidFill>
+          <a:srgbClr val="FAFBFB"/>
+        </a:solidFill>
+      </p:bgPr>
+    </p:bg>
+    <p:spTree>
+      <p:nvGrpSpPr>
+        <p:cNvPr id="1" name=""/>
+        <p:cNvGrpSpPr/>
+        <p:nvPr/>
+      </p:nvGrpSpPr>
+      <p:grpSpPr>
+        <a:xfrm>
+          <a:off x="0" y="0"/>
+          <a:ext cx="0" cy="0"/>
+          <a:chOff x="0" y="0"/>
+          <a:chExt cx="0" cy="0"/>
+        </a:xfrm>
+      </p:grpSpPr>
+      <p:sp>
+        <p:nvSpPr>
+          <p:cNvPr id="2" name="Text 0"/>
+          <p:cNvSpPr txBox="1"/>
+          <p:nvPr/>
+        </p:nvSpPr>
+        <p:spPr>
+          <a:xfrm>
+            <a:off x="594360" y="411480"/>
+            <a:ext cx="10515600" cy="274320"/>
+          </a:xfrm>
+          <a:prstGeom prst="rect">
+            <a:avLst/>
+          </a:prstGeom>
+          <a:noFill/>
+          <a:ln/>
+        </p:spPr>
+        <p:txBody>
+          <a:bodyPr wrap="square" lIns="0" tIns="0" rIns="0" bIns="0" rtlCol="0" anchor="ctr"/>
+          <a:lstStyle/>
+          <a:p>
+            <a:pPr algn="l" indent="0" marL="0">
+              <a:buNone/>
+            </a:pPr>
+            <a:r>
+              <a:rPr lang="en-US" sz="1150" b="1" spc="200" kern="0" dirty="0">
+                <a:solidFill>
+                  <a:srgbClr val="E0A33E"/>
+                </a:solidFill>
+                <a:latin typeface="Calibri" pitchFamily="34" charset="0"/>
+                <a:ea typeface="Calibri" pitchFamily="34" charset="-122"/>
+                <a:cs typeface="Calibri" pitchFamily="34" charset="-120"/>
+              </a:rPr>
+              <a:t>Le reste de la gamme</a:t>
+            </a:r>
+            <a:endParaRPr lang="en-US" sz="1150" dirty="0"/>
+          </a:p>
+        </p:txBody>
+      </p:sp>
+      <p:sp>
+        <p:nvSpPr>
+          <p:cNvPr id="3" name="Text 1"/>
+          <p:cNvSpPr txBox="1"/>
+          <p:nvPr/>
+        </p:nvSpPr>
+        <p:spPr>
+          <a:xfrm>
+            <a:off x="594360" y="731520"/>
+            <a:ext cx="10881360" cy="731520"/>
+          </a:xfrm>
+          <a:prstGeom prst="rect">
+            <a:avLst/>
+          </a:prstGeom>
+          <a:noFill/>
+          <a:ln/>
+        </p:spPr>
+        <p:txBody>
+          <a:bodyPr wrap="square" lIns="0" tIns="0" rIns="0" bIns="0" rtlCol="0" anchor="ctr"/>
+          <a:lstStyle/>
+          <a:p>
+            <a:pPr algn="l" indent="0" marL="0">
+              <a:buNone/>
+            </a:pPr>
+            <a:r>
+              <a:rPr lang="en-US" sz="3000" b="1" dirty="0">
+                <a:solidFill>
+                  <a:srgbClr val="0E3546"/>
+                </a:solidFill>
+                <a:latin typeface="Cambria" pitchFamily="34" charset="0"/>
+                <a:ea typeface="Cambria" pitchFamily="34" charset="-122"/>
+                <a:cs typeface="Cambria" pitchFamily="34" charset="-120"/>
+              </a:rPr>
+              <a:t>Protéger les cultures, fixer les sols</a:t>
+            </a:r>
+            <a:endParaRPr lang="en-US" sz="3000" dirty="0"/>
+          </a:p>
+        </p:txBody>
+      </p:sp>
+      <p:sp>
+        <p:nvSpPr>
+          <p:cNvPr id="4" name="Text 2"/>
+          <p:cNvSpPr txBox="1"/>
+          <p:nvPr/>
+        </p:nvSpPr>
+        <p:spPr>
+          <a:xfrm>
+            <a:off x="594360" y="1783080"/>
+            <a:ext cx="5227168" cy="411480"/>
+          </a:xfrm>
+          <a:prstGeom prst="rect">
+            <a:avLst/>
+          </a:prstGeom>
+          <a:noFill/>
+          <a:ln/>
+        </p:spPr>
+        <p:txBody>
+          <a:bodyPr wrap="square" lIns="0" tIns="0" rIns="0" bIns="0" rtlCol="0" anchor="ctr"/>
+          <a:lstStyle/>
+          <a:p>
+            <a:pPr algn="l" indent="0" marL="0">
+              <a:buNone/>
+            </a:pPr>
+            <a:r>
+              <a:rPr lang="en-US" sz="1600" b="1" dirty="0">
+                <a:solidFill>
+                  <a:srgbClr val="1C5A73"/>
+                </a:solidFill>
+                <a:latin typeface="Cambria" pitchFamily="34" charset="0"/>
+                <a:ea typeface="Cambria" pitchFamily="34" charset="-122"/>
+                <a:cs typeface="Cambria" pitchFamily="34" charset="-120"/>
+              </a:rPr>
+              <a:t>NAPEMA® — protéger sans résidu</a:t>
+            </a:r>
+            <a:endParaRPr lang="en-US" sz="1600" dirty="0"/>
+          </a:p>
+        </p:txBody>
+      </p:sp>
+      <p:sp>
+        <p:nvSpPr>
+          <p:cNvPr id="5" name="Text 3"/>
+          <p:cNvSpPr txBox="1"/>
+          <p:nvPr/>
+        </p:nvSpPr>
+        <p:spPr>
+          <a:xfrm>
+            <a:off x="594360" y="2286000"/>
+            <a:ext cx="5227168" cy="2468880"/>
+          </a:xfrm>
+          <a:prstGeom prst="rect">
+            <a:avLst/>
+          </a:prstGeom>
+          <a:noFill/>
+          <a:ln/>
+        </p:spPr>
+        <p:txBody>
+          <a:bodyPr wrap="square" lIns="0" tIns="0" rIns="0" bIns="0" rtlCol="0" anchor="t"/>
+          <a:lstStyle/>
+          <a:p>
+            <a:pPr algn="l" marL="342900" indent="-342900">
+              <a:lnSpc>
+                <a:spcPct val="122000"/>
+              </a:lnSpc>
+              <a:spcAft>
+                <a:spcPts val="1000"/>
+              </a:spcAft>
+              <a:buSzPct val="100000"/>
+              <a:buChar char="•"/>
+            </a:pPr>
+            <a:r>
+              <a:rPr lang="en-US" sz="1350" dirty="0">
+                <a:solidFill>
+                  <a:srgbClr val="31424A"/>
+                </a:solidFill>
+                <a:latin typeface="Calibri" pitchFamily="34" charset="0"/>
+                <a:ea typeface="Calibri" pitchFamily="34" charset="-122"/>
+                <a:cs typeface="Calibri" pitchFamily="34" charset="-120"/>
+              </a:rPr>
+              <a:t>Lutte contre maladies, parasites, champignons et ravageurs, sans molécule de synthèse.</a:t>
+            </a:r>
+            <a:endParaRPr lang="en-US" sz="1350" dirty="0"/>
+          </a:p>
+          <a:p>
+            <a:pPr algn="l" marL="342900" indent="-342900">
+              <a:lnSpc>
+                <a:spcPct val="122000"/>
+              </a:lnSpc>
+              <a:spcAft>
+                <a:spcPts val="1000"/>
+              </a:spcAft>
+              <a:buSzPct val="100000"/>
+              <a:buChar char="•"/>
+            </a:pPr>
+            <a:r>
+              <a:rPr lang="en-US" sz="1350" dirty="0">
+                <a:solidFill>
+                  <a:srgbClr val="31424A"/>
+                </a:solidFill>
+                <a:latin typeface="Calibri" pitchFamily="34" charset="0"/>
+                <a:ea typeface="Calibri" pitchFamily="34" charset="-122"/>
+                <a:cs typeface="Calibri" pitchFamily="34" charset="-120"/>
+              </a:rPr>
+              <a:t>Pulvérisation foliaire et racinaire, à effet préventif comme curatif.</a:t>
+            </a:r>
+            <a:endParaRPr lang="en-US" sz="1350" dirty="0"/>
+          </a:p>
+          <a:p>
+            <a:pPr algn="l" marL="342900" indent="-342900">
+              <a:lnSpc>
+                <a:spcPct val="122000"/>
+              </a:lnSpc>
+              <a:spcAft>
+                <a:spcPts val="1000"/>
+              </a:spcAft>
+              <a:buSzPct val="100000"/>
+              <a:buChar char="•"/>
+            </a:pPr>
+            <a:r>
+              <a:rPr lang="en-US" sz="1350" dirty="0">
+                <a:solidFill>
+                  <a:srgbClr val="31424A"/>
+                </a:solidFill>
+                <a:latin typeface="Calibri" pitchFamily="34" charset="0"/>
+                <a:ea typeface="Calibri" pitchFamily="34" charset="-122"/>
+                <a:cs typeface="Calibri" pitchFamily="34" charset="-120"/>
+              </a:rPr>
+              <a:t>Aucun résidu dans le sol, la plante ou l'air : pollinisateurs et auxiliaires préservés.</a:t>
+            </a:r>
+            <a:endParaRPr lang="en-US" sz="1350" dirty="0"/>
+          </a:p>
+          <a:p>
+            <a:pPr algn="l" marL="342900" indent="-342900">
+              <a:lnSpc>
+                <a:spcPct val="122000"/>
+              </a:lnSpc>
+              <a:spcAft>
+                <a:spcPts val="1000"/>
+              </a:spcAft>
+              <a:buSzPct val="100000"/>
+              <a:buChar char="•"/>
+            </a:pPr>
+            <a:r>
+              <a:rPr lang="en-US" sz="1350" dirty="0">
+                <a:solidFill>
+                  <a:srgbClr val="31424A"/>
+                </a:solidFill>
+                <a:latin typeface="Calibri" pitchFamily="34" charset="0"/>
+                <a:ea typeface="Calibri" pitchFamily="34" charset="-122"/>
+                <a:cs typeface="Calibri" pitchFamily="34" charset="-120"/>
+              </a:rPr>
+              <a:t>Formulé sur mesure pour un problème précis : cochenille, HLB des agrumes, nématodes.</a:t>
+            </a:r>
+            <a:endParaRPr lang="en-US" sz="1350" dirty="0"/>
+          </a:p>
+        </p:txBody>
+      </p:sp>
+      <p:sp>
+        <p:nvSpPr>
+          <p:cNvPr id="6" name="Text 4"/>
+          <p:cNvSpPr txBox="1"/>
+          <p:nvPr/>
+        </p:nvSpPr>
+        <p:spPr>
+          <a:xfrm>
+            <a:off x="6370168" y="1783080"/>
+            <a:ext cx="5227168" cy="411480"/>
+          </a:xfrm>
+          <a:prstGeom prst="rect">
+            <a:avLst/>
+          </a:prstGeom>
+          <a:noFill/>
+          <a:ln/>
+        </p:spPr>
+        <p:txBody>
+          <a:bodyPr wrap="square" lIns="0" tIns="0" rIns="0" bIns="0" rtlCol="0" anchor="ctr"/>
+          <a:lstStyle/>
+          <a:p>
+            <a:pPr algn="l" indent="0" marL="0">
+              <a:buNone/>
+            </a:pPr>
+            <a:r>
+              <a:rPr lang="en-US" sz="1600" b="1" dirty="0">
+                <a:solidFill>
+                  <a:srgbClr val="1C5A73"/>
+                </a:solidFill>
+                <a:latin typeface="Cambria" pitchFamily="34" charset="0"/>
+                <a:ea typeface="Cambria" pitchFamily="34" charset="-122"/>
+                <a:cs typeface="Cambria" pitchFamily="34" charset="-120"/>
+              </a:rPr>
+              <a:t>Paulownia ALTIFOLIA® — l'arbre des régions chaudes</a:t>
+            </a:r>
+            <a:endParaRPr lang="en-US" sz="1600" dirty="0"/>
+          </a:p>
+        </p:txBody>
+      </p:sp>
+      <p:sp>
+        <p:nvSpPr>
+          <p:cNvPr id="7" name="Text 5"/>
+          <p:cNvSpPr txBox="1"/>
+          <p:nvPr/>
+        </p:nvSpPr>
+        <p:spPr>
+          <a:xfrm>
+            <a:off x="6370168" y="2286000"/>
+            <a:ext cx="5227168" cy="2468880"/>
+          </a:xfrm>
+          <a:prstGeom prst="rect">
+            <a:avLst/>
+          </a:prstGeom>
+          <a:noFill/>
+          <a:ln/>
+        </p:spPr>
+        <p:txBody>
+          <a:bodyPr wrap="square" lIns="0" tIns="0" rIns="0" bIns="0" rtlCol="0" anchor="t"/>
+          <a:lstStyle/>
+          <a:p>
+            <a:pPr algn="l" marL="342900" indent="-342900">
+              <a:lnSpc>
+                <a:spcPct val="122000"/>
+              </a:lnSpc>
+              <a:spcAft>
+                <a:spcPts val="1000"/>
+              </a:spcAft>
+              <a:buSzPct val="100000"/>
+              <a:buChar char="•"/>
+            </a:pPr>
+            <a:r>
+              <a:rPr lang="en-US" sz="1350" dirty="0">
+                <a:solidFill>
+                  <a:srgbClr val="31424A"/>
+                </a:solidFill>
+                <a:latin typeface="Calibri" pitchFamily="34" charset="0"/>
+                <a:ea typeface="Calibri" pitchFamily="34" charset="-122"/>
+                <a:cs typeface="Calibri" pitchFamily="34" charset="-120"/>
+              </a:rPr>
+              <a:t>13 à 15 m en six à huit ans, avec un tronc de gros diamètre.</a:t>
+            </a:r>
+            <a:endParaRPr lang="en-US" sz="1350" dirty="0"/>
+          </a:p>
+          <a:p>
+            <a:pPr algn="l" marL="342900" indent="-342900">
+              <a:lnSpc>
+                <a:spcPct val="122000"/>
+              </a:lnSpc>
+              <a:spcAft>
+                <a:spcPts val="1000"/>
+              </a:spcAft>
+              <a:buSzPct val="100000"/>
+              <a:buChar char="•"/>
+            </a:pPr>
+            <a:r>
+              <a:rPr lang="en-US" sz="1350" dirty="0">
+                <a:solidFill>
+                  <a:srgbClr val="31424A"/>
+                </a:solidFill>
+                <a:latin typeface="Calibri" pitchFamily="34" charset="0"/>
+                <a:ea typeface="Calibri" pitchFamily="34" charset="-122"/>
+                <a:cs typeface="Calibri" pitchFamily="34" charset="-120"/>
+              </a:rPr>
+              <a:t>Associé à 100 g d'EVERGREEN® par plant, l'irrigation nécessaire diminue de 50 %.</a:t>
+            </a:r>
+            <a:endParaRPr lang="en-US" sz="1350" dirty="0"/>
+          </a:p>
+          <a:p>
+            <a:pPr algn="l" marL="342900" indent="-342900">
+              <a:lnSpc>
+                <a:spcPct val="122000"/>
+              </a:lnSpc>
+              <a:spcAft>
+                <a:spcPts val="1000"/>
+              </a:spcAft>
+              <a:buSzPct val="100000"/>
+              <a:buChar char="•"/>
+            </a:pPr>
+            <a:r>
+              <a:rPr lang="en-US" sz="1350" dirty="0">
+                <a:solidFill>
+                  <a:srgbClr val="31424A"/>
+                </a:solidFill>
+                <a:latin typeface="Calibri" pitchFamily="34" charset="0"/>
+                <a:ea typeface="Calibri" pitchFamily="34" charset="-122"/>
+                <a:cs typeface="Calibri" pitchFamily="34" charset="-120"/>
+              </a:rPr>
+              <a:t>Résiste de −25 °C à +45 °C ; son bois ne s'enflamme qu'à partir de 426 °C.</a:t>
+            </a:r>
+            <a:endParaRPr lang="en-US" sz="1350" dirty="0"/>
+          </a:p>
+          <a:p>
+            <a:pPr algn="l" marL="342900" indent="-342900">
+              <a:lnSpc>
+                <a:spcPct val="122000"/>
+              </a:lnSpc>
+              <a:spcAft>
+                <a:spcPts val="1000"/>
+              </a:spcAft>
+              <a:buSzPct val="100000"/>
+              <a:buChar char="•"/>
+            </a:pPr>
+            <a:r>
+              <a:rPr lang="en-US" sz="1350" dirty="0">
+                <a:solidFill>
+                  <a:srgbClr val="31424A"/>
+                </a:solidFill>
+                <a:latin typeface="Calibri" pitchFamily="34" charset="0"/>
+                <a:ea typeface="Calibri" pitchFamily="34" charset="-122"/>
+                <a:cs typeface="Calibri" pitchFamily="34" charset="-120"/>
+              </a:rPr>
+              <a:t>Brise-vent, protection des sols contre l'érosion, 400 à 700 kg de miel par hectare.</a:t>
+            </a:r>
+            <a:endParaRPr lang="en-US" sz="1350" dirty="0"/>
+          </a:p>
+        </p:txBody>
+      </p:sp>
+      <p:sp>
+        <p:nvSpPr>
+          <p:cNvPr id="8" name="Shape 6"/>
+          <p:cNvSpPr/>
+          <p:nvPr/>
+        </p:nvSpPr>
+        <p:spPr>
+          <a:xfrm>
+            <a:off x="594360" y="4846320"/>
+            <a:ext cx="11002975" cy="960120"/>
+          </a:xfrm>
+          <a:prstGeom prst="roundRect">
+            <a:avLst>
+              <a:gd name="adj" fmla="val 7619"/>
+            </a:avLst>
+          </a:prstGeom>
+          <a:solidFill>
+            <a:srgbClr val="EDF3F5"/>
+          </a:solidFill>
+          <a:ln w="9525">
+            <a:solidFill>
+              <a:srgbClr val="D6E2E7"/>
+            </a:solidFill>
+            <a:prstDash val="solid"/>
+          </a:ln>
+        </p:spPr>
+      </p:sp>
+      <p:sp>
+        <p:nvSpPr>
+          <p:cNvPr id="9" name="Text 7"/>
+          <p:cNvSpPr txBox="1"/>
+          <p:nvPr/>
+        </p:nvSpPr>
+        <p:spPr>
+          <a:xfrm>
+            <a:off x="822960" y="4983480"/>
+            <a:ext cx="10545775" cy="713232"/>
+          </a:xfrm>
+          <a:prstGeom prst="rect">
+            <a:avLst/>
+          </a:prstGeom>
+          <a:noFill/>
+          <a:ln/>
+        </p:spPr>
+        <p:txBody>
+          <a:bodyPr wrap="square" lIns="0" tIns="0" rIns="0" bIns="0" rtlCol="0" anchor="t"/>
+          <a:lstStyle/>
+          <a:p>
+            <a:pPr algn="l" indent="0" marL="0">
+              <a:lnSpc>
+                <a:spcPct val="118000"/>
+              </a:lnSpc>
+              <a:buNone/>
+            </a:pPr>
+            <a:r>
+              <a:rPr lang="en-US" sz="1100" dirty="0">
+                <a:solidFill>
+                  <a:srgbClr val="6C8089"/>
+                </a:solidFill>
+                <a:latin typeface="Calibri" pitchFamily="34" charset="0"/>
+                <a:ea typeface="Calibri" pitchFamily="34" charset="-122"/>
+                <a:cs typeface="Calibri" pitchFamily="34" charset="-120"/>
+              </a:rPr>
+              <a:t>Plants livrés en pot (25 à 30 cm), certifiés indemnes de maladies et remplacés sous garantie en cas de perte. Première coupe à la fin de la sixième année, bois valorisé autour de 400 à 450 € le m³.</a:t>
+            </a:r>
+            <a:endParaRPr lang="en-US" sz="1100" dirty="0"/>
+          </a:p>
+        </p:txBody>
+      </p:sp>
+      <p:sp>
+        <p:nvSpPr>
+          <p:cNvPr id="10" name="Text 8"/>
+          <p:cNvSpPr txBox="1"/>
+          <p:nvPr/>
+        </p:nvSpPr>
+        <p:spPr>
+          <a:xfrm>
+            <a:off x="502920" y="6382512"/>
+            <a:ext cx="8229600" cy="274320"/>
+          </a:xfrm>
+          <a:prstGeom prst="rect">
+            <a:avLst/>
+          </a:prstGeom>
+          <a:noFill/>
+          <a:ln/>
+        </p:spPr>
+        <p:txBody>
+          <a:bodyPr wrap="square" lIns="0" tIns="0" rIns="0" bIns="0" rtlCol="0" anchor="ctr"/>
+          <a:lstStyle/>
+          <a:p>
+            <a:pPr algn="l" indent="0" marL="0">
+              <a:buNone/>
+            </a:pPr>
+            <a:r>
+              <a:rPr lang="en-US" sz="950" dirty="0">
+                <a:solidFill>
+                  <a:srgbClr val="6C8089">
+                    <a:alpha val="80000"/>
+                  </a:srgbClr>
+                </a:solidFill>
+                <a:latin typeface="Calibri" pitchFamily="34" charset="0"/>
+                <a:ea typeface="Calibri" pitchFamily="34" charset="-122"/>
+                <a:cs typeface="Calibri" pitchFamily="34" charset="-120"/>
+              </a:rPr>
+              <a:t>Green Solutions · Dossier marché Gabon</a:t>
+            </a:r>
+            <a:endParaRPr lang="en-US" sz="950" dirty="0"/>
+          </a:p>
+        </p:txBody>
+      </p:sp>
+      <p:sp>
+        <p:nvSpPr>
+          <p:cNvPr id="11" name="Text 9"/>
+          <p:cNvSpPr txBox="1"/>
+          <p:nvPr/>
+        </p:nvSpPr>
+        <p:spPr>
+          <a:xfrm>
+            <a:off x="11140135" y="6382512"/>
+            <a:ext cx="548640" cy="274320"/>
+          </a:xfrm>
+          <a:prstGeom prst="rect">
+            <a:avLst/>
+          </a:prstGeom>
+          <a:noFill/>
+          <a:ln/>
+        </p:spPr>
+        <p:txBody>
+          <a:bodyPr wrap="square" lIns="0" tIns="0" rIns="0" bIns="0" rtlCol="0" anchor="ctr"/>
+          <a:lstStyle/>
+          <a:p>
+            <a:pPr algn="r" indent="0" marL="0">
+              <a:buNone/>
+            </a:pPr>
+            <a:r>
+              <a:rPr lang="en-US" sz="950" dirty="0">
+                <a:solidFill>
+                  <a:srgbClr val="6C8089">
+                    <a:alpha val="80000"/>
+                  </a:srgbClr>
+                </a:solidFill>
+                <a:latin typeface="Calibri" pitchFamily="34" charset="0"/>
+                <a:ea typeface="Calibri" pitchFamily="34" charset="-122"/>
+                <a:cs typeface="Calibri" pitchFamily="34" charset="-120"/>
+              </a:rPr>
+              <a:t>10</a:t>
+            </a:r>
+            <a:endParaRPr lang="en-US" sz="950" dirty="0"/>
+          </a:p>
+        </p:txBody>
+      </p:sp>
+    </p:spTree>
+  </p:cSld>
+  <p:clrMapOvr>
+    <a:masterClrMapping/>
+  </p:clrMapOvr>
+</p:sld>
+</file>
+
+<file path=ppt/slides/slide12.xml><?xml version="1.0" encoding="utf-8"?>
+<p:sld xmlns:a="http://schemas.openxmlformats.org/drawingml/2006/main" xmlns:r="http://schemas.openxmlformats.org/officeDocument/2006/relationships" xmlns:p="http://schemas.openxmlformats.org/presentationml/2006/main">
+  <p:cSld name="Slide 12">
+    <p:bg>
+      <p:bgPr>
+        <a:solidFill>
+          <a:srgbClr val="FAFBFB"/>
+        </a:solidFill>
+      </p:bgPr>
+    </p:bg>
+    <p:spTree>
+      <p:nvGrpSpPr>
+        <p:cNvPr id="1" name=""/>
+        <p:cNvGrpSpPr/>
+        <p:nvPr/>
+      </p:nvGrpSpPr>
+      <p:grpSpPr>
+        <a:xfrm>
+          <a:off x="0" y="0"/>
+          <a:ext cx="0" cy="0"/>
+          <a:chOff x="0" y="0"/>
+          <a:chExt cx="0" cy="0"/>
+        </a:xfrm>
+      </p:grpSpPr>
+      <p:sp>
+        <p:nvSpPr>
+          <p:cNvPr id="2" name="Text 0"/>
+          <p:cNvSpPr txBox="1"/>
+          <p:nvPr/>
+        </p:nvSpPr>
+        <p:spPr>
+          <a:xfrm>
+            <a:off x="594360" y="411480"/>
+            <a:ext cx="10515600" cy="274320"/>
+          </a:xfrm>
+          <a:prstGeom prst="rect">
+            <a:avLst/>
+          </a:prstGeom>
+          <a:noFill/>
+          <a:ln/>
+        </p:spPr>
+        <p:txBody>
+          <a:bodyPr wrap="square" lIns="0" tIns="0" rIns="0" bIns="0" rtlCol="0" anchor="ctr"/>
+          <a:lstStyle/>
+          <a:p>
+            <a:pPr algn="l" indent="0" marL="0">
+              <a:buNone/>
+            </a:pPr>
+            <a:r>
+              <a:rPr lang="en-US" sz="1150" b="1" spc="200" kern="0" dirty="0">
+                <a:solidFill>
+                  <a:srgbClr val="E0A33E"/>
+                </a:solidFill>
+                <a:latin typeface="Calibri" pitchFamily="34" charset="0"/>
+                <a:ea typeface="Calibri" pitchFamily="34" charset="-122"/>
+                <a:cs typeface="Calibri" pitchFamily="34" charset="-120"/>
+              </a:rPr>
+              <a:t>ORDRES DE GRANDEUR</a:t>
+            </a:r>
+            <a:endParaRPr lang="en-US" sz="1150" dirty="0"/>
+          </a:p>
+        </p:txBody>
+      </p:sp>
+      <p:sp>
+        <p:nvSpPr>
+          <p:cNvPr id="3" name="Text 1"/>
+          <p:cNvSpPr txBox="1"/>
+          <p:nvPr/>
+        </p:nvSpPr>
+        <p:spPr>
+          <a:xfrm>
+            <a:off x="594360" y="731520"/>
+            <a:ext cx="10881360" cy="731520"/>
+          </a:xfrm>
+          <a:prstGeom prst="rect">
+            <a:avLst/>
+          </a:prstGeom>
+          <a:noFill/>
+          <a:ln/>
+        </p:spPr>
+        <p:txBody>
+          <a:bodyPr wrap="square" lIns="0" tIns="0" rIns="0" bIns="0" rtlCol="0" anchor="ctr"/>
+          <a:lstStyle/>
+          <a:p>
+            <a:pPr algn="l" indent="0" marL="0">
+              <a:buNone/>
+            </a:pPr>
+            <a:r>
+              <a:rPr lang="en-US" sz="3000" b="1" dirty="0">
+                <a:solidFill>
+                  <a:srgbClr val="0E3546"/>
+                </a:solidFill>
+                <a:latin typeface="Cambria" pitchFamily="34" charset="0"/>
+                <a:ea typeface="Cambria" pitchFamily="34" charset="-122"/>
+                <a:cs typeface="Cambria" pitchFamily="34" charset="-120"/>
+              </a:rPr>
+              <a:t>Économie d'eau attendue selon le mode d'arrosage</a:t>
+            </a:r>
+            <a:endParaRPr lang="en-US" sz="3000" dirty="0"/>
+          </a:p>
+        </p:txBody>
+      </p:sp>
+      <p:graphicFrame>
+        <p:nvGraphicFramePr>
+          <p:cNvPr id="4" name="Chart 0" descr=""/>
+          <p:cNvGraphicFramePr/>
+          <p:nvPr/>
+        </p:nvGraphicFramePr>
+        <p:xfrm>
+          <a:off x="594360" y="1783080"/>
+          <a:ext cx="7360920" cy="3977640"/>
+        </p:xfrm>
+        <a:graphic xmlns:a="http://schemas.openxmlformats.org/drawingml/2006/main">
+          <a:graphicData uri="http://schemas.openxmlformats.org/drawingml/2006/chart">
+            <c:chart xmlns:c="http://schemas.openxmlformats.org/drawingml/2006/chart" r:id="rId1"/>
+          </a:graphicData>
+        </a:graphic>
+      </p:graphicFrame>
+      <p:sp>
+        <p:nvSpPr>
+          <p:cNvPr id="5" name="Shape 2"/>
+          <p:cNvSpPr/>
+          <p:nvPr/>
+        </p:nvSpPr>
+        <p:spPr>
+          <a:xfrm>
+            <a:off x="8275320" y="1783080"/>
+            <a:ext cx="3291840" cy="3977640"/>
+          </a:xfrm>
+          <a:prstGeom prst="roundRect">
+            <a:avLst>
+              <a:gd name="adj" fmla="val 2778"/>
+            </a:avLst>
+          </a:prstGeom>
+          <a:solidFill>
+            <a:srgbClr val="EDF3F5"/>
+          </a:solidFill>
+          <a:ln w="9525">
+            <a:solidFill>
+              <a:srgbClr val="D6E2E7"/>
+            </a:solidFill>
+            <a:prstDash val="solid"/>
+          </a:ln>
+        </p:spPr>
+      </p:sp>
+      <p:sp>
+        <p:nvSpPr>
+          <p:cNvPr id="6" name="Text 3"/>
+          <p:cNvSpPr txBox="1"/>
+          <p:nvPr/>
+        </p:nvSpPr>
+        <p:spPr>
+          <a:xfrm>
+            <a:off x="8503920" y="2011680"/>
+            <a:ext cx="2834640" cy="457200"/>
+          </a:xfrm>
+          <a:prstGeom prst="rect">
+            <a:avLst/>
+          </a:prstGeom>
+          <a:noFill/>
+          <a:ln/>
+        </p:spPr>
+        <p:txBody>
+          <a:bodyPr wrap="square" lIns="0" tIns="0" rIns="0" bIns="0" rtlCol="0" anchor="ctr"/>
+          <a:lstStyle/>
+          <a:p>
+            <a:pPr algn="l" indent="0" marL="0">
+              <a:buNone/>
+            </a:pPr>
+            <a:r>
+              <a:rPr lang="en-US" sz="1300" b="1" dirty="0">
+                <a:solidFill>
+                  <a:srgbClr val="1C5A73"/>
+                </a:solidFill>
+                <a:latin typeface="Cambria" pitchFamily="34" charset="0"/>
+                <a:ea typeface="Cambria" pitchFamily="34" charset="-122"/>
+                <a:cs typeface="Cambria" pitchFamily="34" charset="-120"/>
+              </a:rPr>
+              <a:t>À lire avec prudence</a:t>
+            </a:r>
+            <a:endParaRPr lang="en-US" sz="1300" dirty="0"/>
+          </a:p>
+        </p:txBody>
+      </p:sp>
+      <p:sp>
+        <p:nvSpPr>
+          <p:cNvPr id="7" name="Text 4"/>
+          <p:cNvSpPr txBox="1"/>
+          <p:nvPr/>
+        </p:nvSpPr>
+        <p:spPr>
+          <a:xfrm>
+            <a:off x="8503920" y="2560320"/>
+            <a:ext cx="2834640" cy="3017520"/>
+          </a:xfrm>
+          <a:prstGeom prst="rect">
+            <a:avLst/>
+          </a:prstGeom>
+          <a:noFill/>
+          <a:ln/>
+        </p:spPr>
+        <p:txBody>
+          <a:bodyPr wrap="square" lIns="0" tIns="0" rIns="0" bIns="0" rtlCol="0" anchor="t"/>
+          <a:lstStyle/>
+          <a:p>
+            <a:pPr algn="l" indent="0" marL="0">
+              <a:lnSpc>
+                <a:spcPct val="125000"/>
+              </a:lnSpc>
+              <a:buNone/>
+            </a:pPr>
+            <a:r>
+              <a:rPr lang="en-US" sz="1200" dirty="0">
+                <a:solidFill>
+                  <a:srgbClr val="31424A"/>
+                </a:solidFill>
+                <a:latin typeface="Calibri" pitchFamily="34" charset="0"/>
+                <a:ea typeface="Calibri" pitchFamily="34" charset="-122"/>
+                <a:cs typeface="Calibri" pitchFamily="34" charset="-120"/>
+              </a:rPr>
+              <a:t>Ces fourchettes sont indicatives et fondées sur les gains documentés de nos hydro-rétenteurs.</a:t>
+            </a:r>
+            <a:endParaRPr lang="en-US" sz="1200" dirty="0"/>
+          </a:p>
+          <a:p>
+            <a:pPr algn="l" indent="0" marL="0">
+              <a:lnSpc>
+                <a:spcPct val="125000"/>
+              </a:lnSpc>
+              <a:buNone/>
+            </a:pPr>
+            <a:endParaRPr lang="en-US" sz="1200" dirty="0"/>
+          </a:p>
+          <a:p>
+            <a:pPr algn="l" indent="0" marL="0">
+              <a:lnSpc>
+                <a:spcPct val="125000"/>
+              </a:lnSpc>
+              <a:buNone/>
+            </a:pPr>
+            <a:r>
+              <a:rPr lang="en-US" sz="1200" dirty="0">
+                <a:solidFill>
+                  <a:srgbClr val="31424A"/>
+                </a:solidFill>
+                <a:latin typeface="Calibri" pitchFamily="34" charset="0"/>
+                <a:ea typeface="Calibri" pitchFamily="34" charset="-122"/>
+                <a:cs typeface="Calibri" pitchFamily="34" charset="-120"/>
+              </a:rPr>
+              <a:t>Le résultat réel dépend du sol, du climat et de la culture. Ces chiffres donnent un ordre de grandeur : ils ne constituent en aucun cas une valeur garantie, contractuelle ou absolue.</a:t>
+            </a:r>
+            <a:endParaRPr lang="en-US" sz="1200" dirty="0"/>
+          </a:p>
+        </p:txBody>
+      </p:sp>
+      <p:sp>
+        <p:nvSpPr>
+          <p:cNvPr id="8" name="Text 5"/>
+          <p:cNvSpPr txBox="1"/>
+          <p:nvPr/>
+        </p:nvSpPr>
+        <p:spPr>
+          <a:xfrm>
+            <a:off x="502920" y="6382512"/>
+            <a:ext cx="8229600" cy="274320"/>
+          </a:xfrm>
+          <a:prstGeom prst="rect">
+            <a:avLst/>
+          </a:prstGeom>
+          <a:noFill/>
+          <a:ln/>
+        </p:spPr>
+        <p:txBody>
+          <a:bodyPr wrap="square" lIns="0" tIns="0" rIns="0" bIns="0" rtlCol="0" anchor="ctr"/>
+          <a:lstStyle/>
+          <a:p>
+            <a:pPr algn="l" indent="0" marL="0">
+              <a:buNone/>
+            </a:pPr>
+            <a:r>
+              <a:rPr lang="en-US" sz="950" dirty="0">
+                <a:solidFill>
+                  <a:srgbClr val="6C8089">
+                    <a:alpha val="80000"/>
+                  </a:srgbClr>
+                </a:solidFill>
+                <a:latin typeface="Calibri" pitchFamily="34" charset="0"/>
+                <a:ea typeface="Calibri" pitchFamily="34" charset="-122"/>
+                <a:cs typeface="Calibri" pitchFamily="34" charset="-120"/>
+              </a:rPr>
+              <a:t>Green Solutions · Dossier marché Gabon</a:t>
+            </a:r>
+            <a:endParaRPr lang="en-US" sz="950" dirty="0"/>
+          </a:p>
+        </p:txBody>
+      </p:sp>
+      <p:sp>
+        <p:nvSpPr>
+          <p:cNvPr id="9" name="Text 6"/>
+          <p:cNvSpPr txBox="1"/>
+          <p:nvPr/>
+        </p:nvSpPr>
+        <p:spPr>
+          <a:xfrm>
+            <a:off x="11140135" y="6382512"/>
+            <a:ext cx="548640" cy="274320"/>
+          </a:xfrm>
+          <a:prstGeom prst="rect">
+            <a:avLst/>
+          </a:prstGeom>
+          <a:noFill/>
+          <a:ln/>
+        </p:spPr>
+        <p:txBody>
+          <a:bodyPr wrap="square" lIns="0" tIns="0" rIns="0" bIns="0" rtlCol="0" anchor="ctr"/>
+          <a:lstStyle/>
+          <a:p>
+            <a:pPr algn="r" indent="0" marL="0">
+              <a:buNone/>
+            </a:pPr>
+            <a:r>
+              <a:rPr lang="en-US" sz="950" dirty="0">
+                <a:solidFill>
+                  <a:srgbClr val="6C8089">
+                    <a:alpha val="80000"/>
+                  </a:srgbClr>
+                </a:solidFill>
+                <a:latin typeface="Calibri" pitchFamily="34" charset="0"/>
+                <a:ea typeface="Calibri" pitchFamily="34" charset="-122"/>
+                <a:cs typeface="Calibri" pitchFamily="34" charset="-120"/>
+              </a:rPr>
+              <a:t>11</a:t>
+            </a:r>
+            <a:endParaRPr lang="en-US" sz="950" dirty="0"/>
+          </a:p>
+        </p:txBody>
+      </p:sp>
+    </p:spTree>
+  </p:cSld>
+  <p:clrMapOvr>
+    <a:masterClrMapping/>
+  </p:clrMapOvr>
+</p:sld>
+</file>
+
+<file path=ppt/slides/slide13.xml><?xml version="1.0" encoding="utf-8"?>
+<p:sld xmlns:a="http://schemas.openxmlformats.org/drawingml/2006/main" xmlns:r="http://schemas.openxmlformats.org/officeDocument/2006/relationships" xmlns:p="http://schemas.openxmlformats.org/presentationml/2006/main">
+  <p:cSld name="Slide 13">
+    <p:bg>
+      <p:bgPr>
+        <a:solidFill>
+          <a:srgbClr val="FAFBFB"/>
+        </a:solidFill>
+      </p:bgPr>
+    </p:bg>
+    <p:spTree>
+      <p:nvGrpSpPr>
+        <p:cNvPr id="1" name=""/>
+        <p:cNvGrpSpPr/>
+        <p:nvPr/>
+      </p:nvGrpSpPr>
+      <p:grpSpPr>
+        <a:xfrm>
+          <a:off x="0" y="0"/>
+          <a:ext cx="0" cy="0"/>
+          <a:chOff x="0" y="0"/>
+          <a:chExt cx="0" cy="0"/>
+        </a:xfrm>
+      </p:grpSpPr>
+      <p:sp>
+        <p:nvSpPr>
+          <p:cNvPr id="2" name="Text 0"/>
+          <p:cNvSpPr txBox="1"/>
+          <p:nvPr/>
+        </p:nvSpPr>
+        <p:spPr>
+          <a:xfrm>
+            <a:off x="594360" y="411480"/>
+            <a:ext cx="10515600" cy="274320"/>
+          </a:xfrm>
+          <a:prstGeom prst="rect">
+            <a:avLst/>
+          </a:prstGeom>
+          <a:noFill/>
+          <a:ln/>
+        </p:spPr>
+        <p:txBody>
+          <a:bodyPr wrap="square" lIns="0" tIns="0" rIns="0" bIns="0" rtlCol="0" anchor="ctr"/>
+          <a:lstStyle/>
+          <a:p>
+            <a:pPr algn="l" indent="0" marL="0">
+              <a:buNone/>
+            </a:pPr>
+            <a:r>
+              <a:rPr lang="en-US" sz="1150" b="1" spc="200" kern="0" dirty="0">
+                <a:solidFill>
+                  <a:srgbClr val="E0A33E"/>
+                </a:solidFill>
+                <a:latin typeface="Calibri" pitchFamily="34" charset="0"/>
+                <a:ea typeface="Calibri" pitchFamily="34" charset="-122"/>
+                <a:cs typeface="Calibri" pitchFamily="34" charset="-120"/>
+              </a:rPr>
+              <a:t>TROIS TERRAINS PRIORITAIRES</a:t>
+            </a:r>
+            <a:endParaRPr lang="en-US" sz="1150" dirty="0"/>
+          </a:p>
+        </p:txBody>
+      </p:sp>
+      <p:sp>
+        <p:nvSpPr>
+          <p:cNvPr id="3" name="Text 1"/>
+          <p:cNvSpPr txBox="1"/>
+          <p:nvPr/>
+        </p:nvSpPr>
+        <p:spPr>
+          <a:xfrm>
+            <a:off x="594360" y="731520"/>
+            <a:ext cx="10881360" cy="731520"/>
+          </a:xfrm>
+          <a:prstGeom prst="rect">
+            <a:avLst/>
+          </a:prstGeom>
+          <a:noFill/>
+          <a:ln/>
+        </p:spPr>
+        <p:txBody>
+          <a:bodyPr wrap="square" lIns="0" tIns="0" rIns="0" bIns="0" rtlCol="0" anchor="ctr"/>
+          <a:lstStyle/>
+          <a:p>
+            <a:pPr algn="l" indent="0" marL="0">
+              <a:buNone/>
+            </a:pPr>
+            <a:r>
+              <a:rPr lang="en-US" sz="3000" b="1" dirty="0">
+                <a:solidFill>
+                  <a:srgbClr val="0E3546"/>
+                </a:solidFill>
+                <a:latin typeface="Cambria" pitchFamily="34" charset="0"/>
+                <a:ea typeface="Cambria" pitchFamily="34" charset="-122"/>
+                <a:cs typeface="Cambria" pitchFamily="34" charset="-120"/>
+              </a:rPr>
+              <a:t>Où engager les premiers essais</a:t>
+            </a:r>
+            <a:endParaRPr lang="en-US" sz="3000" dirty="0"/>
+          </a:p>
+        </p:txBody>
+      </p:sp>
+      <p:sp>
+        <p:nvSpPr>
+          <p:cNvPr id="4" name="Shape 2"/>
+          <p:cNvSpPr/>
+          <p:nvPr/>
+        </p:nvSpPr>
+        <p:spPr>
+          <a:xfrm>
+            <a:off x="594360" y="1783080"/>
+            <a:ext cx="3472586" cy="4069080"/>
+          </a:xfrm>
+          <a:prstGeom prst="roundRect">
+            <a:avLst>
+              <a:gd name="adj" fmla="val 2633"/>
+            </a:avLst>
+          </a:prstGeom>
+          <a:solidFill>
+            <a:srgbClr val="EDF3F5"/>
+          </a:solidFill>
+          <a:ln w="9525">
+            <a:solidFill>
+              <a:srgbClr val="D6E2E7"/>
+            </a:solidFill>
+            <a:prstDash val="solid"/>
+          </a:ln>
+        </p:spPr>
+      </p:sp>
+      <p:pic>
+        <p:nvPicPr>
+          <p:cNvPr id="5" name="Image 0" descr="preencoded.png">    </p:cNvPr>
+          <p:cNvPicPr>
+            <a:picLocks noChangeAspect="1"/>
+          </p:cNvPicPr>
+          <p:nvPr/>
+        </p:nvPicPr>
+        <p:blipFill>
+          <a:blip r:embed="rId1"/>
+          <a:stretch>
+            <a:fillRect/>
+          </a:stretch>
+        </p:blipFill>
+        <p:spPr>
+          <a:xfrm>
+            <a:off x="594360" y="1783080"/>
+            <a:ext cx="3472586" cy="1691640"/>
+          </a:xfrm>
+          <a:prstGeom prst="rect">
+            <a:avLst/>
+          </a:prstGeom>
+        </p:spPr>
+      </p:pic>
+      <p:sp>
+        <p:nvSpPr>
+          <p:cNvPr id="6" name="Text 3"/>
+          <p:cNvSpPr txBox="1"/>
+          <p:nvPr/>
+        </p:nvSpPr>
+        <p:spPr>
+          <a:xfrm>
+            <a:off x="795528" y="3639312"/>
+            <a:ext cx="3070250" cy="384048"/>
+          </a:xfrm>
+          <a:prstGeom prst="rect">
+            <a:avLst/>
+          </a:prstGeom>
+          <a:noFill/>
+          <a:ln/>
+        </p:spPr>
+        <p:txBody>
+          <a:bodyPr wrap="square" lIns="0" tIns="0" rIns="0" bIns="0" rtlCol="0" anchor="ctr"/>
+          <a:lstStyle/>
+          <a:p>
+            <a:pPr algn="l" indent="0" marL="0">
+              <a:buNone/>
+            </a:pPr>
+            <a:r>
+              <a:rPr lang="en-US" sz="1500" b="1" dirty="0">
+                <a:solidFill>
+                  <a:srgbClr val="1C5A73"/>
+                </a:solidFill>
+                <a:latin typeface="Cambria" pitchFamily="34" charset="0"/>
+                <a:ea typeface="Cambria" pitchFamily="34" charset="-122"/>
+                <a:cs typeface="Cambria" pitchFamily="34" charset="-120"/>
+              </a:rPr>
+              <a:t>Estuaire — Libreville</a:t>
+            </a:r>
+            <a:endParaRPr lang="en-US" sz="1500" dirty="0"/>
+          </a:p>
+        </p:txBody>
+      </p:sp>
+      <p:sp>
+        <p:nvSpPr>
+          <p:cNvPr id="7" name="Text 4"/>
+          <p:cNvSpPr txBox="1"/>
+          <p:nvPr/>
+        </p:nvSpPr>
+        <p:spPr>
+          <a:xfrm>
+            <a:off x="795528" y="4041648"/>
+            <a:ext cx="3070250" cy="329184"/>
+          </a:xfrm>
+          <a:prstGeom prst="rect">
+            <a:avLst/>
+          </a:prstGeom>
+          <a:noFill/>
+          <a:ln/>
+        </p:spPr>
+        <p:txBody>
+          <a:bodyPr wrap="square" lIns="0" tIns="0" rIns="0" bIns="0" rtlCol="0" anchor="ctr"/>
+          <a:lstStyle/>
+          <a:p>
+            <a:pPr algn="l" indent="0" marL="0">
+              <a:buNone/>
+            </a:pPr>
+            <a:r>
+              <a:rPr lang="en-US" sz="1250" b="1" dirty="0">
+                <a:solidFill>
+                  <a:srgbClr val="A3701A"/>
+                </a:solidFill>
+                <a:latin typeface="Calibri" pitchFamily="34" charset="0"/>
+                <a:ea typeface="Calibri" pitchFamily="34" charset="-122"/>
+                <a:cs typeface="Calibri" pitchFamily="34" charset="-120"/>
+              </a:rPr>
+              <a:t>≈ 900 000 consommateurs</a:t>
+            </a:r>
+            <a:endParaRPr lang="en-US" sz="1250" dirty="0"/>
+          </a:p>
+        </p:txBody>
+      </p:sp>
+      <p:sp>
+        <p:nvSpPr>
+          <p:cNvPr id="8" name="Text 5"/>
+          <p:cNvSpPr txBox="1"/>
+          <p:nvPr/>
+        </p:nvSpPr>
+        <p:spPr>
+          <a:xfrm>
+            <a:off x="795528" y="4407408"/>
+            <a:ext cx="3070250" cy="1280160"/>
+          </a:xfrm>
+          <a:prstGeom prst="rect">
+            <a:avLst/>
+          </a:prstGeom>
+          <a:noFill/>
+          <a:ln/>
+        </p:spPr>
+        <p:txBody>
+          <a:bodyPr wrap="square" lIns="0" tIns="0" rIns="0" bIns="0" rtlCol="0" anchor="t"/>
+          <a:lstStyle/>
+          <a:p>
+            <a:pPr algn="l" marL="342900" indent="-342900">
+              <a:lnSpc>
+                <a:spcPct val="116000"/>
+              </a:lnSpc>
+              <a:spcAft>
+                <a:spcPts val="700"/>
+              </a:spcAft>
+              <a:buSzPct val="100000"/>
+              <a:buChar char="•"/>
+            </a:pPr>
+            <a:r>
+              <a:rPr lang="en-US" sz="1150" dirty="0">
+                <a:solidFill>
+                  <a:srgbClr val="31424A"/>
+                </a:solidFill>
+                <a:latin typeface="Calibri" pitchFamily="34" charset="0"/>
+                <a:ea typeface="Calibri" pitchFamily="34" charset="-122"/>
+                <a:cs typeface="Calibri" pitchFamily="34" charset="-120"/>
+              </a:rPr>
+              <a:t>Ceinture maraîchère de Ntoum et Kango, qui approvisionne la capitale toute l'année.</a:t>
+            </a:r>
+            <a:endParaRPr lang="en-US" sz="1150" dirty="0"/>
+          </a:p>
+          <a:p>
+            <a:pPr algn="l" marL="342900" indent="-342900">
+              <a:lnSpc>
+                <a:spcPct val="116000"/>
+              </a:lnSpc>
+              <a:spcAft>
+                <a:spcPts val="700"/>
+              </a:spcAft>
+              <a:buSzPct val="100000"/>
+              <a:buChar char="•"/>
+            </a:pPr>
+            <a:r>
+              <a:rPr lang="en-US" sz="1150" dirty="0">
+                <a:solidFill>
+                  <a:srgbClr val="31424A"/>
+                </a:solidFill>
+                <a:latin typeface="Calibri" pitchFamily="34" charset="0"/>
+                <a:ea typeface="Calibri" pitchFamily="34" charset="-122"/>
+                <a:cs typeface="Calibri" pitchFamily="34" charset="-120"/>
+              </a:rPr>
+              <a:t>Sols sableux littoraux, arrosage manuel ou goutte-à-goutte : l'eau y coûte cher en main-d'œuvre.</a:t>
+            </a:r>
+            <a:endParaRPr lang="en-US" sz="1150" dirty="0"/>
+          </a:p>
+          <a:p>
+            <a:pPr algn="l" marL="342900" indent="-342900">
+              <a:lnSpc>
+                <a:spcPct val="116000"/>
+              </a:lnSpc>
+              <a:spcAft>
+                <a:spcPts val="700"/>
+              </a:spcAft>
+              <a:buSzPct val="100000"/>
+              <a:buChar char="•"/>
+            </a:pPr>
+            <a:r>
+              <a:rPr lang="en-US" sz="1150" dirty="0">
+                <a:solidFill>
+                  <a:srgbClr val="31424A"/>
+                </a:solidFill>
+                <a:latin typeface="Calibri" pitchFamily="34" charset="0"/>
+                <a:ea typeface="Calibri" pitchFamily="34" charset="-122"/>
+                <a:cs typeface="Calibri" pitchFamily="34" charset="-120"/>
+              </a:rPr>
+              <a:t>Cultures à cycle court et à forte valeur, où un essai se conclut en une saison.</a:t>
+            </a:r>
+            <a:endParaRPr lang="en-US" sz="1150" dirty="0"/>
+          </a:p>
+        </p:txBody>
+      </p:sp>
+      <p:sp>
+        <p:nvSpPr>
+          <p:cNvPr id="9" name="Shape 6"/>
+          <p:cNvSpPr/>
+          <p:nvPr/>
+        </p:nvSpPr>
+        <p:spPr>
+          <a:xfrm>
+            <a:off x="4359554" y="1783080"/>
+            <a:ext cx="3472586" cy="4069080"/>
+          </a:xfrm>
+          <a:prstGeom prst="roundRect">
+            <a:avLst>
+              <a:gd name="adj" fmla="val 2633"/>
+            </a:avLst>
+          </a:prstGeom>
+          <a:solidFill>
+            <a:srgbClr val="EDF3F5"/>
+          </a:solidFill>
+          <a:ln w="9525">
+            <a:solidFill>
+              <a:srgbClr val="D6E2E7"/>
+            </a:solidFill>
+            <a:prstDash val="solid"/>
+          </a:ln>
+        </p:spPr>
+      </p:sp>
+      <p:pic>
+        <p:nvPicPr>
+          <p:cNvPr id="10" name="Image 1" descr="preencoded.png">    </p:cNvPr>
+          <p:cNvPicPr>
+            <a:picLocks noChangeAspect="1"/>
+          </p:cNvPicPr>
+          <p:nvPr/>
+        </p:nvPicPr>
+        <p:blipFill>
+          <a:blip r:embed="rId2"/>
+          <a:stretch>
+            <a:fillRect/>
+          </a:stretch>
+        </p:blipFill>
+        <p:spPr>
+          <a:xfrm>
+            <a:off x="4359554" y="1783080"/>
+            <a:ext cx="3472586" cy="1691640"/>
+          </a:xfrm>
+          <a:prstGeom prst="rect">
+            <a:avLst/>
+          </a:prstGeom>
+        </p:spPr>
+      </p:pic>
+      <p:sp>
+        <p:nvSpPr>
+          <p:cNvPr id="11" name="Text 7"/>
+          <p:cNvSpPr txBox="1"/>
+          <p:nvPr/>
+        </p:nvSpPr>
+        <p:spPr>
+          <a:xfrm>
+            <a:off x="4560722" y="3639312"/>
+            <a:ext cx="3070250" cy="384048"/>
+          </a:xfrm>
+          <a:prstGeom prst="rect">
+            <a:avLst/>
+          </a:prstGeom>
+          <a:noFill/>
+          <a:ln/>
+        </p:spPr>
+        <p:txBody>
+          <a:bodyPr wrap="square" lIns="0" tIns="0" rIns="0" bIns="0" rtlCol="0" anchor="ctr"/>
+          <a:lstStyle/>
+          <a:p>
+            <a:pPr algn="l" indent="0" marL="0">
+              <a:buNone/>
+            </a:pPr>
+            <a:r>
+              <a:rPr lang="en-US" sz="1500" b="1" dirty="0">
+                <a:solidFill>
+                  <a:srgbClr val="1C5A73"/>
+                </a:solidFill>
+                <a:latin typeface="Cambria" pitchFamily="34" charset="0"/>
+                <a:ea typeface="Cambria" pitchFamily="34" charset="-122"/>
+                <a:cs typeface="Cambria" pitchFamily="34" charset="-120"/>
+              </a:rPr>
+              <a:t>Woleu-Ntem — Oyem</a:t>
+            </a:r>
+            <a:endParaRPr lang="en-US" sz="1500" dirty="0"/>
+          </a:p>
+        </p:txBody>
+      </p:sp>
+      <p:sp>
+        <p:nvSpPr>
+          <p:cNvPr id="12" name="Text 8"/>
+          <p:cNvSpPr txBox="1"/>
+          <p:nvPr/>
+        </p:nvSpPr>
+        <p:spPr>
+          <a:xfrm>
+            <a:off x="4560722" y="4041648"/>
+            <a:ext cx="3070250" cy="329184"/>
+          </a:xfrm>
+          <a:prstGeom prst="rect">
+            <a:avLst/>
+          </a:prstGeom>
+          <a:noFill/>
+          <a:ln/>
+        </p:spPr>
+        <p:txBody>
+          <a:bodyPr wrap="square" lIns="0" tIns="0" rIns="0" bIns="0" rtlCol="0" anchor="ctr"/>
+          <a:lstStyle/>
+          <a:p>
+            <a:pPr algn="l" indent="0" marL="0">
+              <a:buNone/>
+            </a:pPr>
+            <a:r>
+              <a:rPr lang="en-US" sz="1250" b="1" dirty="0">
+                <a:solidFill>
+                  <a:srgbClr val="A3701A"/>
+                </a:solidFill>
+                <a:latin typeface="Calibri" pitchFamily="34" charset="0"/>
+                <a:ea typeface="Calibri" pitchFamily="34" charset="-122"/>
+                <a:cs typeface="Calibri" pitchFamily="34" charset="-120"/>
+              </a:rPr>
+              <a:t>Premier bassin vivrier</a:t>
+            </a:r>
+            <a:endParaRPr lang="en-US" sz="1250" dirty="0"/>
+          </a:p>
+        </p:txBody>
+      </p:sp>
+      <p:sp>
+        <p:nvSpPr>
+          <p:cNvPr id="13" name="Text 9"/>
+          <p:cNvSpPr txBox="1"/>
+          <p:nvPr/>
+        </p:nvSpPr>
+        <p:spPr>
+          <a:xfrm>
+            <a:off x="4560722" y="4407408"/>
+            <a:ext cx="3070250" cy="1280160"/>
+          </a:xfrm>
+          <a:prstGeom prst="rect">
+            <a:avLst/>
+          </a:prstGeom>
+          <a:noFill/>
+          <a:ln/>
+        </p:spPr>
+        <p:txBody>
+          <a:bodyPr wrap="square" lIns="0" tIns="0" rIns="0" bIns="0" rtlCol="0" anchor="t"/>
+          <a:lstStyle/>
+          <a:p>
+            <a:pPr algn="l" marL="342900" indent="-342900">
+              <a:lnSpc>
+                <a:spcPct val="116000"/>
+              </a:lnSpc>
+              <a:spcAft>
+                <a:spcPts val="700"/>
+              </a:spcAft>
+              <a:buSzPct val="100000"/>
+              <a:buChar char="•"/>
+            </a:pPr>
+            <a:r>
+              <a:rPr lang="en-US" sz="1150" dirty="0">
+                <a:solidFill>
+                  <a:srgbClr val="31424A"/>
+                </a:solidFill>
+                <a:latin typeface="Calibri" pitchFamily="34" charset="0"/>
+                <a:ea typeface="Calibri" pitchFamily="34" charset="-122"/>
+                <a:cs typeface="Calibri" pitchFamily="34" charset="-120"/>
+              </a:rPr>
+              <a:t>Manioc, banane plantain et arachide sur de petites parcelles familiales, presque toutes pluviales.</a:t>
+            </a:r>
+            <a:endParaRPr lang="en-US" sz="1150" dirty="0"/>
+          </a:p>
+          <a:p>
+            <a:pPr algn="l" marL="342900" indent="-342900">
+              <a:lnSpc>
+                <a:spcPct val="116000"/>
+              </a:lnSpc>
+              <a:spcAft>
+                <a:spcPts val="700"/>
+              </a:spcAft>
+              <a:buSzPct val="100000"/>
+              <a:buChar char="•"/>
+            </a:pPr>
+            <a:r>
+              <a:rPr lang="en-US" sz="1150" dirty="0">
+                <a:solidFill>
+                  <a:srgbClr val="31424A"/>
+                </a:solidFill>
+                <a:latin typeface="Calibri" pitchFamily="34" charset="0"/>
+                <a:ea typeface="Calibri" pitchFamily="34" charset="-122"/>
+                <a:cs typeface="Calibri" pitchFamily="34" charset="-120"/>
+              </a:rPr>
+              <a:t>Cacaoyers et caféiers en replantation, cultures pérennes où l'effet de 3 à 4 ans est décisif à la reprise.</a:t>
+            </a:r>
+            <a:endParaRPr lang="en-US" sz="1150" dirty="0"/>
+          </a:p>
+          <a:p>
+            <a:pPr algn="l" marL="342900" indent="-342900">
+              <a:lnSpc>
+                <a:spcPct val="116000"/>
+              </a:lnSpc>
+              <a:spcAft>
+                <a:spcPts val="700"/>
+              </a:spcAft>
+              <a:buSzPct val="100000"/>
+              <a:buChar char="•"/>
+            </a:pPr>
+            <a:r>
+              <a:rPr lang="en-US" sz="1150" dirty="0">
+                <a:solidFill>
+                  <a:srgbClr val="31424A"/>
+                </a:solidFill>
+                <a:latin typeface="Calibri" pitchFamily="34" charset="0"/>
+                <a:ea typeface="Calibri" pitchFamily="34" charset="-122"/>
+                <a:cs typeface="Calibri" pitchFamily="34" charset="-120"/>
+              </a:rPr>
+              <a:t>Coopératives déjà structurées : la décision d'achat peut être groupée.</a:t>
+            </a:r>
+            <a:endParaRPr lang="en-US" sz="1150" dirty="0"/>
+          </a:p>
+        </p:txBody>
+      </p:sp>
+      <p:sp>
+        <p:nvSpPr>
+          <p:cNvPr id="14" name="Shape 10"/>
+          <p:cNvSpPr/>
+          <p:nvPr/>
+        </p:nvSpPr>
+        <p:spPr>
+          <a:xfrm>
+            <a:off x="8124749" y="1783080"/>
+            <a:ext cx="3472586" cy="4069080"/>
+          </a:xfrm>
+          <a:prstGeom prst="roundRect">
+            <a:avLst>
+              <a:gd name="adj" fmla="val 2633"/>
+            </a:avLst>
+          </a:prstGeom>
+          <a:solidFill>
+            <a:srgbClr val="EDF3F5"/>
+          </a:solidFill>
+          <a:ln w="9525">
+            <a:solidFill>
+              <a:srgbClr val="D6E2E7"/>
+            </a:solidFill>
+            <a:prstDash val="solid"/>
+          </a:ln>
+        </p:spPr>
+      </p:sp>
+      <p:pic>
+        <p:nvPicPr>
+          <p:cNvPr id="15" name="Image 2" descr="preencoded.png">    </p:cNvPr>
+          <p:cNvPicPr>
+            <a:picLocks noChangeAspect="1"/>
+          </p:cNvPicPr>
+          <p:nvPr/>
+        </p:nvPicPr>
+        <p:blipFill>
+          <a:blip r:embed="rId3"/>
+          <a:stretch>
+            <a:fillRect/>
+          </a:stretch>
+        </p:blipFill>
+        <p:spPr>
+          <a:xfrm>
+            <a:off x="8124749" y="1783080"/>
+            <a:ext cx="3472586" cy="1691640"/>
+          </a:xfrm>
+          <a:prstGeom prst="rect">
+            <a:avLst/>
+          </a:prstGeom>
+        </p:spPr>
+      </p:pic>
+      <p:sp>
+        <p:nvSpPr>
+          <p:cNvPr id="16" name="Text 11"/>
+          <p:cNvSpPr txBox="1"/>
+          <p:nvPr/>
+        </p:nvSpPr>
+        <p:spPr>
+          <a:xfrm>
+            <a:off x="8325917" y="3639312"/>
+            <a:ext cx="3070250" cy="384048"/>
+          </a:xfrm>
+          <a:prstGeom prst="rect">
+            <a:avLst/>
+          </a:prstGeom>
+          <a:noFill/>
+          <a:ln/>
+        </p:spPr>
+        <p:txBody>
+          <a:bodyPr wrap="square" lIns="0" tIns="0" rIns="0" bIns="0" rtlCol="0" anchor="ctr"/>
+          <a:lstStyle/>
+          <a:p>
+            <a:pPr algn="l" indent="0" marL="0">
+              <a:buNone/>
+            </a:pPr>
+            <a:r>
+              <a:rPr lang="en-US" sz="1500" b="1" dirty="0">
+                <a:solidFill>
+                  <a:srgbClr val="1C5A73"/>
+                </a:solidFill>
+                <a:latin typeface="Cambria" pitchFamily="34" charset="0"/>
+                <a:ea typeface="Cambria" pitchFamily="34" charset="-122"/>
+                <a:cs typeface="Cambria" pitchFamily="34" charset="-120"/>
+              </a:rPr>
+              <a:t>Ngounié — Mouila</a:t>
+            </a:r>
+            <a:endParaRPr lang="en-US" sz="1500" dirty="0"/>
+          </a:p>
+        </p:txBody>
+      </p:sp>
+      <p:sp>
+        <p:nvSpPr>
+          <p:cNvPr id="17" name="Text 12"/>
+          <p:cNvSpPr txBox="1"/>
+          <p:nvPr/>
+        </p:nvSpPr>
+        <p:spPr>
+          <a:xfrm>
+            <a:off x="8325917" y="4041648"/>
+            <a:ext cx="3070250" cy="329184"/>
+          </a:xfrm>
+          <a:prstGeom prst="rect">
+            <a:avLst/>
+          </a:prstGeom>
+          <a:noFill/>
+          <a:ln/>
+        </p:spPr>
+        <p:txBody>
+          <a:bodyPr wrap="square" lIns="0" tIns="0" rIns="0" bIns="0" rtlCol="0" anchor="ctr"/>
+          <a:lstStyle/>
+          <a:p>
+            <a:pPr algn="l" indent="0" marL="0">
+              <a:buNone/>
+            </a:pPr>
+            <a:r>
+              <a:rPr lang="en-US" sz="1250" b="1" dirty="0">
+                <a:solidFill>
+                  <a:srgbClr val="A3701A"/>
+                </a:solidFill>
+                <a:latin typeface="Calibri" pitchFamily="34" charset="0"/>
+                <a:ea typeface="Calibri" pitchFamily="34" charset="-122"/>
+                <a:cs typeface="Calibri" pitchFamily="34" charset="-120"/>
+              </a:rPr>
+              <a:t>≈ 40 000 ha de palmier</a:t>
+            </a:r>
+            <a:endParaRPr lang="en-US" sz="1250" dirty="0"/>
+          </a:p>
+        </p:txBody>
+      </p:sp>
+      <p:sp>
+        <p:nvSpPr>
+          <p:cNvPr id="18" name="Text 13"/>
+          <p:cNvSpPr txBox="1"/>
+          <p:nvPr/>
+        </p:nvSpPr>
+        <p:spPr>
+          <a:xfrm>
+            <a:off x="8325917" y="4407408"/>
+            <a:ext cx="3070250" cy="1280160"/>
+          </a:xfrm>
+          <a:prstGeom prst="rect">
+            <a:avLst/>
+          </a:prstGeom>
+          <a:noFill/>
+          <a:ln/>
+        </p:spPr>
+        <p:txBody>
+          <a:bodyPr wrap="square" lIns="0" tIns="0" rIns="0" bIns="0" rtlCol="0" anchor="t"/>
+          <a:lstStyle/>
+          <a:p>
+            <a:pPr algn="l" marL="342900" indent="-342900">
+              <a:lnSpc>
+                <a:spcPct val="116000"/>
+              </a:lnSpc>
+              <a:spcAft>
+                <a:spcPts val="700"/>
+              </a:spcAft>
+              <a:buSzPct val="100000"/>
+              <a:buChar char="•"/>
+            </a:pPr>
+            <a:r>
+              <a:rPr lang="en-US" sz="1150" dirty="0">
+                <a:solidFill>
+                  <a:srgbClr val="31424A"/>
+                </a:solidFill>
+                <a:latin typeface="Calibri" pitchFamily="34" charset="0"/>
+                <a:ea typeface="Calibri" pitchFamily="34" charset="-122"/>
+                <a:cs typeface="Calibri" pitchFamily="34" charset="-120"/>
+              </a:rPr>
+              <a:t>Plantations industrielles de palmier à huile, suivies agronomiquement bloc par bloc.</a:t>
+            </a:r>
+            <a:endParaRPr lang="en-US" sz="1150" dirty="0"/>
+          </a:p>
+          <a:p>
+            <a:pPr algn="l" marL="342900" indent="-342900">
+              <a:lnSpc>
+                <a:spcPct val="116000"/>
+              </a:lnSpc>
+              <a:spcAft>
+                <a:spcPts val="700"/>
+              </a:spcAft>
+              <a:buSzPct val="100000"/>
+              <a:buChar char="•"/>
+            </a:pPr>
+            <a:r>
+              <a:rPr lang="en-US" sz="1150" dirty="0">
+                <a:solidFill>
+                  <a:srgbClr val="31424A"/>
+                </a:solidFill>
+                <a:latin typeface="Calibri" pitchFamily="34" charset="0"/>
+                <a:ea typeface="Calibri" pitchFamily="34" charset="-122"/>
+                <a:cs typeface="Calibri" pitchFamily="34" charset="-120"/>
+              </a:rPr>
+              <a:t>Forte mortalité des jeunes plants en saison sèche : l'hydro-rétenteur se juge au taux de reprise.</a:t>
+            </a:r>
+            <a:endParaRPr lang="en-US" sz="1150" dirty="0"/>
+          </a:p>
+          <a:p>
+            <a:pPr algn="l" marL="342900" indent="-342900">
+              <a:lnSpc>
+                <a:spcPct val="116000"/>
+              </a:lnSpc>
+              <a:spcAft>
+                <a:spcPts val="700"/>
+              </a:spcAft>
+              <a:buSzPct val="100000"/>
+              <a:buChar char="•"/>
+            </a:pPr>
+            <a:r>
+              <a:rPr lang="en-US" sz="1150" dirty="0">
+                <a:solidFill>
+                  <a:srgbClr val="31424A"/>
+                </a:solidFill>
+                <a:latin typeface="Calibri" pitchFamily="34" charset="0"/>
+                <a:ea typeface="Calibri" pitchFamily="34" charset="-122"/>
+                <a:cs typeface="Calibri" pitchFamily="34" charset="-120"/>
+              </a:rPr>
+              <a:t>Volumes contractualisables et protocole d'essai facile à tenir sur un bloc homogène.</a:t>
+            </a:r>
+            <a:endParaRPr lang="en-US" sz="1150" dirty="0"/>
+          </a:p>
+        </p:txBody>
+      </p:sp>
+      <p:sp>
+        <p:nvSpPr>
+          <p:cNvPr id="19" name="Text 14"/>
+          <p:cNvSpPr txBox="1"/>
+          <p:nvPr/>
+        </p:nvSpPr>
+        <p:spPr>
+          <a:xfrm>
+            <a:off x="502920" y="6382512"/>
+            <a:ext cx="8229600" cy="274320"/>
+          </a:xfrm>
+          <a:prstGeom prst="rect">
+            <a:avLst/>
+          </a:prstGeom>
+          <a:noFill/>
+          <a:ln/>
+        </p:spPr>
+        <p:txBody>
+          <a:bodyPr wrap="square" lIns="0" tIns="0" rIns="0" bIns="0" rtlCol="0" anchor="ctr"/>
+          <a:lstStyle/>
+          <a:p>
+            <a:pPr algn="l" indent="0" marL="0">
+              <a:buNone/>
+            </a:pPr>
+            <a:r>
+              <a:rPr lang="en-US" sz="950" dirty="0">
+                <a:solidFill>
+                  <a:srgbClr val="6C8089">
+                    <a:alpha val="80000"/>
+                  </a:srgbClr>
+                </a:solidFill>
+                <a:latin typeface="Calibri" pitchFamily="34" charset="0"/>
+                <a:ea typeface="Calibri" pitchFamily="34" charset="-122"/>
+                <a:cs typeface="Calibri" pitchFamily="34" charset="-120"/>
+              </a:rPr>
+              <a:t>Green Solutions · Dossier marché Gabon</a:t>
+            </a:r>
+            <a:endParaRPr lang="en-US" sz="950" dirty="0"/>
+          </a:p>
+        </p:txBody>
+      </p:sp>
+      <p:sp>
+        <p:nvSpPr>
+          <p:cNvPr id="20" name="Text 15"/>
+          <p:cNvSpPr txBox="1"/>
+          <p:nvPr/>
+        </p:nvSpPr>
+        <p:spPr>
+          <a:xfrm>
+            <a:off x="11140135" y="6382512"/>
+            <a:ext cx="548640" cy="274320"/>
+          </a:xfrm>
+          <a:prstGeom prst="rect">
+            <a:avLst/>
+          </a:prstGeom>
+          <a:noFill/>
+          <a:ln/>
+        </p:spPr>
+        <p:txBody>
+          <a:bodyPr wrap="square" lIns="0" tIns="0" rIns="0" bIns="0" rtlCol="0" anchor="ctr"/>
+          <a:lstStyle/>
+          <a:p>
+            <a:pPr algn="r" indent="0" marL="0">
+              <a:buNone/>
+            </a:pPr>
+            <a:r>
+              <a:rPr lang="en-US" sz="950" dirty="0">
+                <a:solidFill>
+                  <a:srgbClr val="6C8089">
+                    <a:alpha val="80000"/>
+                  </a:srgbClr>
+                </a:solidFill>
+                <a:latin typeface="Calibri" pitchFamily="34" charset="0"/>
+                <a:ea typeface="Calibri" pitchFamily="34" charset="-122"/>
+                <a:cs typeface="Calibri" pitchFamily="34" charset="-120"/>
+              </a:rPr>
+              <a:t>12</a:t>
+            </a:r>
+            <a:endParaRPr lang="en-US" sz="950" dirty="0"/>
+          </a:p>
+        </p:txBody>
+      </p:sp>
+    </p:spTree>
+  </p:cSld>
+  <p:clrMapOvr>
+    <a:masterClrMapping/>
+  </p:clrMapOvr>
+</p:sld>
+</file>
+
+<file path=ppt/slides/slide14.xml><?xml version="1.0" encoding="utf-8"?>
+<p:sld xmlns:a="http://schemas.openxmlformats.org/drawingml/2006/main" xmlns:r="http://schemas.openxmlformats.org/officeDocument/2006/relationships" xmlns:p="http://schemas.openxmlformats.org/presentationml/2006/main">
+  <p:cSld name="Slide 14">
+    <p:bg>
+      <p:bgPr>
+        <a:solidFill>
+          <a:srgbClr val="FAFBFB"/>
+        </a:solidFill>
+      </p:bgPr>
+    </p:bg>
+    <p:spTree>
+      <p:nvGrpSpPr>
+        <p:cNvPr id="1" name=""/>
+        <p:cNvGrpSpPr/>
+        <p:nvPr/>
+      </p:nvGrpSpPr>
+      <p:grpSpPr>
+        <a:xfrm>
+          <a:off x="0" y="0"/>
+          <a:ext cx="0" cy="0"/>
+          <a:chOff x="0" y="0"/>
+          <a:chExt cx="0" cy="0"/>
+        </a:xfrm>
+      </p:grpSpPr>
+      <p:sp>
+        <p:nvSpPr>
+          <p:cNvPr id="2" name="Text 0"/>
+          <p:cNvSpPr txBox="1"/>
+          <p:nvPr/>
+        </p:nvSpPr>
+        <p:spPr>
+          <a:xfrm>
+            <a:off x="594360" y="411480"/>
+            <a:ext cx="10515600" cy="274320"/>
+          </a:xfrm>
+          <a:prstGeom prst="rect">
+            <a:avLst/>
+          </a:prstGeom>
+          <a:noFill/>
+          <a:ln/>
+        </p:spPr>
+        <p:txBody>
+          <a:bodyPr wrap="square" lIns="0" tIns="0" rIns="0" bIns="0" rtlCol="0" anchor="ctr"/>
+          <a:lstStyle/>
+          <a:p>
+            <a:pPr algn="l" indent="0" marL="0">
+              <a:buNone/>
+            </a:pPr>
+            <a:r>
+              <a:rPr lang="en-US" sz="1150" b="1" spc="200" kern="0" dirty="0">
+                <a:solidFill>
+                  <a:srgbClr val="E0A33E"/>
+                </a:solidFill>
+                <a:latin typeface="Calibri" pitchFamily="34" charset="0"/>
+                <a:ea typeface="Calibri" pitchFamily="34" charset="-122"/>
+                <a:cs typeface="Calibri" pitchFamily="34" charset="-120"/>
+              </a:rPr>
+              <a:t>COMMENT NOUS PROCÉDONS</a:t>
+            </a:r>
+            <a:endParaRPr lang="en-US" sz="1150" dirty="0"/>
+          </a:p>
+        </p:txBody>
+      </p:sp>
+      <p:sp>
+        <p:nvSpPr>
+          <p:cNvPr id="3" name="Text 1"/>
+          <p:cNvSpPr txBox="1"/>
+          <p:nvPr/>
+        </p:nvSpPr>
+        <p:spPr>
+          <a:xfrm>
+            <a:off x="594360" y="731520"/>
+            <a:ext cx="10881360" cy="731520"/>
+          </a:xfrm>
+          <a:prstGeom prst="rect">
+            <a:avLst/>
+          </a:prstGeom>
+          <a:noFill/>
+          <a:ln/>
+        </p:spPr>
+        <p:txBody>
+          <a:bodyPr wrap="square" lIns="0" tIns="0" rIns="0" bIns="0" rtlCol="0" anchor="ctr"/>
+          <a:lstStyle/>
+          <a:p>
+            <a:pPr algn="l" indent="0" marL="0">
+              <a:buNone/>
+            </a:pPr>
+            <a:r>
+              <a:rPr lang="en-US" sz="3000" b="1" dirty="0">
+                <a:solidFill>
+                  <a:srgbClr val="0E3546"/>
+                </a:solidFill>
+                <a:latin typeface="Cambria" pitchFamily="34" charset="0"/>
+                <a:ea typeface="Cambria" pitchFamily="34" charset="-122"/>
+                <a:cs typeface="Cambria" pitchFamily="34" charset="-120"/>
+              </a:rPr>
+              <a:t>Un déploiement par étapes, mesuré à chaque palier</a:t>
+            </a:r>
+            <a:endParaRPr lang="en-US" sz="3000" dirty="0"/>
+          </a:p>
+        </p:txBody>
+      </p:sp>
+      <p:sp>
+        <p:nvSpPr>
+          <p:cNvPr id="4" name="Shape 2"/>
+          <p:cNvSpPr/>
+          <p:nvPr/>
+        </p:nvSpPr>
+        <p:spPr>
+          <a:xfrm>
+            <a:off x="594360" y="1874520"/>
+            <a:ext cx="2545004" cy="2834640"/>
+          </a:xfrm>
+          <a:prstGeom prst="roundRect">
+            <a:avLst>
+              <a:gd name="adj" fmla="val 3593"/>
+            </a:avLst>
+          </a:prstGeom>
+          <a:solidFill>
+            <a:srgbClr val="EDF3F5"/>
+          </a:solidFill>
+          <a:ln w="9525">
+            <a:solidFill>
+              <a:srgbClr val="D6E2E7"/>
+            </a:solidFill>
+            <a:prstDash val="solid"/>
+          </a:ln>
+        </p:spPr>
+      </p:sp>
+      <p:sp>
+        <p:nvSpPr>
+          <p:cNvPr id="5" name="Shape 3"/>
+          <p:cNvSpPr/>
+          <p:nvPr/>
+        </p:nvSpPr>
+        <p:spPr>
+          <a:xfrm>
+            <a:off x="822960" y="2103120"/>
+            <a:ext cx="566928" cy="566928"/>
+          </a:xfrm>
+          <a:prstGeom prst="ellipse">
+            <a:avLst/>
+          </a:prstGeom>
+          <a:solidFill>
+            <a:srgbClr val="1C5A73"/>
+          </a:solidFill>
+          <a:ln/>
+        </p:spPr>
+      </p:sp>
+      <p:sp>
+        <p:nvSpPr>
+          <p:cNvPr id="6" name="Text 4"/>
+          <p:cNvSpPr txBox="1"/>
+          <p:nvPr/>
+        </p:nvSpPr>
+        <p:spPr>
+          <a:xfrm>
+            <a:off x="822960" y="2103120"/>
+            <a:ext cx="566928" cy="566928"/>
+          </a:xfrm>
+          <a:prstGeom prst="rect">
+            <a:avLst/>
+          </a:prstGeom>
+          <a:noFill/>
+          <a:ln/>
+        </p:spPr>
+        <p:txBody>
+          <a:bodyPr wrap="square" lIns="0" tIns="0" rIns="0" bIns="0" rtlCol="0" anchor="ctr"/>
+          <a:lstStyle/>
+          <a:p>
+            <a:pPr algn="ctr" indent="0" marL="0">
+              <a:buNone/>
+            </a:pPr>
+            <a:r>
+              <a:rPr lang="en-US" sz="1600" b="1" dirty="0">
+                <a:solidFill>
+                  <a:srgbClr val="FFFFFF"/>
+                </a:solidFill>
+                <a:latin typeface="Cambria" pitchFamily="34" charset="0"/>
+                <a:ea typeface="Cambria" pitchFamily="34" charset="-122"/>
+                <a:cs typeface="Cambria" pitchFamily="34" charset="-120"/>
+              </a:rPr>
+              <a:t>1</a:t>
+            </a:r>
+            <a:endParaRPr lang="en-US" sz="1600" dirty="0"/>
+          </a:p>
+        </p:txBody>
+      </p:sp>
+      <p:sp>
+        <p:nvSpPr>
+          <p:cNvPr id="7" name="Text 5"/>
+          <p:cNvSpPr txBox="1"/>
+          <p:nvPr/>
+        </p:nvSpPr>
+        <p:spPr>
+          <a:xfrm>
+            <a:off x="822960" y="2788920"/>
+            <a:ext cx="2087804" cy="457200"/>
+          </a:xfrm>
+          <a:prstGeom prst="rect">
+            <a:avLst/>
+          </a:prstGeom>
+          <a:noFill/>
+          <a:ln/>
+        </p:spPr>
+        <p:txBody>
+          <a:bodyPr wrap="square" lIns="0" tIns="0" rIns="0" bIns="0" rtlCol="0" anchor="ctr"/>
+          <a:lstStyle/>
+          <a:p>
+            <a:pPr algn="l" indent="0" marL="0">
+              <a:buNone/>
+            </a:pPr>
+            <a:r>
+              <a:rPr lang="en-US" sz="1400" b="1" dirty="0">
+                <a:solidFill>
+                  <a:srgbClr val="1C5A73"/>
+                </a:solidFill>
+                <a:latin typeface="Cambria" pitchFamily="34" charset="0"/>
+                <a:ea typeface="Cambria" pitchFamily="34" charset="-122"/>
+                <a:cs typeface="Cambria" pitchFamily="34" charset="-120"/>
+              </a:rPr>
+              <a:t>Diagnostic</a:t>
+            </a:r>
+            <a:endParaRPr lang="en-US" sz="1400" dirty="0"/>
+          </a:p>
+        </p:txBody>
+      </p:sp>
+      <p:sp>
+        <p:nvSpPr>
+          <p:cNvPr id="8" name="Text 6"/>
+          <p:cNvSpPr txBox="1"/>
+          <p:nvPr/>
+        </p:nvSpPr>
+        <p:spPr>
+          <a:xfrm>
+            <a:off x="822960" y="3291840"/>
+            <a:ext cx="2087804" cy="1234440"/>
+          </a:xfrm>
+          <a:prstGeom prst="rect">
+            <a:avLst/>
+          </a:prstGeom>
+          <a:noFill/>
+          <a:ln/>
+        </p:spPr>
+        <p:txBody>
+          <a:bodyPr wrap="square" lIns="0" tIns="0" rIns="0" bIns="0" rtlCol="0" anchor="t"/>
+          <a:lstStyle/>
+          <a:p>
+            <a:pPr algn="l" indent="0" marL="0">
+              <a:lnSpc>
+                <a:spcPct val="120000"/>
+              </a:lnSpc>
+              <a:buNone/>
+            </a:pPr>
+            <a:r>
+              <a:rPr lang="en-US" sz="1200" dirty="0">
+                <a:solidFill>
+                  <a:srgbClr val="31424A"/>
+                </a:solidFill>
+                <a:latin typeface="Calibri" pitchFamily="34" charset="0"/>
+                <a:ea typeface="Calibri" pitchFamily="34" charset="-122"/>
+                <a:cs typeface="Calibri" pitchFamily="34" charset="-120"/>
+              </a:rPr>
+              <a:t>Analyse du sol, du mode d'arrosage et de la culture. Aucun engagement à ce stade.</a:t>
+            </a:r>
+            <a:endParaRPr lang="en-US" sz="1200" dirty="0"/>
+          </a:p>
+        </p:txBody>
+      </p:sp>
+      <p:sp>
+        <p:nvSpPr>
+          <p:cNvPr id="9" name="Shape 7"/>
+          <p:cNvSpPr/>
+          <p:nvPr/>
+        </p:nvSpPr>
+        <p:spPr>
+          <a:xfrm>
+            <a:off x="3413684" y="1874520"/>
+            <a:ext cx="2545004" cy="2834640"/>
+          </a:xfrm>
+          <a:prstGeom prst="roundRect">
+            <a:avLst>
+              <a:gd name="adj" fmla="val 3593"/>
+            </a:avLst>
+          </a:prstGeom>
+          <a:solidFill>
+            <a:srgbClr val="EDF3F5"/>
+          </a:solidFill>
+          <a:ln w="9525">
+            <a:solidFill>
+              <a:srgbClr val="D6E2E7"/>
+            </a:solidFill>
+            <a:prstDash val="solid"/>
+          </a:ln>
+        </p:spPr>
+      </p:sp>
+      <p:sp>
+        <p:nvSpPr>
+          <p:cNvPr id="10" name="Shape 8"/>
+          <p:cNvSpPr/>
+          <p:nvPr/>
+        </p:nvSpPr>
+        <p:spPr>
+          <a:xfrm>
+            <a:off x="3642284" y="2103120"/>
+            <a:ext cx="566928" cy="566928"/>
+          </a:xfrm>
+          <a:prstGeom prst="ellipse">
+            <a:avLst/>
+          </a:prstGeom>
+          <a:solidFill>
+            <a:srgbClr val="1C5A73"/>
+          </a:solidFill>
+          <a:ln/>
+        </p:spPr>
+      </p:sp>
+      <p:sp>
+        <p:nvSpPr>
+          <p:cNvPr id="11" name="Text 9"/>
+          <p:cNvSpPr txBox="1"/>
+          <p:nvPr/>
+        </p:nvSpPr>
+        <p:spPr>
+          <a:xfrm>
+            <a:off x="3642284" y="2103120"/>
+            <a:ext cx="566928" cy="566928"/>
+          </a:xfrm>
+          <a:prstGeom prst="rect">
+            <a:avLst/>
+          </a:prstGeom>
+          <a:noFill/>
+          <a:ln/>
+        </p:spPr>
+        <p:txBody>
+          <a:bodyPr wrap="square" lIns="0" tIns="0" rIns="0" bIns="0" rtlCol="0" anchor="ctr"/>
+          <a:lstStyle/>
+          <a:p>
+            <a:pPr algn="ctr" indent="0" marL="0">
+              <a:buNone/>
+            </a:pPr>
+            <a:r>
+              <a:rPr lang="en-US" sz="1600" b="1" dirty="0">
+                <a:solidFill>
+                  <a:srgbClr val="FFFFFF"/>
+                </a:solidFill>
+                <a:latin typeface="Cambria" pitchFamily="34" charset="0"/>
+                <a:ea typeface="Cambria" pitchFamily="34" charset="-122"/>
+                <a:cs typeface="Cambria" pitchFamily="34" charset="-120"/>
+              </a:rPr>
+              <a:t>2</a:t>
+            </a:r>
+            <a:endParaRPr lang="en-US" sz="1600" dirty="0"/>
+          </a:p>
+        </p:txBody>
+      </p:sp>
+      <p:sp>
+        <p:nvSpPr>
+          <p:cNvPr id="12" name="Text 10"/>
+          <p:cNvSpPr txBox="1"/>
+          <p:nvPr/>
+        </p:nvSpPr>
+        <p:spPr>
+          <a:xfrm>
+            <a:off x="3642284" y="2788920"/>
+            <a:ext cx="2087804" cy="457200"/>
+          </a:xfrm>
+          <a:prstGeom prst="rect">
+            <a:avLst/>
+          </a:prstGeom>
+          <a:noFill/>
+          <a:ln/>
+        </p:spPr>
+        <p:txBody>
+          <a:bodyPr wrap="square" lIns="0" tIns="0" rIns="0" bIns="0" rtlCol="0" anchor="ctr"/>
+          <a:lstStyle/>
+          <a:p>
+            <a:pPr algn="l" indent="0" marL="0">
+              <a:buNone/>
+            </a:pPr>
+            <a:r>
+              <a:rPr lang="en-US" sz="1400" b="1" dirty="0">
+                <a:solidFill>
+                  <a:srgbClr val="1C5A73"/>
+                </a:solidFill>
+                <a:latin typeface="Cambria" pitchFamily="34" charset="0"/>
+                <a:ea typeface="Cambria" pitchFamily="34" charset="-122"/>
+                <a:cs typeface="Cambria" pitchFamily="34" charset="-120"/>
+              </a:rPr>
+              <a:t>Parcelle témoin</a:t>
+            </a:r>
+            <a:endParaRPr lang="en-US" sz="1400" dirty="0"/>
+          </a:p>
+        </p:txBody>
+      </p:sp>
+      <p:sp>
+        <p:nvSpPr>
+          <p:cNvPr id="13" name="Text 11"/>
+          <p:cNvSpPr txBox="1"/>
+          <p:nvPr/>
+        </p:nvSpPr>
+        <p:spPr>
+          <a:xfrm>
+            <a:off x="3642284" y="3291840"/>
+            <a:ext cx="2087804" cy="1234440"/>
+          </a:xfrm>
+          <a:prstGeom prst="rect">
+            <a:avLst/>
+          </a:prstGeom>
+          <a:noFill/>
+          <a:ln/>
+        </p:spPr>
+        <p:txBody>
+          <a:bodyPr wrap="square" lIns="0" tIns="0" rIns="0" bIns="0" rtlCol="0" anchor="t"/>
+          <a:lstStyle/>
+          <a:p>
+            <a:pPr algn="l" indent="0" marL="0">
+              <a:lnSpc>
+                <a:spcPct val="120000"/>
+              </a:lnSpc>
+              <a:buNone/>
+            </a:pPr>
+            <a:r>
+              <a:rPr lang="en-US" sz="1200" dirty="0">
+                <a:solidFill>
+                  <a:srgbClr val="31424A"/>
+                </a:solidFill>
+                <a:latin typeface="Calibri" pitchFamily="34" charset="0"/>
+                <a:ea typeface="Calibri" pitchFamily="34" charset="-122"/>
+                <a:cs typeface="Calibri" pitchFamily="34" charset="-120"/>
+              </a:rPr>
+              <a:t>Un essai comparatif sur un bloc, avec parcelle témoin conduite à l'identique.</a:t>
+            </a:r>
+            <a:endParaRPr lang="en-US" sz="1200" dirty="0"/>
+          </a:p>
+        </p:txBody>
+      </p:sp>
+      <p:sp>
+        <p:nvSpPr>
+          <p:cNvPr id="14" name="Shape 12"/>
+          <p:cNvSpPr/>
+          <p:nvPr/>
+        </p:nvSpPr>
+        <p:spPr>
+          <a:xfrm>
+            <a:off x="6233008" y="1874520"/>
+            <a:ext cx="2545004" cy="2834640"/>
+          </a:xfrm>
+          <a:prstGeom prst="roundRect">
+            <a:avLst>
+              <a:gd name="adj" fmla="val 3593"/>
+            </a:avLst>
+          </a:prstGeom>
+          <a:solidFill>
+            <a:srgbClr val="EDF3F5"/>
+          </a:solidFill>
+          <a:ln w="9525">
+            <a:solidFill>
+              <a:srgbClr val="D6E2E7"/>
+            </a:solidFill>
+            <a:prstDash val="solid"/>
+          </a:ln>
+        </p:spPr>
+      </p:sp>
+      <p:sp>
+        <p:nvSpPr>
+          <p:cNvPr id="15" name="Shape 13"/>
+          <p:cNvSpPr/>
+          <p:nvPr/>
+        </p:nvSpPr>
+        <p:spPr>
+          <a:xfrm>
+            <a:off x="6461608" y="2103120"/>
+            <a:ext cx="566928" cy="566928"/>
+          </a:xfrm>
+          <a:prstGeom prst="ellipse">
+            <a:avLst/>
+          </a:prstGeom>
+          <a:solidFill>
+            <a:srgbClr val="1C5A73"/>
+          </a:solidFill>
+          <a:ln/>
+        </p:spPr>
+      </p:sp>
+      <p:sp>
+        <p:nvSpPr>
+          <p:cNvPr id="16" name="Text 14"/>
+          <p:cNvSpPr txBox="1"/>
+          <p:nvPr/>
+        </p:nvSpPr>
+        <p:spPr>
+          <a:xfrm>
+            <a:off x="6461608" y="2103120"/>
+            <a:ext cx="566928" cy="566928"/>
+          </a:xfrm>
+          <a:prstGeom prst="rect">
+            <a:avLst/>
+          </a:prstGeom>
+          <a:noFill/>
+          <a:ln/>
+        </p:spPr>
+        <p:txBody>
+          <a:bodyPr wrap="square" lIns="0" tIns="0" rIns="0" bIns="0" rtlCol="0" anchor="ctr"/>
+          <a:lstStyle/>
+          <a:p>
+            <a:pPr algn="ctr" indent="0" marL="0">
+              <a:buNone/>
+            </a:pPr>
+            <a:r>
+              <a:rPr lang="en-US" sz="1600" b="1" dirty="0">
+                <a:solidFill>
+                  <a:srgbClr val="FFFFFF"/>
+                </a:solidFill>
+                <a:latin typeface="Cambria" pitchFamily="34" charset="0"/>
+                <a:ea typeface="Cambria" pitchFamily="34" charset="-122"/>
+                <a:cs typeface="Cambria" pitchFamily="34" charset="-120"/>
+              </a:rPr>
+              <a:t>3</a:t>
+            </a:r>
+            <a:endParaRPr lang="en-US" sz="1600" dirty="0"/>
+          </a:p>
+        </p:txBody>
+      </p:sp>
+      <p:sp>
+        <p:nvSpPr>
+          <p:cNvPr id="17" name="Text 15"/>
+          <p:cNvSpPr txBox="1"/>
+          <p:nvPr/>
+        </p:nvSpPr>
+        <p:spPr>
+          <a:xfrm>
+            <a:off x="6461608" y="2788920"/>
+            <a:ext cx="2087804" cy="457200"/>
+          </a:xfrm>
+          <a:prstGeom prst="rect">
+            <a:avLst/>
+          </a:prstGeom>
+          <a:noFill/>
+          <a:ln/>
+        </p:spPr>
+        <p:txBody>
+          <a:bodyPr wrap="square" lIns="0" tIns="0" rIns="0" bIns="0" rtlCol="0" anchor="ctr"/>
+          <a:lstStyle/>
+          <a:p>
+            <a:pPr algn="l" indent="0" marL="0">
+              <a:buNone/>
+            </a:pPr>
+            <a:r>
+              <a:rPr lang="en-US" sz="1400" b="1" dirty="0">
+                <a:solidFill>
+                  <a:srgbClr val="1C5A73"/>
+                </a:solidFill>
+                <a:latin typeface="Cambria" pitchFamily="34" charset="0"/>
+                <a:ea typeface="Cambria" pitchFamily="34" charset="-122"/>
+                <a:cs typeface="Cambria" pitchFamily="34" charset="-120"/>
+              </a:rPr>
+              <a:t>Mesure</a:t>
+            </a:r>
+            <a:endParaRPr lang="en-US" sz="1400" dirty="0"/>
+          </a:p>
+        </p:txBody>
+      </p:sp>
+      <p:sp>
+        <p:nvSpPr>
+          <p:cNvPr id="18" name="Text 16"/>
+          <p:cNvSpPr txBox="1"/>
+          <p:nvPr/>
+        </p:nvSpPr>
+        <p:spPr>
+          <a:xfrm>
+            <a:off x="6461608" y="3291840"/>
+            <a:ext cx="2087804" cy="1234440"/>
+          </a:xfrm>
+          <a:prstGeom prst="rect">
+            <a:avLst/>
+          </a:prstGeom>
+          <a:noFill/>
+          <a:ln/>
+        </p:spPr>
+        <p:txBody>
+          <a:bodyPr wrap="square" lIns="0" tIns="0" rIns="0" bIns="0" rtlCol="0" anchor="t"/>
+          <a:lstStyle/>
+          <a:p>
+            <a:pPr algn="l" indent="0" marL="0">
+              <a:lnSpc>
+                <a:spcPct val="120000"/>
+              </a:lnSpc>
+              <a:buNone/>
+            </a:pPr>
+            <a:r>
+              <a:rPr lang="en-US" sz="1200" dirty="0">
+                <a:solidFill>
+                  <a:srgbClr val="31424A"/>
+                </a:solidFill>
+                <a:latin typeface="Calibri" pitchFamily="34" charset="0"/>
+                <a:ea typeface="Calibri" pitchFamily="34" charset="-122"/>
+                <a:cs typeface="Calibri" pitchFamily="34" charset="-120"/>
+              </a:rPr>
+              <a:t>Relevés de reprise, de consommation et de rendement à cheval sur la saison sèche.</a:t>
+            </a:r>
+            <a:endParaRPr lang="en-US" sz="1200" dirty="0"/>
+          </a:p>
+        </p:txBody>
+      </p:sp>
+      <p:sp>
+        <p:nvSpPr>
+          <p:cNvPr id="19" name="Shape 17"/>
+          <p:cNvSpPr/>
+          <p:nvPr/>
+        </p:nvSpPr>
+        <p:spPr>
+          <a:xfrm>
+            <a:off x="9052331" y="1874520"/>
+            <a:ext cx="2545004" cy="2834640"/>
+          </a:xfrm>
+          <a:prstGeom prst="roundRect">
+            <a:avLst>
+              <a:gd name="adj" fmla="val 3593"/>
+            </a:avLst>
+          </a:prstGeom>
+          <a:solidFill>
+            <a:srgbClr val="EDF3F5"/>
+          </a:solidFill>
+          <a:ln w="9525">
+            <a:solidFill>
+              <a:srgbClr val="D6E2E7"/>
+            </a:solidFill>
+            <a:prstDash val="solid"/>
+          </a:ln>
+        </p:spPr>
+      </p:sp>
+      <p:sp>
+        <p:nvSpPr>
+          <p:cNvPr id="20" name="Shape 18"/>
+          <p:cNvSpPr/>
+          <p:nvPr/>
+        </p:nvSpPr>
+        <p:spPr>
+          <a:xfrm>
+            <a:off x="9280931" y="2103120"/>
+            <a:ext cx="566928" cy="566928"/>
+          </a:xfrm>
+          <a:prstGeom prst="ellipse">
+            <a:avLst/>
+          </a:prstGeom>
+          <a:solidFill>
+            <a:srgbClr val="1C5A73"/>
+          </a:solidFill>
+          <a:ln/>
+        </p:spPr>
+      </p:sp>
+      <p:sp>
+        <p:nvSpPr>
+          <p:cNvPr id="21" name="Text 19"/>
+          <p:cNvSpPr txBox="1"/>
+          <p:nvPr/>
+        </p:nvSpPr>
+        <p:spPr>
+          <a:xfrm>
+            <a:off x="9280931" y="2103120"/>
+            <a:ext cx="566928" cy="566928"/>
+          </a:xfrm>
+          <a:prstGeom prst="rect">
+            <a:avLst/>
+          </a:prstGeom>
+          <a:noFill/>
+          <a:ln/>
+        </p:spPr>
+        <p:txBody>
+          <a:bodyPr wrap="square" lIns="0" tIns="0" rIns="0" bIns="0" rtlCol="0" anchor="ctr"/>
+          <a:lstStyle/>
+          <a:p>
+            <a:pPr algn="ctr" indent="0" marL="0">
+              <a:buNone/>
+            </a:pPr>
+            <a:r>
+              <a:rPr lang="en-US" sz="1600" b="1" dirty="0">
+                <a:solidFill>
+                  <a:srgbClr val="FFFFFF"/>
+                </a:solidFill>
+                <a:latin typeface="Cambria" pitchFamily="34" charset="0"/>
+                <a:ea typeface="Cambria" pitchFamily="34" charset="-122"/>
+                <a:cs typeface="Cambria" pitchFamily="34" charset="-120"/>
+              </a:rPr>
+              <a:t>4</a:t>
+            </a:r>
+            <a:endParaRPr lang="en-US" sz="1600" dirty="0"/>
+          </a:p>
+        </p:txBody>
+      </p:sp>
+      <p:sp>
+        <p:nvSpPr>
+          <p:cNvPr id="22" name="Text 20"/>
+          <p:cNvSpPr txBox="1"/>
+          <p:nvPr/>
+        </p:nvSpPr>
+        <p:spPr>
+          <a:xfrm>
+            <a:off x="9280931" y="2788920"/>
+            <a:ext cx="2087804" cy="457200"/>
+          </a:xfrm>
+          <a:prstGeom prst="rect">
+            <a:avLst/>
+          </a:prstGeom>
+          <a:noFill/>
+          <a:ln/>
+        </p:spPr>
+        <p:txBody>
+          <a:bodyPr wrap="square" lIns="0" tIns="0" rIns="0" bIns="0" rtlCol="0" anchor="ctr"/>
+          <a:lstStyle/>
+          <a:p>
+            <a:pPr algn="l" indent="0" marL="0">
+              <a:buNone/>
+            </a:pPr>
+            <a:r>
+              <a:rPr lang="en-US" sz="1400" b="1" dirty="0">
+                <a:solidFill>
+                  <a:srgbClr val="1C5A73"/>
+                </a:solidFill>
+                <a:latin typeface="Cambria" pitchFamily="34" charset="0"/>
+                <a:ea typeface="Cambria" pitchFamily="34" charset="-122"/>
+                <a:cs typeface="Cambria" pitchFamily="34" charset="-120"/>
+              </a:rPr>
+              <a:t>Extension</a:t>
+            </a:r>
+            <a:endParaRPr lang="en-US" sz="1400" dirty="0"/>
+          </a:p>
+        </p:txBody>
+      </p:sp>
+      <p:sp>
+        <p:nvSpPr>
+          <p:cNvPr id="23" name="Text 21"/>
+          <p:cNvSpPr txBox="1"/>
+          <p:nvPr/>
+        </p:nvSpPr>
+        <p:spPr>
+          <a:xfrm>
+            <a:off x="9280931" y="3291840"/>
+            <a:ext cx="2087804" cy="1234440"/>
+          </a:xfrm>
+          <a:prstGeom prst="rect">
+            <a:avLst/>
+          </a:prstGeom>
+          <a:noFill/>
+          <a:ln/>
+        </p:spPr>
+        <p:txBody>
+          <a:bodyPr wrap="square" lIns="0" tIns="0" rIns="0" bIns="0" rtlCol="0" anchor="t"/>
+          <a:lstStyle/>
+          <a:p>
+            <a:pPr algn="l" indent="0" marL="0">
+              <a:lnSpc>
+                <a:spcPct val="120000"/>
+              </a:lnSpc>
+              <a:buNone/>
+            </a:pPr>
+            <a:r>
+              <a:rPr lang="en-US" sz="1200" dirty="0">
+                <a:solidFill>
+                  <a:srgbClr val="31424A"/>
+                </a:solidFill>
+                <a:latin typeface="Calibri" pitchFamily="34" charset="0"/>
+                <a:ea typeface="Calibri" pitchFamily="34" charset="-122"/>
+                <a:cs typeface="Calibri" pitchFamily="34" charset="-120"/>
+              </a:rPr>
+              <a:t>Généralisation progressive aux autres parcelles sur la base des résultats constatés.</a:t>
+            </a:r>
+            <a:endParaRPr lang="en-US" sz="1200" dirty="0"/>
+          </a:p>
+        </p:txBody>
+      </p:sp>
+      <p:sp>
+        <p:nvSpPr>
+          <p:cNvPr id="24" name="Text 22"/>
+          <p:cNvSpPr txBox="1"/>
+          <p:nvPr/>
+        </p:nvSpPr>
+        <p:spPr>
+          <a:xfrm>
+            <a:off x="594360" y="4983480"/>
+            <a:ext cx="11002975" cy="822960"/>
+          </a:xfrm>
+          <a:prstGeom prst="rect">
+            <a:avLst/>
+          </a:prstGeom>
+          <a:noFill/>
+          <a:ln/>
+        </p:spPr>
+        <p:txBody>
+          <a:bodyPr wrap="square" lIns="0" tIns="0" rIns="0" bIns="0" rtlCol="0" anchor="t"/>
+          <a:lstStyle/>
+          <a:p>
+            <a:pPr algn="l" indent="0" marL="0">
+              <a:lnSpc>
+                <a:spcPct val="125000"/>
+              </a:lnSpc>
+              <a:buNone/>
+            </a:pPr>
+            <a:r>
+              <a:rPr lang="en-US" sz="1250" i="1" dirty="0">
+                <a:solidFill>
+                  <a:srgbClr val="6C8089"/>
+                </a:solidFill>
+                <a:latin typeface="Calibri" pitchFamily="34" charset="0"/>
+                <a:ea typeface="Calibri" pitchFamily="34" charset="-122"/>
+                <a:cs typeface="Calibri" pitchFamily="34" charset="-120"/>
+              </a:rPr>
+              <a:t>La règle de dosage est la même partout : 3 grammes par litre de terre utile. Ce qui change d'un terrain à l'autre, c'est le volume de terre effectivement exploré par les racines.</a:t>
+            </a:r>
+            <a:endParaRPr lang="en-US" sz="1250" dirty="0"/>
+          </a:p>
+        </p:txBody>
+      </p:sp>
+      <p:sp>
+        <p:nvSpPr>
+          <p:cNvPr id="25" name="Text 23"/>
+          <p:cNvSpPr txBox="1"/>
+          <p:nvPr/>
+        </p:nvSpPr>
+        <p:spPr>
+          <a:xfrm>
+            <a:off x="502920" y="6382512"/>
+            <a:ext cx="8229600" cy="274320"/>
+          </a:xfrm>
+          <a:prstGeom prst="rect">
+            <a:avLst/>
+          </a:prstGeom>
+          <a:noFill/>
+          <a:ln/>
+        </p:spPr>
+        <p:txBody>
+          <a:bodyPr wrap="square" lIns="0" tIns="0" rIns="0" bIns="0" rtlCol="0" anchor="ctr"/>
+          <a:lstStyle/>
+          <a:p>
+            <a:pPr algn="l" indent="0" marL="0">
+              <a:buNone/>
+            </a:pPr>
+            <a:r>
+              <a:rPr lang="en-US" sz="950" dirty="0">
+                <a:solidFill>
+                  <a:srgbClr val="6C8089">
+                    <a:alpha val="80000"/>
+                  </a:srgbClr>
+                </a:solidFill>
+                <a:latin typeface="Calibri" pitchFamily="34" charset="0"/>
+                <a:ea typeface="Calibri" pitchFamily="34" charset="-122"/>
+                <a:cs typeface="Calibri" pitchFamily="34" charset="-120"/>
+              </a:rPr>
+              <a:t>Green Solutions · Dossier marché Gabon</a:t>
+            </a:r>
+            <a:endParaRPr lang="en-US" sz="950" dirty="0"/>
+          </a:p>
+        </p:txBody>
+      </p:sp>
+      <p:sp>
+        <p:nvSpPr>
+          <p:cNvPr id="26" name="Text 24"/>
+          <p:cNvSpPr txBox="1"/>
+          <p:nvPr/>
+        </p:nvSpPr>
+        <p:spPr>
+          <a:xfrm>
+            <a:off x="11140135" y="6382512"/>
+            <a:ext cx="548640" cy="274320"/>
+          </a:xfrm>
+          <a:prstGeom prst="rect">
+            <a:avLst/>
+          </a:prstGeom>
+          <a:noFill/>
+          <a:ln/>
+        </p:spPr>
+        <p:txBody>
+          <a:bodyPr wrap="square" lIns="0" tIns="0" rIns="0" bIns="0" rtlCol="0" anchor="ctr"/>
+          <a:lstStyle/>
+          <a:p>
+            <a:pPr algn="r" indent="0" marL="0">
+              <a:buNone/>
+            </a:pPr>
+            <a:r>
+              <a:rPr lang="en-US" sz="950" dirty="0">
+                <a:solidFill>
+                  <a:srgbClr val="6C8089">
+                    <a:alpha val="80000"/>
+                  </a:srgbClr>
+                </a:solidFill>
+                <a:latin typeface="Calibri" pitchFamily="34" charset="0"/>
+                <a:ea typeface="Calibri" pitchFamily="34" charset="-122"/>
+                <a:cs typeface="Calibri" pitchFamily="34" charset="-120"/>
+              </a:rPr>
+              <a:t>13</a:t>
+            </a:r>
+            <a:endParaRPr lang="en-US" sz="950" dirty="0"/>
+          </a:p>
+        </p:txBody>
+      </p:sp>
+    </p:spTree>
+  </p:cSld>
+  <p:clrMapOvr>
+    <a:masterClrMapping/>
+  </p:clrMapOvr>
+</p:sld>
+</file>
+
+<file path=ppt/slides/slide15.xml><?xml version="1.0" encoding="utf-8"?>
+<p:sld xmlns:a="http://schemas.openxmlformats.org/drawingml/2006/main" xmlns:r="http://schemas.openxmlformats.org/officeDocument/2006/relationships" xmlns:p="http://schemas.openxmlformats.org/presentationml/2006/main">
+  <p:cSld name="Slide 15">
+    <p:bg>
+      <p:bgPr>
+        <a:solidFill>
+          <a:srgbClr val="FAFBFB"/>
+        </a:solidFill>
+      </p:bgPr>
+    </p:bg>
+    <p:spTree>
+      <p:nvGrpSpPr>
+        <p:cNvPr id="1" name=""/>
+        <p:cNvGrpSpPr/>
+        <p:nvPr/>
+      </p:nvGrpSpPr>
+      <p:grpSpPr>
+        <a:xfrm>
+          <a:off x="0" y="0"/>
+          <a:ext cx="0" cy="0"/>
+          <a:chOff x="0" y="0"/>
+          <a:chExt cx="0" cy="0"/>
+        </a:xfrm>
+      </p:grpSpPr>
+      <p:sp>
+        <p:nvSpPr>
+          <p:cNvPr id="2" name="Text 0"/>
+          <p:cNvSpPr txBox="1"/>
+          <p:nvPr/>
+        </p:nvSpPr>
+        <p:spPr>
+          <a:xfrm>
+            <a:off x="594360" y="411480"/>
+            <a:ext cx="10515600" cy="274320"/>
+          </a:xfrm>
+          <a:prstGeom prst="rect">
+            <a:avLst/>
+          </a:prstGeom>
+          <a:noFill/>
+          <a:ln/>
+        </p:spPr>
+        <p:txBody>
+          <a:bodyPr wrap="square" lIns="0" tIns="0" rIns="0" bIns="0" rtlCol="0" anchor="ctr"/>
+          <a:lstStyle/>
+          <a:p>
+            <a:pPr algn="l" indent="0" marL="0">
+              <a:buNone/>
+            </a:pPr>
+            <a:r>
+              <a:rPr lang="en-US" sz="1150" b="1" spc="200" kern="0" dirty="0">
+                <a:solidFill>
+                  <a:srgbClr val="E0A33E"/>
+                </a:solidFill>
+                <a:latin typeface="Calibri" pitchFamily="34" charset="0"/>
+                <a:ea typeface="Calibri" pitchFamily="34" charset="-122"/>
+                <a:cs typeface="Calibri" pitchFamily="34" charset="-120"/>
+              </a:rPr>
+              <a:t>Travailler ensemble</a:t>
+            </a:r>
+            <a:endParaRPr lang="en-US" sz="1150" dirty="0"/>
+          </a:p>
+        </p:txBody>
+      </p:sp>
+      <p:sp>
+        <p:nvSpPr>
+          <p:cNvPr id="3" name="Text 1"/>
+          <p:cNvSpPr txBox="1"/>
+          <p:nvPr/>
+        </p:nvSpPr>
+        <p:spPr>
+          <a:xfrm>
+            <a:off x="594360" y="731520"/>
+            <a:ext cx="10881360" cy="731520"/>
+          </a:xfrm>
+          <a:prstGeom prst="rect">
+            <a:avLst/>
+          </a:prstGeom>
+          <a:noFill/>
+          <a:ln/>
+        </p:spPr>
+        <p:txBody>
+          <a:bodyPr wrap="square" lIns="0" tIns="0" rIns="0" bIns="0" rtlCol="0" anchor="ctr"/>
+          <a:lstStyle/>
+          <a:p>
+            <a:pPr algn="l" indent="0" marL="0">
+              <a:buNone/>
+            </a:pPr>
+            <a:r>
+              <a:rPr lang="en-US" sz="3000" b="1" dirty="0">
+                <a:solidFill>
+                  <a:srgbClr val="0E3546"/>
+                </a:solidFill>
+                <a:latin typeface="Cambria" pitchFamily="34" charset="0"/>
+                <a:ea typeface="Cambria" pitchFamily="34" charset="-122"/>
+                <a:cs typeface="Cambria" pitchFamily="34" charset="-120"/>
+              </a:rPr>
+              <a:t>Un partenaire local pour le Gabon</a:t>
+            </a:r>
+            <a:endParaRPr lang="en-US" sz="3000" dirty="0"/>
+          </a:p>
+        </p:txBody>
+      </p:sp>
+      <p:sp>
+        <p:nvSpPr>
+          <p:cNvPr id="4" name="Shape 2"/>
+          <p:cNvSpPr/>
+          <p:nvPr/>
+        </p:nvSpPr>
+        <p:spPr>
+          <a:xfrm>
+            <a:off x="594360" y="1874520"/>
+            <a:ext cx="2545004" cy="2834640"/>
+          </a:xfrm>
+          <a:prstGeom prst="roundRect">
+            <a:avLst>
+              <a:gd name="adj" fmla="val 3593"/>
+            </a:avLst>
+          </a:prstGeom>
+          <a:solidFill>
+            <a:srgbClr val="EDF3F5"/>
+          </a:solidFill>
+          <a:ln w="9525">
+            <a:solidFill>
+              <a:srgbClr val="D6E2E7"/>
+            </a:solidFill>
+            <a:prstDash val="solid"/>
+          </a:ln>
+        </p:spPr>
+      </p:sp>
+      <p:sp>
+        <p:nvSpPr>
+          <p:cNvPr id="5" name="Shape 3"/>
+          <p:cNvSpPr/>
+          <p:nvPr/>
+        </p:nvSpPr>
+        <p:spPr>
+          <a:xfrm>
+            <a:off x="822960" y="2103120"/>
+            <a:ext cx="566928" cy="566928"/>
+          </a:xfrm>
+          <a:prstGeom prst="ellipse">
+            <a:avLst/>
+          </a:prstGeom>
+          <a:solidFill>
+            <a:srgbClr val="1C5A73"/>
+          </a:solidFill>
+          <a:ln/>
+        </p:spPr>
+      </p:sp>
+      <p:sp>
+        <p:nvSpPr>
+          <p:cNvPr id="6" name="Text 4"/>
+          <p:cNvSpPr txBox="1"/>
+          <p:nvPr/>
+        </p:nvSpPr>
+        <p:spPr>
+          <a:xfrm>
+            <a:off x="822960" y="2103120"/>
+            <a:ext cx="566928" cy="566928"/>
+          </a:xfrm>
+          <a:prstGeom prst="rect">
+            <a:avLst/>
+          </a:prstGeom>
+          <a:noFill/>
+          <a:ln/>
+        </p:spPr>
+        <p:txBody>
+          <a:bodyPr wrap="square" lIns="0" tIns="0" rIns="0" bIns="0" rtlCol="0" anchor="ctr"/>
+          <a:lstStyle/>
+          <a:p>
+            <a:pPr algn="ctr" indent="0" marL="0">
+              <a:buNone/>
+            </a:pPr>
+            <a:r>
+              <a:rPr lang="en-US" sz="1600" b="1" dirty="0">
+                <a:solidFill>
+                  <a:srgbClr val="FFFFFF"/>
+                </a:solidFill>
+                <a:latin typeface="Cambria" pitchFamily="34" charset="0"/>
+                <a:ea typeface="Cambria" pitchFamily="34" charset="-122"/>
+                <a:cs typeface="Cambria" pitchFamily="34" charset="-120"/>
+              </a:rPr>
+              <a:t>1</a:t>
+            </a:r>
+            <a:endParaRPr lang="en-US" sz="1600" dirty="0"/>
+          </a:p>
+        </p:txBody>
+      </p:sp>
+      <p:sp>
+        <p:nvSpPr>
+          <p:cNvPr id="7" name="Text 5"/>
+          <p:cNvSpPr txBox="1"/>
+          <p:nvPr/>
+        </p:nvSpPr>
+        <p:spPr>
+          <a:xfrm>
+            <a:off x="822960" y="2788920"/>
+            <a:ext cx="2087804" cy="457200"/>
+          </a:xfrm>
+          <a:prstGeom prst="rect">
+            <a:avLst/>
+          </a:prstGeom>
+          <a:noFill/>
+          <a:ln/>
+        </p:spPr>
+        <p:txBody>
+          <a:bodyPr wrap="square" lIns="0" tIns="0" rIns="0" bIns="0" rtlCol="0" anchor="ctr"/>
+          <a:lstStyle/>
+          <a:p>
+            <a:pPr algn="l" indent="0" marL="0">
+              <a:buNone/>
+            </a:pPr>
+            <a:r>
+              <a:rPr lang="en-US" sz="1400" b="1" dirty="0">
+                <a:solidFill>
+                  <a:srgbClr val="1C5A73"/>
+                </a:solidFill>
+                <a:latin typeface="Cambria" pitchFamily="34" charset="0"/>
+                <a:ea typeface="Cambria" pitchFamily="34" charset="-122"/>
+                <a:cs typeface="Cambria" pitchFamily="34" charset="-120"/>
+              </a:rPr>
+              <a:t>Distribution</a:t>
+            </a:r>
+            <a:endParaRPr lang="en-US" sz="1400" dirty="0"/>
+          </a:p>
+        </p:txBody>
+      </p:sp>
+      <p:sp>
+        <p:nvSpPr>
+          <p:cNvPr id="8" name="Text 6"/>
+          <p:cNvSpPr txBox="1"/>
+          <p:nvPr/>
+        </p:nvSpPr>
+        <p:spPr>
+          <a:xfrm>
+            <a:off x="822960" y="3291840"/>
+            <a:ext cx="2087804" cy="1234440"/>
+          </a:xfrm>
+          <a:prstGeom prst="rect">
+            <a:avLst/>
+          </a:prstGeom>
+          <a:noFill/>
+          <a:ln/>
+        </p:spPr>
+        <p:txBody>
+          <a:bodyPr wrap="square" lIns="0" tIns="0" rIns="0" bIns="0" rtlCol="0" anchor="t"/>
+          <a:lstStyle/>
+          <a:p>
+            <a:pPr algn="l" indent="0" marL="0">
+              <a:lnSpc>
+                <a:spcPct val="120000"/>
+              </a:lnSpc>
+              <a:buNone/>
+            </a:pPr>
+            <a:r>
+              <a:rPr lang="en-US" sz="1200" dirty="0">
+                <a:solidFill>
+                  <a:srgbClr val="31424A"/>
+                </a:solidFill>
+                <a:latin typeface="Calibri" pitchFamily="34" charset="0"/>
+                <a:ea typeface="Calibri" pitchFamily="34" charset="-122"/>
+                <a:cs typeface="Calibri" pitchFamily="34" charset="-120"/>
+              </a:rPr>
+              <a:t>Exclusivité territoriale et stock de lancement pour la première saison commerciale.</a:t>
+            </a:r>
+            <a:endParaRPr lang="en-US" sz="1200" dirty="0"/>
+          </a:p>
+        </p:txBody>
+      </p:sp>
+      <p:sp>
+        <p:nvSpPr>
+          <p:cNvPr id="9" name="Shape 7"/>
+          <p:cNvSpPr/>
+          <p:nvPr/>
+        </p:nvSpPr>
+        <p:spPr>
+          <a:xfrm>
+            <a:off x="3413684" y="1874520"/>
+            <a:ext cx="2545004" cy="2834640"/>
+          </a:xfrm>
+          <a:prstGeom prst="roundRect">
+            <a:avLst>
+              <a:gd name="adj" fmla="val 3593"/>
+            </a:avLst>
+          </a:prstGeom>
+          <a:solidFill>
+            <a:srgbClr val="EDF3F5"/>
+          </a:solidFill>
+          <a:ln w="9525">
+            <a:solidFill>
+              <a:srgbClr val="D6E2E7"/>
+            </a:solidFill>
+            <a:prstDash val="solid"/>
+          </a:ln>
+        </p:spPr>
+      </p:sp>
+      <p:sp>
+        <p:nvSpPr>
+          <p:cNvPr id="10" name="Shape 8"/>
+          <p:cNvSpPr/>
+          <p:nvPr/>
+        </p:nvSpPr>
+        <p:spPr>
+          <a:xfrm>
+            <a:off x="3642284" y="2103120"/>
+            <a:ext cx="566928" cy="566928"/>
+          </a:xfrm>
+          <a:prstGeom prst="ellipse">
+            <a:avLst/>
+          </a:prstGeom>
+          <a:solidFill>
+            <a:srgbClr val="1C5A73"/>
+          </a:solidFill>
+          <a:ln/>
+        </p:spPr>
+      </p:sp>
+      <p:sp>
+        <p:nvSpPr>
+          <p:cNvPr id="11" name="Text 9"/>
+          <p:cNvSpPr txBox="1"/>
+          <p:nvPr/>
+        </p:nvSpPr>
+        <p:spPr>
+          <a:xfrm>
+            <a:off x="3642284" y="2103120"/>
+            <a:ext cx="566928" cy="566928"/>
+          </a:xfrm>
+          <a:prstGeom prst="rect">
+            <a:avLst/>
+          </a:prstGeom>
+          <a:noFill/>
+          <a:ln/>
+        </p:spPr>
+        <p:txBody>
+          <a:bodyPr wrap="square" lIns="0" tIns="0" rIns="0" bIns="0" rtlCol="0" anchor="ctr"/>
+          <a:lstStyle/>
+          <a:p>
+            <a:pPr algn="ctr" indent="0" marL="0">
+              <a:buNone/>
+            </a:pPr>
+            <a:r>
+              <a:rPr lang="en-US" sz="1600" b="1" dirty="0">
+                <a:solidFill>
+                  <a:srgbClr val="FFFFFF"/>
+                </a:solidFill>
+                <a:latin typeface="Cambria" pitchFamily="34" charset="0"/>
+                <a:ea typeface="Cambria" pitchFamily="34" charset="-122"/>
+                <a:cs typeface="Cambria" pitchFamily="34" charset="-120"/>
+              </a:rPr>
+              <a:t>2</a:t>
+            </a:r>
+            <a:endParaRPr lang="en-US" sz="1600" dirty="0"/>
+          </a:p>
+        </p:txBody>
+      </p:sp>
+      <p:sp>
+        <p:nvSpPr>
+          <p:cNvPr id="12" name="Text 10"/>
+          <p:cNvSpPr txBox="1"/>
+          <p:nvPr/>
+        </p:nvSpPr>
+        <p:spPr>
+          <a:xfrm>
+            <a:off x="3642284" y="2788920"/>
+            <a:ext cx="2087804" cy="457200"/>
+          </a:xfrm>
+          <a:prstGeom prst="rect">
+            <a:avLst/>
+          </a:prstGeom>
+          <a:noFill/>
+          <a:ln/>
+        </p:spPr>
+        <p:txBody>
+          <a:bodyPr wrap="square" lIns="0" tIns="0" rIns="0" bIns="0" rtlCol="0" anchor="ctr"/>
+          <a:lstStyle/>
+          <a:p>
+            <a:pPr algn="l" indent="0" marL="0">
+              <a:buNone/>
+            </a:pPr>
+            <a:r>
+              <a:rPr lang="en-US" sz="1400" b="1" dirty="0">
+                <a:solidFill>
+                  <a:srgbClr val="1C5A73"/>
+                </a:solidFill>
+                <a:latin typeface="Cambria" pitchFamily="34" charset="0"/>
+                <a:ea typeface="Cambria" pitchFamily="34" charset="-122"/>
+                <a:cs typeface="Cambria" pitchFamily="34" charset="-120"/>
+              </a:rPr>
+              <a:t>Formation</a:t>
+            </a:r>
+            <a:endParaRPr lang="en-US" sz="1400" dirty="0"/>
+          </a:p>
+        </p:txBody>
+      </p:sp>
+      <p:sp>
+        <p:nvSpPr>
+          <p:cNvPr id="13" name="Text 11"/>
+          <p:cNvSpPr txBox="1"/>
+          <p:nvPr/>
+        </p:nvSpPr>
+        <p:spPr>
+          <a:xfrm>
+            <a:off x="3642284" y="3291840"/>
+            <a:ext cx="2087804" cy="1234440"/>
+          </a:xfrm>
+          <a:prstGeom prst="rect">
+            <a:avLst/>
+          </a:prstGeom>
+          <a:noFill/>
+          <a:ln/>
+        </p:spPr>
+        <p:txBody>
+          <a:bodyPr wrap="square" lIns="0" tIns="0" rIns="0" bIns="0" rtlCol="0" anchor="t"/>
+          <a:lstStyle/>
+          <a:p>
+            <a:pPr algn="l" indent="0" marL="0">
+              <a:lnSpc>
+                <a:spcPct val="120000"/>
+              </a:lnSpc>
+              <a:buNone/>
+            </a:pPr>
+            <a:r>
+              <a:rPr lang="en-US" sz="1200" dirty="0">
+                <a:solidFill>
+                  <a:srgbClr val="31424A"/>
+                </a:solidFill>
+                <a:latin typeface="Calibri" pitchFamily="34" charset="0"/>
+                <a:ea typeface="Calibri" pitchFamily="34" charset="-122"/>
+                <a:cs typeface="Calibri" pitchFamily="34" charset="-120"/>
+              </a:rPr>
+              <a:t>Formation technique des équipes, protocoles de dosage et mises à jour à chaque saison.</a:t>
+            </a:r>
+            <a:endParaRPr lang="en-US" sz="1200" dirty="0"/>
+          </a:p>
+        </p:txBody>
+      </p:sp>
+      <p:sp>
+        <p:nvSpPr>
+          <p:cNvPr id="14" name="Shape 12"/>
+          <p:cNvSpPr/>
+          <p:nvPr/>
+        </p:nvSpPr>
+        <p:spPr>
+          <a:xfrm>
+            <a:off x="6233008" y="1874520"/>
+            <a:ext cx="2545004" cy="2834640"/>
+          </a:xfrm>
+          <a:prstGeom prst="roundRect">
+            <a:avLst>
+              <a:gd name="adj" fmla="val 3593"/>
+            </a:avLst>
+          </a:prstGeom>
+          <a:solidFill>
+            <a:srgbClr val="EDF3F5"/>
+          </a:solidFill>
+          <a:ln w="9525">
+            <a:solidFill>
+              <a:srgbClr val="D6E2E7"/>
+            </a:solidFill>
+            <a:prstDash val="solid"/>
+          </a:ln>
+        </p:spPr>
+      </p:sp>
+      <p:sp>
+        <p:nvSpPr>
+          <p:cNvPr id="15" name="Shape 13"/>
+          <p:cNvSpPr/>
+          <p:nvPr/>
+        </p:nvSpPr>
+        <p:spPr>
+          <a:xfrm>
+            <a:off x="6461608" y="2103120"/>
+            <a:ext cx="566928" cy="566928"/>
+          </a:xfrm>
+          <a:prstGeom prst="ellipse">
+            <a:avLst/>
+          </a:prstGeom>
+          <a:solidFill>
+            <a:srgbClr val="1C5A73"/>
+          </a:solidFill>
+          <a:ln/>
+        </p:spPr>
+      </p:sp>
+      <p:sp>
+        <p:nvSpPr>
+          <p:cNvPr id="16" name="Text 14"/>
+          <p:cNvSpPr txBox="1"/>
+          <p:nvPr/>
+        </p:nvSpPr>
+        <p:spPr>
+          <a:xfrm>
+            <a:off x="6461608" y="2103120"/>
+            <a:ext cx="566928" cy="566928"/>
+          </a:xfrm>
+          <a:prstGeom prst="rect">
+            <a:avLst/>
+          </a:prstGeom>
+          <a:noFill/>
+          <a:ln/>
+        </p:spPr>
+        <p:txBody>
+          <a:bodyPr wrap="square" lIns="0" tIns="0" rIns="0" bIns="0" rtlCol="0" anchor="ctr"/>
+          <a:lstStyle/>
+          <a:p>
+            <a:pPr algn="ctr" indent="0" marL="0">
+              <a:buNone/>
+            </a:pPr>
+            <a:r>
+              <a:rPr lang="en-US" sz="1600" b="1" dirty="0">
+                <a:solidFill>
+                  <a:srgbClr val="FFFFFF"/>
+                </a:solidFill>
+                <a:latin typeface="Cambria" pitchFamily="34" charset="0"/>
+                <a:ea typeface="Cambria" pitchFamily="34" charset="-122"/>
+                <a:cs typeface="Cambria" pitchFamily="34" charset="-120"/>
+              </a:rPr>
+              <a:t>3</a:t>
+            </a:r>
+            <a:endParaRPr lang="en-US" sz="1600" dirty="0"/>
+          </a:p>
+        </p:txBody>
+      </p:sp>
+      <p:sp>
+        <p:nvSpPr>
+          <p:cNvPr id="17" name="Text 15"/>
+          <p:cNvSpPr txBox="1"/>
+          <p:nvPr/>
+        </p:nvSpPr>
+        <p:spPr>
+          <a:xfrm>
+            <a:off x="6461608" y="2788920"/>
+            <a:ext cx="2087804" cy="457200"/>
+          </a:xfrm>
+          <a:prstGeom prst="rect">
+            <a:avLst/>
+          </a:prstGeom>
+          <a:noFill/>
+          <a:ln/>
+        </p:spPr>
+        <p:txBody>
+          <a:bodyPr wrap="square" lIns="0" tIns="0" rIns="0" bIns="0" rtlCol="0" anchor="ctr"/>
+          <a:lstStyle/>
+          <a:p>
+            <a:pPr algn="l" indent="0" marL="0">
+              <a:buNone/>
+            </a:pPr>
+            <a:r>
+              <a:rPr lang="en-US" sz="1400" b="1" dirty="0">
+                <a:solidFill>
+                  <a:srgbClr val="1C5A73"/>
+                </a:solidFill>
+                <a:latin typeface="Cambria" pitchFamily="34" charset="0"/>
+                <a:ea typeface="Cambria" pitchFamily="34" charset="-122"/>
+                <a:cs typeface="Cambria" pitchFamily="34" charset="-120"/>
+              </a:rPr>
+              <a:t>Essais conjoints</a:t>
+            </a:r>
+            <a:endParaRPr lang="en-US" sz="1400" dirty="0"/>
+          </a:p>
+        </p:txBody>
+      </p:sp>
+      <p:sp>
+        <p:nvSpPr>
+          <p:cNvPr id="18" name="Text 16"/>
+          <p:cNvSpPr txBox="1"/>
+          <p:nvPr/>
+        </p:nvSpPr>
+        <p:spPr>
+          <a:xfrm>
+            <a:off x="6461608" y="3291840"/>
+            <a:ext cx="2087804" cy="1234440"/>
+          </a:xfrm>
+          <a:prstGeom prst="rect">
+            <a:avLst/>
+          </a:prstGeom>
+          <a:noFill/>
+          <a:ln/>
+        </p:spPr>
+        <p:txBody>
+          <a:bodyPr wrap="square" lIns="0" tIns="0" rIns="0" bIns="0" rtlCol="0" anchor="t"/>
+          <a:lstStyle/>
+          <a:p>
+            <a:pPr algn="l" indent="0" marL="0">
+              <a:lnSpc>
+                <a:spcPct val="120000"/>
+              </a:lnSpc>
+              <a:buNone/>
+            </a:pPr>
+            <a:r>
+              <a:rPr lang="en-US" sz="1200" dirty="0">
+                <a:solidFill>
+                  <a:srgbClr val="31424A"/>
+                </a:solidFill>
+                <a:latin typeface="Calibri" pitchFamily="34" charset="0"/>
+                <a:ea typeface="Calibri" pitchFamily="34" charset="-122"/>
+                <a:cs typeface="Calibri" pitchFamily="34" charset="-120"/>
+              </a:rPr>
+              <a:t>Parcelles de démonstration avec témoin, résultats partagés avec les producteurs.</a:t>
+            </a:r>
+            <a:endParaRPr lang="en-US" sz="1200" dirty="0"/>
+          </a:p>
+        </p:txBody>
+      </p:sp>
+      <p:sp>
+        <p:nvSpPr>
+          <p:cNvPr id="19" name="Shape 17"/>
+          <p:cNvSpPr/>
+          <p:nvPr/>
+        </p:nvSpPr>
+        <p:spPr>
+          <a:xfrm>
+            <a:off x="9052331" y="1874520"/>
+            <a:ext cx="2545004" cy="2834640"/>
+          </a:xfrm>
+          <a:prstGeom prst="roundRect">
+            <a:avLst>
+              <a:gd name="adj" fmla="val 3593"/>
+            </a:avLst>
+          </a:prstGeom>
+          <a:solidFill>
+            <a:srgbClr val="EDF3F5"/>
+          </a:solidFill>
+          <a:ln w="9525">
+            <a:solidFill>
+              <a:srgbClr val="D6E2E7"/>
+            </a:solidFill>
+            <a:prstDash val="solid"/>
+          </a:ln>
+        </p:spPr>
+      </p:sp>
+      <p:sp>
+        <p:nvSpPr>
+          <p:cNvPr id="20" name="Shape 18"/>
+          <p:cNvSpPr/>
+          <p:nvPr/>
+        </p:nvSpPr>
+        <p:spPr>
+          <a:xfrm>
+            <a:off x="9280931" y="2103120"/>
+            <a:ext cx="566928" cy="566928"/>
+          </a:xfrm>
+          <a:prstGeom prst="ellipse">
+            <a:avLst/>
+          </a:prstGeom>
+          <a:solidFill>
+            <a:srgbClr val="1C5A73"/>
+          </a:solidFill>
+          <a:ln/>
+        </p:spPr>
+      </p:sp>
+      <p:sp>
+        <p:nvSpPr>
+          <p:cNvPr id="21" name="Text 19"/>
+          <p:cNvSpPr txBox="1"/>
+          <p:nvPr/>
+        </p:nvSpPr>
+        <p:spPr>
+          <a:xfrm>
+            <a:off x="9280931" y="2103120"/>
+            <a:ext cx="566928" cy="566928"/>
+          </a:xfrm>
+          <a:prstGeom prst="rect">
+            <a:avLst/>
+          </a:prstGeom>
+          <a:noFill/>
+          <a:ln/>
+        </p:spPr>
+        <p:txBody>
+          <a:bodyPr wrap="square" lIns="0" tIns="0" rIns="0" bIns="0" rtlCol="0" anchor="ctr"/>
+          <a:lstStyle/>
+          <a:p>
+            <a:pPr algn="ctr" indent="0" marL="0">
+              <a:buNone/>
+            </a:pPr>
+            <a:r>
+              <a:rPr lang="en-US" sz="1600" b="1" dirty="0">
+                <a:solidFill>
+                  <a:srgbClr val="FFFFFF"/>
+                </a:solidFill>
+                <a:latin typeface="Cambria" pitchFamily="34" charset="0"/>
+                <a:ea typeface="Cambria" pitchFamily="34" charset="-122"/>
+                <a:cs typeface="Cambria" pitchFamily="34" charset="-120"/>
+              </a:rPr>
+              <a:t>4</a:t>
+            </a:r>
+            <a:endParaRPr lang="en-US" sz="1600" dirty="0"/>
+          </a:p>
+        </p:txBody>
+      </p:sp>
+      <p:sp>
+        <p:nvSpPr>
+          <p:cNvPr id="22" name="Text 20"/>
+          <p:cNvSpPr txBox="1"/>
+          <p:nvPr/>
+        </p:nvSpPr>
+        <p:spPr>
+          <a:xfrm>
+            <a:off x="9280931" y="2788920"/>
+            <a:ext cx="2087804" cy="457200"/>
+          </a:xfrm>
+          <a:prstGeom prst="rect">
+            <a:avLst/>
+          </a:prstGeom>
+          <a:noFill/>
+          <a:ln/>
+        </p:spPr>
+        <p:txBody>
+          <a:bodyPr wrap="square" lIns="0" tIns="0" rIns="0" bIns="0" rtlCol="0" anchor="ctr"/>
+          <a:lstStyle/>
+          <a:p>
+            <a:pPr algn="l" indent="0" marL="0">
+              <a:buNone/>
+            </a:pPr>
+            <a:r>
+              <a:rPr lang="en-US" sz="1400" b="1" dirty="0">
+                <a:solidFill>
+                  <a:srgbClr val="1C5A73"/>
+                </a:solidFill>
+                <a:latin typeface="Cambria" pitchFamily="34" charset="0"/>
+                <a:ea typeface="Cambria" pitchFamily="34" charset="-122"/>
+                <a:cs typeface="Cambria" pitchFamily="34" charset="-120"/>
+              </a:rPr>
+              <a:t>Institutions</a:t>
+            </a:r>
+            <a:endParaRPr lang="en-US" sz="1400" dirty="0"/>
+          </a:p>
+        </p:txBody>
+      </p:sp>
+      <p:sp>
+        <p:nvSpPr>
+          <p:cNvPr id="23" name="Text 21"/>
+          <p:cNvSpPr txBox="1"/>
+          <p:nvPr/>
+        </p:nvSpPr>
+        <p:spPr>
+          <a:xfrm>
+            <a:off x="9280931" y="3291840"/>
+            <a:ext cx="2087804" cy="1234440"/>
+          </a:xfrm>
+          <a:prstGeom prst="rect">
+            <a:avLst/>
+          </a:prstGeom>
+          <a:noFill/>
+          <a:ln/>
+        </p:spPr>
+        <p:txBody>
+          <a:bodyPr wrap="square" lIns="0" tIns="0" rIns="0" bIns="0" rtlCol="0" anchor="t"/>
+          <a:lstStyle/>
+          <a:p>
+            <a:pPr algn="l" indent="0" marL="0">
+              <a:lnSpc>
+                <a:spcPct val="120000"/>
+              </a:lnSpc>
+              <a:buNone/>
+            </a:pPr>
+            <a:r>
+              <a:rPr lang="en-US" sz="1200" dirty="0">
+                <a:solidFill>
+                  <a:srgbClr val="31424A"/>
+                </a:solidFill>
+                <a:latin typeface="Calibri" pitchFamily="34" charset="0"/>
+                <a:ea typeface="Calibri" pitchFamily="34" charset="-122"/>
+                <a:cs typeface="Calibri" pitchFamily="34" charset="-120"/>
+              </a:rPr>
+              <a:t>Dialogue avec le ministère de l'Agriculture et les programmes de sécurité alimentaire.</a:t>
+            </a:r>
+            <a:endParaRPr lang="en-US" sz="1200" dirty="0"/>
+          </a:p>
+        </p:txBody>
+      </p:sp>
+      <p:sp>
+        <p:nvSpPr>
+          <p:cNvPr id="24" name="Text 22"/>
+          <p:cNvSpPr txBox="1"/>
+          <p:nvPr/>
+        </p:nvSpPr>
+        <p:spPr>
+          <a:xfrm>
+            <a:off x="594360" y="4983480"/>
+            <a:ext cx="11002975" cy="822960"/>
+          </a:xfrm>
+          <a:prstGeom prst="rect">
+            <a:avLst/>
+          </a:prstGeom>
+          <a:noFill/>
+          <a:ln/>
+        </p:spPr>
+        <p:txBody>
+          <a:bodyPr wrap="square" lIns="0" tIns="0" rIns="0" bIns="0" rtlCol="0" anchor="t"/>
+          <a:lstStyle/>
+          <a:p>
+            <a:pPr algn="l" indent="0" marL="0">
+              <a:lnSpc>
+                <a:spcPct val="125000"/>
+              </a:lnSpc>
+              <a:buNone/>
+            </a:pPr>
+            <a:r>
+              <a:rPr lang="en-US" sz="1250" i="1" dirty="0">
+                <a:solidFill>
+                  <a:srgbClr val="6C8089"/>
+                </a:solidFill>
+                <a:latin typeface="Calibri" pitchFamily="34" charset="0"/>
+                <a:ea typeface="Calibri" pitchFamily="34" charset="-122"/>
+                <a:cs typeface="Calibri" pitchFamily="34" charset="-120"/>
+              </a:rPr>
+              <a:t>Le cadre s'adapte au territoire : un importateur, un distributeur d'intrants ou un groupement de producteurs peut porter le partenariat.</a:t>
+            </a:r>
+            <a:endParaRPr lang="en-US" sz="1250" dirty="0"/>
+          </a:p>
+        </p:txBody>
+      </p:sp>
+      <p:sp>
+        <p:nvSpPr>
+          <p:cNvPr id="25" name="Text 23"/>
+          <p:cNvSpPr txBox="1"/>
+          <p:nvPr/>
+        </p:nvSpPr>
+        <p:spPr>
+          <a:xfrm>
+            <a:off x="502920" y="6382512"/>
+            <a:ext cx="8229600" cy="274320"/>
+          </a:xfrm>
+          <a:prstGeom prst="rect">
+            <a:avLst/>
+          </a:prstGeom>
+          <a:noFill/>
+          <a:ln/>
+        </p:spPr>
+        <p:txBody>
+          <a:bodyPr wrap="square" lIns="0" tIns="0" rIns="0" bIns="0" rtlCol="0" anchor="ctr"/>
+          <a:lstStyle/>
+          <a:p>
+            <a:pPr algn="l" indent="0" marL="0">
+              <a:buNone/>
+            </a:pPr>
+            <a:r>
+              <a:rPr lang="en-US" sz="950" dirty="0">
+                <a:solidFill>
+                  <a:srgbClr val="6C8089">
+                    <a:alpha val="80000"/>
+                  </a:srgbClr>
+                </a:solidFill>
+                <a:latin typeface="Calibri" pitchFamily="34" charset="0"/>
+                <a:ea typeface="Calibri" pitchFamily="34" charset="-122"/>
+                <a:cs typeface="Calibri" pitchFamily="34" charset="-120"/>
+              </a:rPr>
+              <a:t>Green Solutions · Dossier marché Gabon</a:t>
+            </a:r>
+            <a:endParaRPr lang="en-US" sz="950" dirty="0"/>
+          </a:p>
+        </p:txBody>
+      </p:sp>
+      <p:sp>
+        <p:nvSpPr>
+          <p:cNvPr id="26" name="Text 24"/>
+          <p:cNvSpPr txBox="1"/>
+          <p:nvPr/>
+        </p:nvSpPr>
+        <p:spPr>
+          <a:xfrm>
+            <a:off x="11140135" y="6382512"/>
+            <a:ext cx="548640" cy="274320"/>
+          </a:xfrm>
+          <a:prstGeom prst="rect">
+            <a:avLst/>
+          </a:prstGeom>
+          <a:noFill/>
+          <a:ln/>
+        </p:spPr>
+        <p:txBody>
+          <a:bodyPr wrap="square" lIns="0" tIns="0" rIns="0" bIns="0" rtlCol="0" anchor="ctr"/>
+          <a:lstStyle/>
+          <a:p>
+            <a:pPr algn="r" indent="0" marL="0">
+              <a:buNone/>
+            </a:pPr>
+            <a:r>
+              <a:rPr lang="en-US" sz="950" dirty="0">
+                <a:solidFill>
+                  <a:srgbClr val="6C8089">
+                    <a:alpha val="80000"/>
+                  </a:srgbClr>
+                </a:solidFill>
+                <a:latin typeface="Calibri" pitchFamily="34" charset="0"/>
+                <a:ea typeface="Calibri" pitchFamily="34" charset="-122"/>
+                <a:cs typeface="Calibri" pitchFamily="34" charset="-120"/>
+              </a:rPr>
+              <a:t>14</a:t>
+            </a:r>
+            <a:endParaRPr lang="en-US" sz="950" dirty="0"/>
+          </a:p>
+        </p:txBody>
+      </p:sp>
+    </p:spTree>
+  </p:cSld>
+  <p:clrMapOvr>
+    <a:masterClrMapping/>
+  </p:clrMapOvr>
+</p:sld>
+</file>
+
+<file path=ppt/slides/slide16.xml><?xml version="1.0" encoding="utf-8"?>
+<p:sld xmlns:a="http://schemas.openxmlformats.org/drawingml/2006/main" xmlns:r="http://schemas.openxmlformats.org/officeDocument/2006/relationships" xmlns:p="http://schemas.openxmlformats.org/presentationml/2006/main">
+  <p:cSld name="Slide 16">
+    <p:bg>
+      <p:bgPr>
+        <a:solidFill>
+          <a:srgbClr val="FAFBFB"/>
+        </a:solidFill>
+      </p:bgPr>
+    </p:bg>
+    <p:spTree>
+      <p:nvGrpSpPr>
+        <p:cNvPr id="1" name=""/>
+        <p:cNvGrpSpPr/>
+        <p:nvPr/>
+      </p:nvGrpSpPr>
+      <p:grpSpPr>
+        <a:xfrm>
+          <a:off x="0" y="0"/>
+          <a:ext cx="0" cy="0"/>
+          <a:chOff x="0" y="0"/>
+          <a:chExt cx="0" cy="0"/>
+        </a:xfrm>
+      </p:grpSpPr>
+      <p:sp>
+        <p:nvSpPr>
+          <p:cNvPr id="2" name="Text 0"/>
+          <p:cNvSpPr txBox="1"/>
+          <p:nvPr/>
+        </p:nvSpPr>
+        <p:spPr>
+          <a:xfrm>
+            <a:off x="594360" y="411480"/>
+            <a:ext cx="10515600" cy="274320"/>
+          </a:xfrm>
+          <a:prstGeom prst="rect">
+            <a:avLst/>
+          </a:prstGeom>
+          <a:noFill/>
+          <a:ln/>
+        </p:spPr>
+        <p:txBody>
+          <a:bodyPr wrap="square" lIns="0" tIns="0" rIns="0" bIns="0" rtlCol="0" anchor="ctr"/>
+          <a:lstStyle/>
+          <a:p>
+            <a:pPr algn="l" indent="0" marL="0">
+              <a:buNone/>
+            </a:pPr>
+            <a:r>
+              <a:rPr lang="en-US" sz="1150" b="1" spc="200" kern="0" dirty="0">
+                <a:solidFill>
+                  <a:srgbClr val="E0A33E"/>
+                </a:solidFill>
+                <a:latin typeface="Calibri" pitchFamily="34" charset="0"/>
+                <a:ea typeface="Calibri" pitchFamily="34" charset="-122"/>
+                <a:cs typeface="Calibri" pitchFamily="34" charset="-120"/>
+              </a:rPr>
+              <a:t>CE QU'IL FAUT ANTICIPER</a:t>
+            </a:r>
+            <a:endParaRPr lang="en-US" sz="1150" dirty="0"/>
+          </a:p>
+        </p:txBody>
+      </p:sp>
+      <p:sp>
+        <p:nvSpPr>
+          <p:cNvPr id="3" name="Text 1"/>
+          <p:cNvSpPr txBox="1"/>
+          <p:nvPr/>
+        </p:nvSpPr>
+        <p:spPr>
+          <a:xfrm>
+            <a:off x="594360" y="731520"/>
+            <a:ext cx="10881360" cy="731520"/>
+          </a:xfrm>
+          <a:prstGeom prst="rect">
+            <a:avLst/>
+          </a:prstGeom>
+          <a:noFill/>
+          <a:ln/>
+        </p:spPr>
+        <p:txBody>
+          <a:bodyPr wrap="square" lIns="0" tIns="0" rIns="0" bIns="0" rtlCol="0" anchor="ctr"/>
+          <a:lstStyle/>
+          <a:p>
+            <a:pPr algn="l" indent="0" marL="0">
+              <a:buNone/>
+            </a:pPr>
+            <a:r>
+              <a:rPr lang="en-US" sz="3000" b="1" dirty="0">
+                <a:solidFill>
+                  <a:srgbClr val="0E3546"/>
+                </a:solidFill>
+                <a:latin typeface="Cambria" pitchFamily="34" charset="0"/>
+                <a:ea typeface="Cambria" pitchFamily="34" charset="-122"/>
+                <a:cs typeface="Cambria" pitchFamily="34" charset="-120"/>
+              </a:rPr>
+              <a:t>Risques identifiés et réponses</a:t>
+            </a:r>
+            <a:endParaRPr lang="en-US" sz="3000" dirty="0"/>
+          </a:p>
+        </p:txBody>
+      </p:sp>
+      <p:sp>
+        <p:nvSpPr>
+          <p:cNvPr id="4" name="Text 2"/>
+          <p:cNvSpPr txBox="1"/>
+          <p:nvPr/>
+        </p:nvSpPr>
+        <p:spPr>
+          <a:xfrm>
+            <a:off x="594360" y="1783080"/>
+            <a:ext cx="5227168" cy="411480"/>
+          </a:xfrm>
+          <a:prstGeom prst="rect">
+            <a:avLst/>
+          </a:prstGeom>
+          <a:noFill/>
+          <a:ln/>
+        </p:spPr>
+        <p:txBody>
+          <a:bodyPr wrap="square" lIns="0" tIns="0" rIns="0" bIns="0" rtlCol="0" anchor="ctr"/>
+          <a:lstStyle/>
+          <a:p>
+            <a:pPr algn="l" indent="0" marL="0">
+              <a:buNone/>
+            </a:pPr>
+            <a:r>
+              <a:rPr lang="en-US" sz="1600" b="1" dirty="0">
+                <a:solidFill>
+                  <a:srgbClr val="1C5A73"/>
+                </a:solidFill>
+                <a:latin typeface="Cambria" pitchFamily="34" charset="0"/>
+                <a:ea typeface="Cambria" pitchFamily="34" charset="-122"/>
+                <a:cs typeface="Cambria" pitchFamily="34" charset="-120"/>
+              </a:rPr>
+              <a:t>Risques</a:t>
+            </a:r>
+            <a:endParaRPr lang="en-US" sz="1600" dirty="0"/>
+          </a:p>
+        </p:txBody>
+      </p:sp>
+      <p:sp>
+        <p:nvSpPr>
+          <p:cNvPr id="5" name="Text 3"/>
+          <p:cNvSpPr txBox="1"/>
+          <p:nvPr/>
+        </p:nvSpPr>
+        <p:spPr>
+          <a:xfrm>
+            <a:off x="594360" y="2286000"/>
+            <a:ext cx="5227168" cy="2468880"/>
+          </a:xfrm>
+          <a:prstGeom prst="rect">
+            <a:avLst/>
+          </a:prstGeom>
+          <a:noFill/>
+          <a:ln/>
+        </p:spPr>
+        <p:txBody>
+          <a:bodyPr wrap="square" lIns="0" tIns="0" rIns="0" bIns="0" rtlCol="0" anchor="t"/>
+          <a:lstStyle/>
+          <a:p>
+            <a:pPr algn="l" marL="342900" indent="-342900">
+              <a:lnSpc>
+                <a:spcPct val="122000"/>
+              </a:lnSpc>
+              <a:spcAft>
+                <a:spcPts val="1000"/>
+              </a:spcAft>
+              <a:buSzPct val="100000"/>
+              <a:buChar char="•"/>
+            </a:pPr>
+            <a:r>
+              <a:rPr lang="en-US" sz="1350" dirty="0">
+                <a:solidFill>
+                  <a:srgbClr val="31424A"/>
+                </a:solidFill>
+                <a:latin typeface="Calibri" pitchFamily="34" charset="0"/>
+                <a:ea typeface="Calibri" pitchFamily="34" charset="-122"/>
+                <a:cs typeface="Calibri" pitchFamily="34" charset="-120"/>
+              </a:rPr>
+              <a:t>Marché intérieur étroit : environ 2,4 millions d'habitants et des exploitations vivrières de très petite taille.</a:t>
+            </a:r>
+            <a:endParaRPr lang="en-US" sz="1350" dirty="0"/>
+          </a:p>
+          <a:p>
+            <a:pPr algn="l" marL="342900" indent="-342900">
+              <a:lnSpc>
+                <a:spcPct val="122000"/>
+              </a:lnSpc>
+              <a:spcAft>
+                <a:spcPts val="1000"/>
+              </a:spcAft>
+              <a:buSzPct val="100000"/>
+              <a:buChar char="•"/>
+            </a:pPr>
+            <a:r>
+              <a:rPr lang="en-US" sz="1350" dirty="0">
+                <a:solidFill>
+                  <a:srgbClr val="31424A"/>
+                </a:solidFill>
+                <a:latin typeface="Calibri" pitchFamily="34" charset="0"/>
+                <a:ea typeface="Calibri" pitchFamily="34" charset="-122"/>
+                <a:cs typeface="Calibri" pitchFamily="34" charset="-120"/>
+              </a:rPr>
+              <a:t>Logistique intérieure difficile en saison des pluies, qui renchérit la distribution hors des axes principaux.</a:t>
+            </a:r>
+            <a:endParaRPr lang="en-US" sz="1350" dirty="0"/>
+          </a:p>
+          <a:p>
+            <a:pPr algn="l" marL="342900" indent="-342900">
+              <a:lnSpc>
+                <a:spcPct val="122000"/>
+              </a:lnSpc>
+              <a:spcAft>
+                <a:spcPts val="1000"/>
+              </a:spcAft>
+              <a:buSzPct val="100000"/>
+              <a:buChar char="•"/>
+            </a:pPr>
+            <a:r>
+              <a:rPr lang="en-US" sz="1350" dirty="0">
+                <a:solidFill>
+                  <a:srgbClr val="31424A"/>
+                </a:solidFill>
+                <a:latin typeface="Calibri" pitchFamily="34" charset="0"/>
+                <a:ea typeface="Calibri" pitchFamily="34" charset="-122"/>
+                <a:cs typeface="Calibri" pitchFamily="34" charset="-120"/>
+              </a:rPr>
+              <a:t>Pluviométrie abondante : un essai conduit hors saison sèche masque l'intérêt du produit.</a:t>
+            </a:r>
+            <a:endParaRPr lang="en-US" sz="1350" dirty="0"/>
+          </a:p>
+          <a:p>
+            <a:pPr algn="l" marL="342900" indent="-342900">
+              <a:lnSpc>
+                <a:spcPct val="122000"/>
+              </a:lnSpc>
+              <a:spcAft>
+                <a:spcPts val="1000"/>
+              </a:spcAft>
+              <a:buSzPct val="100000"/>
+              <a:buChar char="•"/>
+            </a:pPr>
+            <a:r>
+              <a:rPr lang="en-US" sz="1350" dirty="0">
+                <a:solidFill>
+                  <a:srgbClr val="31424A"/>
+                </a:solidFill>
+                <a:latin typeface="Calibri" pitchFamily="34" charset="0"/>
+                <a:ea typeface="Calibri" pitchFamily="34" charset="-122"/>
+                <a:cs typeface="Calibri" pitchFamily="34" charset="-120"/>
+              </a:rPr>
+              <a:t>Produit peu connu, parfois confondu avec les polymères à base de sodium vendus en jardinerie.</a:t>
+            </a:r>
+            <a:endParaRPr lang="en-US" sz="1350" dirty="0"/>
+          </a:p>
+        </p:txBody>
+      </p:sp>
+      <p:sp>
+        <p:nvSpPr>
+          <p:cNvPr id="6" name="Text 4"/>
+          <p:cNvSpPr txBox="1"/>
+          <p:nvPr/>
+        </p:nvSpPr>
+        <p:spPr>
+          <a:xfrm>
+            <a:off x="6370168" y="1783080"/>
+            <a:ext cx="5227168" cy="411480"/>
+          </a:xfrm>
+          <a:prstGeom prst="rect">
+            <a:avLst/>
+          </a:prstGeom>
+          <a:noFill/>
+          <a:ln/>
+        </p:spPr>
+        <p:txBody>
+          <a:bodyPr wrap="square" lIns="0" tIns="0" rIns="0" bIns="0" rtlCol="0" anchor="ctr"/>
+          <a:lstStyle/>
+          <a:p>
+            <a:pPr algn="l" indent="0" marL="0">
+              <a:buNone/>
+            </a:pPr>
+            <a:r>
+              <a:rPr lang="en-US" sz="1600" b="1" dirty="0">
+                <a:solidFill>
+                  <a:srgbClr val="1C5A73"/>
+                </a:solidFill>
+                <a:latin typeface="Cambria" pitchFamily="34" charset="0"/>
+                <a:ea typeface="Cambria" pitchFamily="34" charset="-122"/>
+                <a:cs typeface="Cambria" pitchFamily="34" charset="-120"/>
+              </a:rPr>
+              <a:t>Réponses</a:t>
+            </a:r>
+            <a:endParaRPr lang="en-US" sz="1600" dirty="0"/>
+          </a:p>
+        </p:txBody>
+      </p:sp>
+      <p:sp>
+        <p:nvSpPr>
+          <p:cNvPr id="7" name="Text 5"/>
+          <p:cNvSpPr txBox="1"/>
+          <p:nvPr/>
+        </p:nvSpPr>
+        <p:spPr>
+          <a:xfrm>
+            <a:off x="6370168" y="2286000"/>
+            <a:ext cx="5227168" cy="2468880"/>
+          </a:xfrm>
+          <a:prstGeom prst="rect">
+            <a:avLst/>
+          </a:prstGeom>
+          <a:noFill/>
+          <a:ln/>
+        </p:spPr>
+        <p:txBody>
+          <a:bodyPr wrap="square" lIns="0" tIns="0" rIns="0" bIns="0" rtlCol="0" anchor="t"/>
+          <a:lstStyle/>
+          <a:p>
+            <a:pPr algn="l" marL="342900" indent="-342900">
+              <a:lnSpc>
+                <a:spcPct val="122000"/>
+              </a:lnSpc>
+              <a:spcAft>
+                <a:spcPts val="1000"/>
+              </a:spcAft>
+              <a:buSzPct val="100000"/>
+              <a:buChar char="•"/>
+            </a:pPr>
+            <a:r>
+              <a:rPr lang="en-US" sz="1350" dirty="0">
+                <a:solidFill>
+                  <a:srgbClr val="31424A"/>
+                </a:solidFill>
+                <a:latin typeface="Calibri" pitchFamily="34" charset="0"/>
+                <a:ea typeface="Calibri" pitchFamily="34" charset="-122"/>
+                <a:cs typeface="Calibri" pitchFamily="34" charset="-120"/>
+              </a:rPr>
+              <a:t>Concentrer les premiers volumes sur les plantations industrielles et les coopératives maraîchères péri-urbaines.</a:t>
+            </a:r>
+            <a:endParaRPr lang="en-US" sz="1350" dirty="0"/>
+          </a:p>
+          <a:p>
+            <a:pPr algn="l" marL="342900" indent="-342900">
+              <a:lnSpc>
+                <a:spcPct val="122000"/>
+              </a:lnSpc>
+              <a:spcAft>
+                <a:spcPts val="1000"/>
+              </a:spcAft>
+              <a:buSzPct val="100000"/>
+              <a:buChar char="•"/>
+            </a:pPr>
+            <a:r>
+              <a:rPr lang="en-US" sz="1350" dirty="0">
+                <a:solidFill>
+                  <a:srgbClr val="31424A"/>
+                </a:solidFill>
+                <a:latin typeface="Calibri" pitchFamily="34" charset="0"/>
+                <a:ea typeface="Calibri" pitchFamily="34" charset="-122"/>
+                <a:cs typeface="Calibri" pitchFamily="34" charset="-120"/>
+              </a:rPr>
+              <a:t>Grouper les commandes sur un conteneur via le port d'Owendo, avec un stock tampon à Libreville.</a:t>
+            </a:r>
+            <a:endParaRPr lang="en-US" sz="1350" dirty="0"/>
+          </a:p>
+          <a:p>
+            <a:pPr algn="l" marL="342900" indent="-342900">
+              <a:lnSpc>
+                <a:spcPct val="122000"/>
+              </a:lnSpc>
+              <a:spcAft>
+                <a:spcPts val="1000"/>
+              </a:spcAft>
+              <a:buSzPct val="100000"/>
+              <a:buChar char="•"/>
+            </a:pPr>
+            <a:r>
+              <a:rPr lang="en-US" sz="1350" dirty="0">
+                <a:solidFill>
+                  <a:srgbClr val="31424A"/>
+                </a:solidFill>
+                <a:latin typeface="Calibri" pitchFamily="34" charset="0"/>
+                <a:ea typeface="Calibri" pitchFamily="34" charset="-122"/>
+                <a:cs typeface="Calibri" pitchFamily="34" charset="-120"/>
+              </a:rPr>
+              <a:t>Programmer systématiquement l'essai de mai à octobre, pour couvrir la grande saison sèche.</a:t>
+            </a:r>
+            <a:endParaRPr lang="en-US" sz="1350" dirty="0"/>
+          </a:p>
+          <a:p>
+            <a:pPr algn="l" marL="342900" indent="-342900">
+              <a:lnSpc>
+                <a:spcPct val="122000"/>
+              </a:lnSpc>
+              <a:spcAft>
+                <a:spcPts val="1000"/>
+              </a:spcAft>
+              <a:buSzPct val="100000"/>
+              <a:buChar char="•"/>
+            </a:pPr>
+            <a:r>
+              <a:rPr lang="en-US" sz="1350" dirty="0">
+                <a:solidFill>
+                  <a:srgbClr val="31424A"/>
+                </a:solidFill>
+                <a:latin typeface="Calibri" pitchFamily="34" charset="0"/>
+                <a:ea typeface="Calibri" pitchFamily="34" charset="-122"/>
+                <a:cs typeface="Calibri" pitchFamily="34" charset="-120"/>
+              </a:rPr>
+              <a:t>Documenter la formulation potassique, sans sodium, compatible avec les cultures alimentaires.</a:t>
+            </a:r>
+            <a:endParaRPr lang="en-US" sz="1350" dirty="0"/>
+          </a:p>
+        </p:txBody>
+      </p:sp>
+      <p:sp>
+        <p:nvSpPr>
+          <p:cNvPr id="8" name="Shape 6"/>
+          <p:cNvSpPr/>
+          <p:nvPr/>
+        </p:nvSpPr>
+        <p:spPr>
+          <a:xfrm>
+            <a:off x="594360" y="4846320"/>
+            <a:ext cx="11002975" cy="960120"/>
+          </a:xfrm>
+          <a:prstGeom prst="roundRect">
+            <a:avLst>
+              <a:gd name="adj" fmla="val 7619"/>
+            </a:avLst>
+          </a:prstGeom>
+          <a:solidFill>
+            <a:srgbClr val="EDF3F5"/>
+          </a:solidFill>
+          <a:ln w="9525">
+            <a:solidFill>
+              <a:srgbClr val="D6E2E7"/>
+            </a:solidFill>
+            <a:prstDash val="solid"/>
+          </a:ln>
+        </p:spPr>
+      </p:sp>
+      <p:sp>
+        <p:nvSpPr>
+          <p:cNvPr id="9" name="Text 7"/>
+          <p:cNvSpPr txBox="1"/>
+          <p:nvPr/>
+        </p:nvSpPr>
+        <p:spPr>
+          <a:xfrm>
+            <a:off x="822960" y="4983480"/>
+            <a:ext cx="10545775" cy="713232"/>
+          </a:xfrm>
+          <a:prstGeom prst="rect">
+            <a:avLst/>
+          </a:prstGeom>
+          <a:noFill/>
+          <a:ln/>
+        </p:spPr>
+        <p:txBody>
+          <a:bodyPr wrap="square" lIns="0" tIns="0" rIns="0" bIns="0" rtlCol="0" anchor="t"/>
+          <a:lstStyle/>
+          <a:p>
+            <a:pPr algn="l" indent="0" marL="0">
+              <a:lnSpc>
+                <a:spcPct val="118000"/>
+              </a:lnSpc>
+              <a:buNone/>
+            </a:pPr>
+            <a:r>
+              <a:rPr lang="en-US" sz="1100" dirty="0">
+                <a:solidFill>
+                  <a:srgbClr val="6C8089"/>
+                </a:solidFill>
+                <a:latin typeface="Calibri" pitchFamily="34" charset="0"/>
+                <a:ea typeface="Calibri" pitchFamily="34" charset="-122"/>
+                <a:cs typeface="Calibri" pitchFamily="34" charset="-120"/>
+              </a:rPr>
+              <a:t>Analyse acrylamide (laboratoire Polymex, ISO 9001, teneur inférieure à 3,0 µg/g) et screening REACH / SVHC (SGS) disponibles sur demande, ainsi que le certificat SOHISCERT valable jusqu'au 4 septembre 2027.</a:t>
+            </a:r>
+            <a:endParaRPr lang="en-US" sz="1100" dirty="0"/>
+          </a:p>
+        </p:txBody>
+      </p:sp>
+      <p:sp>
+        <p:nvSpPr>
+          <p:cNvPr id="10" name="Text 8"/>
+          <p:cNvSpPr txBox="1"/>
+          <p:nvPr/>
+        </p:nvSpPr>
+        <p:spPr>
+          <a:xfrm>
+            <a:off x="502920" y="6382512"/>
+            <a:ext cx="8229600" cy="274320"/>
+          </a:xfrm>
+          <a:prstGeom prst="rect">
+            <a:avLst/>
+          </a:prstGeom>
+          <a:noFill/>
+          <a:ln/>
+        </p:spPr>
+        <p:txBody>
+          <a:bodyPr wrap="square" lIns="0" tIns="0" rIns="0" bIns="0" rtlCol="0" anchor="ctr"/>
+          <a:lstStyle/>
+          <a:p>
+            <a:pPr algn="l" indent="0" marL="0">
+              <a:buNone/>
+            </a:pPr>
+            <a:r>
+              <a:rPr lang="en-US" sz="950" dirty="0">
+                <a:solidFill>
+                  <a:srgbClr val="6C8089">
+                    <a:alpha val="80000"/>
+                  </a:srgbClr>
+                </a:solidFill>
+                <a:latin typeface="Calibri" pitchFamily="34" charset="0"/>
+                <a:ea typeface="Calibri" pitchFamily="34" charset="-122"/>
+                <a:cs typeface="Calibri" pitchFamily="34" charset="-120"/>
+              </a:rPr>
+              <a:t>Green Solutions · Dossier marché Gabon</a:t>
+            </a:r>
+            <a:endParaRPr lang="en-US" sz="950" dirty="0"/>
+          </a:p>
+        </p:txBody>
+      </p:sp>
+      <p:sp>
+        <p:nvSpPr>
+          <p:cNvPr id="11" name="Text 9"/>
+          <p:cNvSpPr txBox="1"/>
+          <p:nvPr/>
+        </p:nvSpPr>
+        <p:spPr>
+          <a:xfrm>
+            <a:off x="11140135" y="6382512"/>
+            <a:ext cx="548640" cy="274320"/>
+          </a:xfrm>
+          <a:prstGeom prst="rect">
+            <a:avLst/>
+          </a:prstGeom>
+          <a:noFill/>
+          <a:ln/>
+        </p:spPr>
+        <p:txBody>
+          <a:bodyPr wrap="square" lIns="0" tIns="0" rIns="0" bIns="0" rtlCol="0" anchor="ctr"/>
+          <a:lstStyle/>
+          <a:p>
+            <a:pPr algn="r" indent="0" marL="0">
+              <a:buNone/>
+            </a:pPr>
+            <a:r>
+              <a:rPr lang="en-US" sz="950" dirty="0">
+                <a:solidFill>
+                  <a:srgbClr val="6C8089">
+                    <a:alpha val="80000"/>
+                  </a:srgbClr>
+                </a:solidFill>
+                <a:latin typeface="Calibri" pitchFamily="34" charset="0"/>
+                <a:ea typeface="Calibri" pitchFamily="34" charset="-122"/>
+                <a:cs typeface="Calibri" pitchFamily="34" charset="-120"/>
+              </a:rPr>
+              <a:t>15</a:t>
+            </a:r>
+            <a:endParaRPr lang="en-US" sz="950" dirty="0"/>
+          </a:p>
+        </p:txBody>
+      </p:sp>
+    </p:spTree>
+  </p:cSld>
+  <p:clrMapOvr>
+    <a:masterClrMapping/>
+  </p:clrMapOvr>
+</p:sld>
+</file>
+
+<file path=ppt/slides/slide17.xml><?xml version="1.0" encoding="utf-8"?>
+<p:sld xmlns:a="http://schemas.openxmlformats.org/drawingml/2006/main" xmlns:r="http://schemas.openxmlformats.org/officeDocument/2006/relationships" xmlns:p="http://schemas.openxmlformats.org/presentationml/2006/main">
+  <p:cSld name="Slide 17">
+    <p:bg>
+      <p:bgPr>
+        <a:solidFill>
+          <a:srgbClr val="FAFBFB"/>
+        </a:solidFill>
+      </p:bgPr>
+    </p:bg>
+    <p:spTree>
+      <p:nvGrpSpPr>
+        <p:cNvPr id="1" name=""/>
+        <p:cNvGrpSpPr/>
+        <p:nvPr/>
+      </p:nvGrpSpPr>
+      <p:grpSpPr>
+        <a:xfrm>
+          <a:off x="0" y="0"/>
+          <a:ext cx="0" cy="0"/>
+          <a:chOff x="0" y="0"/>
+          <a:chExt cx="0" cy="0"/>
+        </a:xfrm>
+      </p:grpSpPr>
+      <p:sp>
+        <p:nvSpPr>
+          <p:cNvPr id="2" name="Text 0"/>
+          <p:cNvSpPr txBox="1"/>
+          <p:nvPr/>
+        </p:nvSpPr>
+        <p:spPr>
+          <a:xfrm>
+            <a:off x="594360" y="411480"/>
+            <a:ext cx="10515600" cy="274320"/>
+          </a:xfrm>
+          <a:prstGeom prst="rect">
+            <a:avLst/>
+          </a:prstGeom>
+          <a:noFill/>
+          <a:ln/>
+        </p:spPr>
+        <p:txBody>
+          <a:bodyPr wrap="square" lIns="0" tIns="0" rIns="0" bIns="0" rtlCol="0" anchor="ctr"/>
+          <a:lstStyle/>
+          <a:p>
+            <a:pPr algn="l" indent="0" marL="0">
+              <a:buNone/>
+            </a:pPr>
+            <a:r>
+              <a:rPr lang="en-US" sz="1150" b="1" spc="200" kern="0" dirty="0">
+                <a:solidFill>
+                  <a:srgbClr val="E0A33E"/>
+                </a:solidFill>
+                <a:latin typeface="Calibri" pitchFamily="34" charset="0"/>
+                <a:ea typeface="Calibri" pitchFamily="34" charset="-122"/>
+                <a:cs typeface="Calibri" pitchFamily="34" charset="-120"/>
+              </a:rPr>
+              <a:t>Sources</a:t>
+            </a:r>
+            <a:endParaRPr lang="en-US" sz="1150" dirty="0"/>
+          </a:p>
+        </p:txBody>
+      </p:sp>
+      <p:sp>
+        <p:nvSpPr>
+          <p:cNvPr id="3" name="Text 1"/>
+          <p:cNvSpPr txBox="1"/>
+          <p:nvPr/>
+        </p:nvSpPr>
+        <p:spPr>
+          <a:xfrm>
+            <a:off x="594360" y="731520"/>
+            <a:ext cx="10881360" cy="731520"/>
+          </a:xfrm>
+          <a:prstGeom prst="rect">
+            <a:avLst/>
+          </a:prstGeom>
+          <a:noFill/>
+          <a:ln/>
+        </p:spPr>
+        <p:txBody>
+          <a:bodyPr wrap="square" lIns="0" tIns="0" rIns="0" bIns="0" rtlCol="0" anchor="ctr"/>
+          <a:lstStyle/>
+          <a:p>
+            <a:pPr algn="l" indent="0" marL="0">
+              <a:buNone/>
+            </a:pPr>
+            <a:r>
+              <a:rPr lang="en-US" sz="3000" b="1" dirty="0">
+                <a:solidFill>
+                  <a:srgbClr val="0E3546"/>
+                </a:solidFill>
+                <a:latin typeface="Cambria" pitchFamily="34" charset="0"/>
+                <a:ea typeface="Cambria" pitchFamily="34" charset="-122"/>
+                <a:cs typeface="Cambria" pitchFamily="34" charset="-120"/>
+              </a:rPr>
+              <a:t>Sources et hypothèses de travail</a:t>
+            </a:r>
+            <a:endParaRPr lang="en-US" sz="3000" dirty="0"/>
+          </a:p>
+        </p:txBody>
+      </p:sp>
+      <p:sp>
+        <p:nvSpPr>
+          <p:cNvPr id="4" name="Text 2"/>
+          <p:cNvSpPr txBox="1"/>
+          <p:nvPr/>
+        </p:nvSpPr>
+        <p:spPr>
+          <a:xfrm>
+            <a:off x="594360" y="1783080"/>
+            <a:ext cx="5227168" cy="411480"/>
+          </a:xfrm>
+          <a:prstGeom prst="rect">
+            <a:avLst/>
+          </a:prstGeom>
+          <a:noFill/>
+          <a:ln/>
+        </p:spPr>
+        <p:txBody>
+          <a:bodyPr wrap="square" lIns="0" tIns="0" rIns="0" bIns="0" rtlCol="0" anchor="ctr"/>
+          <a:lstStyle/>
+          <a:p>
+            <a:pPr algn="l" indent="0" marL="0">
+              <a:buNone/>
+            </a:pPr>
+            <a:r>
+              <a:rPr lang="en-US" sz="1600" b="1" dirty="0">
+                <a:solidFill>
+                  <a:srgbClr val="1C5A73"/>
+                </a:solidFill>
+                <a:latin typeface="Cambria" pitchFamily="34" charset="0"/>
+                <a:ea typeface="Cambria" pitchFamily="34" charset="-122"/>
+                <a:cs typeface="Cambria" pitchFamily="34" charset="-120"/>
+              </a:rPr>
+              <a:t>Sources principales</a:t>
+            </a:r>
+            <a:endParaRPr lang="en-US" sz="1600" dirty="0"/>
+          </a:p>
+        </p:txBody>
+      </p:sp>
+      <p:sp>
+        <p:nvSpPr>
+          <p:cNvPr id="5" name="Text 3"/>
+          <p:cNvSpPr txBox="1"/>
+          <p:nvPr/>
+        </p:nvSpPr>
+        <p:spPr>
+          <a:xfrm>
+            <a:off x="594360" y="2286000"/>
+            <a:ext cx="5227168" cy="2468880"/>
+          </a:xfrm>
+          <a:prstGeom prst="rect">
+            <a:avLst/>
+          </a:prstGeom>
+          <a:noFill/>
+          <a:ln/>
+        </p:spPr>
+        <p:txBody>
+          <a:bodyPr wrap="square" lIns="0" tIns="0" rIns="0" bIns="0" rtlCol="0" anchor="t"/>
+          <a:lstStyle/>
+          <a:p>
+            <a:pPr algn="l" marL="342900" indent="-342900">
+              <a:lnSpc>
+                <a:spcPct val="122000"/>
+              </a:lnSpc>
+              <a:spcAft>
+                <a:spcPts val="1000"/>
+              </a:spcAft>
+              <a:buSzPct val="100000"/>
+              <a:buChar char="•"/>
+            </a:pPr>
+            <a:r>
+              <a:rPr lang="en-US" sz="1350" dirty="0">
+                <a:solidFill>
+                  <a:srgbClr val="31424A"/>
+                </a:solidFill>
+                <a:latin typeface="Calibri" pitchFamily="34" charset="0"/>
+                <a:ea typeface="Calibri" pitchFamily="34" charset="-122"/>
+                <a:cs typeface="Calibri" pitchFamily="34" charset="-120"/>
+              </a:rPr>
+              <a:t>Direction générale de la statistique : comptes nationaux, commerce extérieur.</a:t>
+            </a:r>
+            <a:endParaRPr lang="en-US" sz="1350" dirty="0"/>
+          </a:p>
+          <a:p>
+            <a:pPr algn="l" marL="342900" indent="-342900">
+              <a:lnSpc>
+                <a:spcPct val="122000"/>
+              </a:lnSpc>
+              <a:spcAft>
+                <a:spcPts val="1000"/>
+              </a:spcAft>
+              <a:buSzPct val="100000"/>
+              <a:buChar char="•"/>
+            </a:pPr>
+            <a:r>
+              <a:rPr lang="en-US" sz="1350" dirty="0">
+                <a:solidFill>
+                  <a:srgbClr val="31424A"/>
+                </a:solidFill>
+                <a:latin typeface="Calibri" pitchFamily="34" charset="0"/>
+                <a:ea typeface="Calibri" pitchFamily="34" charset="-122"/>
+                <a:cs typeface="Calibri" pitchFamily="34" charset="-120"/>
+              </a:rPr>
+              <a:t>Ministère de l'Agriculture : programme GRAINE, statistiques agricoles.</a:t>
+            </a:r>
+            <a:endParaRPr lang="en-US" sz="1350" dirty="0"/>
+          </a:p>
+          <a:p>
+            <a:pPr algn="l" marL="342900" indent="-342900">
+              <a:lnSpc>
+                <a:spcPct val="122000"/>
+              </a:lnSpc>
+              <a:spcAft>
+                <a:spcPts val="1000"/>
+              </a:spcAft>
+              <a:buSzPct val="100000"/>
+              <a:buChar char="•"/>
+            </a:pPr>
+            <a:r>
+              <a:rPr lang="en-US" sz="1350" dirty="0">
+                <a:solidFill>
+                  <a:srgbClr val="31424A"/>
+                </a:solidFill>
+                <a:latin typeface="Calibri" pitchFamily="34" charset="0"/>
+                <a:ea typeface="Calibri" pitchFamily="34" charset="-122"/>
+                <a:cs typeface="Calibri" pitchFamily="34" charset="-120"/>
+              </a:rPr>
+              <a:t>Banque africaine de développement : profil agricole du Gabon.</a:t>
+            </a:r>
+            <a:endParaRPr lang="en-US" sz="1350" dirty="0"/>
+          </a:p>
+          <a:p>
+            <a:pPr algn="l" marL="342900" indent="-342900">
+              <a:lnSpc>
+                <a:spcPct val="122000"/>
+              </a:lnSpc>
+              <a:spcAft>
+                <a:spcPts val="1000"/>
+              </a:spcAft>
+              <a:buSzPct val="100000"/>
+              <a:buChar char="•"/>
+            </a:pPr>
+            <a:r>
+              <a:rPr lang="en-US" sz="1350" dirty="0">
+                <a:solidFill>
+                  <a:srgbClr val="31424A"/>
+                </a:solidFill>
+                <a:latin typeface="Calibri" pitchFamily="34" charset="0"/>
+                <a:ea typeface="Calibri" pitchFamily="34" charset="-122"/>
+                <a:cs typeface="Calibri" pitchFamily="34" charset="-120"/>
+              </a:rPr>
+              <a:t>FAO (FAOSTAT, AQUASTAT) et Banque mondiale (WDI).</a:t>
+            </a:r>
+            <a:endParaRPr lang="en-US" sz="1350" dirty="0"/>
+          </a:p>
+        </p:txBody>
+      </p:sp>
+      <p:sp>
+        <p:nvSpPr>
+          <p:cNvPr id="6" name="Text 4"/>
+          <p:cNvSpPr txBox="1"/>
+          <p:nvPr/>
+        </p:nvSpPr>
+        <p:spPr>
+          <a:xfrm>
+            <a:off x="6370168" y="1783080"/>
+            <a:ext cx="5227168" cy="411480"/>
+          </a:xfrm>
+          <a:prstGeom prst="rect">
+            <a:avLst/>
+          </a:prstGeom>
+          <a:noFill/>
+          <a:ln/>
+        </p:spPr>
+        <p:txBody>
+          <a:bodyPr wrap="square" lIns="0" tIns="0" rIns="0" bIns="0" rtlCol="0" anchor="ctr"/>
+          <a:lstStyle/>
+          <a:p>
+            <a:pPr algn="l" indent="0" marL="0">
+              <a:buNone/>
+            </a:pPr>
+            <a:r>
+              <a:rPr lang="en-US" sz="1600" b="1" dirty="0">
+                <a:solidFill>
+                  <a:srgbClr val="1C5A73"/>
+                </a:solidFill>
+                <a:latin typeface="Cambria" pitchFamily="34" charset="0"/>
+                <a:ea typeface="Cambria" pitchFamily="34" charset="-122"/>
+                <a:cs typeface="Cambria" pitchFamily="34" charset="-120"/>
+              </a:rPr>
+              <a:t>Hypothèses de travail</a:t>
+            </a:r>
+            <a:endParaRPr lang="en-US" sz="1600" dirty="0"/>
+          </a:p>
+        </p:txBody>
+      </p:sp>
+      <p:sp>
+        <p:nvSpPr>
+          <p:cNvPr id="7" name="Text 5"/>
+          <p:cNvSpPr txBox="1"/>
+          <p:nvPr/>
+        </p:nvSpPr>
+        <p:spPr>
+          <a:xfrm>
+            <a:off x="6370168" y="2286000"/>
+            <a:ext cx="5227168" cy="2468880"/>
+          </a:xfrm>
+          <a:prstGeom prst="rect">
+            <a:avLst/>
+          </a:prstGeom>
+          <a:noFill/>
+          <a:ln/>
+        </p:spPr>
+        <p:txBody>
+          <a:bodyPr wrap="square" lIns="0" tIns="0" rIns="0" bIns="0" rtlCol="0" anchor="t"/>
+          <a:lstStyle/>
+          <a:p>
+            <a:pPr algn="l" marL="342900" indent="-342900">
+              <a:lnSpc>
+                <a:spcPct val="122000"/>
+              </a:lnSpc>
+              <a:spcAft>
+                <a:spcPts val="1000"/>
+              </a:spcAft>
+              <a:buSzPct val="100000"/>
+              <a:buChar char="•"/>
+            </a:pPr>
+            <a:r>
+              <a:rPr lang="en-US" sz="1350" dirty="0">
+                <a:solidFill>
+                  <a:srgbClr val="31424A"/>
+                </a:solidFill>
+                <a:latin typeface="Calibri" pitchFamily="34" charset="0"/>
+                <a:ea typeface="Calibri" pitchFamily="34" charset="-122"/>
+                <a:cs typeface="Calibri" pitchFamily="34" charset="-120"/>
+              </a:rPr>
+              <a:t>Les chiffres sont des ordres de grandeur arrondis, tirés des dernières données publiques disponibles.</a:t>
+            </a:r>
+            <a:endParaRPr lang="en-US" sz="1350" dirty="0"/>
+          </a:p>
+          <a:p>
+            <a:pPr algn="l" marL="342900" indent="-342900">
+              <a:lnSpc>
+                <a:spcPct val="122000"/>
+              </a:lnSpc>
+              <a:spcAft>
+                <a:spcPts val="1000"/>
+              </a:spcAft>
+              <a:buSzPct val="100000"/>
+              <a:buChar char="•"/>
+            </a:pPr>
+            <a:r>
+              <a:rPr lang="en-US" sz="1350" dirty="0">
+                <a:solidFill>
+                  <a:srgbClr val="31424A"/>
+                </a:solidFill>
+                <a:latin typeface="Calibri" pitchFamily="34" charset="0"/>
+                <a:ea typeface="Calibri" pitchFamily="34" charset="-122"/>
+                <a:cs typeface="Calibri" pitchFamily="34" charset="-120"/>
+              </a:rPr>
+              <a:t>Les gains d'eau et de rendement sont indicatifs et varient selon le sol, le climat et la culture.</a:t>
+            </a:r>
+            <a:endParaRPr lang="en-US" sz="1350" dirty="0"/>
+          </a:p>
+          <a:p>
+            <a:pPr algn="l" marL="342900" indent="-342900">
+              <a:lnSpc>
+                <a:spcPct val="122000"/>
+              </a:lnSpc>
+              <a:spcAft>
+                <a:spcPts val="1000"/>
+              </a:spcAft>
+              <a:buSzPct val="100000"/>
+              <a:buChar char="•"/>
+            </a:pPr>
+            <a:r>
+              <a:rPr lang="en-US" sz="1350" dirty="0">
+                <a:solidFill>
+                  <a:srgbClr val="31424A"/>
+                </a:solidFill>
+                <a:latin typeface="Calibri" pitchFamily="34" charset="0"/>
+                <a:ea typeface="Calibri" pitchFamily="34" charset="-122"/>
+                <a:cs typeface="Calibri" pitchFamily="34" charset="-120"/>
+              </a:rPr>
+              <a:t>Document de travail commercial : chiffres à actualiser avant toute soumission officielle.</a:t>
+            </a:r>
+            <a:endParaRPr lang="en-US" sz="1350" dirty="0"/>
+          </a:p>
+        </p:txBody>
+      </p:sp>
+      <p:sp>
+        <p:nvSpPr>
+          <p:cNvPr id="8" name="Shape 6"/>
+          <p:cNvSpPr/>
+          <p:nvPr/>
+        </p:nvSpPr>
+        <p:spPr>
+          <a:xfrm>
+            <a:off x="594360" y="4846320"/>
+            <a:ext cx="11002975" cy="960120"/>
+          </a:xfrm>
+          <a:prstGeom prst="roundRect">
+            <a:avLst>
+              <a:gd name="adj" fmla="val 7619"/>
+            </a:avLst>
+          </a:prstGeom>
+          <a:solidFill>
+            <a:srgbClr val="EDF3F5"/>
+          </a:solidFill>
+          <a:ln w="9525">
+            <a:solidFill>
+              <a:srgbClr val="D6E2E7"/>
+            </a:solidFill>
+            <a:prstDash val="solid"/>
+          </a:ln>
+        </p:spPr>
+      </p:sp>
+      <p:sp>
+        <p:nvSpPr>
+          <p:cNvPr id="9" name="Text 7"/>
+          <p:cNvSpPr txBox="1"/>
+          <p:nvPr/>
+        </p:nvSpPr>
+        <p:spPr>
+          <a:xfrm>
+            <a:off x="822960" y="4983480"/>
+            <a:ext cx="10545775" cy="713232"/>
+          </a:xfrm>
+          <a:prstGeom prst="rect">
+            <a:avLst/>
+          </a:prstGeom>
+          <a:noFill/>
+          <a:ln/>
+        </p:spPr>
+        <p:txBody>
+          <a:bodyPr wrap="square" lIns="0" tIns="0" rIns="0" bIns="0" rtlCol="0" anchor="t"/>
+          <a:lstStyle/>
+          <a:p>
+            <a:pPr algn="l" indent="0" marL="0">
+              <a:lnSpc>
+                <a:spcPct val="118000"/>
+              </a:lnSpc>
+              <a:buNone/>
+            </a:pPr>
+            <a:r>
+              <a:rPr lang="en-US" sz="1100" dirty="0">
+                <a:solidFill>
+                  <a:srgbClr val="6C8089"/>
+                </a:solidFill>
+                <a:latin typeface="Calibri" pitchFamily="34" charset="0"/>
+                <a:ea typeface="Calibri" pitchFamily="34" charset="-122"/>
+                <a:cs typeface="Calibri" pitchFamily="34" charset="-120"/>
+              </a:rPr>
+              <a:t>Rapports d'essais, certificats (SOHISCERT, analyses Polymex et SGS) et fiches techniques : disponibles sur demande.</a:t>
+            </a:r>
+            <a:endParaRPr lang="en-US" sz="1100" dirty="0"/>
+          </a:p>
+        </p:txBody>
+      </p:sp>
+      <p:sp>
+        <p:nvSpPr>
+          <p:cNvPr id="10" name="Text 8"/>
+          <p:cNvSpPr txBox="1"/>
+          <p:nvPr/>
+        </p:nvSpPr>
+        <p:spPr>
+          <a:xfrm>
+            <a:off x="502920" y="6382512"/>
+            <a:ext cx="8229600" cy="274320"/>
+          </a:xfrm>
+          <a:prstGeom prst="rect">
+            <a:avLst/>
+          </a:prstGeom>
+          <a:noFill/>
+          <a:ln/>
+        </p:spPr>
+        <p:txBody>
+          <a:bodyPr wrap="square" lIns="0" tIns="0" rIns="0" bIns="0" rtlCol="0" anchor="ctr"/>
+          <a:lstStyle/>
+          <a:p>
+            <a:pPr algn="l" indent="0" marL="0">
+              <a:buNone/>
+            </a:pPr>
+            <a:r>
+              <a:rPr lang="en-US" sz="950" dirty="0">
+                <a:solidFill>
+                  <a:srgbClr val="6C8089">
+                    <a:alpha val="80000"/>
+                  </a:srgbClr>
+                </a:solidFill>
+                <a:latin typeface="Calibri" pitchFamily="34" charset="0"/>
+                <a:ea typeface="Calibri" pitchFamily="34" charset="-122"/>
+                <a:cs typeface="Calibri" pitchFamily="34" charset="-120"/>
+              </a:rPr>
+              <a:t>Green Solutions · Dossier marché Gabon</a:t>
+            </a:r>
+            <a:endParaRPr lang="en-US" sz="950" dirty="0"/>
+          </a:p>
+        </p:txBody>
+      </p:sp>
+      <p:sp>
+        <p:nvSpPr>
+          <p:cNvPr id="11" name="Text 9"/>
+          <p:cNvSpPr txBox="1"/>
+          <p:nvPr/>
+        </p:nvSpPr>
+        <p:spPr>
+          <a:xfrm>
+            <a:off x="11140135" y="6382512"/>
+            <a:ext cx="548640" cy="274320"/>
+          </a:xfrm>
+          <a:prstGeom prst="rect">
+            <a:avLst/>
+          </a:prstGeom>
+          <a:noFill/>
+          <a:ln/>
+        </p:spPr>
+        <p:txBody>
+          <a:bodyPr wrap="square" lIns="0" tIns="0" rIns="0" bIns="0" rtlCol="0" anchor="ctr"/>
+          <a:lstStyle/>
+          <a:p>
+            <a:pPr algn="r" indent="0" marL="0">
+              <a:buNone/>
+            </a:pPr>
+            <a:r>
+              <a:rPr lang="en-US" sz="950" dirty="0">
+                <a:solidFill>
+                  <a:srgbClr val="6C8089">
+                    <a:alpha val="80000"/>
+                  </a:srgbClr>
+                </a:solidFill>
+                <a:latin typeface="Calibri" pitchFamily="34" charset="0"/>
+                <a:ea typeface="Calibri" pitchFamily="34" charset="-122"/>
+                <a:cs typeface="Calibri" pitchFamily="34" charset="-120"/>
+              </a:rPr>
+              <a:t>16</a:t>
+            </a:r>
+            <a:endParaRPr lang="en-US" sz="950" dirty="0"/>
+          </a:p>
+        </p:txBody>
+      </p:sp>
+    </p:spTree>
+  </p:cSld>
+  <p:clrMapOvr>
+    <a:masterClrMapping/>
+  </p:clrMapOvr>
+</p:sld>
+</file>
+
+<file path=ppt/slides/slide18.xml><?xml version="1.0" encoding="utf-8"?>
+<p:sld xmlns:a="http://schemas.openxmlformats.org/drawingml/2006/main" xmlns:r="http://schemas.openxmlformats.org/officeDocument/2006/relationships" xmlns:p="http://schemas.openxmlformats.org/presentationml/2006/main">
+  <p:cSld name="Slide 18">
     <p:spTree>
       <p:nvGrpSpPr>
         <p:cNvPr id="1" name=""/>
@@ -3944,7 +9643,7 @@
                 <a:ea typeface="Calibri" pitchFamily="34" charset="-122"/>
                 <a:cs typeface="Calibri" pitchFamily="34" charset="-120"/>
               </a:rPr>
-              <a:t>10</a:t>
+              <a:t>17</a:t>
             </a:r>
             <a:endParaRPr lang="en-US" sz="950" dirty="0"/>
           </a:p>
@@ -5423,7 +11122,7 @@
                 <a:ea typeface="Calibri" pitchFamily="34" charset="-122"/>
                 <a:cs typeface="Calibri" pitchFamily="34" charset="-120"/>
               </a:rPr>
-              <a:t>LES FILIÈRES</a:t>
+              <a:t>ÉCONOMIE ET SÉCURITÉ ALIMENTAIRE</a:t>
             </a:r>
             <a:endParaRPr lang="en-US" sz="1150" dirty="0"/>
           </a:p>
@@ -5462,42 +11161,26 @@
                 <a:ea typeface="Cambria" pitchFamily="34" charset="-122"/>
                 <a:cs typeface="Cambria" pitchFamily="34" charset="-120"/>
               </a:rPr>
-              <a:t>Cinq productions structurent l'offre nationale</a:t>
+              <a:t>Une économie pétrolière qui veut nourrir ses villes</a:t>
             </a:r>
             <a:endParaRPr lang="en-US" sz="3000" dirty="0"/>
           </a:p>
         </p:txBody>
       </p:sp>
-      <p:graphicFrame>
-        <p:nvGraphicFramePr>
-          <p:cNvPr id="4" name="Chart 0" descr=""/>
-          <p:cNvGraphicFramePr/>
-          <p:nvPr/>
-        </p:nvGraphicFramePr>
-        <p:xfrm>
-          <a:off x="594360" y="1783080"/>
-          <a:ext cx="7360920" cy="3977640"/>
-        </p:xfrm>
-        <a:graphic xmlns:a="http://schemas.openxmlformats.org/drawingml/2006/main">
-          <a:graphicData uri="http://schemas.openxmlformats.org/drawingml/2006/chart">
-            <c:chart xmlns:c="http://schemas.openxmlformats.org/drawingml/2006/chart" r:id="rId1"/>
-          </a:graphicData>
-        </a:graphic>
-      </p:graphicFrame>
-      <p:sp>
-        <p:nvSpPr>
-          <p:cNvPr id="5" name="Shape 2"/>
+      <p:sp>
+        <p:nvSpPr>
+          <p:cNvPr id="4" name="Shape 2"/>
           <p:cNvSpPr/>
           <p:nvPr/>
         </p:nvSpPr>
         <p:spPr>
           <a:xfrm>
-            <a:off x="8275320" y="1783080"/>
-            <a:ext cx="3291840" cy="3977640"/>
+            <a:off x="594360" y="1874520"/>
+            <a:ext cx="2545004" cy="2514600"/>
           </a:xfrm>
           <a:prstGeom prst="roundRect">
             <a:avLst>
-              <a:gd name="adj" fmla="val 2778"/>
+              <a:gd name="adj" fmla="val 3636"/>
             </a:avLst>
           </a:prstGeom>
           <a:solidFill>
@@ -5513,14 +11196,14 @@
       </p:sp>
       <p:sp>
         <p:nvSpPr>
-          <p:cNvPr id="6" name="Text 3"/>
-          <p:cNvSpPr txBox="1"/>
-          <p:nvPr/>
-        </p:nvSpPr>
-        <p:spPr>
-          <a:xfrm>
-            <a:off x="8503920" y="2011680"/>
-            <a:ext cx="2834640" cy="457200"/>
+          <p:cNvPr id="5" name="Text 3"/>
+          <p:cNvSpPr txBox="1"/>
+          <p:nvPr/>
+        </p:nvSpPr>
+        <p:spPr>
+          <a:xfrm>
+            <a:off x="777240" y="2148840"/>
+            <a:ext cx="2179244" cy="960120"/>
           </a:xfrm>
           <a:prstGeom prst="rect">
             <a:avLst/>
@@ -5532,11 +11215,11 @@
           <a:bodyPr wrap="square" lIns="0" tIns="0" rIns="0" bIns="0" rtlCol="0" anchor="ctr"/>
           <a:lstStyle/>
           <a:p>
-            <a:pPr algn="l" indent="0" marL="0">
-              <a:buNone/>
-            </a:pPr>
-            <a:r>
-              <a:rPr lang="en-US" sz="1300" b="1" dirty="0">
+            <a:pPr algn="ctr" indent="0" marL="0">
+              <a:buNone/>
+            </a:pPr>
+            <a:r>
+              <a:rPr lang="en-US" sz="3800" b="1" dirty="0">
                 <a:solidFill>
                   <a:srgbClr val="1C5A73"/>
                 </a:solidFill>
@@ -5544,22 +11227,388 @@
                 <a:ea typeface="Cambria" pitchFamily="34" charset="-122"/>
                 <a:cs typeface="Cambria" pitchFamily="34" charset="-120"/>
               </a:rPr>
-              <a:t>Lecture</a:t>
-            </a:r>
-            <a:endParaRPr lang="en-US" sz="1300" dirty="0"/>
-          </a:p>
-        </p:txBody>
-      </p:sp>
-      <p:sp>
-        <p:nvSpPr>
-          <p:cNvPr id="7" name="Text 4"/>
-          <p:cNvSpPr txBox="1"/>
-          <p:nvPr/>
-        </p:nvSpPr>
-        <p:spPr>
-          <a:xfrm>
-            <a:off x="8503920" y="2560320"/>
-            <a:ext cx="2834640" cy="3017520"/>
+              <a:t>≈ 90 %</a:t>
+            </a:r>
+            <a:endParaRPr lang="en-US" sz="3800" dirty="0"/>
+          </a:p>
+        </p:txBody>
+      </p:sp>
+      <p:sp>
+        <p:nvSpPr>
+          <p:cNvPr id="6" name="Text 4"/>
+          <p:cNvSpPr txBox="1"/>
+          <p:nvPr/>
+        </p:nvSpPr>
+        <p:spPr>
+          <a:xfrm>
+            <a:off x="795528" y="3154680"/>
+            <a:ext cx="2142668" cy="1051560"/>
+          </a:xfrm>
+          <a:prstGeom prst="rect">
+            <a:avLst/>
+          </a:prstGeom>
+          <a:noFill/>
+          <a:ln/>
+        </p:spPr>
+        <p:txBody>
+          <a:bodyPr wrap="square" lIns="0" tIns="0" rIns="0" bIns="0" rtlCol="0" anchor="t"/>
+          <a:lstStyle/>
+          <a:p>
+            <a:pPr algn="ctr" indent="0" marL="0">
+              <a:lnSpc>
+                <a:spcPct val="118000"/>
+              </a:lnSpc>
+              <a:buNone/>
+            </a:pPr>
+            <a:r>
+              <a:rPr lang="en-US" sz="1250" dirty="0">
+                <a:solidFill>
+                  <a:srgbClr val="31424A"/>
+                </a:solidFill>
+                <a:latin typeface="Calibri" pitchFamily="34" charset="0"/>
+                <a:ea typeface="Calibri" pitchFamily="34" charset="-122"/>
+                <a:cs typeface="Calibri" pitchFamily="34" charset="-120"/>
+              </a:rPr>
+              <a:t>de la population vit en ville, près de la moitié à Libreville</a:t>
+            </a:r>
+            <a:endParaRPr lang="en-US" sz="1250" dirty="0"/>
+          </a:p>
+        </p:txBody>
+      </p:sp>
+      <p:sp>
+        <p:nvSpPr>
+          <p:cNvPr id="7" name="Shape 5"/>
+          <p:cNvSpPr/>
+          <p:nvPr/>
+        </p:nvSpPr>
+        <p:spPr>
+          <a:xfrm>
+            <a:off x="3413684" y="1874520"/>
+            <a:ext cx="2545004" cy="2514600"/>
+          </a:xfrm>
+          <a:prstGeom prst="roundRect">
+            <a:avLst>
+              <a:gd name="adj" fmla="val 3636"/>
+            </a:avLst>
+          </a:prstGeom>
+          <a:solidFill>
+            <a:srgbClr val="EDF3F5"/>
+          </a:solidFill>
+          <a:ln w="9525">
+            <a:solidFill>
+              <a:srgbClr val="D6E2E7"/>
+            </a:solidFill>
+            <a:prstDash val="solid"/>
+          </a:ln>
+        </p:spPr>
+      </p:sp>
+      <p:sp>
+        <p:nvSpPr>
+          <p:cNvPr id="8" name="Text 6"/>
+          <p:cNvSpPr txBox="1"/>
+          <p:nvPr/>
+        </p:nvSpPr>
+        <p:spPr>
+          <a:xfrm>
+            <a:off x="3596564" y="2148840"/>
+            <a:ext cx="2179244" cy="960120"/>
+          </a:xfrm>
+          <a:prstGeom prst="rect">
+            <a:avLst/>
+          </a:prstGeom>
+          <a:noFill/>
+          <a:ln/>
+        </p:spPr>
+        <p:txBody>
+          <a:bodyPr wrap="square" lIns="0" tIns="0" rIns="0" bIns="0" rtlCol="0" anchor="ctr"/>
+          <a:lstStyle/>
+          <a:p>
+            <a:pPr algn="ctr" indent="0" marL="0">
+              <a:buNone/>
+            </a:pPr>
+            <a:r>
+              <a:rPr lang="en-US" sz="3800" b="1" dirty="0">
+                <a:solidFill>
+                  <a:srgbClr val="1C5A73"/>
+                </a:solidFill>
+                <a:latin typeface="Cambria" pitchFamily="34" charset="0"/>
+                <a:ea typeface="Cambria" pitchFamily="34" charset="-122"/>
+                <a:cs typeface="Cambria" pitchFamily="34" charset="-120"/>
+              </a:rPr>
+              <a:t>≈ 88 %</a:t>
+            </a:r>
+            <a:endParaRPr lang="en-US" sz="3800" dirty="0"/>
+          </a:p>
+        </p:txBody>
+      </p:sp>
+      <p:sp>
+        <p:nvSpPr>
+          <p:cNvPr id="9" name="Text 7"/>
+          <p:cNvSpPr txBox="1"/>
+          <p:nvPr/>
+        </p:nvSpPr>
+        <p:spPr>
+          <a:xfrm>
+            <a:off x="3614852" y="3154680"/>
+            <a:ext cx="2142668" cy="1051560"/>
+          </a:xfrm>
+          <a:prstGeom prst="rect">
+            <a:avLst/>
+          </a:prstGeom>
+          <a:noFill/>
+          <a:ln/>
+        </p:spPr>
+        <p:txBody>
+          <a:bodyPr wrap="square" lIns="0" tIns="0" rIns="0" bIns="0" rtlCol="0" anchor="t"/>
+          <a:lstStyle/>
+          <a:p>
+            <a:pPr algn="ctr" indent="0" marL="0">
+              <a:lnSpc>
+                <a:spcPct val="118000"/>
+              </a:lnSpc>
+              <a:buNone/>
+            </a:pPr>
+            <a:r>
+              <a:rPr lang="en-US" sz="1250" dirty="0">
+                <a:solidFill>
+                  <a:srgbClr val="31424A"/>
+                </a:solidFill>
+                <a:latin typeface="Calibri" pitchFamily="34" charset="0"/>
+                <a:ea typeface="Calibri" pitchFamily="34" charset="-122"/>
+                <a:cs typeface="Calibri" pitchFamily="34" charset="-120"/>
+              </a:rPr>
+              <a:t>du territoire couvert par la forêt</a:t>
+            </a:r>
+            <a:endParaRPr lang="en-US" sz="1250" dirty="0"/>
+          </a:p>
+        </p:txBody>
+      </p:sp>
+      <p:sp>
+        <p:nvSpPr>
+          <p:cNvPr id="10" name="Shape 8"/>
+          <p:cNvSpPr/>
+          <p:nvPr/>
+        </p:nvSpPr>
+        <p:spPr>
+          <a:xfrm>
+            <a:off x="6233008" y="1874520"/>
+            <a:ext cx="2545004" cy="2514600"/>
+          </a:xfrm>
+          <a:prstGeom prst="roundRect">
+            <a:avLst>
+              <a:gd name="adj" fmla="val 3636"/>
+            </a:avLst>
+          </a:prstGeom>
+          <a:solidFill>
+            <a:srgbClr val="EDF3F5"/>
+          </a:solidFill>
+          <a:ln w="9525">
+            <a:solidFill>
+              <a:srgbClr val="D6E2E7"/>
+            </a:solidFill>
+            <a:prstDash val="solid"/>
+          </a:ln>
+        </p:spPr>
+      </p:sp>
+      <p:sp>
+        <p:nvSpPr>
+          <p:cNvPr id="11" name="Text 9"/>
+          <p:cNvSpPr txBox="1"/>
+          <p:nvPr/>
+        </p:nvSpPr>
+        <p:spPr>
+          <a:xfrm>
+            <a:off x="6415888" y="2148840"/>
+            <a:ext cx="2179244" cy="960120"/>
+          </a:xfrm>
+          <a:prstGeom prst="rect">
+            <a:avLst/>
+          </a:prstGeom>
+          <a:noFill/>
+          <a:ln/>
+        </p:spPr>
+        <p:txBody>
+          <a:bodyPr wrap="square" lIns="0" tIns="0" rIns="0" bIns="0" rtlCol="0" anchor="ctr"/>
+          <a:lstStyle/>
+          <a:p>
+            <a:pPr algn="ctr" indent="0" marL="0">
+              <a:buNone/>
+            </a:pPr>
+            <a:r>
+              <a:rPr lang="en-US" sz="3800" b="1" dirty="0">
+                <a:solidFill>
+                  <a:srgbClr val="1C5A73"/>
+                </a:solidFill>
+                <a:latin typeface="Cambria" pitchFamily="34" charset="0"/>
+                <a:ea typeface="Cambria" pitchFamily="34" charset="-122"/>
+                <a:cs typeface="Cambria" pitchFamily="34" charset="-120"/>
+              </a:rPr>
+              <a:t>≈ 500 Md</a:t>
+            </a:r>
+            <a:endParaRPr lang="en-US" sz="3800" dirty="0"/>
+          </a:p>
+        </p:txBody>
+      </p:sp>
+      <p:sp>
+        <p:nvSpPr>
+          <p:cNvPr id="12" name="Text 10"/>
+          <p:cNvSpPr txBox="1"/>
+          <p:nvPr/>
+        </p:nvSpPr>
+        <p:spPr>
+          <a:xfrm>
+            <a:off x="6434176" y="3154680"/>
+            <a:ext cx="2142668" cy="1051560"/>
+          </a:xfrm>
+          <a:prstGeom prst="rect">
+            <a:avLst/>
+          </a:prstGeom>
+          <a:noFill/>
+          <a:ln/>
+        </p:spPr>
+        <p:txBody>
+          <a:bodyPr wrap="square" lIns="0" tIns="0" rIns="0" bIns="0" rtlCol="0" anchor="t"/>
+          <a:lstStyle/>
+          <a:p>
+            <a:pPr algn="ctr" indent="0" marL="0">
+              <a:lnSpc>
+                <a:spcPct val="118000"/>
+              </a:lnSpc>
+              <a:buNone/>
+            </a:pPr>
+            <a:r>
+              <a:rPr lang="en-US" sz="1250" dirty="0">
+                <a:solidFill>
+                  <a:srgbClr val="31424A"/>
+                </a:solidFill>
+                <a:latin typeface="Calibri" pitchFamily="34" charset="0"/>
+                <a:ea typeface="Calibri" pitchFamily="34" charset="-122"/>
+                <a:cs typeface="Calibri" pitchFamily="34" charset="-120"/>
+              </a:rPr>
+              <a:t>de francs CFA d'importations alimentaires par an</a:t>
+            </a:r>
+            <a:endParaRPr lang="en-US" sz="1250" dirty="0"/>
+          </a:p>
+        </p:txBody>
+      </p:sp>
+      <p:sp>
+        <p:nvSpPr>
+          <p:cNvPr id="13" name="Shape 11"/>
+          <p:cNvSpPr/>
+          <p:nvPr/>
+        </p:nvSpPr>
+        <p:spPr>
+          <a:xfrm>
+            <a:off x="9052331" y="1874520"/>
+            <a:ext cx="2545004" cy="2514600"/>
+          </a:xfrm>
+          <a:prstGeom prst="roundRect">
+            <a:avLst>
+              <a:gd name="adj" fmla="val 3636"/>
+            </a:avLst>
+          </a:prstGeom>
+          <a:solidFill>
+            <a:srgbClr val="EDF3F5"/>
+          </a:solidFill>
+          <a:ln w="9525">
+            <a:solidFill>
+              <a:srgbClr val="D6E2E7"/>
+            </a:solidFill>
+            <a:prstDash val="solid"/>
+          </a:ln>
+        </p:spPr>
+      </p:sp>
+      <p:sp>
+        <p:nvSpPr>
+          <p:cNvPr id="14" name="Text 12"/>
+          <p:cNvSpPr txBox="1"/>
+          <p:nvPr/>
+        </p:nvSpPr>
+        <p:spPr>
+          <a:xfrm>
+            <a:off x="9235211" y="2148840"/>
+            <a:ext cx="2179244" cy="960120"/>
+          </a:xfrm>
+          <a:prstGeom prst="rect">
+            <a:avLst/>
+          </a:prstGeom>
+          <a:noFill/>
+          <a:ln/>
+        </p:spPr>
+        <p:txBody>
+          <a:bodyPr wrap="square" lIns="0" tIns="0" rIns="0" bIns="0" rtlCol="0" anchor="ctr"/>
+          <a:lstStyle/>
+          <a:p>
+            <a:pPr algn="ctr" indent="0" marL="0">
+              <a:buNone/>
+            </a:pPr>
+            <a:r>
+              <a:rPr lang="en-US" sz="3800" b="1" dirty="0">
+                <a:solidFill>
+                  <a:srgbClr val="1C5A73"/>
+                </a:solidFill>
+                <a:latin typeface="Cambria" pitchFamily="34" charset="0"/>
+                <a:ea typeface="Cambria" pitchFamily="34" charset="-122"/>
+                <a:cs typeface="Cambria" pitchFamily="34" charset="-120"/>
+              </a:rPr>
+              <a:t>2014</a:t>
+            </a:r>
+            <a:endParaRPr lang="en-US" sz="3800" dirty="0"/>
+          </a:p>
+        </p:txBody>
+      </p:sp>
+      <p:sp>
+        <p:nvSpPr>
+          <p:cNvPr id="15" name="Text 13"/>
+          <p:cNvSpPr txBox="1"/>
+          <p:nvPr/>
+        </p:nvSpPr>
+        <p:spPr>
+          <a:xfrm>
+            <a:off x="9253499" y="3154680"/>
+            <a:ext cx="2142668" cy="1051560"/>
+          </a:xfrm>
+          <a:prstGeom prst="rect">
+            <a:avLst/>
+          </a:prstGeom>
+          <a:noFill/>
+          <a:ln/>
+        </p:spPr>
+        <p:txBody>
+          <a:bodyPr wrap="square" lIns="0" tIns="0" rIns="0" bIns="0" rtlCol="0" anchor="t"/>
+          <a:lstStyle/>
+          <a:p>
+            <a:pPr algn="ctr" indent="0" marL="0">
+              <a:lnSpc>
+                <a:spcPct val="118000"/>
+              </a:lnSpc>
+              <a:buNone/>
+            </a:pPr>
+            <a:r>
+              <a:rPr lang="en-US" sz="1250" dirty="0">
+                <a:solidFill>
+                  <a:srgbClr val="31424A"/>
+                </a:solidFill>
+                <a:latin typeface="Calibri" pitchFamily="34" charset="0"/>
+                <a:ea typeface="Calibri" pitchFamily="34" charset="-122"/>
+                <a:cs typeface="Calibri" pitchFamily="34" charset="-120"/>
+              </a:rPr>
+              <a:t>lancement du programme GRAINE de relance agricole</a:t>
+            </a:r>
+            <a:endParaRPr lang="en-US" sz="1250" dirty="0"/>
+          </a:p>
+        </p:txBody>
+      </p:sp>
+      <p:sp>
+        <p:nvSpPr>
+          <p:cNvPr id="16" name="Text 14"/>
+          <p:cNvSpPr txBox="1"/>
+          <p:nvPr/>
+        </p:nvSpPr>
+        <p:spPr>
+          <a:xfrm>
+            <a:off x="594360" y="4709160"/>
+            <a:ext cx="11002975" cy="1097280"/>
           </a:xfrm>
           <a:prstGeom prst="rect">
             <a:avLst/>
@@ -5573,12 +11622,12 @@
           <a:p>
             <a:pPr algn="l" indent="0" marL="0">
               <a:lnSpc>
-                <a:spcPct val="125000"/>
+                <a:spcPct val="130000"/>
               </a:lnSpc>
               <a:buNone/>
             </a:pPr>
             <a:r>
-              <a:rPr lang="en-US" sz="1200" dirty="0">
+              <a:rPr lang="en-US" sz="1350" dirty="0">
                 <a:solidFill>
                   <a:srgbClr val="31424A"/>
                 </a:solidFill>
@@ -5586,44 +11635,15 @@
                 <a:ea typeface="Calibri" pitchFamily="34" charset="-122"/>
                 <a:cs typeface="Calibri" pitchFamily="34" charset="-120"/>
               </a:rPr>
-              <a:t>Manioc et banane plantain forment la base alimentaire, cultivés en petites parcelles pluviales.</a:t>
-            </a:r>
-            <a:endParaRPr lang="en-US" sz="1200" dirty="0"/>
-          </a:p>
-          <a:p>
-            <a:pPr algn="l" indent="0" marL="0">
-              <a:lnSpc>
-                <a:spcPct val="125000"/>
-              </a:lnSpc>
-              <a:buNone/>
-            </a:pPr>
-            <a:endParaRPr lang="en-US" sz="1200" dirty="0"/>
-          </a:p>
-          <a:p>
-            <a:pPr algn="l" indent="0" marL="0">
-              <a:lnSpc>
-                <a:spcPct val="125000"/>
-              </a:lnSpc>
-              <a:buNone/>
-            </a:pPr>
-            <a:r>
-              <a:rPr lang="en-US" sz="1200" dirty="0">
-                <a:solidFill>
-                  <a:srgbClr val="31424A"/>
-                </a:solidFill>
-                <a:latin typeface="Calibri" pitchFamily="34" charset="0"/>
-                <a:ea typeface="Calibri" pitchFamily="34" charset="-122"/>
-                <a:cs typeface="Calibri" pitchFamily="34" charset="-120"/>
-              </a:rPr>
-              <a:t>Huile de palme, canne et hévéa sont conduits en plantations industrielles, sur des périmètres suivis et équipés : ce sont les interlocuteurs les plus rapides à convaincre par la mesure.</a:t>
-            </a:r>
-            <a:endParaRPr lang="en-US" sz="1200" dirty="0"/>
-          </a:p>
-        </p:txBody>
-      </p:sp>
-      <p:sp>
-        <p:nvSpPr>
-          <p:cNvPr id="8" name="Text 5"/>
+              <a:t>Le pétrole, le manganèse et le bois font l'essentiel des exportations, tandis que l'assiette des Gabonais vient largement de l'étranger. Les plans de diversification et le programme GRAINE misent sur une agriculture vivrière et périurbaine capable de réduire cette dépendance.</a:t>
+            </a:r>
+            <a:endParaRPr lang="en-US" sz="1350" dirty="0"/>
+          </a:p>
+        </p:txBody>
+      </p:sp>
+      <p:sp>
+        <p:nvSpPr>
+          <p:cNvPr id="17" name="Text 15"/>
           <p:cNvSpPr txBox="1"/>
           <p:nvPr/>
         </p:nvSpPr>
@@ -5664,7 +11684,7 @@
       </p:sp>
       <p:sp>
         <p:nvSpPr>
-          <p:cNvPr id="9" name="Text 6"/>
+          <p:cNvPr id="18" name="Text 16"/>
           <p:cNvSpPr txBox="1"/>
           <p:nvPr/>
         </p:nvSpPr>
@@ -5768,7 +11788,7 @@
                 <a:ea typeface="Calibri" pitchFamily="34" charset="-122"/>
                 <a:cs typeface="Calibri" pitchFamily="34" charset="-120"/>
               </a:rPr>
-              <a:t>NOTRE RÉPONSE</a:t>
+              <a:t>LES FILIÈRES</a:t>
             </a:r>
             <a:endParaRPr lang="en-US" sz="1150" dirty="0"/>
           </a:p>
@@ -5807,340 +11827,42 @@
                 <a:ea typeface="Cambria" pitchFamily="34" charset="-122"/>
                 <a:cs typeface="Cambria" pitchFamily="34" charset="-120"/>
               </a:rPr>
-              <a:t>Retenir l'eau, nourrir sans lessiver</a:t>
+              <a:t>Cinq productions structurent l'offre nationale</a:t>
             </a:r>
             <a:endParaRPr lang="en-US" sz="3000" dirty="0"/>
           </a:p>
         </p:txBody>
       </p:sp>
-      <p:sp>
-        <p:nvSpPr>
-          <p:cNvPr id="4" name="Text 2"/>
-          <p:cNvSpPr txBox="1"/>
-          <p:nvPr/>
-        </p:nvSpPr>
-        <p:spPr>
-          <a:xfrm>
-            <a:off x="594360" y="1783080"/>
-            <a:ext cx="5227168" cy="411480"/>
-          </a:xfrm>
-          <a:prstGeom prst="rect">
-            <a:avLst/>
-          </a:prstGeom>
-          <a:noFill/>
-          <a:ln/>
-        </p:spPr>
-        <p:txBody>
-          <a:bodyPr wrap="square" lIns="0" tIns="0" rIns="0" bIns="0" rtlCol="0" anchor="ctr"/>
-          <a:lstStyle/>
-          <a:p>
-            <a:pPr algn="l" indent="0" marL="0">
-              <a:buNone/>
-            </a:pPr>
-            <a:r>
-              <a:rPr lang="en-US" sz="1600" b="1" dirty="0">
-                <a:solidFill>
-                  <a:srgbClr val="1C5A73"/>
-                </a:solidFill>
-                <a:latin typeface="Cambria" pitchFamily="34" charset="0"/>
-                <a:ea typeface="Cambria" pitchFamily="34" charset="-122"/>
-                <a:cs typeface="Cambria" pitchFamily="34" charset="-120"/>
-              </a:rPr>
-              <a:t>EVERGREEN® — retenir l'eau</a:t>
-            </a:r>
-            <a:endParaRPr lang="en-US" sz="1600" dirty="0"/>
-          </a:p>
-        </p:txBody>
-      </p:sp>
-      <p:sp>
-        <p:nvSpPr>
-          <p:cNvPr id="5" name="Text 3"/>
-          <p:cNvSpPr txBox="1"/>
-          <p:nvPr/>
-        </p:nvSpPr>
-        <p:spPr>
-          <a:xfrm>
-            <a:off x="594360" y="2286000"/>
-            <a:ext cx="5227168" cy="2468880"/>
-          </a:xfrm>
-          <a:prstGeom prst="rect">
-            <a:avLst/>
-          </a:prstGeom>
-          <a:noFill/>
-          <a:ln/>
-        </p:spPr>
-        <p:txBody>
-          <a:bodyPr wrap="square" lIns="0" tIns="0" rIns="0" bIns="0" rtlCol="0" anchor="t"/>
-          <a:lstStyle/>
-          <a:p>
-            <a:pPr algn="l" marL="342900" indent="-342900">
-              <a:lnSpc>
-                <a:spcPct val="122000"/>
-              </a:lnSpc>
-              <a:spcAft>
-                <a:spcPts val="1000"/>
-              </a:spcAft>
-              <a:buSzPct val="100000"/>
-              <a:buChar char="•"/>
-            </a:pPr>
-            <a:r>
-              <a:rPr lang="en-US" sz="1350" dirty="0">
-                <a:solidFill>
-                  <a:srgbClr val="31424A"/>
-                </a:solidFill>
-                <a:latin typeface="Calibri" pitchFamily="34" charset="0"/>
-                <a:ea typeface="Calibri" pitchFamily="34" charset="-122"/>
-                <a:cs typeface="Calibri" pitchFamily="34" charset="-120"/>
-              </a:rPr>
-              <a:t>Hydro-rétenteur à base de potassium, placé dans la zone racinaire à la plantation ou à la reprise.</a:t>
-            </a:r>
-            <a:endParaRPr lang="en-US" sz="1350" dirty="0"/>
-          </a:p>
-          <a:p>
-            <a:pPr algn="l" marL="342900" indent="-342900">
-              <a:lnSpc>
-                <a:spcPct val="122000"/>
-              </a:lnSpc>
-              <a:spcAft>
-                <a:spcPts val="1000"/>
-              </a:spcAft>
-              <a:buSzPct val="100000"/>
-              <a:buChar char="•"/>
-            </a:pPr>
-            <a:r>
-              <a:rPr lang="en-US" sz="1350" dirty="0">
-                <a:solidFill>
-                  <a:srgbClr val="31424A"/>
-                </a:solidFill>
-                <a:latin typeface="Calibri" pitchFamily="34" charset="0"/>
-                <a:ea typeface="Calibri" pitchFamily="34" charset="-122"/>
-                <a:cs typeface="Calibri" pitchFamily="34" charset="-120"/>
-              </a:rPr>
-              <a:t>Capte l'eau de pluie ou d'irrigation et la restitue progressivement, ce qui lisse l'écart entre une averse tropicale et quatre mois sans pluie.</a:t>
-            </a:r>
-            <a:endParaRPr lang="en-US" sz="1350" dirty="0"/>
-          </a:p>
-          <a:p>
-            <a:pPr algn="l" marL="342900" indent="-342900">
-              <a:lnSpc>
-                <a:spcPct val="122000"/>
-              </a:lnSpc>
-              <a:spcAft>
-                <a:spcPts val="1000"/>
-              </a:spcAft>
-              <a:buSzPct val="100000"/>
-              <a:buChar char="•"/>
-            </a:pPr>
-            <a:r>
-              <a:rPr lang="en-US" sz="1350" dirty="0">
-                <a:solidFill>
-                  <a:srgbClr val="31424A"/>
-                </a:solidFill>
-                <a:latin typeface="Calibri" pitchFamily="34" charset="0"/>
-                <a:ea typeface="Calibri" pitchFamily="34" charset="-122"/>
-                <a:cs typeface="Calibri" pitchFamily="34" charset="-120"/>
-              </a:rPr>
-              <a:t>Capacité d'absorption de l'ordre de 300 fois son poids ; durée d'effet utile de 3 à 4 ans dans le sol.</a:t>
-            </a:r>
-            <a:endParaRPr lang="en-US" sz="1350" dirty="0"/>
-          </a:p>
-          <a:p>
-            <a:pPr algn="l" marL="342900" indent="-342900">
-              <a:lnSpc>
-                <a:spcPct val="122000"/>
-              </a:lnSpc>
-              <a:spcAft>
-                <a:spcPts val="1000"/>
-              </a:spcAft>
-              <a:buSzPct val="100000"/>
-              <a:buChar char="•"/>
-            </a:pPr>
-            <a:r>
-              <a:rPr lang="en-US" sz="1350" dirty="0">
-                <a:solidFill>
-                  <a:srgbClr val="31424A"/>
-                </a:solidFill>
-                <a:latin typeface="Calibri" pitchFamily="34" charset="0"/>
-                <a:ea typeface="Calibri" pitchFamily="34" charset="-122"/>
-                <a:cs typeface="Calibri" pitchFamily="34" charset="-120"/>
-              </a:rPr>
-              <a:t>Se dégrade de 20 à 25 % par an, sans accumulation ni risque de surdosage.</a:t>
-            </a:r>
-            <a:endParaRPr lang="en-US" sz="1350" dirty="0"/>
-          </a:p>
-        </p:txBody>
-      </p:sp>
-      <p:sp>
-        <p:nvSpPr>
-          <p:cNvPr id="6" name="Text 4"/>
-          <p:cNvSpPr txBox="1"/>
-          <p:nvPr/>
-        </p:nvSpPr>
-        <p:spPr>
-          <a:xfrm>
-            <a:off x="6370168" y="1783080"/>
-            <a:ext cx="5227168" cy="411480"/>
-          </a:xfrm>
-          <a:prstGeom prst="rect">
-            <a:avLst/>
-          </a:prstGeom>
-          <a:noFill/>
-          <a:ln/>
-        </p:spPr>
-        <p:txBody>
-          <a:bodyPr wrap="square" lIns="0" tIns="0" rIns="0" bIns="0" rtlCol="0" anchor="ctr"/>
-          <a:lstStyle/>
-          <a:p>
-            <a:pPr algn="l" indent="0" marL="0">
-              <a:buNone/>
-            </a:pPr>
-            <a:r>
-              <a:rPr lang="en-US" sz="1600" b="1" dirty="0">
-                <a:solidFill>
-                  <a:srgbClr val="1C5A73"/>
-                </a:solidFill>
-                <a:latin typeface="Cambria" pitchFamily="34" charset="0"/>
-                <a:ea typeface="Cambria" pitchFamily="34" charset="-122"/>
-                <a:cs typeface="Cambria" pitchFamily="34" charset="-120"/>
-              </a:rPr>
-              <a:t>ECOFERT® — nourrir sans épuiser</a:t>
-            </a:r>
-            <a:endParaRPr lang="en-US" sz="1600" dirty="0"/>
-          </a:p>
-        </p:txBody>
-      </p:sp>
-      <p:sp>
-        <p:nvSpPr>
-          <p:cNvPr id="7" name="Text 5"/>
-          <p:cNvSpPr txBox="1"/>
-          <p:nvPr/>
-        </p:nvSpPr>
-        <p:spPr>
-          <a:xfrm>
-            <a:off x="6370168" y="2286000"/>
-            <a:ext cx="5227168" cy="2468880"/>
-          </a:xfrm>
-          <a:prstGeom prst="rect">
-            <a:avLst/>
-          </a:prstGeom>
-          <a:noFill/>
-          <a:ln/>
-        </p:spPr>
-        <p:txBody>
-          <a:bodyPr wrap="square" lIns="0" tIns="0" rIns="0" bIns="0" rtlCol="0" anchor="t"/>
-          <a:lstStyle/>
-          <a:p>
-            <a:pPr algn="l" marL="342900" indent="-342900">
-              <a:lnSpc>
-                <a:spcPct val="122000"/>
-              </a:lnSpc>
-              <a:spcAft>
-                <a:spcPts val="1000"/>
-              </a:spcAft>
-              <a:buSzPct val="100000"/>
-              <a:buChar char="•"/>
-            </a:pPr>
-            <a:r>
-              <a:rPr lang="en-US" sz="1350" dirty="0">
-                <a:solidFill>
-                  <a:srgbClr val="31424A"/>
-                </a:solidFill>
-                <a:latin typeface="Calibri" pitchFamily="34" charset="0"/>
-                <a:ea typeface="Calibri" pitchFamily="34" charset="-122"/>
-                <a:cs typeface="Calibri" pitchFamily="34" charset="-120"/>
-              </a:rPr>
-              <a:t>Fertilisant en microdoses d'acides aminés, azote, phosphore et potassium, issu de ressources renouvelables.</a:t>
-            </a:r>
-            <a:endParaRPr lang="en-US" sz="1350" dirty="0"/>
-          </a:p>
-          <a:p>
-            <a:pPr algn="l" marL="342900" indent="-342900">
-              <a:lnSpc>
-                <a:spcPct val="122000"/>
-              </a:lnSpc>
-              <a:spcAft>
-                <a:spcPts val="1000"/>
-              </a:spcAft>
-              <a:buSzPct val="100000"/>
-              <a:buChar char="•"/>
-            </a:pPr>
-            <a:r>
-              <a:rPr lang="en-US" sz="1350" dirty="0">
-                <a:solidFill>
-                  <a:srgbClr val="31424A"/>
-                </a:solidFill>
-                <a:latin typeface="Calibri" pitchFamily="34" charset="0"/>
-                <a:ea typeface="Calibri" pitchFamily="34" charset="-122"/>
-                <a:cs typeface="Calibri" pitchFamily="34" charset="-120"/>
-              </a:rPr>
-              <a:t>Non chélatant : il n'appauvrit pas le complexe argilo-humique, déjà fragile sur sols ferralitiques acides.</a:t>
-            </a:r>
-            <a:endParaRPr lang="en-US" sz="1350" dirty="0"/>
-          </a:p>
-          <a:p>
-            <a:pPr algn="l" marL="342900" indent="-342900">
-              <a:lnSpc>
-                <a:spcPct val="122000"/>
-              </a:lnSpc>
-              <a:spcAft>
-                <a:spcPts val="1000"/>
-              </a:spcAft>
-              <a:buSzPct val="100000"/>
-              <a:buChar char="•"/>
-            </a:pPr>
-            <a:r>
-              <a:rPr lang="en-US" sz="1350" dirty="0">
-                <a:solidFill>
-                  <a:srgbClr val="31424A"/>
-                </a:solidFill>
-                <a:latin typeface="Calibri" pitchFamily="34" charset="0"/>
-                <a:ea typeface="Calibri" pitchFamily="34" charset="-122"/>
-                <a:cs typeface="Calibri" pitchFamily="34" charset="-120"/>
-              </a:rPr>
-              <a:t>Certifié SOHISCERT et EU Bio, utilisé dans 60 pays — argument utile pour les filières palme et hévéa exportatrices.</a:t>
-            </a:r>
-            <a:endParaRPr lang="en-US" sz="1350" dirty="0"/>
-          </a:p>
-          <a:p>
-            <a:pPr algn="l" marL="342900" indent="-342900">
-              <a:lnSpc>
-                <a:spcPct val="122000"/>
-              </a:lnSpc>
-              <a:spcAft>
-                <a:spcPts val="1000"/>
-              </a:spcAft>
-              <a:buSzPct val="100000"/>
-              <a:buChar char="•"/>
-            </a:pPr>
-            <a:r>
-              <a:rPr lang="en-US" sz="1350" dirty="0">
-                <a:solidFill>
-                  <a:srgbClr val="31424A"/>
-                </a:solidFill>
-                <a:latin typeface="Calibri" pitchFamily="34" charset="0"/>
-                <a:ea typeface="Calibri" pitchFamily="34" charset="-122"/>
-                <a:cs typeface="Calibri" pitchFamily="34" charset="-120"/>
-              </a:rPr>
-              <a:t>1 à 4 flacons de 140 ml par hectare, compatibles avec un pulvérisateur à dos comme avec la fertirrigation.</a:t>
-            </a:r>
-            <a:endParaRPr lang="en-US" sz="1350" dirty="0"/>
-          </a:p>
-        </p:txBody>
-      </p:sp>
-      <p:sp>
-        <p:nvSpPr>
-          <p:cNvPr id="8" name="Shape 6"/>
+      <p:graphicFrame>
+        <p:nvGraphicFramePr>
+          <p:cNvPr id="4" name="Chart 0" descr=""/>
+          <p:cNvGraphicFramePr/>
+          <p:nvPr/>
+        </p:nvGraphicFramePr>
+        <p:xfrm>
+          <a:off x="594360" y="1783080"/>
+          <a:ext cx="7360920" cy="3977640"/>
+        </p:xfrm>
+        <a:graphic xmlns:a="http://schemas.openxmlformats.org/drawingml/2006/main">
+          <a:graphicData uri="http://schemas.openxmlformats.org/drawingml/2006/chart">
+            <c:chart xmlns:c="http://schemas.openxmlformats.org/drawingml/2006/chart" r:id="rId1"/>
+          </a:graphicData>
+        </a:graphic>
+      </p:graphicFrame>
+      <p:sp>
+        <p:nvSpPr>
+          <p:cNvPr id="5" name="Shape 2"/>
           <p:cNvSpPr/>
           <p:nvPr/>
         </p:nvSpPr>
         <p:spPr>
           <a:xfrm>
-            <a:off x="594360" y="4846320"/>
-            <a:ext cx="11002975" cy="960120"/>
+            <a:off x="8275320" y="1783080"/>
+            <a:ext cx="3291840" cy="3977640"/>
           </a:xfrm>
           <a:prstGeom prst="roundRect">
             <a:avLst>
-              <a:gd name="adj" fmla="val 7619"/>
+              <a:gd name="adj" fmla="val 2778"/>
             </a:avLst>
           </a:prstGeom>
           <a:solidFill>
@@ -6156,14 +11878,53 @@
       </p:sp>
       <p:sp>
         <p:nvSpPr>
-          <p:cNvPr id="9" name="Text 7"/>
-          <p:cNvSpPr txBox="1"/>
-          <p:nvPr/>
-        </p:nvSpPr>
-        <p:spPr>
-          <a:xfrm>
-            <a:off x="822960" y="4983480"/>
-            <a:ext cx="10545775" cy="713232"/>
+          <p:cNvPr id="6" name="Text 3"/>
+          <p:cNvSpPr txBox="1"/>
+          <p:nvPr/>
+        </p:nvSpPr>
+        <p:spPr>
+          <a:xfrm>
+            <a:off x="8503920" y="2011680"/>
+            <a:ext cx="2834640" cy="457200"/>
+          </a:xfrm>
+          <a:prstGeom prst="rect">
+            <a:avLst/>
+          </a:prstGeom>
+          <a:noFill/>
+          <a:ln/>
+        </p:spPr>
+        <p:txBody>
+          <a:bodyPr wrap="square" lIns="0" tIns="0" rIns="0" bIns="0" rtlCol="0" anchor="ctr"/>
+          <a:lstStyle/>
+          <a:p>
+            <a:pPr algn="l" indent="0" marL="0">
+              <a:buNone/>
+            </a:pPr>
+            <a:r>
+              <a:rPr lang="en-US" sz="1300" b="1" dirty="0">
+                <a:solidFill>
+                  <a:srgbClr val="1C5A73"/>
+                </a:solidFill>
+                <a:latin typeface="Cambria" pitchFamily="34" charset="0"/>
+                <a:ea typeface="Cambria" pitchFamily="34" charset="-122"/>
+                <a:cs typeface="Cambria" pitchFamily="34" charset="-120"/>
+              </a:rPr>
+              <a:t>Lecture</a:t>
+            </a:r>
+            <a:endParaRPr lang="en-US" sz="1300" dirty="0"/>
+          </a:p>
+        </p:txBody>
+      </p:sp>
+      <p:sp>
+        <p:nvSpPr>
+          <p:cNvPr id="7" name="Text 4"/>
+          <p:cNvSpPr txBox="1"/>
+          <p:nvPr/>
+        </p:nvSpPr>
+        <p:spPr>
+          <a:xfrm>
+            <a:off x="8503920" y="2560320"/>
+            <a:ext cx="2834640" cy="3017520"/>
           </a:xfrm>
           <a:prstGeom prst="rect">
             <a:avLst/>
@@ -6177,28 +11938,57 @@
           <a:p>
             <a:pPr algn="l" indent="0" marL="0">
               <a:lnSpc>
-                <a:spcPct val="118000"/>
+                <a:spcPct val="125000"/>
               </a:lnSpc>
               <a:buNone/>
             </a:pPr>
             <a:r>
-              <a:rPr lang="en-US" sz="1100" dirty="0">
-                <a:solidFill>
-                  <a:srgbClr val="6C8089"/>
-                </a:solidFill>
-                <a:latin typeface="Calibri" pitchFamily="34" charset="0"/>
-                <a:ea typeface="Calibri" pitchFamily="34" charset="-122"/>
-                <a:cs typeface="Calibri" pitchFamily="34" charset="-120"/>
-              </a:rPr>
-              <a:t>Les deux produits se vendent séparément mais ont été conçus pour se renforcer : l'hydro-rétenteur prolonge la disponibilité de l'eau, le fertilisant valorise cette eau sans ajouter à la charge saline d'un sol déjà lessivé.</a:t>
-            </a:r>
-            <a:endParaRPr lang="en-US" sz="1100" dirty="0"/>
-          </a:p>
-        </p:txBody>
-      </p:sp>
-      <p:sp>
-        <p:nvSpPr>
-          <p:cNvPr id="10" name="Text 8"/>
+              <a:rPr lang="en-US" sz="1200" dirty="0">
+                <a:solidFill>
+                  <a:srgbClr val="31424A"/>
+                </a:solidFill>
+                <a:latin typeface="Calibri" pitchFamily="34" charset="0"/>
+                <a:ea typeface="Calibri" pitchFamily="34" charset="-122"/>
+                <a:cs typeface="Calibri" pitchFamily="34" charset="-120"/>
+              </a:rPr>
+              <a:t>Manioc et banane plantain forment la base alimentaire, cultivés en petites parcelles pluviales.</a:t>
+            </a:r>
+            <a:endParaRPr lang="en-US" sz="1200" dirty="0"/>
+          </a:p>
+          <a:p>
+            <a:pPr algn="l" indent="0" marL="0">
+              <a:lnSpc>
+                <a:spcPct val="125000"/>
+              </a:lnSpc>
+              <a:buNone/>
+            </a:pPr>
+            <a:endParaRPr lang="en-US" sz="1200" dirty="0"/>
+          </a:p>
+          <a:p>
+            <a:pPr algn="l" indent="0" marL="0">
+              <a:lnSpc>
+                <a:spcPct val="125000"/>
+              </a:lnSpc>
+              <a:buNone/>
+            </a:pPr>
+            <a:r>
+              <a:rPr lang="en-US" sz="1200" dirty="0">
+                <a:solidFill>
+                  <a:srgbClr val="31424A"/>
+                </a:solidFill>
+                <a:latin typeface="Calibri" pitchFamily="34" charset="0"/>
+                <a:ea typeface="Calibri" pitchFamily="34" charset="-122"/>
+                <a:cs typeface="Calibri" pitchFamily="34" charset="-120"/>
+              </a:rPr>
+              <a:t>Huile de palme, canne et hévéa sont conduits en plantations industrielles, sur des périmètres suivis et équipés : ce sont les interlocuteurs les plus rapides à convaincre par la mesure.</a:t>
+            </a:r>
+            <a:endParaRPr lang="en-US" sz="1200" dirty="0"/>
+          </a:p>
+        </p:txBody>
+      </p:sp>
+      <p:sp>
+        <p:nvSpPr>
+          <p:cNvPr id="8" name="Text 5"/>
           <p:cNvSpPr txBox="1"/>
           <p:nvPr/>
         </p:nvSpPr>
@@ -6239,7 +12029,7 @@
       </p:sp>
       <p:sp>
         <p:nvSpPr>
-          <p:cNvPr id="11" name="Text 9"/>
+          <p:cNvPr id="9" name="Text 6"/>
           <p:cNvSpPr txBox="1"/>
           <p:nvPr/>
         </p:nvSpPr>
@@ -6343,7 +12133,7 @@
                 <a:ea typeface="Calibri" pitchFamily="34" charset="-122"/>
                 <a:cs typeface="Calibri" pitchFamily="34" charset="-120"/>
               </a:rPr>
-              <a:t>ORDRES DE GRANDEUR</a:t>
+              <a:t>PREMIÈRE FILIÈRE</a:t>
             </a:r>
             <a:endParaRPr lang="en-US" sz="1150" dirty="0"/>
           </a:p>
@@ -6382,168 +12172,181 @@
                 <a:ea typeface="Cambria" pitchFamily="34" charset="-122"/>
                 <a:cs typeface="Cambria" pitchFamily="34" charset="-120"/>
               </a:rPr>
-              <a:t>Économie d'eau attendue selon le mode d'arrosage</a:t>
+              <a:t>Banane plantain et manioc : la base de l'assiette</a:t>
             </a:r>
             <a:endParaRPr lang="en-US" sz="3000" dirty="0"/>
           </a:p>
         </p:txBody>
       </p:sp>
-      <p:graphicFrame>
-        <p:nvGraphicFramePr>
-          <p:cNvPr id="4" name="Chart 0" descr=""/>
-          <p:cNvGraphicFramePr/>
-          <p:nvPr/>
-        </p:nvGraphicFramePr>
-        <p:xfrm>
-          <a:off x="594360" y="1783080"/>
-          <a:ext cx="7360920" cy="3977640"/>
-        </p:xfrm>
-        <a:graphic xmlns:a="http://schemas.openxmlformats.org/drawingml/2006/main">
-          <a:graphicData uri="http://schemas.openxmlformats.org/drawingml/2006/chart">
-            <c:chart xmlns:c="http://schemas.openxmlformats.org/drawingml/2006/chart" r:id="rId1"/>
-          </a:graphicData>
-        </a:graphic>
-      </p:graphicFrame>
-      <p:sp>
-        <p:nvSpPr>
-          <p:cNvPr id="5" name="Shape 2"/>
-          <p:cNvSpPr/>
-          <p:nvPr/>
-        </p:nvSpPr>
-        <p:spPr>
-          <a:xfrm>
-            <a:off x="8275320" y="1783080"/>
-            <a:ext cx="3291840" cy="3977640"/>
-          </a:xfrm>
-          <a:prstGeom prst="roundRect">
-            <a:avLst>
-              <a:gd name="adj" fmla="val 2778"/>
-            </a:avLst>
-          </a:prstGeom>
-          <a:solidFill>
-            <a:srgbClr val="EDF3F5"/>
-          </a:solidFill>
-          <a:ln w="9525">
-            <a:solidFill>
-              <a:srgbClr val="D6E2E7"/>
-            </a:solidFill>
-            <a:prstDash val="solid"/>
-          </a:ln>
-        </p:spPr>
+      <p:pic>
+        <p:nvPicPr>
+          <p:cNvPr id="4" name="Image 0" descr="preencoded.png">    </p:cNvPr>
+          <p:cNvPicPr>
+            <a:picLocks noChangeAspect="1"/>
+          </p:cNvPicPr>
+          <p:nvPr/>
+        </p:nvPicPr>
+        <p:blipFill>
+          <a:blip r:embed="rId1"/>
+          <a:stretch>
+            <a:fillRect/>
+          </a:stretch>
+        </p:blipFill>
+        <p:spPr>
+          <a:xfrm>
+            <a:off x="6522415" y="1783080"/>
+            <a:ext cx="5074920" cy="3794760"/>
+          </a:xfrm>
+          <a:prstGeom prst="rect">
+            <a:avLst/>
+          </a:prstGeom>
+        </p:spPr>
+      </p:pic>
+      <p:sp>
+        <p:nvSpPr>
+          <p:cNvPr id="5" name="Text 2"/>
+          <p:cNvSpPr txBox="1"/>
+          <p:nvPr/>
+        </p:nvSpPr>
+        <p:spPr>
+          <a:xfrm>
+            <a:off x="594360" y="1783080"/>
+            <a:ext cx="5379415" cy="4251960"/>
+          </a:xfrm>
+          <a:prstGeom prst="rect">
+            <a:avLst/>
+          </a:prstGeom>
+          <a:noFill/>
+          <a:ln/>
+        </p:spPr>
+        <p:txBody>
+          <a:bodyPr wrap="square" lIns="0" tIns="0" rIns="0" bIns="0" rtlCol="0" anchor="t"/>
+          <a:lstStyle/>
+          <a:p>
+            <a:pPr algn="l" marL="342900" indent="-342900">
+              <a:lnSpc>
+                <a:spcPct val="122000"/>
+              </a:lnSpc>
+              <a:spcAft>
+                <a:spcPts val="1100"/>
+              </a:spcAft>
+              <a:buSzPct val="100000"/>
+              <a:buChar char="•"/>
+            </a:pPr>
+            <a:r>
+              <a:rPr lang="en-US" sz="1400" dirty="0">
+                <a:solidFill>
+                  <a:srgbClr val="31424A"/>
+                </a:solidFill>
+                <a:latin typeface="Calibri" pitchFamily="34" charset="0"/>
+                <a:ea typeface="Calibri" pitchFamily="34" charset="-122"/>
+                <a:cs typeface="Calibri" pitchFamily="34" charset="-120"/>
+              </a:rPr>
+              <a:t>Manioc et banane plantain sont les deux aliments de base, cultivés surtout en petites parcelles familiales.</a:t>
+            </a:r>
+            <a:endParaRPr lang="en-US" sz="1400" dirty="0"/>
+          </a:p>
+          <a:p>
+            <a:pPr algn="l" marL="342900" indent="-342900">
+              <a:lnSpc>
+                <a:spcPct val="122000"/>
+              </a:lnSpc>
+              <a:spcAft>
+                <a:spcPts val="1100"/>
+              </a:spcAft>
+              <a:buSzPct val="100000"/>
+              <a:buChar char="•"/>
+            </a:pPr>
+            <a:r>
+              <a:rPr lang="en-US" sz="1400" dirty="0">
+                <a:solidFill>
+                  <a:srgbClr val="31424A"/>
+                </a:solidFill>
+                <a:latin typeface="Calibri" pitchFamily="34" charset="0"/>
+                <a:ea typeface="Calibri" pitchFamily="34" charset="-122"/>
+                <a:cs typeface="Calibri" pitchFamily="34" charset="-120"/>
+              </a:rPr>
+              <a:t>Les sols ferralitiques, lessivés par les fortes pluies, retiennent mal l'eau et les éléments nutritifs.</a:t>
+            </a:r>
+            <a:endParaRPr lang="en-US" sz="1400" dirty="0"/>
+          </a:p>
+          <a:p>
+            <a:pPr algn="l" marL="342900" indent="-342900">
+              <a:lnSpc>
+                <a:spcPct val="122000"/>
+              </a:lnSpc>
+              <a:spcAft>
+                <a:spcPts val="1100"/>
+              </a:spcAft>
+              <a:buSzPct val="100000"/>
+              <a:buChar char="•"/>
+            </a:pPr>
+            <a:r>
+              <a:rPr lang="en-US" sz="1400" dirty="0">
+                <a:solidFill>
+                  <a:srgbClr val="31424A"/>
+                </a:solidFill>
+                <a:latin typeface="Calibri" pitchFamily="34" charset="0"/>
+                <a:ea typeface="Calibri" pitchFamily="34" charset="-122"/>
+                <a:cs typeface="Calibri" pitchFamily="34" charset="-120"/>
+              </a:rPr>
+              <a:t>La saison sèche, de juin à septembre, suffit à faire chuter la production des parcelles non arrosées.</a:t>
+            </a:r>
+            <a:endParaRPr lang="en-US" sz="1400" dirty="0"/>
+          </a:p>
+          <a:p>
+            <a:pPr algn="l" marL="342900" indent="-342900">
+              <a:lnSpc>
+                <a:spcPct val="122000"/>
+              </a:lnSpc>
+              <a:spcAft>
+                <a:spcPts val="1100"/>
+              </a:spcAft>
+              <a:buSzPct val="100000"/>
+              <a:buChar char="•"/>
+            </a:pPr>
+            <a:r>
+              <a:rPr lang="en-US" sz="1400" dirty="0">
+                <a:solidFill>
+                  <a:srgbClr val="31424A"/>
+                </a:solidFill>
+                <a:latin typeface="Calibri" pitchFamily="34" charset="0"/>
+                <a:ea typeface="Calibri" pitchFamily="34" charset="-122"/>
+                <a:cs typeface="Calibri" pitchFamily="34" charset="-120"/>
+              </a:rPr>
+              <a:t>Une part importante de la banane plantain vendue à Libreville arrive encore du Cameroun.</a:t>
+            </a:r>
+            <a:endParaRPr lang="en-US" sz="1400" dirty="0"/>
+          </a:p>
+          <a:p>
+            <a:pPr algn="l" marL="342900" indent="-342900">
+              <a:lnSpc>
+                <a:spcPct val="122000"/>
+              </a:lnSpc>
+              <a:spcAft>
+                <a:spcPts val="1100"/>
+              </a:spcAft>
+              <a:buSzPct val="100000"/>
+              <a:buChar char="•"/>
+            </a:pPr>
+            <a:r>
+              <a:rPr lang="en-US" sz="1400" dirty="0">
+                <a:solidFill>
+                  <a:srgbClr val="31424A"/>
+                </a:solidFill>
+                <a:latin typeface="Calibri" pitchFamily="34" charset="0"/>
+                <a:ea typeface="Calibri" pitchFamily="34" charset="-122"/>
+                <a:cs typeface="Calibri" pitchFamily="34" charset="-120"/>
+              </a:rPr>
+              <a:t>EVERGREEN® à la plantation garde l'humidité au pied pendant la saison sèche ; ECOFERT® apporte ce que la pluie emporte.</a:t>
+            </a:r>
+            <a:endParaRPr lang="en-US" sz="1400" dirty="0"/>
+          </a:p>
+        </p:txBody>
       </p:sp>
       <p:sp>
         <p:nvSpPr>
           <p:cNvPr id="6" name="Text 3"/>
-          <p:cNvSpPr txBox="1"/>
-          <p:nvPr/>
-        </p:nvSpPr>
-        <p:spPr>
-          <a:xfrm>
-            <a:off x="8503920" y="2011680"/>
-            <a:ext cx="2834640" cy="457200"/>
-          </a:xfrm>
-          <a:prstGeom prst="rect">
-            <a:avLst/>
-          </a:prstGeom>
-          <a:noFill/>
-          <a:ln/>
-        </p:spPr>
-        <p:txBody>
-          <a:bodyPr wrap="square" lIns="0" tIns="0" rIns="0" bIns="0" rtlCol="0" anchor="ctr"/>
-          <a:lstStyle/>
-          <a:p>
-            <a:pPr algn="l" indent="0" marL="0">
-              <a:buNone/>
-            </a:pPr>
-            <a:r>
-              <a:rPr lang="en-US" sz="1300" b="1" dirty="0">
-                <a:solidFill>
-                  <a:srgbClr val="1C5A73"/>
-                </a:solidFill>
-                <a:latin typeface="Cambria" pitchFamily="34" charset="0"/>
-                <a:ea typeface="Cambria" pitchFamily="34" charset="-122"/>
-                <a:cs typeface="Cambria" pitchFamily="34" charset="-120"/>
-              </a:rPr>
-              <a:t>À lire avec prudence</a:t>
-            </a:r>
-            <a:endParaRPr lang="en-US" sz="1300" dirty="0"/>
-          </a:p>
-        </p:txBody>
-      </p:sp>
-      <p:sp>
-        <p:nvSpPr>
-          <p:cNvPr id="7" name="Text 4"/>
-          <p:cNvSpPr txBox="1"/>
-          <p:nvPr/>
-        </p:nvSpPr>
-        <p:spPr>
-          <a:xfrm>
-            <a:off x="8503920" y="2560320"/>
-            <a:ext cx="2834640" cy="3017520"/>
-          </a:xfrm>
-          <a:prstGeom prst="rect">
-            <a:avLst/>
-          </a:prstGeom>
-          <a:noFill/>
-          <a:ln/>
-        </p:spPr>
-        <p:txBody>
-          <a:bodyPr wrap="square" lIns="0" tIns="0" rIns="0" bIns="0" rtlCol="0" anchor="t"/>
-          <a:lstStyle/>
-          <a:p>
-            <a:pPr algn="l" indent="0" marL="0">
-              <a:lnSpc>
-                <a:spcPct val="125000"/>
-              </a:lnSpc>
-              <a:buNone/>
-            </a:pPr>
-            <a:r>
-              <a:rPr lang="en-US" sz="1200" dirty="0">
-                <a:solidFill>
-                  <a:srgbClr val="31424A"/>
-                </a:solidFill>
-                <a:latin typeface="Calibri" pitchFamily="34" charset="0"/>
-                <a:ea typeface="Calibri" pitchFamily="34" charset="-122"/>
-                <a:cs typeface="Calibri" pitchFamily="34" charset="-120"/>
-              </a:rPr>
-              <a:t>Ces fourchettes sont indicatives et fondées sur les gains documentés de nos hydro-rétenteurs.</a:t>
-            </a:r>
-            <a:endParaRPr lang="en-US" sz="1200" dirty="0"/>
-          </a:p>
-          <a:p>
-            <a:pPr algn="l" indent="0" marL="0">
-              <a:lnSpc>
-                <a:spcPct val="125000"/>
-              </a:lnSpc>
-              <a:buNone/>
-            </a:pPr>
-            <a:endParaRPr lang="en-US" sz="1200" dirty="0"/>
-          </a:p>
-          <a:p>
-            <a:pPr algn="l" indent="0" marL="0">
-              <a:lnSpc>
-                <a:spcPct val="125000"/>
-              </a:lnSpc>
-              <a:buNone/>
-            </a:pPr>
-            <a:r>
-              <a:rPr lang="en-US" sz="1200" dirty="0">
-                <a:solidFill>
-                  <a:srgbClr val="31424A"/>
-                </a:solidFill>
-                <a:latin typeface="Calibri" pitchFamily="34" charset="0"/>
-                <a:ea typeface="Calibri" pitchFamily="34" charset="-122"/>
-                <a:cs typeface="Calibri" pitchFamily="34" charset="-120"/>
-              </a:rPr>
-              <a:t>Le résultat réel dépend du sol, du climat et de la culture. Ces chiffres donnent un ordre de grandeur : ils ne constituent en aucun cas une valeur garantie, contractuelle ou absolue.</a:t>
-            </a:r>
-            <a:endParaRPr lang="en-US" sz="1200" dirty="0"/>
-          </a:p>
-        </p:txBody>
-      </p:sp>
-      <p:sp>
-        <p:nvSpPr>
-          <p:cNvPr id="8" name="Text 5"/>
           <p:cNvSpPr txBox="1"/>
           <p:nvPr/>
         </p:nvSpPr>
@@ -6584,7 +12387,7 @@
       </p:sp>
       <p:sp>
         <p:nvSpPr>
-          <p:cNvPr id="9" name="Text 6"/>
+          <p:cNvPr id="7" name="Text 4"/>
           <p:cNvSpPr txBox="1"/>
           <p:nvPr/>
         </p:nvSpPr>
@@ -6688,7 +12491,7 @@
                 <a:ea typeface="Calibri" pitchFamily="34" charset="-122"/>
                 <a:cs typeface="Calibri" pitchFamily="34" charset="-120"/>
               </a:rPr>
-              <a:t>TROIS TERRAINS PRIORITAIRES</a:t>
+              <a:t>DEUXIÈME FILIÈRE</a:t>
             </a:r>
             <a:endParaRPr lang="en-US" sz="1150" dirty="0"/>
           </a:p>
@@ -6727,42 +12530,15 @@
                 <a:ea typeface="Cambria" pitchFamily="34" charset="-122"/>
                 <a:cs typeface="Cambria" pitchFamily="34" charset="-120"/>
               </a:rPr>
-              <a:t>Où engager les premiers essais</a:t>
+              <a:t>Maraîchage autour de Libreville : produire là où l'on mange</a:t>
             </a:r>
             <a:endParaRPr lang="en-US" sz="3000" dirty="0"/>
           </a:p>
         </p:txBody>
-      </p:sp>
-      <p:sp>
-        <p:nvSpPr>
-          <p:cNvPr id="4" name="Shape 2"/>
-          <p:cNvSpPr/>
-          <p:nvPr/>
-        </p:nvSpPr>
-        <p:spPr>
-          <a:xfrm>
-            <a:off x="594360" y="1783080"/>
-            <a:ext cx="3472586" cy="4069080"/>
-          </a:xfrm>
-          <a:prstGeom prst="roundRect">
-            <a:avLst>
-              <a:gd name="adj" fmla="val 2633"/>
-            </a:avLst>
-          </a:prstGeom>
-          <a:solidFill>
-            <a:srgbClr val="EDF3F5"/>
-          </a:solidFill>
-          <a:ln w="9525">
-            <a:solidFill>
-              <a:srgbClr val="D6E2E7"/>
-            </a:solidFill>
-            <a:prstDash val="solid"/>
-          </a:ln>
-        </p:spPr>
       </p:sp>
       <p:pic>
         <p:nvPicPr>
-          <p:cNvPr id="5" name="Image 0" descr="preencoded.png">    </p:cNvPr>
+          <p:cNvPr id="4" name="Image 0" descr="preencoded.png">    </p:cNvPr>
           <p:cNvPicPr>
             <a:picLocks noChangeAspect="1"/>
           </p:cNvPicPr>
@@ -6777,7 +12553,7 @@
         <p:spPr>
           <a:xfrm>
             <a:off x="594360" y="1783080"/>
-            <a:ext cx="3472586" cy="1691640"/>
+            <a:ext cx="5074920" cy="3794760"/>
           </a:xfrm>
           <a:prstGeom prst="rect">
             <a:avLst/>
@@ -6786,92 +12562,14 @@
       </p:pic>
       <p:sp>
         <p:nvSpPr>
-          <p:cNvPr id="6" name="Text 3"/>
-          <p:cNvSpPr txBox="1"/>
-          <p:nvPr/>
-        </p:nvSpPr>
-        <p:spPr>
-          <a:xfrm>
-            <a:off x="795528" y="3639312"/>
-            <a:ext cx="3070250" cy="384048"/>
-          </a:xfrm>
-          <a:prstGeom prst="rect">
-            <a:avLst/>
-          </a:prstGeom>
-          <a:noFill/>
-          <a:ln/>
-        </p:spPr>
-        <p:txBody>
-          <a:bodyPr wrap="square" lIns="0" tIns="0" rIns="0" bIns="0" rtlCol="0" anchor="ctr"/>
-          <a:lstStyle/>
-          <a:p>
-            <a:pPr algn="l" indent="0" marL="0">
-              <a:buNone/>
-            </a:pPr>
-            <a:r>
-              <a:rPr lang="en-US" sz="1500" b="1" dirty="0">
-                <a:solidFill>
-                  <a:srgbClr val="1C5A73"/>
-                </a:solidFill>
-                <a:latin typeface="Cambria" pitchFamily="34" charset="0"/>
-                <a:ea typeface="Cambria" pitchFamily="34" charset="-122"/>
-                <a:cs typeface="Cambria" pitchFamily="34" charset="-120"/>
-              </a:rPr>
-              <a:t>Estuaire — Libreville</a:t>
-            </a:r>
-            <a:endParaRPr lang="en-US" sz="1500" dirty="0"/>
-          </a:p>
-        </p:txBody>
-      </p:sp>
-      <p:sp>
-        <p:nvSpPr>
-          <p:cNvPr id="7" name="Text 4"/>
-          <p:cNvSpPr txBox="1"/>
-          <p:nvPr/>
-        </p:nvSpPr>
-        <p:spPr>
-          <a:xfrm>
-            <a:off x="795528" y="4041648"/>
-            <a:ext cx="3070250" cy="329184"/>
-          </a:xfrm>
-          <a:prstGeom prst="rect">
-            <a:avLst/>
-          </a:prstGeom>
-          <a:noFill/>
-          <a:ln/>
-        </p:spPr>
-        <p:txBody>
-          <a:bodyPr wrap="square" lIns="0" tIns="0" rIns="0" bIns="0" rtlCol="0" anchor="ctr"/>
-          <a:lstStyle/>
-          <a:p>
-            <a:pPr algn="l" indent="0" marL="0">
-              <a:buNone/>
-            </a:pPr>
-            <a:r>
-              <a:rPr lang="en-US" sz="1250" b="1" dirty="0">
-                <a:solidFill>
-                  <a:srgbClr val="A3701A"/>
-                </a:solidFill>
-                <a:latin typeface="Calibri" pitchFamily="34" charset="0"/>
-                <a:ea typeface="Calibri" pitchFamily="34" charset="-122"/>
-                <a:cs typeface="Calibri" pitchFamily="34" charset="-120"/>
-              </a:rPr>
-              <a:t>≈ 900 000 consommateurs</a:t>
-            </a:r>
-            <a:endParaRPr lang="en-US" sz="1250" dirty="0"/>
-          </a:p>
-        </p:txBody>
-      </p:sp>
-      <p:sp>
-        <p:nvSpPr>
-          <p:cNvPr id="8" name="Text 5"/>
-          <p:cNvSpPr txBox="1"/>
-          <p:nvPr/>
-        </p:nvSpPr>
-        <p:spPr>
-          <a:xfrm>
-            <a:off x="795528" y="4407408"/>
-            <a:ext cx="3070250" cy="1280160"/>
+          <p:cNvPr id="5" name="Text 2"/>
+          <p:cNvSpPr txBox="1"/>
+          <p:nvPr/>
+        </p:nvSpPr>
+        <p:spPr>
+          <a:xfrm>
+            <a:off x="6217920" y="1783080"/>
+            <a:ext cx="5379415" cy="4251960"/>
           </a:xfrm>
           <a:prstGeom prst="rect">
             <a:avLst/>
@@ -6885,16 +12583,16 @@
           <a:p>
             <a:pPr algn="l" marL="342900" indent="-342900">
               <a:lnSpc>
-                <a:spcPct val="116000"/>
+                <a:spcPct val="122000"/>
               </a:lnSpc>
               <a:spcAft>
-                <a:spcPts val="700"/>
+                <a:spcPts val="1100"/>
               </a:spcAft>
               <a:buSzPct val="100000"/>
               <a:buChar char="•"/>
             </a:pPr>
             <a:r>
-              <a:rPr lang="en-US" sz="1150" dirty="0">
+              <a:rPr lang="en-US" sz="1400" dirty="0">
                 <a:solidFill>
                   <a:srgbClr val="31424A"/>
                 </a:solidFill>
@@ -6902,23 +12600,23 @@
                 <a:ea typeface="Calibri" pitchFamily="34" charset="-122"/>
                 <a:cs typeface="Calibri" pitchFamily="34" charset="-120"/>
               </a:rPr>
-              <a:t>Ceinture maraîchère de Ntoum et Kango, qui approvisionne la capitale toute l'année.</a:t>
-            </a:r>
-            <a:endParaRPr lang="en-US" sz="1150" dirty="0"/>
+              <a:t>Tomates, piments, oseille et légumes-feuilles sont cultivés en ceinture de Libreville, d'Owendo et de Ntoum.</a:t>
+            </a:r>
+            <a:endParaRPr lang="en-US" sz="1400" dirty="0"/>
           </a:p>
           <a:p>
             <a:pPr algn="l" marL="342900" indent="-342900">
               <a:lnSpc>
-                <a:spcPct val="116000"/>
+                <a:spcPct val="122000"/>
               </a:lnSpc>
               <a:spcAft>
-                <a:spcPts val="700"/>
+                <a:spcPts val="1100"/>
               </a:spcAft>
               <a:buSzPct val="100000"/>
               <a:buChar char="•"/>
             </a:pPr>
             <a:r>
-              <a:rPr lang="en-US" sz="1150" dirty="0">
+              <a:rPr lang="en-US" sz="1400" dirty="0">
                 <a:solidFill>
                   <a:srgbClr val="31424A"/>
                 </a:solidFill>
@@ -6926,23 +12624,23 @@
                 <a:ea typeface="Calibri" pitchFamily="34" charset="-122"/>
                 <a:cs typeface="Calibri" pitchFamily="34" charset="-120"/>
               </a:rPr>
-              <a:t>Sols sableux littoraux, arrosage manuel ou goutte-à-goutte : l'eau y coûte cher en main-d'œuvre.</a:t>
-            </a:r>
-            <a:endParaRPr lang="en-US" sz="1150" dirty="0"/>
+              <a:t>Les légumes importés arrivent chers et souvent abîmés : la production locale a un marché immédiat.</a:t>
+            </a:r>
+            <a:endParaRPr lang="en-US" sz="1400" dirty="0"/>
           </a:p>
           <a:p>
             <a:pPr algn="l" marL="342900" indent="-342900">
               <a:lnSpc>
-                <a:spcPct val="116000"/>
+                <a:spcPct val="122000"/>
               </a:lnSpc>
               <a:spcAft>
-                <a:spcPts val="700"/>
+                <a:spcPts val="1100"/>
               </a:spcAft>
               <a:buSzPct val="100000"/>
               <a:buChar char="•"/>
             </a:pPr>
             <a:r>
-              <a:rPr lang="en-US" sz="1150" dirty="0">
+              <a:rPr lang="en-US" sz="1400" dirty="0">
                 <a:solidFill>
                   <a:srgbClr val="31424A"/>
                 </a:solidFill>
@@ -6950,174 +12648,23 @@
                 <a:ea typeface="Calibri" pitchFamily="34" charset="-122"/>
                 <a:cs typeface="Calibri" pitchFamily="34" charset="-120"/>
               </a:rPr>
-              <a:t>Cultures à cycle court et à forte valeur, où un essai se conclut en une saison.</a:t>
-            </a:r>
-            <a:endParaRPr lang="en-US" sz="1150" dirty="0"/>
-          </a:p>
-        </p:txBody>
-      </p:sp>
-      <p:sp>
-        <p:nvSpPr>
-          <p:cNvPr id="9" name="Shape 6"/>
-          <p:cNvSpPr/>
-          <p:nvPr/>
-        </p:nvSpPr>
-        <p:spPr>
-          <a:xfrm>
-            <a:off x="4359554" y="1783080"/>
-            <a:ext cx="3472586" cy="4069080"/>
-          </a:xfrm>
-          <a:prstGeom prst="roundRect">
-            <a:avLst>
-              <a:gd name="adj" fmla="val 2633"/>
-            </a:avLst>
-          </a:prstGeom>
-          <a:solidFill>
-            <a:srgbClr val="EDF3F5"/>
-          </a:solidFill>
-          <a:ln w="9525">
-            <a:solidFill>
-              <a:srgbClr val="D6E2E7"/>
-            </a:solidFill>
-            <a:prstDash val="solid"/>
-          </a:ln>
-        </p:spPr>
-      </p:sp>
-      <p:pic>
-        <p:nvPicPr>
-          <p:cNvPr id="10" name="Image 1" descr="preencoded.png">    </p:cNvPr>
-          <p:cNvPicPr>
-            <a:picLocks noChangeAspect="1"/>
-          </p:cNvPicPr>
-          <p:nvPr/>
-        </p:nvPicPr>
-        <p:blipFill>
-          <a:blip r:embed="rId2"/>
-          <a:stretch>
-            <a:fillRect/>
-          </a:stretch>
-        </p:blipFill>
-        <p:spPr>
-          <a:xfrm>
-            <a:off x="4359554" y="1783080"/>
-            <a:ext cx="3472586" cy="1691640"/>
-          </a:xfrm>
-          <a:prstGeom prst="rect">
-            <a:avLst/>
-          </a:prstGeom>
-        </p:spPr>
-      </p:pic>
-      <p:sp>
-        <p:nvSpPr>
-          <p:cNvPr id="11" name="Text 7"/>
-          <p:cNvSpPr txBox="1"/>
-          <p:nvPr/>
-        </p:nvSpPr>
-        <p:spPr>
-          <a:xfrm>
-            <a:off x="4560722" y="3639312"/>
-            <a:ext cx="3070250" cy="384048"/>
-          </a:xfrm>
-          <a:prstGeom prst="rect">
-            <a:avLst/>
-          </a:prstGeom>
-          <a:noFill/>
-          <a:ln/>
-        </p:spPr>
-        <p:txBody>
-          <a:bodyPr wrap="square" lIns="0" tIns="0" rIns="0" bIns="0" rtlCol="0" anchor="ctr"/>
-          <a:lstStyle/>
-          <a:p>
-            <a:pPr algn="l" indent="0" marL="0">
-              <a:buNone/>
-            </a:pPr>
-            <a:r>
-              <a:rPr lang="en-US" sz="1500" b="1" dirty="0">
-                <a:solidFill>
-                  <a:srgbClr val="1C5A73"/>
-                </a:solidFill>
-                <a:latin typeface="Cambria" pitchFamily="34" charset="0"/>
-                <a:ea typeface="Cambria" pitchFamily="34" charset="-122"/>
-                <a:cs typeface="Cambria" pitchFamily="34" charset="-120"/>
-              </a:rPr>
-              <a:t>Woleu-Ntem — Oyem</a:t>
-            </a:r>
-            <a:endParaRPr lang="en-US" sz="1500" dirty="0"/>
-          </a:p>
-        </p:txBody>
-      </p:sp>
-      <p:sp>
-        <p:nvSpPr>
-          <p:cNvPr id="12" name="Text 8"/>
-          <p:cNvSpPr txBox="1"/>
-          <p:nvPr/>
-        </p:nvSpPr>
-        <p:spPr>
-          <a:xfrm>
-            <a:off x="4560722" y="4041648"/>
-            <a:ext cx="3070250" cy="329184"/>
-          </a:xfrm>
-          <a:prstGeom prst="rect">
-            <a:avLst/>
-          </a:prstGeom>
-          <a:noFill/>
-          <a:ln/>
-        </p:spPr>
-        <p:txBody>
-          <a:bodyPr wrap="square" lIns="0" tIns="0" rIns="0" bIns="0" rtlCol="0" anchor="ctr"/>
-          <a:lstStyle/>
-          <a:p>
-            <a:pPr algn="l" indent="0" marL="0">
-              <a:buNone/>
-            </a:pPr>
-            <a:r>
-              <a:rPr lang="en-US" sz="1250" b="1" dirty="0">
-                <a:solidFill>
-                  <a:srgbClr val="A3701A"/>
-                </a:solidFill>
-                <a:latin typeface="Calibri" pitchFamily="34" charset="0"/>
-                <a:ea typeface="Calibri" pitchFamily="34" charset="-122"/>
-                <a:cs typeface="Calibri" pitchFamily="34" charset="-120"/>
-              </a:rPr>
-              <a:t>Premier bassin vivrier</a:t>
-            </a:r>
-            <a:endParaRPr lang="en-US" sz="1250" dirty="0"/>
-          </a:p>
-        </p:txBody>
-      </p:sp>
-      <p:sp>
-        <p:nvSpPr>
-          <p:cNvPr id="13" name="Text 9"/>
-          <p:cNvSpPr txBox="1"/>
-          <p:nvPr/>
-        </p:nvSpPr>
-        <p:spPr>
-          <a:xfrm>
-            <a:off x="4560722" y="4407408"/>
-            <a:ext cx="3070250" cy="1280160"/>
-          </a:xfrm>
-          <a:prstGeom prst="rect">
-            <a:avLst/>
-          </a:prstGeom>
-          <a:noFill/>
-          <a:ln/>
-        </p:spPr>
-        <p:txBody>
-          <a:bodyPr wrap="square" lIns="0" tIns="0" rIns="0" bIns="0" rtlCol="0" anchor="t"/>
-          <a:lstStyle/>
+              <a:t>Sur sol sableux ou très lessivé, l'arrosage manuel ne suffit plus dès que la pluie s'interrompt quelques jours.</a:t>
+            </a:r>
+            <a:endParaRPr lang="en-US" sz="1400" dirty="0"/>
+          </a:p>
           <a:p>
             <a:pPr algn="l" marL="342900" indent="-342900">
               <a:lnSpc>
-                <a:spcPct val="116000"/>
+                <a:spcPct val="122000"/>
               </a:lnSpc>
               <a:spcAft>
-                <a:spcPts val="700"/>
+                <a:spcPts val="1100"/>
               </a:spcAft>
               <a:buSzPct val="100000"/>
               <a:buChar char="•"/>
             </a:pPr>
             <a:r>
-              <a:rPr lang="en-US" sz="1150" dirty="0">
+              <a:rPr lang="en-US" sz="1400" dirty="0">
                 <a:solidFill>
                   <a:srgbClr val="31424A"/>
                 </a:solidFill>
@@ -7125,23 +12672,23 @@
                 <a:ea typeface="Calibri" pitchFamily="34" charset="-122"/>
                 <a:cs typeface="Calibri" pitchFamily="34" charset="-120"/>
               </a:rPr>
-              <a:t>Manioc, banane plantain et arachide sur de petites parcelles familiales, presque toutes pluviales.</a:t>
-            </a:r>
-            <a:endParaRPr lang="en-US" sz="1150" dirty="0"/>
+              <a:t>Les maladies fongiques profitent de l'humidité : NAPEMA® les traite sans résidu sur des légumes vendus frais.</a:t>
+            </a:r>
+            <a:endParaRPr lang="en-US" sz="1400" dirty="0"/>
           </a:p>
           <a:p>
             <a:pPr algn="l" marL="342900" indent="-342900">
               <a:lnSpc>
-                <a:spcPct val="116000"/>
+                <a:spcPct val="122000"/>
               </a:lnSpc>
               <a:spcAft>
-                <a:spcPts val="700"/>
+                <a:spcPts val="1100"/>
               </a:spcAft>
               <a:buSzPct val="100000"/>
               <a:buChar char="•"/>
             </a:pPr>
             <a:r>
-              <a:rPr lang="en-US" sz="1150" dirty="0">
+              <a:rPr lang="en-US" sz="1400" dirty="0">
                 <a:solidFill>
                   <a:srgbClr val="31424A"/>
                 </a:solidFill>
@@ -7149,262 +12696,15 @@
                 <a:ea typeface="Calibri" pitchFamily="34" charset="-122"/>
                 <a:cs typeface="Calibri" pitchFamily="34" charset="-120"/>
               </a:rPr>
-              <a:t>Cacaoyers et caféiers en replantation, cultures pérennes où l'effet de 3 à 4 ans est décisif à la reprise.</a:t>
-            </a:r>
-            <a:endParaRPr lang="en-US" sz="1150" dirty="0"/>
-          </a:p>
-          <a:p>
-            <a:pPr algn="l" marL="342900" indent="-342900">
-              <a:lnSpc>
-                <a:spcPct val="116000"/>
-              </a:lnSpc>
-              <a:spcAft>
-                <a:spcPts val="700"/>
-              </a:spcAft>
-              <a:buSzPct val="100000"/>
-              <a:buChar char="•"/>
-            </a:pPr>
-            <a:r>
-              <a:rPr lang="en-US" sz="1150" dirty="0">
-                <a:solidFill>
-                  <a:srgbClr val="31424A"/>
-                </a:solidFill>
-                <a:latin typeface="Calibri" pitchFamily="34" charset="0"/>
-                <a:ea typeface="Calibri" pitchFamily="34" charset="-122"/>
-                <a:cs typeface="Calibri" pitchFamily="34" charset="-120"/>
-              </a:rPr>
-              <a:t>Coopératives déjà structurées : la décision d'achat peut être groupée.</a:t>
-            </a:r>
-            <a:endParaRPr lang="en-US" sz="1150" dirty="0"/>
-          </a:p>
-        </p:txBody>
-      </p:sp>
-      <p:sp>
-        <p:nvSpPr>
-          <p:cNvPr id="14" name="Shape 10"/>
-          <p:cNvSpPr/>
-          <p:nvPr/>
-        </p:nvSpPr>
-        <p:spPr>
-          <a:xfrm>
-            <a:off x="8124749" y="1783080"/>
-            <a:ext cx="3472586" cy="4069080"/>
-          </a:xfrm>
-          <a:prstGeom prst="roundRect">
-            <a:avLst>
-              <a:gd name="adj" fmla="val 2633"/>
-            </a:avLst>
-          </a:prstGeom>
-          <a:solidFill>
-            <a:srgbClr val="EDF3F5"/>
-          </a:solidFill>
-          <a:ln w="9525">
-            <a:solidFill>
-              <a:srgbClr val="D6E2E7"/>
-            </a:solidFill>
-            <a:prstDash val="solid"/>
-          </a:ln>
-        </p:spPr>
-      </p:sp>
-      <p:pic>
-        <p:nvPicPr>
-          <p:cNvPr id="15" name="Image 2" descr="preencoded.png">    </p:cNvPr>
-          <p:cNvPicPr>
-            <a:picLocks noChangeAspect="1"/>
-          </p:cNvPicPr>
-          <p:nvPr/>
-        </p:nvPicPr>
-        <p:blipFill>
-          <a:blip r:embed="rId3"/>
-          <a:stretch>
-            <a:fillRect/>
-          </a:stretch>
-        </p:blipFill>
-        <p:spPr>
-          <a:xfrm>
-            <a:off x="8124749" y="1783080"/>
-            <a:ext cx="3472586" cy="1691640"/>
-          </a:xfrm>
-          <a:prstGeom prst="rect">
-            <a:avLst/>
-          </a:prstGeom>
-        </p:spPr>
-      </p:pic>
-      <p:sp>
-        <p:nvSpPr>
-          <p:cNvPr id="16" name="Text 11"/>
-          <p:cNvSpPr txBox="1"/>
-          <p:nvPr/>
-        </p:nvSpPr>
-        <p:spPr>
-          <a:xfrm>
-            <a:off x="8325917" y="3639312"/>
-            <a:ext cx="3070250" cy="384048"/>
-          </a:xfrm>
-          <a:prstGeom prst="rect">
-            <a:avLst/>
-          </a:prstGeom>
-          <a:noFill/>
-          <a:ln/>
-        </p:spPr>
-        <p:txBody>
-          <a:bodyPr wrap="square" lIns="0" tIns="0" rIns="0" bIns="0" rtlCol="0" anchor="ctr"/>
-          <a:lstStyle/>
-          <a:p>
-            <a:pPr algn="l" indent="0" marL="0">
-              <a:buNone/>
-            </a:pPr>
-            <a:r>
-              <a:rPr lang="en-US" sz="1500" b="1" dirty="0">
-                <a:solidFill>
-                  <a:srgbClr val="1C5A73"/>
-                </a:solidFill>
-                <a:latin typeface="Cambria" pitchFamily="34" charset="0"/>
-                <a:ea typeface="Cambria" pitchFamily="34" charset="-122"/>
-                <a:cs typeface="Cambria" pitchFamily="34" charset="-120"/>
-              </a:rPr>
-              <a:t>Ngounié — Mouila</a:t>
-            </a:r>
-            <a:endParaRPr lang="en-US" sz="1500" dirty="0"/>
-          </a:p>
-        </p:txBody>
-      </p:sp>
-      <p:sp>
-        <p:nvSpPr>
-          <p:cNvPr id="17" name="Text 12"/>
-          <p:cNvSpPr txBox="1"/>
-          <p:nvPr/>
-        </p:nvSpPr>
-        <p:spPr>
-          <a:xfrm>
-            <a:off x="8325917" y="4041648"/>
-            <a:ext cx="3070250" cy="329184"/>
-          </a:xfrm>
-          <a:prstGeom prst="rect">
-            <a:avLst/>
-          </a:prstGeom>
-          <a:noFill/>
-          <a:ln/>
-        </p:spPr>
-        <p:txBody>
-          <a:bodyPr wrap="square" lIns="0" tIns="0" rIns="0" bIns="0" rtlCol="0" anchor="ctr"/>
-          <a:lstStyle/>
-          <a:p>
-            <a:pPr algn="l" indent="0" marL="0">
-              <a:buNone/>
-            </a:pPr>
-            <a:r>
-              <a:rPr lang="en-US" sz="1250" b="1" dirty="0">
-                <a:solidFill>
-                  <a:srgbClr val="A3701A"/>
-                </a:solidFill>
-                <a:latin typeface="Calibri" pitchFamily="34" charset="0"/>
-                <a:ea typeface="Calibri" pitchFamily="34" charset="-122"/>
-                <a:cs typeface="Calibri" pitchFamily="34" charset="-120"/>
-              </a:rPr>
-              <a:t>≈ 40 000 ha de palmier</a:t>
-            </a:r>
-            <a:endParaRPr lang="en-US" sz="1250" dirty="0"/>
-          </a:p>
-        </p:txBody>
-      </p:sp>
-      <p:sp>
-        <p:nvSpPr>
-          <p:cNvPr id="18" name="Text 13"/>
-          <p:cNvSpPr txBox="1"/>
-          <p:nvPr/>
-        </p:nvSpPr>
-        <p:spPr>
-          <a:xfrm>
-            <a:off x="8325917" y="4407408"/>
-            <a:ext cx="3070250" cy="1280160"/>
-          </a:xfrm>
-          <a:prstGeom prst="rect">
-            <a:avLst/>
-          </a:prstGeom>
-          <a:noFill/>
-          <a:ln/>
-        </p:spPr>
-        <p:txBody>
-          <a:bodyPr wrap="square" lIns="0" tIns="0" rIns="0" bIns="0" rtlCol="0" anchor="t"/>
-          <a:lstStyle/>
-          <a:p>
-            <a:pPr algn="l" marL="342900" indent="-342900">
-              <a:lnSpc>
-                <a:spcPct val="116000"/>
-              </a:lnSpc>
-              <a:spcAft>
-                <a:spcPts val="700"/>
-              </a:spcAft>
-              <a:buSzPct val="100000"/>
-              <a:buChar char="•"/>
-            </a:pPr>
-            <a:r>
-              <a:rPr lang="en-US" sz="1150" dirty="0">
-                <a:solidFill>
-                  <a:srgbClr val="31424A"/>
-                </a:solidFill>
-                <a:latin typeface="Calibri" pitchFamily="34" charset="0"/>
-                <a:ea typeface="Calibri" pitchFamily="34" charset="-122"/>
-                <a:cs typeface="Calibri" pitchFamily="34" charset="-120"/>
-              </a:rPr>
-              <a:t>Plantations industrielles de palmier à huile, suivies agronomiquement bloc par bloc.</a:t>
-            </a:r>
-            <a:endParaRPr lang="en-US" sz="1150" dirty="0"/>
-          </a:p>
-          <a:p>
-            <a:pPr algn="l" marL="342900" indent="-342900">
-              <a:lnSpc>
-                <a:spcPct val="116000"/>
-              </a:lnSpc>
-              <a:spcAft>
-                <a:spcPts val="700"/>
-              </a:spcAft>
-              <a:buSzPct val="100000"/>
-              <a:buChar char="•"/>
-            </a:pPr>
-            <a:r>
-              <a:rPr lang="en-US" sz="1150" dirty="0">
-                <a:solidFill>
-                  <a:srgbClr val="31424A"/>
-                </a:solidFill>
-                <a:latin typeface="Calibri" pitchFamily="34" charset="0"/>
-                <a:ea typeface="Calibri" pitchFamily="34" charset="-122"/>
-                <a:cs typeface="Calibri" pitchFamily="34" charset="-120"/>
-              </a:rPr>
-              <a:t>Forte mortalité des jeunes plants en saison sèche : l'hydro-rétenteur se juge au taux de reprise.</a:t>
-            </a:r>
-            <a:endParaRPr lang="en-US" sz="1150" dirty="0"/>
-          </a:p>
-          <a:p>
-            <a:pPr algn="l" marL="342900" indent="-342900">
-              <a:lnSpc>
-                <a:spcPct val="116000"/>
-              </a:lnSpc>
-              <a:spcAft>
-                <a:spcPts val="700"/>
-              </a:spcAft>
-              <a:buSzPct val="100000"/>
-              <a:buChar char="•"/>
-            </a:pPr>
-            <a:r>
-              <a:rPr lang="en-US" sz="1150" dirty="0">
-                <a:solidFill>
-                  <a:srgbClr val="31424A"/>
-                </a:solidFill>
-                <a:latin typeface="Calibri" pitchFamily="34" charset="0"/>
-                <a:ea typeface="Calibri" pitchFamily="34" charset="-122"/>
-                <a:cs typeface="Calibri" pitchFamily="34" charset="-120"/>
-              </a:rPr>
-              <a:t>Volumes contractualisables et protocole d'essai facile à tenir sur un bloc homogène.</a:t>
-            </a:r>
-            <a:endParaRPr lang="en-US" sz="1150" dirty="0"/>
-          </a:p>
-        </p:txBody>
-      </p:sp>
-      <p:sp>
-        <p:nvSpPr>
-          <p:cNvPr id="19" name="Text 14"/>
+              <a:t>Retenir l'eau au niveau des racines réduit les arrosages et stabilise les récoltes entre deux pluies.</a:t>
+            </a:r>
+            <a:endParaRPr lang="en-US" sz="1400" dirty="0"/>
+          </a:p>
+        </p:txBody>
+      </p:sp>
+      <p:sp>
+        <p:nvSpPr>
+          <p:cNvPr id="6" name="Text 3"/>
           <p:cNvSpPr txBox="1"/>
           <p:nvPr/>
         </p:nvSpPr>
@@ -7445,7 +12745,7 @@
       </p:sp>
       <p:sp>
         <p:nvSpPr>
-          <p:cNvPr id="20" name="Text 15"/>
+          <p:cNvPr id="7" name="Text 4"/>
           <p:cNvSpPr txBox="1"/>
           <p:nvPr/>
         </p:nvSpPr>
@@ -7549,7 +12849,7 @@
                 <a:ea typeface="Calibri" pitchFamily="34" charset="-122"/>
                 <a:cs typeface="Calibri" pitchFamily="34" charset="-120"/>
               </a:rPr>
-              <a:t>COMMENT NOUS PROCÉDONS</a:t>
+              <a:t>Potentiel de rendement</a:t>
             </a:r>
             <a:endParaRPr lang="en-US" sz="1150" dirty="0"/>
           </a:p>
@@ -7588,26 +12888,42 @@
                 <a:ea typeface="Cambria" pitchFamily="34" charset="-122"/>
                 <a:cs typeface="Cambria" pitchFamily="34" charset="-120"/>
               </a:rPr>
-              <a:t>Un déploiement par étapes, mesuré à chaque palier</a:t>
+              <a:t>Gain de rendement attendu par culture</a:t>
             </a:r>
             <a:endParaRPr lang="en-US" sz="3000" dirty="0"/>
           </a:p>
         </p:txBody>
       </p:sp>
-      <p:sp>
-        <p:nvSpPr>
-          <p:cNvPr id="4" name="Shape 2"/>
+      <p:graphicFrame>
+        <p:nvGraphicFramePr>
+          <p:cNvPr id="4" name="Chart 0" descr=""/>
+          <p:cNvGraphicFramePr/>
+          <p:nvPr/>
+        </p:nvGraphicFramePr>
+        <p:xfrm>
+          <a:off x="594360" y="1783080"/>
+          <a:ext cx="7360920" cy="3977640"/>
+        </p:xfrm>
+        <a:graphic xmlns:a="http://schemas.openxmlformats.org/drawingml/2006/main">
+          <a:graphicData uri="http://schemas.openxmlformats.org/drawingml/2006/chart">
+            <c:chart xmlns:c="http://schemas.openxmlformats.org/drawingml/2006/chart" r:id="rId1"/>
+          </a:graphicData>
+        </a:graphic>
+      </p:graphicFrame>
+      <p:sp>
+        <p:nvSpPr>
+          <p:cNvPr id="5" name="Shape 2"/>
           <p:cNvSpPr/>
           <p:nvPr/>
         </p:nvSpPr>
         <p:spPr>
           <a:xfrm>
-            <a:off x="594360" y="1874520"/>
-            <a:ext cx="2545004" cy="2834640"/>
+            <a:off x="8275320" y="1783080"/>
+            <a:ext cx="3291840" cy="3977640"/>
           </a:xfrm>
           <a:prstGeom prst="roundRect">
             <a:avLst>
-              <a:gd name="adj" fmla="val 3593"/>
+              <a:gd name="adj" fmla="val 2778"/>
             </a:avLst>
           </a:prstGeom>
           <a:solidFill>
@@ -7623,34 +12939,14 @@
       </p:sp>
       <p:sp>
         <p:nvSpPr>
-          <p:cNvPr id="5" name="Shape 3"/>
-          <p:cNvSpPr/>
-          <p:nvPr/>
-        </p:nvSpPr>
-        <p:spPr>
-          <a:xfrm>
-            <a:off x="822960" y="2103120"/>
-            <a:ext cx="566928" cy="566928"/>
-          </a:xfrm>
-          <a:prstGeom prst="ellipse">
-            <a:avLst/>
-          </a:prstGeom>
-          <a:solidFill>
-            <a:srgbClr val="1C5A73"/>
-          </a:solidFill>
-          <a:ln/>
-        </p:spPr>
-      </p:sp>
-      <p:sp>
-        <p:nvSpPr>
-          <p:cNvPr id="6" name="Text 4"/>
-          <p:cNvSpPr txBox="1"/>
-          <p:nvPr/>
-        </p:nvSpPr>
-        <p:spPr>
-          <a:xfrm>
-            <a:off x="822960" y="2103120"/>
-            <a:ext cx="566928" cy="566928"/>
+          <p:cNvPr id="6" name="Text 3"/>
+          <p:cNvSpPr txBox="1"/>
+          <p:nvPr/>
+        </p:nvSpPr>
+        <p:spPr>
+          <a:xfrm>
+            <a:off x="8503920" y="2011680"/>
+            <a:ext cx="2834640" cy="457200"/>
           </a:xfrm>
           <a:prstGeom prst="rect">
             <a:avLst/>
@@ -7662,616 +12958,34 @@
           <a:bodyPr wrap="square" lIns="0" tIns="0" rIns="0" bIns="0" rtlCol="0" anchor="ctr"/>
           <a:lstStyle/>
           <a:p>
-            <a:pPr algn="ctr" indent="0" marL="0">
-              <a:buNone/>
-            </a:pPr>
-            <a:r>
-              <a:rPr lang="en-US" sz="1600" b="1" dirty="0">
-                <a:solidFill>
-                  <a:srgbClr val="FFFFFF"/>
+            <a:pPr algn="l" indent="0" marL="0">
+              <a:buNone/>
+            </a:pPr>
+            <a:r>
+              <a:rPr lang="en-US" sz="1300" b="1" dirty="0">
+                <a:solidFill>
+                  <a:srgbClr val="1C5A73"/>
                 </a:solidFill>
                 <a:latin typeface="Cambria" pitchFamily="34" charset="0"/>
                 <a:ea typeface="Cambria" pitchFamily="34" charset="-122"/>
                 <a:cs typeface="Cambria" pitchFamily="34" charset="-120"/>
               </a:rPr>
-              <a:t>1</a:t>
-            </a:r>
-            <a:endParaRPr lang="en-US" sz="1600" dirty="0"/>
-          </a:p>
-        </p:txBody>
-      </p:sp>
-      <p:sp>
-        <p:nvSpPr>
-          <p:cNvPr id="7" name="Text 5"/>
-          <p:cNvSpPr txBox="1"/>
-          <p:nvPr/>
-        </p:nvSpPr>
-        <p:spPr>
-          <a:xfrm>
-            <a:off x="822960" y="2788920"/>
-            <a:ext cx="2087804" cy="457200"/>
-          </a:xfrm>
-          <a:prstGeom prst="rect">
-            <a:avLst/>
-          </a:prstGeom>
-          <a:noFill/>
-          <a:ln/>
-        </p:spPr>
-        <p:txBody>
-          <a:bodyPr wrap="square" lIns="0" tIns="0" rIns="0" bIns="0" rtlCol="0" anchor="ctr"/>
-          <a:lstStyle/>
-          <a:p>
-            <a:pPr algn="l" indent="0" marL="0">
-              <a:buNone/>
-            </a:pPr>
-            <a:r>
-              <a:rPr lang="en-US" sz="1400" b="1" dirty="0">
-                <a:solidFill>
-                  <a:srgbClr val="1C5A73"/>
-                </a:solidFill>
-                <a:latin typeface="Cambria" pitchFamily="34" charset="0"/>
-                <a:ea typeface="Cambria" pitchFamily="34" charset="-122"/>
-                <a:cs typeface="Cambria" pitchFamily="34" charset="-120"/>
-              </a:rPr>
-              <a:t>Diagnostic</a:t>
-            </a:r>
-            <a:endParaRPr lang="en-US" sz="1400" dirty="0"/>
-          </a:p>
-        </p:txBody>
-      </p:sp>
-      <p:sp>
-        <p:nvSpPr>
-          <p:cNvPr id="8" name="Text 6"/>
-          <p:cNvSpPr txBox="1"/>
-          <p:nvPr/>
-        </p:nvSpPr>
-        <p:spPr>
-          <a:xfrm>
-            <a:off x="822960" y="3291840"/>
-            <a:ext cx="2087804" cy="1234440"/>
-          </a:xfrm>
-          <a:prstGeom prst="rect">
-            <a:avLst/>
-          </a:prstGeom>
-          <a:noFill/>
-          <a:ln/>
-        </p:spPr>
-        <p:txBody>
-          <a:bodyPr wrap="square" lIns="0" tIns="0" rIns="0" bIns="0" rtlCol="0" anchor="t"/>
-          <a:lstStyle/>
-          <a:p>
-            <a:pPr algn="l" indent="0" marL="0">
-              <a:lnSpc>
-                <a:spcPct val="120000"/>
-              </a:lnSpc>
-              <a:buNone/>
-            </a:pPr>
-            <a:r>
-              <a:rPr lang="en-US" sz="1200" dirty="0">
-                <a:solidFill>
-                  <a:srgbClr val="31424A"/>
-                </a:solidFill>
-                <a:latin typeface="Calibri" pitchFamily="34" charset="0"/>
-                <a:ea typeface="Calibri" pitchFamily="34" charset="-122"/>
-                <a:cs typeface="Calibri" pitchFamily="34" charset="-120"/>
-              </a:rPr>
-              <a:t>Analyse du sol, du mode d'arrosage et de la culture. Aucun engagement à ce stade.</a:t>
-            </a:r>
-            <a:endParaRPr lang="en-US" sz="1200" dirty="0"/>
-          </a:p>
-        </p:txBody>
-      </p:sp>
-      <p:sp>
-        <p:nvSpPr>
-          <p:cNvPr id="9" name="Shape 7"/>
-          <p:cNvSpPr/>
-          <p:nvPr/>
-        </p:nvSpPr>
-        <p:spPr>
-          <a:xfrm>
-            <a:off x="3413684" y="1874520"/>
-            <a:ext cx="2545004" cy="2834640"/>
-          </a:xfrm>
-          <a:prstGeom prst="roundRect">
-            <a:avLst>
-              <a:gd name="adj" fmla="val 3593"/>
-            </a:avLst>
-          </a:prstGeom>
-          <a:solidFill>
-            <a:srgbClr val="EDF3F5"/>
-          </a:solidFill>
-          <a:ln w="9525">
-            <a:solidFill>
-              <a:srgbClr val="D6E2E7"/>
-            </a:solidFill>
-            <a:prstDash val="solid"/>
-          </a:ln>
-        </p:spPr>
-      </p:sp>
-      <p:sp>
-        <p:nvSpPr>
-          <p:cNvPr id="10" name="Shape 8"/>
-          <p:cNvSpPr/>
-          <p:nvPr/>
-        </p:nvSpPr>
-        <p:spPr>
-          <a:xfrm>
-            <a:off x="3642284" y="2103120"/>
-            <a:ext cx="566928" cy="566928"/>
-          </a:xfrm>
-          <a:prstGeom prst="ellipse">
-            <a:avLst/>
-          </a:prstGeom>
-          <a:solidFill>
-            <a:srgbClr val="1C5A73"/>
-          </a:solidFill>
-          <a:ln/>
-        </p:spPr>
-      </p:sp>
-      <p:sp>
-        <p:nvSpPr>
-          <p:cNvPr id="11" name="Text 9"/>
-          <p:cNvSpPr txBox="1"/>
-          <p:nvPr/>
-        </p:nvSpPr>
-        <p:spPr>
-          <a:xfrm>
-            <a:off x="3642284" y="2103120"/>
-            <a:ext cx="566928" cy="566928"/>
-          </a:xfrm>
-          <a:prstGeom prst="rect">
-            <a:avLst/>
-          </a:prstGeom>
-          <a:noFill/>
-          <a:ln/>
-        </p:spPr>
-        <p:txBody>
-          <a:bodyPr wrap="square" lIns="0" tIns="0" rIns="0" bIns="0" rtlCol="0" anchor="ctr"/>
-          <a:lstStyle/>
-          <a:p>
-            <a:pPr algn="ctr" indent="0" marL="0">
-              <a:buNone/>
-            </a:pPr>
-            <a:r>
-              <a:rPr lang="en-US" sz="1600" b="1" dirty="0">
-                <a:solidFill>
-                  <a:srgbClr val="FFFFFF"/>
-                </a:solidFill>
-                <a:latin typeface="Cambria" pitchFamily="34" charset="0"/>
-                <a:ea typeface="Cambria" pitchFamily="34" charset="-122"/>
-                <a:cs typeface="Cambria" pitchFamily="34" charset="-120"/>
-              </a:rPr>
-              <a:t>2</a:t>
-            </a:r>
-            <a:endParaRPr lang="en-US" sz="1600" dirty="0"/>
-          </a:p>
-        </p:txBody>
-      </p:sp>
-      <p:sp>
-        <p:nvSpPr>
-          <p:cNvPr id="12" name="Text 10"/>
-          <p:cNvSpPr txBox="1"/>
-          <p:nvPr/>
-        </p:nvSpPr>
-        <p:spPr>
-          <a:xfrm>
-            <a:off x="3642284" y="2788920"/>
-            <a:ext cx="2087804" cy="457200"/>
-          </a:xfrm>
-          <a:prstGeom prst="rect">
-            <a:avLst/>
-          </a:prstGeom>
-          <a:noFill/>
-          <a:ln/>
-        </p:spPr>
-        <p:txBody>
-          <a:bodyPr wrap="square" lIns="0" tIns="0" rIns="0" bIns="0" rtlCol="0" anchor="ctr"/>
-          <a:lstStyle/>
-          <a:p>
-            <a:pPr algn="l" indent="0" marL="0">
-              <a:buNone/>
-            </a:pPr>
-            <a:r>
-              <a:rPr lang="en-US" sz="1400" b="1" dirty="0">
-                <a:solidFill>
-                  <a:srgbClr val="1C5A73"/>
-                </a:solidFill>
-                <a:latin typeface="Cambria" pitchFamily="34" charset="0"/>
-                <a:ea typeface="Cambria" pitchFamily="34" charset="-122"/>
-                <a:cs typeface="Cambria" pitchFamily="34" charset="-120"/>
-              </a:rPr>
-              <a:t>Parcelle témoin</a:t>
-            </a:r>
-            <a:endParaRPr lang="en-US" sz="1400" dirty="0"/>
-          </a:p>
-        </p:txBody>
-      </p:sp>
-      <p:sp>
-        <p:nvSpPr>
-          <p:cNvPr id="13" name="Text 11"/>
-          <p:cNvSpPr txBox="1"/>
-          <p:nvPr/>
-        </p:nvSpPr>
-        <p:spPr>
-          <a:xfrm>
-            <a:off x="3642284" y="3291840"/>
-            <a:ext cx="2087804" cy="1234440"/>
-          </a:xfrm>
-          <a:prstGeom prst="rect">
-            <a:avLst/>
-          </a:prstGeom>
-          <a:noFill/>
-          <a:ln/>
-        </p:spPr>
-        <p:txBody>
-          <a:bodyPr wrap="square" lIns="0" tIns="0" rIns="0" bIns="0" rtlCol="0" anchor="t"/>
-          <a:lstStyle/>
-          <a:p>
-            <a:pPr algn="l" indent="0" marL="0">
-              <a:lnSpc>
-                <a:spcPct val="120000"/>
-              </a:lnSpc>
-              <a:buNone/>
-            </a:pPr>
-            <a:r>
-              <a:rPr lang="en-US" sz="1200" dirty="0">
-                <a:solidFill>
-                  <a:srgbClr val="31424A"/>
-                </a:solidFill>
-                <a:latin typeface="Calibri" pitchFamily="34" charset="0"/>
-                <a:ea typeface="Calibri" pitchFamily="34" charset="-122"/>
-                <a:cs typeface="Calibri" pitchFamily="34" charset="-120"/>
-              </a:rPr>
-              <a:t>Un essai comparatif sur un bloc, avec parcelle témoin conduite à l'identique.</a:t>
-            </a:r>
-            <a:endParaRPr lang="en-US" sz="1200" dirty="0"/>
-          </a:p>
-        </p:txBody>
-      </p:sp>
-      <p:sp>
-        <p:nvSpPr>
-          <p:cNvPr id="14" name="Shape 12"/>
-          <p:cNvSpPr/>
-          <p:nvPr/>
-        </p:nvSpPr>
-        <p:spPr>
-          <a:xfrm>
-            <a:off x="6233008" y="1874520"/>
-            <a:ext cx="2545004" cy="2834640"/>
-          </a:xfrm>
-          <a:prstGeom prst="roundRect">
-            <a:avLst>
-              <a:gd name="adj" fmla="val 3593"/>
-            </a:avLst>
-          </a:prstGeom>
-          <a:solidFill>
-            <a:srgbClr val="EDF3F5"/>
-          </a:solidFill>
-          <a:ln w="9525">
-            <a:solidFill>
-              <a:srgbClr val="D6E2E7"/>
-            </a:solidFill>
-            <a:prstDash val="solid"/>
-          </a:ln>
-        </p:spPr>
-      </p:sp>
-      <p:sp>
-        <p:nvSpPr>
-          <p:cNvPr id="15" name="Shape 13"/>
-          <p:cNvSpPr/>
-          <p:nvPr/>
-        </p:nvSpPr>
-        <p:spPr>
-          <a:xfrm>
-            <a:off x="6461608" y="2103120"/>
-            <a:ext cx="566928" cy="566928"/>
-          </a:xfrm>
-          <a:prstGeom prst="ellipse">
-            <a:avLst/>
-          </a:prstGeom>
-          <a:solidFill>
-            <a:srgbClr val="1C5A73"/>
-          </a:solidFill>
-          <a:ln/>
-        </p:spPr>
-      </p:sp>
-      <p:sp>
-        <p:nvSpPr>
-          <p:cNvPr id="16" name="Text 14"/>
-          <p:cNvSpPr txBox="1"/>
-          <p:nvPr/>
-        </p:nvSpPr>
-        <p:spPr>
-          <a:xfrm>
-            <a:off x="6461608" y="2103120"/>
-            <a:ext cx="566928" cy="566928"/>
-          </a:xfrm>
-          <a:prstGeom prst="rect">
-            <a:avLst/>
-          </a:prstGeom>
-          <a:noFill/>
-          <a:ln/>
-        </p:spPr>
-        <p:txBody>
-          <a:bodyPr wrap="square" lIns="0" tIns="0" rIns="0" bIns="0" rtlCol="0" anchor="ctr"/>
-          <a:lstStyle/>
-          <a:p>
-            <a:pPr algn="ctr" indent="0" marL="0">
-              <a:buNone/>
-            </a:pPr>
-            <a:r>
-              <a:rPr lang="en-US" sz="1600" b="1" dirty="0">
-                <a:solidFill>
-                  <a:srgbClr val="FFFFFF"/>
-                </a:solidFill>
-                <a:latin typeface="Cambria" pitchFamily="34" charset="0"/>
-                <a:ea typeface="Cambria" pitchFamily="34" charset="-122"/>
-                <a:cs typeface="Cambria" pitchFamily="34" charset="-120"/>
-              </a:rPr>
-              <a:t>3</a:t>
-            </a:r>
-            <a:endParaRPr lang="en-US" sz="1600" dirty="0"/>
-          </a:p>
-        </p:txBody>
-      </p:sp>
-      <p:sp>
-        <p:nvSpPr>
-          <p:cNvPr id="17" name="Text 15"/>
-          <p:cNvSpPr txBox="1"/>
-          <p:nvPr/>
-        </p:nvSpPr>
-        <p:spPr>
-          <a:xfrm>
-            <a:off x="6461608" y="2788920"/>
-            <a:ext cx="2087804" cy="457200"/>
-          </a:xfrm>
-          <a:prstGeom prst="rect">
-            <a:avLst/>
-          </a:prstGeom>
-          <a:noFill/>
-          <a:ln/>
-        </p:spPr>
-        <p:txBody>
-          <a:bodyPr wrap="square" lIns="0" tIns="0" rIns="0" bIns="0" rtlCol="0" anchor="ctr"/>
-          <a:lstStyle/>
-          <a:p>
-            <a:pPr algn="l" indent="0" marL="0">
-              <a:buNone/>
-            </a:pPr>
-            <a:r>
-              <a:rPr lang="en-US" sz="1400" b="1" dirty="0">
-                <a:solidFill>
-                  <a:srgbClr val="1C5A73"/>
-                </a:solidFill>
-                <a:latin typeface="Cambria" pitchFamily="34" charset="0"/>
-                <a:ea typeface="Cambria" pitchFamily="34" charset="-122"/>
-                <a:cs typeface="Cambria" pitchFamily="34" charset="-120"/>
-              </a:rPr>
-              <a:t>Mesure</a:t>
-            </a:r>
-            <a:endParaRPr lang="en-US" sz="1400" dirty="0"/>
-          </a:p>
-        </p:txBody>
-      </p:sp>
-      <p:sp>
-        <p:nvSpPr>
-          <p:cNvPr id="18" name="Text 16"/>
-          <p:cNvSpPr txBox="1"/>
-          <p:nvPr/>
-        </p:nvSpPr>
-        <p:spPr>
-          <a:xfrm>
-            <a:off x="6461608" y="3291840"/>
-            <a:ext cx="2087804" cy="1234440"/>
-          </a:xfrm>
-          <a:prstGeom prst="rect">
-            <a:avLst/>
-          </a:prstGeom>
-          <a:noFill/>
-          <a:ln/>
-        </p:spPr>
-        <p:txBody>
-          <a:bodyPr wrap="square" lIns="0" tIns="0" rIns="0" bIns="0" rtlCol="0" anchor="t"/>
-          <a:lstStyle/>
-          <a:p>
-            <a:pPr algn="l" indent="0" marL="0">
-              <a:lnSpc>
-                <a:spcPct val="120000"/>
-              </a:lnSpc>
-              <a:buNone/>
-            </a:pPr>
-            <a:r>
-              <a:rPr lang="en-US" sz="1200" dirty="0">
-                <a:solidFill>
-                  <a:srgbClr val="31424A"/>
-                </a:solidFill>
-                <a:latin typeface="Calibri" pitchFamily="34" charset="0"/>
-                <a:ea typeface="Calibri" pitchFamily="34" charset="-122"/>
-                <a:cs typeface="Calibri" pitchFamily="34" charset="-120"/>
-              </a:rPr>
-              <a:t>Relevés de reprise, de consommation et de rendement à cheval sur la saison sèche.</a:t>
-            </a:r>
-            <a:endParaRPr lang="en-US" sz="1200" dirty="0"/>
-          </a:p>
-        </p:txBody>
-      </p:sp>
-      <p:sp>
-        <p:nvSpPr>
-          <p:cNvPr id="19" name="Shape 17"/>
-          <p:cNvSpPr/>
-          <p:nvPr/>
-        </p:nvSpPr>
-        <p:spPr>
-          <a:xfrm>
-            <a:off x="9052331" y="1874520"/>
-            <a:ext cx="2545004" cy="2834640"/>
-          </a:xfrm>
-          <a:prstGeom prst="roundRect">
-            <a:avLst>
-              <a:gd name="adj" fmla="val 3593"/>
-            </a:avLst>
-          </a:prstGeom>
-          <a:solidFill>
-            <a:srgbClr val="EDF3F5"/>
-          </a:solidFill>
-          <a:ln w="9525">
-            <a:solidFill>
-              <a:srgbClr val="D6E2E7"/>
-            </a:solidFill>
-            <a:prstDash val="solid"/>
-          </a:ln>
-        </p:spPr>
-      </p:sp>
-      <p:sp>
-        <p:nvSpPr>
-          <p:cNvPr id="20" name="Shape 18"/>
-          <p:cNvSpPr/>
-          <p:nvPr/>
-        </p:nvSpPr>
-        <p:spPr>
-          <a:xfrm>
-            <a:off x="9280931" y="2103120"/>
-            <a:ext cx="566928" cy="566928"/>
-          </a:xfrm>
-          <a:prstGeom prst="ellipse">
-            <a:avLst/>
-          </a:prstGeom>
-          <a:solidFill>
-            <a:srgbClr val="1C5A73"/>
-          </a:solidFill>
-          <a:ln/>
-        </p:spPr>
-      </p:sp>
-      <p:sp>
-        <p:nvSpPr>
-          <p:cNvPr id="21" name="Text 19"/>
-          <p:cNvSpPr txBox="1"/>
-          <p:nvPr/>
-        </p:nvSpPr>
-        <p:spPr>
-          <a:xfrm>
-            <a:off x="9280931" y="2103120"/>
-            <a:ext cx="566928" cy="566928"/>
-          </a:xfrm>
-          <a:prstGeom prst="rect">
-            <a:avLst/>
-          </a:prstGeom>
-          <a:noFill/>
-          <a:ln/>
-        </p:spPr>
-        <p:txBody>
-          <a:bodyPr wrap="square" lIns="0" tIns="0" rIns="0" bIns="0" rtlCol="0" anchor="ctr"/>
-          <a:lstStyle/>
-          <a:p>
-            <a:pPr algn="ctr" indent="0" marL="0">
-              <a:buNone/>
-            </a:pPr>
-            <a:r>
-              <a:rPr lang="en-US" sz="1600" b="1" dirty="0">
-                <a:solidFill>
-                  <a:srgbClr val="FFFFFF"/>
-                </a:solidFill>
-                <a:latin typeface="Cambria" pitchFamily="34" charset="0"/>
-                <a:ea typeface="Cambria" pitchFamily="34" charset="-122"/>
-                <a:cs typeface="Cambria" pitchFamily="34" charset="-120"/>
-              </a:rPr>
-              <a:t>4</a:t>
-            </a:r>
-            <a:endParaRPr lang="en-US" sz="1600" dirty="0"/>
-          </a:p>
-        </p:txBody>
-      </p:sp>
-      <p:sp>
-        <p:nvSpPr>
-          <p:cNvPr id="22" name="Text 20"/>
-          <p:cNvSpPr txBox="1"/>
-          <p:nvPr/>
-        </p:nvSpPr>
-        <p:spPr>
-          <a:xfrm>
-            <a:off x="9280931" y="2788920"/>
-            <a:ext cx="2087804" cy="457200"/>
-          </a:xfrm>
-          <a:prstGeom prst="rect">
-            <a:avLst/>
-          </a:prstGeom>
-          <a:noFill/>
-          <a:ln/>
-        </p:spPr>
-        <p:txBody>
-          <a:bodyPr wrap="square" lIns="0" tIns="0" rIns="0" bIns="0" rtlCol="0" anchor="ctr"/>
-          <a:lstStyle/>
-          <a:p>
-            <a:pPr algn="l" indent="0" marL="0">
-              <a:buNone/>
-            </a:pPr>
-            <a:r>
-              <a:rPr lang="en-US" sz="1400" b="1" dirty="0">
-                <a:solidFill>
-                  <a:srgbClr val="1C5A73"/>
-                </a:solidFill>
-                <a:latin typeface="Cambria" pitchFamily="34" charset="0"/>
-                <a:ea typeface="Cambria" pitchFamily="34" charset="-122"/>
-                <a:cs typeface="Cambria" pitchFamily="34" charset="-120"/>
-              </a:rPr>
-              <a:t>Extension</a:t>
-            </a:r>
-            <a:endParaRPr lang="en-US" sz="1400" dirty="0"/>
-          </a:p>
-        </p:txBody>
-      </p:sp>
-      <p:sp>
-        <p:nvSpPr>
-          <p:cNvPr id="23" name="Text 21"/>
-          <p:cNvSpPr txBox="1"/>
-          <p:nvPr/>
-        </p:nvSpPr>
-        <p:spPr>
-          <a:xfrm>
-            <a:off x="9280931" y="3291840"/>
-            <a:ext cx="2087804" cy="1234440"/>
-          </a:xfrm>
-          <a:prstGeom prst="rect">
-            <a:avLst/>
-          </a:prstGeom>
-          <a:noFill/>
-          <a:ln/>
-        </p:spPr>
-        <p:txBody>
-          <a:bodyPr wrap="square" lIns="0" tIns="0" rIns="0" bIns="0" rtlCol="0" anchor="t"/>
-          <a:lstStyle/>
-          <a:p>
-            <a:pPr algn="l" indent="0" marL="0">
-              <a:lnSpc>
-                <a:spcPct val="120000"/>
-              </a:lnSpc>
-              <a:buNone/>
-            </a:pPr>
-            <a:r>
-              <a:rPr lang="en-US" sz="1200" dirty="0">
-                <a:solidFill>
-                  <a:srgbClr val="31424A"/>
-                </a:solidFill>
-                <a:latin typeface="Calibri" pitchFamily="34" charset="0"/>
-                <a:ea typeface="Calibri" pitchFamily="34" charset="-122"/>
-                <a:cs typeface="Calibri" pitchFamily="34" charset="-120"/>
-              </a:rPr>
-              <a:t>Généralisation progressive aux autres parcelles sur la base des résultats constatés.</a:t>
-            </a:r>
-            <a:endParaRPr lang="en-US" sz="1200" dirty="0"/>
-          </a:p>
-        </p:txBody>
-      </p:sp>
-      <p:sp>
-        <p:nvSpPr>
-          <p:cNvPr id="24" name="Text 22"/>
-          <p:cNvSpPr txBox="1"/>
-          <p:nvPr/>
-        </p:nvSpPr>
-        <p:spPr>
-          <a:xfrm>
-            <a:off x="594360" y="4983480"/>
-            <a:ext cx="11002975" cy="822960"/>
+              <a:t>À lire avec prudence</a:t>
+            </a:r>
+            <a:endParaRPr lang="en-US" sz="1300" dirty="0"/>
+          </a:p>
+        </p:txBody>
+      </p:sp>
+      <p:sp>
+        <p:nvSpPr>
+          <p:cNvPr id="7" name="Text 4"/>
+          <p:cNvSpPr txBox="1"/>
+          <p:nvPr/>
+        </p:nvSpPr>
+        <p:spPr>
+          <a:xfrm>
+            <a:off x="8503920" y="2560320"/>
+            <a:ext cx="2834640" cy="3017520"/>
           </a:xfrm>
           <a:prstGeom prst="rect">
             <a:avLst/>
@@ -8290,23 +13004,52 @@
               <a:buNone/>
             </a:pPr>
             <a:r>
-              <a:rPr lang="en-US" sz="1250" i="1" dirty="0">
-                <a:solidFill>
-                  <a:srgbClr val="6C8089"/>
-                </a:solidFill>
-                <a:latin typeface="Calibri" pitchFamily="34" charset="0"/>
-                <a:ea typeface="Calibri" pitchFamily="34" charset="-122"/>
-                <a:cs typeface="Calibri" pitchFamily="34" charset="-120"/>
-              </a:rPr>
-              <a:t>La règle de dosage est la même partout : 3 grammes par litre de terre utile. Ce qui change d'un terrain à l'autre, c'est le volume de terre effectivement exploré par les racines.</a:t>
-            </a:r>
-            <a:endParaRPr lang="en-US" sz="1250" dirty="0"/>
-          </a:p>
-        </p:txBody>
-      </p:sp>
-      <p:sp>
-        <p:nvSpPr>
-          <p:cNvPr id="25" name="Text 23"/>
+              <a:rPr lang="en-US" sz="1200" dirty="0">
+                <a:solidFill>
+                  <a:srgbClr val="31424A"/>
+                </a:solidFill>
+                <a:latin typeface="Calibri" pitchFamily="34" charset="0"/>
+                <a:ea typeface="Calibri" pitchFamily="34" charset="-122"/>
+                <a:cs typeface="Calibri" pitchFamily="34" charset="-120"/>
+              </a:rPr>
+              <a:t>Fourchettes retenues par notre calculateur de dose, pour une culture conduite normalement avec EVERGREEN® à la plantation.</a:t>
+            </a:r>
+            <a:endParaRPr lang="en-US" sz="1200" dirty="0"/>
+          </a:p>
+          <a:p>
+            <a:pPr algn="l" indent="0" marL="0">
+              <a:lnSpc>
+                <a:spcPct val="125000"/>
+              </a:lnSpc>
+              <a:buNone/>
+            </a:pPr>
+            <a:endParaRPr lang="en-US" sz="1200" dirty="0"/>
+          </a:p>
+          <a:p>
+            <a:pPr algn="l" indent="0" marL="0">
+              <a:lnSpc>
+                <a:spcPct val="125000"/>
+              </a:lnSpc>
+              <a:buNone/>
+            </a:pPr>
+            <a:r>
+              <a:rPr lang="en-US" sz="1200" dirty="0">
+                <a:solidFill>
+                  <a:srgbClr val="31424A"/>
+                </a:solidFill>
+                <a:latin typeface="Calibri" pitchFamily="34" charset="0"/>
+                <a:ea typeface="Calibri" pitchFamily="34" charset="-122"/>
+                <a:cs typeface="Calibri" pitchFamily="34" charset="-120"/>
+              </a:rPr>
+              <a:t>Le résultat réel dépend du sol, du climat et de la conduite. Pour les céréales, aucun gain n'est avancé sans essai de terrain.</a:t>
+            </a:r>
+            <a:endParaRPr lang="en-US" sz="1200" dirty="0"/>
+          </a:p>
+        </p:txBody>
+      </p:sp>
+      <p:sp>
+        <p:nvSpPr>
+          <p:cNvPr id="8" name="Text 5"/>
           <p:cNvSpPr txBox="1"/>
           <p:nvPr/>
         </p:nvSpPr>
@@ -8347,7 +13090,7 @@
       </p:sp>
       <p:sp>
         <p:nvSpPr>
-          <p:cNvPr id="26" name="Text 24"/>
+          <p:cNvPr id="9" name="Text 6"/>
           <p:cNvSpPr txBox="1"/>
           <p:nvPr/>
         </p:nvSpPr>

--- a/public/documents/countries/gabon.pptx
+++ b/public/documents/countries/gabon.pptx
@@ -3744,7 +3744,7 @@
       </p:sp>
       <p:pic>
         <p:nvPicPr>
-          <p:cNvPr id="5" name="Image 1" descr="C:\Users\Utilisateur\dev\green-solutions-web\public\images\logo-icon.png">    </p:cNvPr>
+          <p:cNvPr id="5" name="Image 1" descr="C:\Users\Utilisateur\dev\gsw-dossiers\public\images\logo-icon.png">    </p:cNvPr>
           <p:cNvPicPr>
             <a:picLocks noChangeAspect="1"/>
           </p:cNvPicPr>
@@ -3768,7 +3768,7 @@
       </p:pic>
       <p:pic>
         <p:nvPicPr>
-          <p:cNvPr id="6" name="Image 2" descr="C:\Users\Utilisateur\dev\green-solutions-web\scripts\dossiers\drapeaux\gabon.png">    </p:cNvPr>
+          <p:cNvPr id="6" name="Image 2" descr="C:\Users\Utilisateur\dev\gsw-dossiers\scripts\dossiers\drapeaux\gabon.png">    </p:cNvPr>
           <p:cNvPicPr>
             <a:picLocks noChangeAspect="1"/>
           </p:cNvPicPr>
@@ -9535,7 +9535,7 @@
                 <a:ea typeface="Calibri" pitchFamily="34" charset="-122"/>
                 <a:cs typeface="Calibri" pitchFamily="34" charset="-120"/>
               </a:rPr>
-              <a:t>contact@evergreen-ecosorb.com · 821 Chemin des Clapiers, 83220 Le Pradet, France</a:t>
+              <a:t>contact@evergreen-ecosorb.com · Green Solutions Groupe AIM SA, 46, route de la Condémine, 1475 Forel, Suisse</a:t>
             </a:r>
             <a:endParaRPr lang="en-US" sz="1400" dirty="0"/>
           </a:p>
@@ -9543,7 +9543,7 @@
       </p:sp>
       <p:pic>
         <p:nvPicPr>
-          <p:cNvPr id="6" name="Image 1" descr="C:\Users\Utilisateur\dev\green-solutions-web\scripts\dossiers\sceau-aim-clair.png">    </p:cNvPr>
+          <p:cNvPr id="6" name="Image 1" descr="C:\Users\Utilisateur\dev\gsw-dossiers\scripts\dossiers\sceau-aim-clair.png">    </p:cNvPr>
           <p:cNvPicPr>
             <a:picLocks noChangeAspect="1"/>
           </p:cNvPicPr>

--- a/public/documents/countries/gabon.pptx
+++ b/public/documents/countries/gabon.pptx
@@ -124,252 +124,7 @@
 </p:presentation>
 </file>
 
-<file path=ppt/charts/chart33.xml><?xml version="1.0" encoding="utf-8"?>
-<c:chartSpace xmlns:c="http://schemas.openxmlformats.org/drawingml/2006/chart" xmlns:a="http://schemas.openxmlformats.org/drawingml/2006/main" xmlns:r="http://schemas.openxmlformats.org/officeDocument/2006/relationships">
-  <c:date1904 val="0"/>
-  <c:roundedCorners val="1"/>
-  <c:chart>
-    <c:autoTitleDeleted val="1"/>
-    <c:plotArea>
-      <c:layout/>
-      <c:doughnutChart>
-        <c:varyColors val="1"/>
-        <c:ser>
-          <c:idx val="0"/>
-          <c:order val="0"/>
-          <c:tx>
-            <c:strRef>
-              <c:f>Sheet1!$B$1</c:f>
-              <c:strCache>
-                <c:ptCount val="1"/>
-                <c:pt idx="0">
-                  <c:v>Prélèvements</c:v>
-                </c:pt>
-              </c:strCache>
-            </c:strRef>
-          </c:tx>
-          <c:spPr>
-            <a:solidFill>
-              <a:schemeClr val="accent1"/>
-            </a:solidFill>
-            <a:ln w="9525" cap="flat">
-              <a:solidFill>
-                <a:srgbClr val="F9F9F9"/>
-              </a:solidFill>
-              <a:prstDash val="solid"/>
-              <a:round/>
-            </a:ln>
-            <a:effectLst/>
-          </c:spPr>
-          <c:dPt>
-            <c:idx val="0"/>
-            <c:bubble3D val="0"/>
-            <c:spPr>
-              <a:solidFill>
-                <a:srgbClr val="1C5A73"/>
-              </a:solidFill>
-              <a:effectLst/>
-            </c:spPr>
-          </c:dPt>
-          <c:dPt>
-            <c:idx val="1"/>
-            <c:bubble3D val="0"/>
-            <c:spPr>
-              <a:solidFill>
-                <a:srgbClr val="E0A33E"/>
-              </a:solidFill>
-              <a:effectLst/>
-            </c:spPr>
-          </c:dPt>
-          <c:dPt>
-            <c:idx val="2"/>
-            <c:bubble3D val="0"/>
-            <c:spPr>
-              <a:solidFill>
-                <a:srgbClr val="5E93A8"/>
-              </a:solidFill>
-              <a:effectLst/>
-            </c:spPr>
-          </c:dPt>
-          <c:dLbls>
-            <c:dLbl>
-              <c:idx val="0"/>
-              <c:numFmt formatCode="[$-40C]0&quot;%&quot;" sourceLinked="0"/>
-              <c:spPr/>
-              <c:txPr>
-                <a:bodyPr/>
-                <a:lstStyle/>
-                <a:p>
-                  <a:pPr>
-                    <a:defRPr sz="1100" b="0" i="0" u="none" strike="noStrike">
-                      <a:solidFill>
-                        <a:srgbClr val="FFFFFF"/>
-                      </a:solidFill>
-                      <a:latin typeface="Calibri"/>
-                    </a:defRPr>
-                  </a:pPr>
-                </a:p>
-              </c:txPr>
-              <c:showLegendKey val="0"/>
-              <c:showVal val="1"/>
-              <c:showCatName val="0"/>
-              <c:showSerName val="0"/>
-              <c:showPercent val="0"/>
-              <c:showBubbleSize val="0"/>
-            </c:dLbl>
-            <c:dLbl>
-              <c:idx val="1"/>
-              <c:numFmt formatCode="[$-40C]0&quot;%&quot;" sourceLinked="0"/>
-              <c:spPr/>
-              <c:txPr>
-                <a:bodyPr/>
-                <a:lstStyle/>
-                <a:p>
-                  <a:pPr>
-                    <a:defRPr sz="1100" b="0" i="0" u="none" strike="noStrike">
-                      <a:solidFill>
-                        <a:srgbClr val="FFFFFF"/>
-                      </a:solidFill>
-                      <a:latin typeface="Calibri"/>
-                    </a:defRPr>
-                  </a:pPr>
-                </a:p>
-              </c:txPr>
-              <c:showLegendKey val="0"/>
-              <c:showVal val="1"/>
-              <c:showCatName val="0"/>
-              <c:showSerName val="0"/>
-              <c:showPercent val="0"/>
-              <c:showBubbleSize val="0"/>
-            </c:dLbl>
-            <c:dLbl>
-              <c:idx val="2"/>
-              <c:numFmt formatCode="[$-40C]0&quot;%&quot;" sourceLinked="0"/>
-              <c:spPr/>
-              <c:txPr>
-                <a:bodyPr/>
-                <a:lstStyle/>
-                <a:p>
-                  <a:pPr>
-                    <a:defRPr sz="1100" b="0" i="0" u="none" strike="noStrike">
-                      <a:solidFill>
-                        <a:srgbClr val="FFFFFF"/>
-                      </a:solidFill>
-                      <a:latin typeface="Calibri"/>
-                    </a:defRPr>
-                  </a:pPr>
-                </a:p>
-              </c:txPr>
-              <c:showLegendKey val="0"/>
-              <c:showVal val="1"/>
-              <c:showCatName val="0"/>
-              <c:showSerName val="0"/>
-              <c:showPercent val="0"/>
-              <c:showBubbleSize val="0"/>
-            </c:dLbl>
-            <c:numFmt formatCode="[$-40C]0&quot;%&quot;" sourceLinked="0"/>
-            <c:txPr>
-              <a:bodyPr/>
-              <a:lstStyle/>
-              <a:p>
-                <a:pPr>
-                  <a:defRPr sz="1800" b="0" i="0" u="none" strike="noStrike">
-                    <a:solidFill>
-                      <a:srgbClr val="000000"/>
-                    </a:solidFill>
-                    <a:latin typeface="Arial"/>
-                  </a:defRPr>
-                </a:pPr>
-              </a:p>
-            </c:txPr>
-            <c:showLegendKey val="0"/>
-            <c:showVal val="0"/>
-            <c:showCatName val="1"/>
-            <c:showSerName val="0"/>
-            <c:showPercent val="1"/>
-            <c:showBubbleSize val="0"/>
-            <c:showLeaderLines val="0"/>
-          </c:dLbls>
-          <c:cat>
-            <c:strRef>
-              <c:f>Sheet1!$A$2:$A$4</c:f>
-              <c:strCache>
-                <c:ptCount val="3"/>
-                <c:pt idx="0">
-                  <c:v>Agriculture</c:v>
-                </c:pt>
-                <c:pt idx="1">
-                  <c:v>Eau potable</c:v>
-                </c:pt>
-                <c:pt idx="2">
-                  <c:v>Industrie</c:v>
-                </c:pt>
-              </c:strCache>
-            </c:strRef>
-          </c:cat>
-          <c:val>
-            <c:numRef>
-              <c:f>Sheet1!$B$2:$B$4</c:f>
-              <c:numCache>
-                <c:ptCount val="3"/>
-                <c:pt idx="0">
-                  <c:v>40</c:v>
-                </c:pt>
-                <c:pt idx="1">
-                  <c:v>50</c:v>
-                </c:pt>
-                <c:pt idx="2">
-                  <c:v>10</c:v>
-                </c:pt>
-              </c:numCache>
-            </c:numRef>
-          </c:val>
-        </c:ser>
-        <c:firstSliceAng val="0"/>
-        <c:holeSize val="55"/>
-      </c:doughnutChart>
-      <c:spPr>
-        <a:noFill/>
-        <a:ln>
-          <a:noFill/>
-        </a:ln>
-        <a:effectLst/>
-      </c:spPr>
-    </c:plotArea>
-    <c:legend>
-      <c:legendPos val="b"/>
-      <c:overlay val="0"/>
-      <c:txPr>
-        <a:bodyPr/>
-        <a:lstStyle/>
-        <a:p>
-          <a:pPr>
-            <a:defRPr sz="1100">
-              <a:latin typeface="Calibri"/>
-              <a:cs typeface="Calibri"/>
-            </a:defRPr>
-          </a:pPr>
-          <a:endParaRPr lang="en-US"/>
-        </a:p>
-      </c:txPr>
-    </c:legend>
-    <c:plotVisOnly val="1"/>
-    <c:dispBlanksAs val="span"/>
-  </c:chart>
-  <c:spPr>
-    <a:noFill/>
-    <a:ln>
-      <a:noFill/>
-    </a:ln>
-    <a:effectLst/>
-  </c:spPr>
-  <c:externalData r:id="rId1">
-    <c:autoUpdate val="0"/>
-  </c:externalData>
-</c:chartSpace>
-</file>
-
-<file path=ppt/charts/chart34.xml><?xml version="1.0" encoding="utf-8"?>
+<file path=ppt/charts/chart10.xml><?xml version="1.0" encoding="utf-8"?>
 <c:chartSpace xmlns:c="http://schemas.openxmlformats.org/drawingml/2006/chart" xmlns:a="http://schemas.openxmlformats.org/drawingml/2006/main" xmlns:r="http://schemas.openxmlformats.org/officeDocument/2006/relationships">
   <c:date1904 val="0"/>
   <c:roundedCorners val="1"/>
@@ -677,7 +432,7 @@
 </c:chartSpace>
 </file>
 
-<file path=ppt/charts/chart35.xml><?xml version="1.0" encoding="utf-8"?>
+<file path=ppt/charts/chart11.xml><?xml version="1.0" encoding="utf-8"?>
 <c:chartSpace xmlns:c="http://schemas.openxmlformats.org/drawingml/2006/chart" xmlns:a="http://schemas.openxmlformats.org/drawingml/2006/main" xmlns:r="http://schemas.openxmlformats.org/officeDocument/2006/relationships">
   <c:date1904 val="0"/>
   <c:roundedCorners val="1"/>
@@ -1042,7 +797,7 @@
 </c:chartSpace>
 </file>
 
-<file path=ppt/charts/chart36.xml><?xml version="1.0" encoding="utf-8"?>
+<file path=ppt/charts/chart12.xml><?xml version="1.0" encoding="utf-8"?>
 <c:chartSpace xmlns:c="http://schemas.openxmlformats.org/drawingml/2006/chart" xmlns:a="http://schemas.openxmlformats.org/drawingml/2006/main" xmlns:r="http://schemas.openxmlformats.org/officeDocument/2006/relationships">
   <c:date1904 val="0"/>
   <c:roundedCorners val="1"/>
@@ -1354,6 +1109,251 @@
         <c:crosses val="autoZero"/>
         <c:crossBetween val="between"/>
       </c:valAx>
+      <c:spPr>
+        <a:noFill/>
+        <a:ln>
+          <a:noFill/>
+        </a:ln>
+        <a:effectLst/>
+      </c:spPr>
+    </c:plotArea>
+    <c:legend>
+      <c:legendPos val="b"/>
+      <c:overlay val="0"/>
+      <c:txPr>
+        <a:bodyPr/>
+        <a:lstStyle/>
+        <a:p>
+          <a:pPr>
+            <a:defRPr sz="1100">
+              <a:latin typeface="Calibri"/>
+              <a:cs typeface="Calibri"/>
+            </a:defRPr>
+          </a:pPr>
+          <a:endParaRPr lang="en-US"/>
+        </a:p>
+      </c:txPr>
+    </c:legend>
+    <c:plotVisOnly val="1"/>
+    <c:dispBlanksAs val="span"/>
+  </c:chart>
+  <c:spPr>
+    <a:noFill/>
+    <a:ln>
+      <a:noFill/>
+    </a:ln>
+    <a:effectLst/>
+  </c:spPr>
+  <c:externalData r:id="rId1">
+    <c:autoUpdate val="0"/>
+  </c:externalData>
+</c:chartSpace>
+</file>
+
+<file path=ppt/charts/chart9.xml><?xml version="1.0" encoding="utf-8"?>
+<c:chartSpace xmlns:c="http://schemas.openxmlformats.org/drawingml/2006/chart" xmlns:a="http://schemas.openxmlformats.org/drawingml/2006/main" xmlns:r="http://schemas.openxmlformats.org/officeDocument/2006/relationships">
+  <c:date1904 val="0"/>
+  <c:roundedCorners val="1"/>
+  <c:chart>
+    <c:autoTitleDeleted val="1"/>
+    <c:plotArea>
+      <c:layout/>
+      <c:doughnutChart>
+        <c:varyColors val="1"/>
+        <c:ser>
+          <c:idx val="0"/>
+          <c:order val="0"/>
+          <c:tx>
+            <c:strRef>
+              <c:f>Sheet1!$B$1</c:f>
+              <c:strCache>
+                <c:ptCount val="1"/>
+                <c:pt idx="0">
+                  <c:v>Prélèvements</c:v>
+                </c:pt>
+              </c:strCache>
+            </c:strRef>
+          </c:tx>
+          <c:spPr>
+            <a:solidFill>
+              <a:schemeClr val="accent1"/>
+            </a:solidFill>
+            <a:ln w="9525" cap="flat">
+              <a:solidFill>
+                <a:srgbClr val="F9F9F9"/>
+              </a:solidFill>
+              <a:prstDash val="solid"/>
+              <a:round/>
+            </a:ln>
+            <a:effectLst/>
+          </c:spPr>
+          <c:dPt>
+            <c:idx val="0"/>
+            <c:bubble3D val="0"/>
+            <c:spPr>
+              <a:solidFill>
+                <a:srgbClr val="1C5A73"/>
+              </a:solidFill>
+              <a:effectLst/>
+            </c:spPr>
+          </c:dPt>
+          <c:dPt>
+            <c:idx val="1"/>
+            <c:bubble3D val="0"/>
+            <c:spPr>
+              <a:solidFill>
+                <a:srgbClr val="E0A33E"/>
+              </a:solidFill>
+              <a:effectLst/>
+            </c:spPr>
+          </c:dPt>
+          <c:dPt>
+            <c:idx val="2"/>
+            <c:bubble3D val="0"/>
+            <c:spPr>
+              <a:solidFill>
+                <a:srgbClr val="5E93A8"/>
+              </a:solidFill>
+              <a:effectLst/>
+            </c:spPr>
+          </c:dPt>
+          <c:dLbls>
+            <c:dLbl>
+              <c:idx val="0"/>
+              <c:numFmt formatCode="[$-40C]0&quot;%&quot;" sourceLinked="0"/>
+              <c:spPr/>
+              <c:txPr>
+                <a:bodyPr/>
+                <a:lstStyle/>
+                <a:p>
+                  <a:pPr>
+                    <a:defRPr sz="1100" b="0" i="0" u="none" strike="noStrike">
+                      <a:solidFill>
+                        <a:srgbClr val="FFFFFF"/>
+                      </a:solidFill>
+                      <a:latin typeface="Calibri"/>
+                    </a:defRPr>
+                  </a:pPr>
+                </a:p>
+              </c:txPr>
+              <c:showLegendKey val="0"/>
+              <c:showVal val="1"/>
+              <c:showCatName val="0"/>
+              <c:showSerName val="0"/>
+              <c:showPercent val="0"/>
+              <c:showBubbleSize val="0"/>
+            </c:dLbl>
+            <c:dLbl>
+              <c:idx val="1"/>
+              <c:numFmt formatCode="[$-40C]0&quot;%&quot;" sourceLinked="0"/>
+              <c:spPr/>
+              <c:txPr>
+                <a:bodyPr/>
+                <a:lstStyle/>
+                <a:p>
+                  <a:pPr>
+                    <a:defRPr sz="1100" b="0" i="0" u="none" strike="noStrike">
+                      <a:solidFill>
+                        <a:srgbClr val="FFFFFF"/>
+                      </a:solidFill>
+                      <a:latin typeface="Calibri"/>
+                    </a:defRPr>
+                  </a:pPr>
+                </a:p>
+              </c:txPr>
+              <c:showLegendKey val="0"/>
+              <c:showVal val="1"/>
+              <c:showCatName val="0"/>
+              <c:showSerName val="0"/>
+              <c:showPercent val="0"/>
+              <c:showBubbleSize val="0"/>
+            </c:dLbl>
+            <c:dLbl>
+              <c:idx val="2"/>
+              <c:numFmt formatCode="[$-40C]0&quot;%&quot;" sourceLinked="0"/>
+              <c:spPr/>
+              <c:txPr>
+                <a:bodyPr/>
+                <a:lstStyle/>
+                <a:p>
+                  <a:pPr>
+                    <a:defRPr sz="1100" b="0" i="0" u="none" strike="noStrike">
+                      <a:solidFill>
+                        <a:srgbClr val="FFFFFF"/>
+                      </a:solidFill>
+                      <a:latin typeface="Calibri"/>
+                    </a:defRPr>
+                  </a:pPr>
+                </a:p>
+              </c:txPr>
+              <c:showLegendKey val="0"/>
+              <c:showVal val="1"/>
+              <c:showCatName val="0"/>
+              <c:showSerName val="0"/>
+              <c:showPercent val="0"/>
+              <c:showBubbleSize val="0"/>
+            </c:dLbl>
+            <c:numFmt formatCode="[$-40C]0&quot;%&quot;" sourceLinked="0"/>
+            <c:txPr>
+              <a:bodyPr/>
+              <a:lstStyle/>
+              <a:p>
+                <a:pPr>
+                  <a:defRPr sz="1800" b="0" i="0" u="none" strike="noStrike">
+                    <a:solidFill>
+                      <a:srgbClr val="000000"/>
+                    </a:solidFill>
+                    <a:latin typeface="Arial"/>
+                  </a:defRPr>
+                </a:pPr>
+              </a:p>
+            </c:txPr>
+            <c:showLegendKey val="0"/>
+            <c:showVal val="0"/>
+            <c:showCatName val="1"/>
+            <c:showSerName val="0"/>
+            <c:showPercent val="1"/>
+            <c:showBubbleSize val="0"/>
+            <c:showLeaderLines val="0"/>
+          </c:dLbls>
+          <c:cat>
+            <c:strRef>
+              <c:f>Sheet1!$A$2:$A$4</c:f>
+              <c:strCache>
+                <c:ptCount val="3"/>
+                <c:pt idx="0">
+                  <c:v>Agriculture</c:v>
+                </c:pt>
+                <c:pt idx="1">
+                  <c:v>Eau potable</c:v>
+                </c:pt>
+                <c:pt idx="2">
+                  <c:v>Industrie</c:v>
+                </c:pt>
+              </c:strCache>
+            </c:strRef>
+          </c:cat>
+          <c:val>
+            <c:numRef>
+              <c:f>Sheet1!$B$2:$B$4</c:f>
+              <c:numCache>
+                <c:ptCount val="3"/>
+                <c:pt idx="0">
+                  <c:v>40</c:v>
+                </c:pt>
+                <c:pt idx="1">
+                  <c:v>50</c:v>
+                </c:pt>
+                <c:pt idx="2">
+                  <c:v>10</c:v>
+                </c:pt>
+              </c:numCache>
+            </c:numRef>
+          </c:val>
+        </c:ser>
+        <c:firstSliceAng val="0"/>
+        <c:holeSize val="55"/>
+      </c:doughnutChart>
       <c:spPr>
         <a:noFill/>
         <a:ln>
@@ -3782,8 +3782,8 @@
         </p:blipFill>
         <p:spPr>
           <a:xfrm>
-            <a:off x="3648456" y="1389888"/>
-            <a:ext cx="1965960" cy="1310640"/>
+            <a:off x="3866896" y="1389888"/>
+            <a:ext cx="1747520" cy="1310640"/>
           </a:xfrm>
           <a:prstGeom prst="rect">
             <a:avLst/>
@@ -3798,8 +3798,8 @@
         </p:nvSpPr>
         <p:spPr>
           <a:xfrm>
-            <a:off x="3648456" y="1389888"/>
-            <a:ext cx="1965960" cy="1310640"/>
+            <a:off x="3866896" y="1389888"/>
+            <a:ext cx="1747520" cy="1310640"/>
           </a:xfrm>
           <a:prstGeom prst="rect">
             <a:avLst/>

--- a/public/documents/countries/gabon.pptx
+++ b/public/documents/countries/gabon.pptx
@@ -124,7 +124,252 @@
 </p:presentation>
 </file>
 
-<file path=ppt/charts/chart10.xml><?xml version="1.0" encoding="utf-8"?>
+<file path=ppt/charts/chart33.xml><?xml version="1.0" encoding="utf-8"?>
+<c:chartSpace xmlns:c="http://schemas.openxmlformats.org/drawingml/2006/chart" xmlns:a="http://schemas.openxmlformats.org/drawingml/2006/main" xmlns:r="http://schemas.openxmlformats.org/officeDocument/2006/relationships">
+  <c:date1904 val="0"/>
+  <c:roundedCorners val="1"/>
+  <c:chart>
+    <c:autoTitleDeleted val="1"/>
+    <c:plotArea>
+      <c:layout/>
+      <c:doughnutChart>
+        <c:varyColors val="1"/>
+        <c:ser>
+          <c:idx val="0"/>
+          <c:order val="0"/>
+          <c:tx>
+            <c:strRef>
+              <c:f>Sheet1!$B$1</c:f>
+              <c:strCache>
+                <c:ptCount val="1"/>
+                <c:pt idx="0">
+                  <c:v>Prélèvements</c:v>
+                </c:pt>
+              </c:strCache>
+            </c:strRef>
+          </c:tx>
+          <c:spPr>
+            <a:solidFill>
+              <a:schemeClr val="accent1"/>
+            </a:solidFill>
+            <a:ln w="9525" cap="flat">
+              <a:solidFill>
+                <a:srgbClr val="F9F9F9"/>
+              </a:solidFill>
+              <a:prstDash val="solid"/>
+              <a:round/>
+            </a:ln>
+            <a:effectLst/>
+          </c:spPr>
+          <c:dPt>
+            <c:idx val="0"/>
+            <c:bubble3D val="0"/>
+            <c:spPr>
+              <a:solidFill>
+                <a:srgbClr val="1C5A73"/>
+              </a:solidFill>
+              <a:effectLst/>
+            </c:spPr>
+          </c:dPt>
+          <c:dPt>
+            <c:idx val="1"/>
+            <c:bubble3D val="0"/>
+            <c:spPr>
+              <a:solidFill>
+                <a:srgbClr val="E0A33E"/>
+              </a:solidFill>
+              <a:effectLst/>
+            </c:spPr>
+          </c:dPt>
+          <c:dPt>
+            <c:idx val="2"/>
+            <c:bubble3D val="0"/>
+            <c:spPr>
+              <a:solidFill>
+                <a:srgbClr val="5E93A8"/>
+              </a:solidFill>
+              <a:effectLst/>
+            </c:spPr>
+          </c:dPt>
+          <c:dLbls>
+            <c:dLbl>
+              <c:idx val="0"/>
+              <c:numFmt formatCode="[$-40C]0&quot;%&quot;" sourceLinked="0"/>
+              <c:spPr/>
+              <c:txPr>
+                <a:bodyPr/>
+                <a:lstStyle/>
+                <a:p>
+                  <a:pPr>
+                    <a:defRPr sz="1100" b="0" i="0" u="none" strike="noStrike">
+                      <a:solidFill>
+                        <a:srgbClr val="FFFFFF"/>
+                      </a:solidFill>
+                      <a:latin typeface="Calibri"/>
+                    </a:defRPr>
+                  </a:pPr>
+                </a:p>
+              </c:txPr>
+              <c:showLegendKey val="0"/>
+              <c:showVal val="1"/>
+              <c:showCatName val="0"/>
+              <c:showSerName val="0"/>
+              <c:showPercent val="0"/>
+              <c:showBubbleSize val="0"/>
+            </c:dLbl>
+            <c:dLbl>
+              <c:idx val="1"/>
+              <c:numFmt formatCode="[$-40C]0&quot;%&quot;" sourceLinked="0"/>
+              <c:spPr/>
+              <c:txPr>
+                <a:bodyPr/>
+                <a:lstStyle/>
+                <a:p>
+                  <a:pPr>
+                    <a:defRPr sz="1100" b="0" i="0" u="none" strike="noStrike">
+                      <a:solidFill>
+                        <a:srgbClr val="FFFFFF"/>
+                      </a:solidFill>
+                      <a:latin typeface="Calibri"/>
+                    </a:defRPr>
+                  </a:pPr>
+                </a:p>
+              </c:txPr>
+              <c:showLegendKey val="0"/>
+              <c:showVal val="1"/>
+              <c:showCatName val="0"/>
+              <c:showSerName val="0"/>
+              <c:showPercent val="0"/>
+              <c:showBubbleSize val="0"/>
+            </c:dLbl>
+            <c:dLbl>
+              <c:idx val="2"/>
+              <c:numFmt formatCode="[$-40C]0&quot;%&quot;" sourceLinked="0"/>
+              <c:spPr/>
+              <c:txPr>
+                <a:bodyPr/>
+                <a:lstStyle/>
+                <a:p>
+                  <a:pPr>
+                    <a:defRPr sz="1100" b="0" i="0" u="none" strike="noStrike">
+                      <a:solidFill>
+                        <a:srgbClr val="FFFFFF"/>
+                      </a:solidFill>
+                      <a:latin typeface="Calibri"/>
+                    </a:defRPr>
+                  </a:pPr>
+                </a:p>
+              </c:txPr>
+              <c:showLegendKey val="0"/>
+              <c:showVal val="1"/>
+              <c:showCatName val="0"/>
+              <c:showSerName val="0"/>
+              <c:showPercent val="0"/>
+              <c:showBubbleSize val="0"/>
+            </c:dLbl>
+            <c:numFmt formatCode="[$-40C]0&quot;%&quot;" sourceLinked="0"/>
+            <c:txPr>
+              <a:bodyPr/>
+              <a:lstStyle/>
+              <a:p>
+                <a:pPr>
+                  <a:defRPr sz="1800" b="0" i="0" u="none" strike="noStrike">
+                    <a:solidFill>
+                      <a:srgbClr val="000000"/>
+                    </a:solidFill>
+                    <a:latin typeface="Arial"/>
+                  </a:defRPr>
+                </a:pPr>
+              </a:p>
+            </c:txPr>
+            <c:showLegendKey val="0"/>
+            <c:showVal val="0"/>
+            <c:showCatName val="1"/>
+            <c:showSerName val="0"/>
+            <c:showPercent val="1"/>
+            <c:showBubbleSize val="0"/>
+            <c:showLeaderLines val="0"/>
+          </c:dLbls>
+          <c:cat>
+            <c:strRef>
+              <c:f>Sheet1!$A$2:$A$4</c:f>
+              <c:strCache>
+                <c:ptCount val="3"/>
+                <c:pt idx="0">
+                  <c:v>Agriculture</c:v>
+                </c:pt>
+                <c:pt idx="1">
+                  <c:v>Eau potable</c:v>
+                </c:pt>
+                <c:pt idx="2">
+                  <c:v>Industrie</c:v>
+                </c:pt>
+              </c:strCache>
+            </c:strRef>
+          </c:cat>
+          <c:val>
+            <c:numRef>
+              <c:f>Sheet1!$B$2:$B$4</c:f>
+              <c:numCache>
+                <c:ptCount val="3"/>
+                <c:pt idx="0">
+                  <c:v>40</c:v>
+                </c:pt>
+                <c:pt idx="1">
+                  <c:v>50</c:v>
+                </c:pt>
+                <c:pt idx="2">
+                  <c:v>10</c:v>
+                </c:pt>
+              </c:numCache>
+            </c:numRef>
+          </c:val>
+        </c:ser>
+        <c:firstSliceAng val="0"/>
+        <c:holeSize val="55"/>
+      </c:doughnutChart>
+      <c:spPr>
+        <a:noFill/>
+        <a:ln>
+          <a:noFill/>
+        </a:ln>
+        <a:effectLst/>
+      </c:spPr>
+    </c:plotArea>
+    <c:legend>
+      <c:legendPos val="b"/>
+      <c:overlay val="0"/>
+      <c:txPr>
+        <a:bodyPr/>
+        <a:lstStyle/>
+        <a:p>
+          <a:pPr>
+            <a:defRPr sz="1100">
+              <a:latin typeface="Calibri"/>
+              <a:cs typeface="Calibri"/>
+            </a:defRPr>
+          </a:pPr>
+          <a:endParaRPr lang="en-US"/>
+        </a:p>
+      </c:txPr>
+    </c:legend>
+    <c:plotVisOnly val="1"/>
+    <c:dispBlanksAs val="span"/>
+  </c:chart>
+  <c:spPr>
+    <a:noFill/>
+    <a:ln>
+      <a:noFill/>
+    </a:ln>
+    <a:effectLst/>
+  </c:spPr>
+  <c:externalData r:id="rId1">
+    <c:autoUpdate val="0"/>
+  </c:externalData>
+</c:chartSpace>
+</file>
+
+<file path=ppt/charts/chart34.xml><?xml version="1.0" encoding="utf-8"?>
 <c:chartSpace xmlns:c="http://schemas.openxmlformats.org/drawingml/2006/chart" xmlns:a="http://schemas.openxmlformats.org/drawingml/2006/main" xmlns:r="http://schemas.openxmlformats.org/officeDocument/2006/relationships">
   <c:date1904 val="0"/>
   <c:roundedCorners val="1"/>
@@ -432,7 +677,7 @@
 </c:chartSpace>
 </file>
 
-<file path=ppt/charts/chart11.xml><?xml version="1.0" encoding="utf-8"?>
+<file path=ppt/charts/chart35.xml><?xml version="1.0" encoding="utf-8"?>
 <c:chartSpace xmlns:c="http://schemas.openxmlformats.org/drawingml/2006/chart" xmlns:a="http://schemas.openxmlformats.org/drawingml/2006/main" xmlns:r="http://schemas.openxmlformats.org/officeDocument/2006/relationships">
   <c:date1904 val="0"/>
   <c:roundedCorners val="1"/>
@@ -797,7 +1042,7 @@
 </c:chartSpace>
 </file>
 
-<file path=ppt/charts/chart12.xml><?xml version="1.0" encoding="utf-8"?>
+<file path=ppt/charts/chart36.xml><?xml version="1.0" encoding="utf-8"?>
 <c:chartSpace xmlns:c="http://schemas.openxmlformats.org/drawingml/2006/chart" xmlns:a="http://schemas.openxmlformats.org/drawingml/2006/main" xmlns:r="http://schemas.openxmlformats.org/officeDocument/2006/relationships">
   <c:date1904 val="0"/>
   <c:roundedCorners val="1"/>
@@ -1109,251 +1354,6 @@
         <c:crosses val="autoZero"/>
         <c:crossBetween val="between"/>
       </c:valAx>
-      <c:spPr>
-        <a:noFill/>
-        <a:ln>
-          <a:noFill/>
-        </a:ln>
-        <a:effectLst/>
-      </c:spPr>
-    </c:plotArea>
-    <c:legend>
-      <c:legendPos val="b"/>
-      <c:overlay val="0"/>
-      <c:txPr>
-        <a:bodyPr/>
-        <a:lstStyle/>
-        <a:p>
-          <a:pPr>
-            <a:defRPr sz="1100">
-              <a:latin typeface="Calibri"/>
-              <a:cs typeface="Calibri"/>
-            </a:defRPr>
-          </a:pPr>
-          <a:endParaRPr lang="en-US"/>
-        </a:p>
-      </c:txPr>
-    </c:legend>
-    <c:plotVisOnly val="1"/>
-    <c:dispBlanksAs val="span"/>
-  </c:chart>
-  <c:spPr>
-    <a:noFill/>
-    <a:ln>
-      <a:noFill/>
-    </a:ln>
-    <a:effectLst/>
-  </c:spPr>
-  <c:externalData r:id="rId1">
-    <c:autoUpdate val="0"/>
-  </c:externalData>
-</c:chartSpace>
-</file>
-
-<file path=ppt/charts/chart9.xml><?xml version="1.0" encoding="utf-8"?>
-<c:chartSpace xmlns:c="http://schemas.openxmlformats.org/drawingml/2006/chart" xmlns:a="http://schemas.openxmlformats.org/drawingml/2006/main" xmlns:r="http://schemas.openxmlformats.org/officeDocument/2006/relationships">
-  <c:date1904 val="0"/>
-  <c:roundedCorners val="1"/>
-  <c:chart>
-    <c:autoTitleDeleted val="1"/>
-    <c:plotArea>
-      <c:layout/>
-      <c:doughnutChart>
-        <c:varyColors val="1"/>
-        <c:ser>
-          <c:idx val="0"/>
-          <c:order val="0"/>
-          <c:tx>
-            <c:strRef>
-              <c:f>Sheet1!$B$1</c:f>
-              <c:strCache>
-                <c:ptCount val="1"/>
-                <c:pt idx="0">
-                  <c:v>Prélèvements</c:v>
-                </c:pt>
-              </c:strCache>
-            </c:strRef>
-          </c:tx>
-          <c:spPr>
-            <a:solidFill>
-              <a:schemeClr val="accent1"/>
-            </a:solidFill>
-            <a:ln w="9525" cap="flat">
-              <a:solidFill>
-                <a:srgbClr val="F9F9F9"/>
-              </a:solidFill>
-              <a:prstDash val="solid"/>
-              <a:round/>
-            </a:ln>
-            <a:effectLst/>
-          </c:spPr>
-          <c:dPt>
-            <c:idx val="0"/>
-            <c:bubble3D val="0"/>
-            <c:spPr>
-              <a:solidFill>
-                <a:srgbClr val="1C5A73"/>
-              </a:solidFill>
-              <a:effectLst/>
-            </c:spPr>
-          </c:dPt>
-          <c:dPt>
-            <c:idx val="1"/>
-            <c:bubble3D val="0"/>
-            <c:spPr>
-              <a:solidFill>
-                <a:srgbClr val="E0A33E"/>
-              </a:solidFill>
-              <a:effectLst/>
-            </c:spPr>
-          </c:dPt>
-          <c:dPt>
-            <c:idx val="2"/>
-            <c:bubble3D val="0"/>
-            <c:spPr>
-              <a:solidFill>
-                <a:srgbClr val="5E93A8"/>
-              </a:solidFill>
-              <a:effectLst/>
-            </c:spPr>
-          </c:dPt>
-          <c:dLbls>
-            <c:dLbl>
-              <c:idx val="0"/>
-              <c:numFmt formatCode="[$-40C]0&quot;%&quot;" sourceLinked="0"/>
-              <c:spPr/>
-              <c:txPr>
-                <a:bodyPr/>
-                <a:lstStyle/>
-                <a:p>
-                  <a:pPr>
-                    <a:defRPr sz="1100" b="0" i="0" u="none" strike="noStrike">
-                      <a:solidFill>
-                        <a:srgbClr val="FFFFFF"/>
-                      </a:solidFill>
-                      <a:latin typeface="Calibri"/>
-                    </a:defRPr>
-                  </a:pPr>
-                </a:p>
-              </c:txPr>
-              <c:showLegendKey val="0"/>
-              <c:showVal val="1"/>
-              <c:showCatName val="0"/>
-              <c:showSerName val="0"/>
-              <c:showPercent val="0"/>
-              <c:showBubbleSize val="0"/>
-            </c:dLbl>
-            <c:dLbl>
-              <c:idx val="1"/>
-              <c:numFmt formatCode="[$-40C]0&quot;%&quot;" sourceLinked="0"/>
-              <c:spPr/>
-              <c:txPr>
-                <a:bodyPr/>
-                <a:lstStyle/>
-                <a:p>
-                  <a:pPr>
-                    <a:defRPr sz="1100" b="0" i="0" u="none" strike="noStrike">
-                      <a:solidFill>
-                        <a:srgbClr val="FFFFFF"/>
-                      </a:solidFill>
-                      <a:latin typeface="Calibri"/>
-                    </a:defRPr>
-                  </a:pPr>
-                </a:p>
-              </c:txPr>
-              <c:showLegendKey val="0"/>
-              <c:showVal val="1"/>
-              <c:showCatName val="0"/>
-              <c:showSerName val="0"/>
-              <c:showPercent val="0"/>
-              <c:showBubbleSize val="0"/>
-            </c:dLbl>
-            <c:dLbl>
-              <c:idx val="2"/>
-              <c:numFmt formatCode="[$-40C]0&quot;%&quot;" sourceLinked="0"/>
-              <c:spPr/>
-              <c:txPr>
-                <a:bodyPr/>
-                <a:lstStyle/>
-                <a:p>
-                  <a:pPr>
-                    <a:defRPr sz="1100" b="0" i="0" u="none" strike="noStrike">
-                      <a:solidFill>
-                        <a:srgbClr val="FFFFFF"/>
-                      </a:solidFill>
-                      <a:latin typeface="Calibri"/>
-                    </a:defRPr>
-                  </a:pPr>
-                </a:p>
-              </c:txPr>
-              <c:showLegendKey val="0"/>
-              <c:showVal val="1"/>
-              <c:showCatName val="0"/>
-              <c:showSerName val="0"/>
-              <c:showPercent val="0"/>
-              <c:showBubbleSize val="0"/>
-            </c:dLbl>
-            <c:numFmt formatCode="[$-40C]0&quot;%&quot;" sourceLinked="0"/>
-            <c:txPr>
-              <a:bodyPr/>
-              <a:lstStyle/>
-              <a:p>
-                <a:pPr>
-                  <a:defRPr sz="1800" b="0" i="0" u="none" strike="noStrike">
-                    <a:solidFill>
-                      <a:srgbClr val="000000"/>
-                    </a:solidFill>
-                    <a:latin typeface="Arial"/>
-                  </a:defRPr>
-                </a:pPr>
-              </a:p>
-            </c:txPr>
-            <c:showLegendKey val="0"/>
-            <c:showVal val="0"/>
-            <c:showCatName val="1"/>
-            <c:showSerName val="0"/>
-            <c:showPercent val="1"/>
-            <c:showBubbleSize val="0"/>
-            <c:showLeaderLines val="0"/>
-          </c:dLbls>
-          <c:cat>
-            <c:strRef>
-              <c:f>Sheet1!$A$2:$A$4</c:f>
-              <c:strCache>
-                <c:ptCount val="3"/>
-                <c:pt idx="0">
-                  <c:v>Agriculture</c:v>
-                </c:pt>
-                <c:pt idx="1">
-                  <c:v>Eau potable</c:v>
-                </c:pt>
-                <c:pt idx="2">
-                  <c:v>Industrie</c:v>
-                </c:pt>
-              </c:strCache>
-            </c:strRef>
-          </c:cat>
-          <c:val>
-            <c:numRef>
-              <c:f>Sheet1!$B$2:$B$4</c:f>
-              <c:numCache>
-                <c:ptCount val="3"/>
-                <c:pt idx="0">
-                  <c:v>40</c:v>
-                </c:pt>
-                <c:pt idx="1">
-                  <c:v>50</c:v>
-                </c:pt>
-                <c:pt idx="2">
-                  <c:v>10</c:v>
-                </c:pt>
-              </c:numCache>
-            </c:numRef>
-          </c:val>
-        </c:ser>
-        <c:firstSliceAng val="0"/>
-        <c:holeSize val="55"/>
-      </c:doughnutChart>
       <c:spPr>
         <a:noFill/>
         <a:ln>
@@ -3744,7 +3744,7 @@
       </p:sp>
       <p:pic>
         <p:nvPicPr>
-          <p:cNvPr id="5" name="Image 1" descr="C:\Users\Utilisateur\dev\gsw-dossiers\public\images\logo-icon.png">    </p:cNvPr>
+          <p:cNvPr id="5" name="Image 1" descr="C:\Users\Utilisateur\dev\green-solutions-web\public\images\logo-icon.png">    </p:cNvPr>
           <p:cNvPicPr>
             <a:picLocks noChangeAspect="1"/>
           </p:cNvPicPr>
@@ -3768,7 +3768,7 @@
       </p:pic>
       <p:pic>
         <p:nvPicPr>
-          <p:cNvPr id="6" name="Image 2" descr="C:\Users\Utilisateur\dev\gsw-dossiers\scripts\dossiers\drapeaux\gabon.png">    </p:cNvPr>
+          <p:cNvPr id="6" name="Image 2" descr="C:\Users\Utilisateur\dev\green-solutions-web\scripts\dossiers\drapeaux\gabon.png">    </p:cNvPr>
           <p:cNvPicPr>
             <a:picLocks noChangeAspect="1"/>
           </p:cNvPicPr>
@@ -9053,6 +9053,30 @@
             </a:r>
             <a:endParaRPr lang="en-US" sz="1350" dirty="0"/>
           </a:p>
+          <a:p>
+            <a:pPr algn="l" marL="342900" indent="-342900">
+              <a:lnSpc>
+                <a:spcPct val="122000"/>
+              </a:lnSpc>
+              <a:spcAft>
+                <a:spcPts val="1000"/>
+              </a:spcAft>
+              <a:buSzPct val="100000"/>
+              <a:buChar char="•"/>
+            </a:pPr>
+            <a:r>
+              <a:rPr lang="en-US" sz="1350" dirty="0">
+                <a:solidFill>
+                  <a:srgbClr val="31424A"/>
+                </a:solidFill>
+                <a:latin typeface="Calibri" pitchFamily="34" charset="0"/>
+                <a:ea typeface="Calibri" pitchFamily="34" charset="-122"/>
+                <a:cs typeface="Calibri" pitchFamily="34" charset="-120"/>
+              </a:rPr>
+              <a:t>Photographies : Estrella230 (CC BY-SA 4.0) — via Wikimedia Commons.</a:t>
+            </a:r>
+            <a:endParaRPr lang="en-US" sz="1350" dirty="0"/>
+          </a:p>
         </p:txBody>
       </p:sp>
       <p:sp>
@@ -9543,7 +9567,7 @@
       </p:sp>
       <p:pic>
         <p:nvPicPr>
-          <p:cNvPr id="6" name="Image 1" descr="C:\Users\Utilisateur\dev\gsw-dossiers\scripts\dossiers\sceau-aim-clair.png">    </p:cNvPr>
+          <p:cNvPr id="6" name="Image 1" descr="C:\Users\Utilisateur\dev\green-solutions-web\scripts\dossiers\sceau-aim-clair.png">    </p:cNvPr>
           <p:cNvPicPr>
             <a:picLocks noChangeAspect="1"/>
           </p:cNvPicPr>

--- a/public/documents/countries/gabon.pptx
+++ b/public/documents/countries/gabon.pptx
@@ -23,9 +23,10 @@
     <p:sldId id="271" r:id="rId17"/>
     <p:sldId id="272" r:id="rId18"/>
     <p:sldId id="273" r:id="rId19"/>
+    <p:sldId id="274" r:id="rId20"/>
   </p:sldIdLst>
   <p:notesMasterIdLst>
-    <p:notesMasterId r:id="rId20"/>
+    <p:notesMasterId r:id="rId21"/>
   </p:notesMasterIdLst>
   <p:sldSz cx="12192000" cy="6858000"/>
   <p:notesSz cx="6858000" cy="12192000"/>
@@ -124,7 +125,266 @@
 </p:presentation>
 </file>
 
-<file path=ppt/charts/chart33.xml><?xml version="1.0" encoding="utf-8"?>
+<file path=ppt/charts/chart50.xml><?xml version="1.0" encoding="utf-8"?>
+<c:chartSpace xmlns:c="http://schemas.openxmlformats.org/drawingml/2006/chart" xmlns:a="http://schemas.openxmlformats.org/drawingml/2006/main" xmlns:r="http://schemas.openxmlformats.org/officeDocument/2006/relationships">
+  <c:date1904 val="0"/>
+  <c:roundedCorners val="1"/>
+  <c:chart>
+    <c:autoTitleDeleted val="1"/>
+    <c:plotArea>
+      <c:layout/>
+      <c:barChart>
+        <c:barDir val="col"/>
+        <c:grouping val="clustered"/>
+        <c:varyColors val="0"/>
+        <c:ser>
+          <c:idx val="0"/>
+          <c:order val="0"/>
+          <c:tx>
+            <c:strRef>
+              <c:f>Sheet1!$B$1</c:f>
+              <c:strCache>
+                <c:ptCount val="1"/>
+                <c:pt idx="0">
+                  <c:v>Indice mondial du nombre et de la durée des sécheresses</c:v>
+                </c:pt>
+              </c:strCache>
+            </c:strRef>
+          </c:tx>
+          <c:spPr>
+            <a:solidFill>
+              <a:srgbClr val="1C5A73"/>
+            </a:solidFill>
+            <a:effectLst/>
+          </c:spPr>
+          <c:invertIfNegative val="0"/>
+          <c:dLbls>
+            <c:numFmt formatCode="[$-40C]0" sourceLinked="0"/>
+            <c:txPr>
+              <a:bodyPr/>
+              <a:lstStyle/>
+              <a:p>
+                <a:pPr>
+                  <a:defRPr b="0" i="0" strike="noStrike" sz="1100" u="none">
+                    <a:solidFill>
+                      <a:srgbClr val="0E3546"/>
+                    </a:solidFill>
+                    <a:latin typeface="Calibri"/>
+                  </a:defRPr>
+                </a:pPr>
+              </a:p>
+            </c:txPr>
+            <c:showLegendKey val="0"/>
+            <c:showVal val="1"/>
+            <c:showCatName val="0"/>
+            <c:showSerName val="0"/>
+            <c:showPercent val="0"/>
+            <c:showBubbleSize val="0"/>
+            <c:showLeaderLines val="0"/>
+          </c:dLbls>
+          <c:dPt>
+            <c:idx val="0"/>
+            <c:invertIfNegative val="0"/>
+            <c:bubble3D val="0"/>
+            <c:spPr>
+              <a:solidFill>
+                <a:srgbClr val="1C5A73"/>
+              </a:solidFill>
+              <a:effectLst/>
+            </c:spPr>
+          </c:dPt>
+          <c:dPt>
+            <c:idx val="1"/>
+            <c:invertIfNegative val="0"/>
+            <c:bubble3D val="0"/>
+            <c:spPr>
+              <a:solidFill>
+                <a:srgbClr val="E0A33E"/>
+              </a:solidFill>
+              <a:effectLst/>
+            </c:spPr>
+          </c:dPt>
+          <c:cat>
+            <c:multiLvlStrRef>
+              <c:f>Sheet1!$A$2:$A$3</c:f>
+              <c:multiLvlStrCache>
+                <c:ptCount val="2"/>
+                <c:lvl>
+                  <c:pt idx="0">
+                    <c:v>1980–1999</c:v>
+                  </c:pt>
+                  <c:pt idx="1">
+                    <c:v>Depuis 2000</c:v>
+                  </c:pt>
+                </c:lvl>
+              </c:multiLvlStrCache>
+            </c:multiLvlStrRef>
+          </c:cat>
+          <c:val>
+            <c:numRef>
+              <c:f>Sheet1!$B$2:$B$3</c:f>
+              <c:numCache>
+                <c:formatCode>General</c:formatCode>
+                <c:ptCount val="2"/>
+                <c:pt idx="0">
+                  <c:v>100</c:v>
+                </c:pt>
+                <c:pt idx="1">
+                  <c:v>129</c:v>
+                </c:pt>
+              </c:numCache>
+            </c:numRef>
+          </c:val>
+        </c:ser>
+        <c:dLbls>
+          <c:numFmt formatCode="[$-40C]0" sourceLinked="0"/>
+          <c:txPr>
+            <a:bodyPr/>
+            <a:lstStyle/>
+            <a:p>
+              <a:pPr>
+                <a:defRPr b="0" i="0" strike="noStrike" sz="1100" u="none">
+                  <a:solidFill>
+                    <a:srgbClr val="0E3546"/>
+                  </a:solidFill>
+                  <a:latin typeface="Calibri"/>
+                </a:defRPr>
+              </a:pPr>
+            </a:p>
+          </c:txPr>
+          <c:showLegendKey val="0"/>
+          <c:showVal val="1"/>
+          <c:showCatName val="0"/>
+          <c:showSerName val="0"/>
+          <c:showPercent val="0"/>
+          <c:showBubbleSize val="0"/>
+          <c:showLeaderLines val="0"/>
+        </c:dLbls>
+        <c:gapWidth val="150"/>
+        <c:overlap val="0"/>
+        <c:axId val="2094734554"/>
+        <c:axId val="2094734552"/>
+        <c:axId val="2094734556"/>
+      </c:barChart>
+      <c:catAx>
+        <c:axId val="2094734554"/>
+        <c:scaling>
+          <c:orientation val="minMax"/>
+        </c:scaling>
+        <c:delete val="0"/>
+        <c:axPos val="b"/>
+        <c:numFmt formatCode="General" sourceLinked="1"/>
+        <c:majorTickMark val="out"/>
+        <c:minorTickMark val="none"/>
+        <c:tickLblPos val="low"/>
+        <c:spPr>
+          <a:ln w="12700" cap="flat">
+            <a:solidFill>
+              <a:srgbClr val="888888"/>
+            </a:solidFill>
+            <a:prstDash val="solid"/>
+            <a:round/>
+          </a:ln>
+        </c:spPr>
+        <c:txPr>
+          <a:bodyPr/>
+          <a:lstStyle/>
+          <a:p>
+            <a:pPr>
+              <a:defRPr sz="1100" b="0" i="0" u="none" strike="noStrike">
+                <a:solidFill>
+                  <a:srgbClr val="6C8089"/>
+                </a:solidFill>
+                <a:latin typeface="Calibri"/>
+              </a:defRPr>
+            </a:pPr>
+            <a:endParaRPr lang="en-US"/>
+          </a:p>
+        </c:txPr>
+        <c:crossAx val="2094734552"/>
+        <c:crosses val="autoZero"/>
+        <c:auto val="1"/>
+        <c:lblAlgn val="ctr"/>
+        <c:noMultiLvlLbl val="1"/>
+      </c:catAx>
+      <c:valAx>
+        <c:axId val="2094734552"/>
+        <c:scaling>
+          <c:orientation val="minMax"/>
+          <c:max val="140"/>
+          <c:min val="0"/>
+        </c:scaling>
+        <c:delete val="0"/>
+        <c:axPos val="l"/>
+        <c:majorGridlines>
+          <c:spPr>
+            <a:ln w="9525" cap="flat">
+              <a:solidFill>
+                <a:srgbClr val="D6E2E7"/>
+              </a:solidFill>
+              <a:prstDash val="solid"/>
+              <a:round/>
+            </a:ln>
+          </c:spPr>
+        </c:majorGridlines>
+        <c:numFmt formatCode="General" sourceLinked="0"/>
+        <c:majorTickMark val="out"/>
+        <c:minorTickMark val="none"/>
+        <c:tickLblPos val="nextTo"/>
+        <c:spPr>
+          <a:ln w="12700" cap="flat">
+            <a:solidFill>
+              <a:srgbClr val="888888"/>
+            </a:solidFill>
+            <a:prstDash val="solid"/>
+            <a:round/>
+          </a:ln>
+        </c:spPr>
+        <c:txPr>
+          <a:bodyPr/>
+          <a:lstStyle/>
+          <a:p>
+            <a:pPr>
+              <a:defRPr sz="1100" b="0" i="0" u="none" strike="noStrike">
+                <a:solidFill>
+                  <a:srgbClr val="6C8089"/>
+                </a:solidFill>
+                <a:latin typeface="Calibri"/>
+              </a:defRPr>
+            </a:pPr>
+            <a:endParaRPr lang="en-US"/>
+          </a:p>
+        </c:txPr>
+        <c:crossAx val="2094734554"/>
+        <c:crosses val="autoZero"/>
+        <c:crossBetween val="between"/>
+        <c:majorUnit val="20"/>
+      </c:valAx>
+      <c:spPr>
+        <a:noFill/>
+        <a:ln>
+          <a:noFill/>
+        </a:ln>
+        <a:effectLst/>
+      </c:spPr>
+    </c:plotArea>
+    <c:plotVisOnly val="1"/>
+    <c:dispBlanksAs val="span"/>
+  </c:chart>
+  <c:spPr>
+    <a:noFill/>
+    <a:ln>
+      <a:noFill/>
+    </a:ln>
+    <a:effectLst/>
+  </c:spPr>
+  <c:externalData r:id="rId1">
+    <c:autoUpdate val="0"/>
+  </c:externalData>
+</c:chartSpace>
+</file>
+
+<file path=ppt/charts/chart51.xml><?xml version="1.0" encoding="utf-8"?>
 <c:chartSpace xmlns:c="http://schemas.openxmlformats.org/drawingml/2006/chart" xmlns:a="http://schemas.openxmlformats.org/drawingml/2006/main" xmlns:r="http://schemas.openxmlformats.org/officeDocument/2006/relationships">
   <c:date1904 val="0"/>
   <c:roundedCorners val="1"/>
@@ -369,7 +629,7 @@
 </c:chartSpace>
 </file>
 
-<file path=ppt/charts/chart34.xml><?xml version="1.0" encoding="utf-8"?>
+<file path=ppt/charts/chart52.xml><?xml version="1.0" encoding="utf-8"?>
 <c:chartSpace xmlns:c="http://schemas.openxmlformats.org/drawingml/2006/chart" xmlns:a="http://schemas.openxmlformats.org/drawingml/2006/main" xmlns:r="http://schemas.openxmlformats.org/officeDocument/2006/relationships">
   <c:date1904 val="0"/>
   <c:roundedCorners val="1"/>
@@ -677,7 +937,7 @@
 </c:chartSpace>
 </file>
 
-<file path=ppt/charts/chart35.xml><?xml version="1.0" encoding="utf-8"?>
+<file path=ppt/charts/chart53.xml><?xml version="1.0" encoding="utf-8"?>
 <c:chartSpace xmlns:c="http://schemas.openxmlformats.org/drawingml/2006/chart" xmlns:a="http://schemas.openxmlformats.org/drawingml/2006/main" xmlns:r="http://schemas.openxmlformats.org/officeDocument/2006/relationships">
   <c:date1904 val="0"/>
   <c:roundedCorners val="1"/>
@@ -1042,7 +1302,7 @@
 </c:chartSpace>
 </file>
 
-<file path=ppt/charts/chart36.xml><?xml version="1.0" encoding="utf-8"?>
+<file path=ppt/charts/chart54.xml><?xml version="1.0" encoding="utf-8"?>
 <c:chartSpace xmlns:c="http://schemas.openxmlformats.org/drawingml/2006/chart" xmlns:a="http://schemas.openxmlformats.org/drawingml/2006/main" xmlns:r="http://schemas.openxmlformats.org/officeDocument/2006/relationships">
   <c:date1904 val="0"/>
   <c:roundedCorners val="1"/>
@@ -2606,6 +2866,94 @@
             <a:fld id="{F7021451-1387-4CA6-816F-3879F97B5CBC}" type="slidenum">
               <a:rPr lang="en-US"/>
               <a:t>18</a:t>
+            </a:fld>
+            <a:endParaRPr lang="en-US"/>
+          </a:p>
+        </p:txBody>
+      </p:sp>
+    </p:spTree>
+    <p:extLst>
+      <p:ext uri="{BB962C8B-B14F-4D97-AF65-F5344CB8AC3E}">
+        <p14:creationId xmlns:p14="http://schemas.microsoft.com/office/powerpoint/2010/main" val="1024086991"/>
+      </p:ext>
+    </p:extLst>
+  </p:cSld>
+  <p:clrMapOvr>
+    <a:masterClrMapping/>
+  </p:clrMapOvr>
+</p:notes>
+</file>
+
+<file path=ppt/notesSlides/notesSlide19.xml><?xml version="1.0" encoding="utf-8"?>
+<p:notes xmlns:a="http://schemas.openxmlformats.org/drawingml/2006/main" xmlns:r="http://schemas.openxmlformats.org/officeDocument/2006/relationships" xmlns:p="http://schemas.openxmlformats.org/presentationml/2006/main">
+  <p:cSld>
+    <p:spTree>
+      <p:nvGrpSpPr>
+        <p:cNvPr id="1" name=""/>
+        <p:cNvGrpSpPr/>
+        <p:nvPr/>
+      </p:nvGrpSpPr>
+      <p:grpSpPr>
+        <a:xfrm>
+          <a:off x="0" y="0"/>
+          <a:ext cx="0" cy="0"/>
+          <a:chOff x="0" y="0"/>
+          <a:chExt cx="0" cy="0"/>
+        </a:xfrm>
+      </p:grpSpPr>
+      <p:sp>
+        <p:nvSpPr>
+          <p:cNvPr id="2" name="Slide Image Placeholder 1"/>
+          <p:cNvSpPr>
+            <a:spLocks noGrp="1" noRot="1" noChangeAspect="1"/>
+          </p:cNvSpPr>
+          <p:nvPr>
+            <p:ph type="sldImg"/>
+          </p:nvPr>
+        </p:nvSpPr>
+        <p:spPr/>
+      </p:sp>
+      <p:sp>
+        <p:nvSpPr>
+          <p:cNvPr id="3" name="Notes Placeholder 2"/>
+          <p:cNvSpPr>
+            <a:spLocks noGrp="1"/>
+          </p:cNvSpPr>
+          <p:nvPr>
+            <p:ph type="body" idx="1"/>
+          </p:nvPr>
+        </p:nvSpPr>
+        <p:spPr/>
+        <p:txBody>
+          <a:bodyPr/>
+          <a:lstStyle/>
+          <a:p>
+            <a:r>
+              <a:rPr lang="en-US" dirty="0"/>
+              <a:t/>
+            </a:r>
+            <a:endParaRPr lang="en-US" dirty="0"/>
+          </a:p>
+        </p:txBody>
+      </p:sp>
+      <p:sp>
+        <p:nvSpPr>
+          <p:cNvPr id="4" name="Slide Number Placeholder 3"/>
+          <p:cNvSpPr>
+            <a:spLocks noGrp="1"/>
+          </p:cNvSpPr>
+          <p:nvPr>
+            <p:ph type="sldNum" sz="quarter" idx="10"/>
+          </p:nvPr>
+        </p:nvSpPr>
+        <p:spPr/>
+        <p:txBody>
+          <a:bodyPr/>
+          <a:lstStyle/>
+          <a:p>
+            <a:fld id="{F7021451-1387-4CA6-816F-3879F97B5CBC}" type="slidenum">
+              <a:rPr lang="en-US"/>
+              <a:t>19</a:t>
             </a:fld>
             <a:endParaRPr lang="en-US"/>
           </a:p>
@@ -3744,7 +4092,7 @@
       </p:sp>
       <p:pic>
         <p:nvPicPr>
-          <p:cNvPr id="5" name="Image 1" descr="C:\Users\Utilisateur\dev\green-solutions-web\public\images\logo-icon.png">    </p:cNvPr>
+          <p:cNvPr id="5" name="Image 1" descr="/workspace/scratch/50eb4f7d8e13/green-solutions-web/public/images/logo-icon.png">    </p:cNvPr>
           <p:cNvPicPr>
             <a:picLocks noChangeAspect="1"/>
           </p:cNvPicPr>
@@ -3768,7 +4116,7 @@
       </p:pic>
       <p:pic>
         <p:nvPicPr>
-          <p:cNvPr id="6" name="Image 2" descr="C:\Users\Utilisateur\dev\green-solutions-web\scripts\dossiers\drapeaux\gabon.png">    </p:cNvPr>
+          <p:cNvPr id="6" name="Image 2" descr="/workspace/scratch/50eb4f7d8e13/green-solutions-web/scripts/dossiers/drapeaux/gabon.png">    </p:cNvPr>
           <p:cNvPicPr>
             <a:picLocks noChangeAspect="1"/>
           </p:cNvPicPr>
@@ -4118,7 +4466,7 @@
                 <a:ea typeface="Calibri" pitchFamily="34" charset="-122"/>
                 <a:cs typeface="Calibri" pitchFamily="34" charset="-120"/>
               </a:rPr>
-              <a:t>NOTRE RÉPONSE</a:t>
+              <a:t>Potentiel de rendement</a:t>
             </a:r>
             <a:endParaRPr lang="en-US" sz="1150" dirty="0"/>
           </a:p>
@@ -4157,340 +4505,42 @@
                 <a:ea typeface="Cambria" pitchFamily="34" charset="-122"/>
                 <a:cs typeface="Cambria" pitchFamily="34" charset="-120"/>
               </a:rPr>
-              <a:t>Retenir l'eau, nourrir sans lessiver</a:t>
+              <a:t>Gain de rendement attendu par culture</a:t>
             </a:r>
             <a:endParaRPr lang="en-US" sz="3000" dirty="0"/>
           </a:p>
         </p:txBody>
       </p:sp>
-      <p:sp>
-        <p:nvSpPr>
-          <p:cNvPr id="4" name="Text 2"/>
-          <p:cNvSpPr txBox="1"/>
-          <p:nvPr/>
-        </p:nvSpPr>
-        <p:spPr>
-          <a:xfrm>
-            <a:off x="594360" y="1783080"/>
-            <a:ext cx="5227168" cy="411480"/>
-          </a:xfrm>
-          <a:prstGeom prst="rect">
-            <a:avLst/>
-          </a:prstGeom>
-          <a:noFill/>
-          <a:ln/>
-        </p:spPr>
-        <p:txBody>
-          <a:bodyPr wrap="square" lIns="0" tIns="0" rIns="0" bIns="0" rtlCol="0" anchor="ctr"/>
-          <a:lstStyle/>
-          <a:p>
-            <a:pPr algn="l" indent="0" marL="0">
-              <a:buNone/>
-            </a:pPr>
-            <a:r>
-              <a:rPr lang="en-US" sz="1600" b="1" dirty="0">
-                <a:solidFill>
-                  <a:srgbClr val="1C5A73"/>
-                </a:solidFill>
-                <a:latin typeface="Cambria" pitchFamily="34" charset="0"/>
-                <a:ea typeface="Cambria" pitchFamily="34" charset="-122"/>
-                <a:cs typeface="Cambria" pitchFamily="34" charset="-120"/>
-              </a:rPr>
-              <a:t>EVERGREEN® — retenir l'eau</a:t>
-            </a:r>
-            <a:endParaRPr lang="en-US" sz="1600" dirty="0"/>
-          </a:p>
-        </p:txBody>
-      </p:sp>
-      <p:sp>
-        <p:nvSpPr>
-          <p:cNvPr id="5" name="Text 3"/>
-          <p:cNvSpPr txBox="1"/>
-          <p:nvPr/>
-        </p:nvSpPr>
-        <p:spPr>
-          <a:xfrm>
-            <a:off x="594360" y="2286000"/>
-            <a:ext cx="5227168" cy="2468880"/>
-          </a:xfrm>
-          <a:prstGeom prst="rect">
-            <a:avLst/>
-          </a:prstGeom>
-          <a:noFill/>
-          <a:ln/>
-        </p:spPr>
-        <p:txBody>
-          <a:bodyPr wrap="square" lIns="0" tIns="0" rIns="0" bIns="0" rtlCol="0" anchor="t"/>
-          <a:lstStyle/>
-          <a:p>
-            <a:pPr algn="l" marL="342900" indent="-342900">
-              <a:lnSpc>
-                <a:spcPct val="122000"/>
-              </a:lnSpc>
-              <a:spcAft>
-                <a:spcPts val="1000"/>
-              </a:spcAft>
-              <a:buSzPct val="100000"/>
-              <a:buChar char="•"/>
-            </a:pPr>
-            <a:r>
-              <a:rPr lang="en-US" sz="1350" dirty="0">
-                <a:solidFill>
-                  <a:srgbClr val="31424A"/>
-                </a:solidFill>
-                <a:latin typeface="Calibri" pitchFamily="34" charset="0"/>
-                <a:ea typeface="Calibri" pitchFamily="34" charset="-122"/>
-                <a:cs typeface="Calibri" pitchFamily="34" charset="-120"/>
-              </a:rPr>
-              <a:t>Hydro-rétenteur à base de potassium, placé dans la zone racinaire à la plantation ou à la reprise.</a:t>
-            </a:r>
-            <a:endParaRPr lang="en-US" sz="1350" dirty="0"/>
-          </a:p>
-          <a:p>
-            <a:pPr algn="l" marL="342900" indent="-342900">
-              <a:lnSpc>
-                <a:spcPct val="122000"/>
-              </a:lnSpc>
-              <a:spcAft>
-                <a:spcPts val="1000"/>
-              </a:spcAft>
-              <a:buSzPct val="100000"/>
-              <a:buChar char="•"/>
-            </a:pPr>
-            <a:r>
-              <a:rPr lang="en-US" sz="1350" dirty="0">
-                <a:solidFill>
-                  <a:srgbClr val="31424A"/>
-                </a:solidFill>
-                <a:latin typeface="Calibri" pitchFamily="34" charset="0"/>
-                <a:ea typeface="Calibri" pitchFamily="34" charset="-122"/>
-                <a:cs typeface="Calibri" pitchFamily="34" charset="-120"/>
-              </a:rPr>
-              <a:t>Capte l'eau de pluie ou d'irrigation et la restitue progressivement, ce qui lisse l'écart entre une averse tropicale et quatre mois sans pluie.</a:t>
-            </a:r>
-            <a:endParaRPr lang="en-US" sz="1350" dirty="0"/>
-          </a:p>
-          <a:p>
-            <a:pPr algn="l" marL="342900" indent="-342900">
-              <a:lnSpc>
-                <a:spcPct val="122000"/>
-              </a:lnSpc>
-              <a:spcAft>
-                <a:spcPts val="1000"/>
-              </a:spcAft>
-              <a:buSzPct val="100000"/>
-              <a:buChar char="•"/>
-            </a:pPr>
-            <a:r>
-              <a:rPr lang="en-US" sz="1350" dirty="0">
-                <a:solidFill>
-                  <a:srgbClr val="31424A"/>
-                </a:solidFill>
-                <a:latin typeface="Calibri" pitchFamily="34" charset="0"/>
-                <a:ea typeface="Calibri" pitchFamily="34" charset="-122"/>
-                <a:cs typeface="Calibri" pitchFamily="34" charset="-120"/>
-              </a:rPr>
-              <a:t>Capacité d'absorption de l'ordre de 300 fois son poids ; durée d'effet utile de 3 à 4 ans dans le sol.</a:t>
-            </a:r>
-            <a:endParaRPr lang="en-US" sz="1350" dirty="0"/>
-          </a:p>
-          <a:p>
-            <a:pPr algn="l" marL="342900" indent="-342900">
-              <a:lnSpc>
-                <a:spcPct val="122000"/>
-              </a:lnSpc>
-              <a:spcAft>
-                <a:spcPts val="1000"/>
-              </a:spcAft>
-              <a:buSzPct val="100000"/>
-              <a:buChar char="•"/>
-            </a:pPr>
-            <a:r>
-              <a:rPr lang="en-US" sz="1350" dirty="0">
-                <a:solidFill>
-                  <a:srgbClr val="31424A"/>
-                </a:solidFill>
-                <a:latin typeface="Calibri" pitchFamily="34" charset="0"/>
-                <a:ea typeface="Calibri" pitchFamily="34" charset="-122"/>
-                <a:cs typeface="Calibri" pitchFamily="34" charset="-120"/>
-              </a:rPr>
-              <a:t>Se dégrade de 20 à 25 % par an, sans accumulation ni risque de surdosage.</a:t>
-            </a:r>
-            <a:endParaRPr lang="en-US" sz="1350" dirty="0"/>
-          </a:p>
-        </p:txBody>
-      </p:sp>
-      <p:sp>
-        <p:nvSpPr>
-          <p:cNvPr id="6" name="Text 4"/>
-          <p:cNvSpPr txBox="1"/>
-          <p:nvPr/>
-        </p:nvSpPr>
-        <p:spPr>
-          <a:xfrm>
-            <a:off x="6370168" y="1783080"/>
-            <a:ext cx="5227168" cy="411480"/>
-          </a:xfrm>
-          <a:prstGeom prst="rect">
-            <a:avLst/>
-          </a:prstGeom>
-          <a:noFill/>
-          <a:ln/>
-        </p:spPr>
-        <p:txBody>
-          <a:bodyPr wrap="square" lIns="0" tIns="0" rIns="0" bIns="0" rtlCol="0" anchor="ctr"/>
-          <a:lstStyle/>
-          <a:p>
-            <a:pPr algn="l" indent="0" marL="0">
-              <a:buNone/>
-            </a:pPr>
-            <a:r>
-              <a:rPr lang="en-US" sz="1600" b="1" dirty="0">
-                <a:solidFill>
-                  <a:srgbClr val="1C5A73"/>
-                </a:solidFill>
-                <a:latin typeface="Cambria" pitchFamily="34" charset="0"/>
-                <a:ea typeface="Cambria" pitchFamily="34" charset="-122"/>
-                <a:cs typeface="Cambria" pitchFamily="34" charset="-120"/>
-              </a:rPr>
-              <a:t>ECOFERT® — nourrir sans épuiser</a:t>
-            </a:r>
-            <a:endParaRPr lang="en-US" sz="1600" dirty="0"/>
-          </a:p>
-        </p:txBody>
-      </p:sp>
-      <p:sp>
-        <p:nvSpPr>
-          <p:cNvPr id="7" name="Text 5"/>
-          <p:cNvSpPr txBox="1"/>
-          <p:nvPr/>
-        </p:nvSpPr>
-        <p:spPr>
-          <a:xfrm>
-            <a:off x="6370168" y="2286000"/>
-            <a:ext cx="5227168" cy="2468880"/>
-          </a:xfrm>
-          <a:prstGeom prst="rect">
-            <a:avLst/>
-          </a:prstGeom>
-          <a:noFill/>
-          <a:ln/>
-        </p:spPr>
-        <p:txBody>
-          <a:bodyPr wrap="square" lIns="0" tIns="0" rIns="0" bIns="0" rtlCol="0" anchor="t"/>
-          <a:lstStyle/>
-          <a:p>
-            <a:pPr algn="l" marL="342900" indent="-342900">
-              <a:lnSpc>
-                <a:spcPct val="122000"/>
-              </a:lnSpc>
-              <a:spcAft>
-                <a:spcPts val="1000"/>
-              </a:spcAft>
-              <a:buSzPct val="100000"/>
-              <a:buChar char="•"/>
-            </a:pPr>
-            <a:r>
-              <a:rPr lang="en-US" sz="1350" dirty="0">
-                <a:solidFill>
-                  <a:srgbClr val="31424A"/>
-                </a:solidFill>
-                <a:latin typeface="Calibri" pitchFamily="34" charset="0"/>
-                <a:ea typeface="Calibri" pitchFamily="34" charset="-122"/>
-                <a:cs typeface="Calibri" pitchFamily="34" charset="-120"/>
-              </a:rPr>
-              <a:t>Fertilisant en microdoses d'acides aminés, azote, phosphore et potassium, issu de ressources renouvelables.</a:t>
-            </a:r>
-            <a:endParaRPr lang="en-US" sz="1350" dirty="0"/>
-          </a:p>
-          <a:p>
-            <a:pPr algn="l" marL="342900" indent="-342900">
-              <a:lnSpc>
-                <a:spcPct val="122000"/>
-              </a:lnSpc>
-              <a:spcAft>
-                <a:spcPts val="1000"/>
-              </a:spcAft>
-              <a:buSzPct val="100000"/>
-              <a:buChar char="•"/>
-            </a:pPr>
-            <a:r>
-              <a:rPr lang="en-US" sz="1350" dirty="0">
-                <a:solidFill>
-                  <a:srgbClr val="31424A"/>
-                </a:solidFill>
-                <a:latin typeface="Calibri" pitchFamily="34" charset="0"/>
-                <a:ea typeface="Calibri" pitchFamily="34" charset="-122"/>
-                <a:cs typeface="Calibri" pitchFamily="34" charset="-120"/>
-              </a:rPr>
-              <a:t>Non chélatant : il n'appauvrit pas le complexe argilo-humique, déjà fragile sur sols ferralitiques acides.</a:t>
-            </a:r>
-            <a:endParaRPr lang="en-US" sz="1350" dirty="0"/>
-          </a:p>
-          <a:p>
-            <a:pPr algn="l" marL="342900" indent="-342900">
-              <a:lnSpc>
-                <a:spcPct val="122000"/>
-              </a:lnSpc>
-              <a:spcAft>
-                <a:spcPts val="1000"/>
-              </a:spcAft>
-              <a:buSzPct val="100000"/>
-              <a:buChar char="•"/>
-            </a:pPr>
-            <a:r>
-              <a:rPr lang="en-US" sz="1350" dirty="0">
-                <a:solidFill>
-                  <a:srgbClr val="31424A"/>
-                </a:solidFill>
-                <a:latin typeface="Calibri" pitchFamily="34" charset="0"/>
-                <a:ea typeface="Calibri" pitchFamily="34" charset="-122"/>
-                <a:cs typeface="Calibri" pitchFamily="34" charset="-120"/>
-              </a:rPr>
-              <a:t>Certifié SOHISCERT et EU Bio, utilisé dans 60 pays — argument utile pour les filières palme et hévéa exportatrices.</a:t>
-            </a:r>
-            <a:endParaRPr lang="en-US" sz="1350" dirty="0"/>
-          </a:p>
-          <a:p>
-            <a:pPr algn="l" marL="342900" indent="-342900">
-              <a:lnSpc>
-                <a:spcPct val="122000"/>
-              </a:lnSpc>
-              <a:spcAft>
-                <a:spcPts val="1000"/>
-              </a:spcAft>
-              <a:buSzPct val="100000"/>
-              <a:buChar char="•"/>
-            </a:pPr>
-            <a:r>
-              <a:rPr lang="en-US" sz="1350" dirty="0">
-                <a:solidFill>
-                  <a:srgbClr val="31424A"/>
-                </a:solidFill>
-                <a:latin typeface="Calibri" pitchFamily="34" charset="0"/>
-                <a:ea typeface="Calibri" pitchFamily="34" charset="-122"/>
-                <a:cs typeface="Calibri" pitchFamily="34" charset="-120"/>
-              </a:rPr>
-              <a:t>1 à 4 flacons de 140 ml par hectare, compatibles avec un pulvérisateur à dos comme avec la fertirrigation.</a:t>
-            </a:r>
-            <a:endParaRPr lang="en-US" sz="1350" dirty="0"/>
-          </a:p>
-        </p:txBody>
-      </p:sp>
-      <p:sp>
-        <p:nvSpPr>
-          <p:cNvPr id="8" name="Shape 6"/>
+      <p:graphicFrame>
+        <p:nvGraphicFramePr>
+          <p:cNvPr id="4" name="Chart 0" descr=""/>
+          <p:cNvGraphicFramePr/>
+          <p:nvPr/>
+        </p:nvGraphicFramePr>
+        <p:xfrm>
+          <a:off x="594360" y="1783080"/>
+          <a:ext cx="7360920" cy="3977640"/>
+        </p:xfrm>
+        <a:graphic xmlns:a="http://schemas.openxmlformats.org/drawingml/2006/main">
+          <a:graphicData uri="http://schemas.openxmlformats.org/drawingml/2006/chart">
+            <c:chart xmlns:c="http://schemas.openxmlformats.org/drawingml/2006/chart" r:id="rId1"/>
+          </a:graphicData>
+        </a:graphic>
+      </p:graphicFrame>
+      <p:sp>
+        <p:nvSpPr>
+          <p:cNvPr id="5" name="Shape 2"/>
           <p:cNvSpPr/>
           <p:nvPr/>
         </p:nvSpPr>
         <p:spPr>
           <a:xfrm>
-            <a:off x="594360" y="4846320"/>
-            <a:ext cx="11002975" cy="960120"/>
+            <a:off x="8275320" y="1783080"/>
+            <a:ext cx="3291840" cy="3977640"/>
           </a:xfrm>
           <a:prstGeom prst="roundRect">
             <a:avLst>
-              <a:gd name="adj" fmla="val 7619"/>
+              <a:gd name="adj" fmla="val 2778"/>
             </a:avLst>
           </a:prstGeom>
           <a:solidFill>
@@ -4506,14 +4556,53 @@
       </p:sp>
       <p:sp>
         <p:nvSpPr>
-          <p:cNvPr id="9" name="Text 7"/>
-          <p:cNvSpPr txBox="1"/>
-          <p:nvPr/>
-        </p:nvSpPr>
-        <p:spPr>
-          <a:xfrm>
-            <a:off x="822960" y="4983480"/>
-            <a:ext cx="10545775" cy="713232"/>
+          <p:cNvPr id="6" name="Text 3"/>
+          <p:cNvSpPr txBox="1"/>
+          <p:nvPr/>
+        </p:nvSpPr>
+        <p:spPr>
+          <a:xfrm>
+            <a:off x="8503920" y="2011680"/>
+            <a:ext cx="2834640" cy="457200"/>
+          </a:xfrm>
+          <a:prstGeom prst="rect">
+            <a:avLst/>
+          </a:prstGeom>
+          <a:noFill/>
+          <a:ln/>
+        </p:spPr>
+        <p:txBody>
+          <a:bodyPr wrap="square" lIns="0" tIns="0" rIns="0" bIns="0" rtlCol="0" anchor="ctr"/>
+          <a:lstStyle/>
+          <a:p>
+            <a:pPr algn="l" indent="0" marL="0">
+              <a:buNone/>
+            </a:pPr>
+            <a:r>
+              <a:rPr lang="en-US" sz="1300" b="1" dirty="0">
+                <a:solidFill>
+                  <a:srgbClr val="1C5A73"/>
+                </a:solidFill>
+                <a:latin typeface="Cambria" pitchFamily="34" charset="0"/>
+                <a:ea typeface="Cambria" pitchFamily="34" charset="-122"/>
+                <a:cs typeface="Cambria" pitchFamily="34" charset="-120"/>
+              </a:rPr>
+              <a:t>À lire avec prudence</a:t>
+            </a:r>
+            <a:endParaRPr lang="en-US" sz="1300" dirty="0"/>
+          </a:p>
+        </p:txBody>
+      </p:sp>
+      <p:sp>
+        <p:nvSpPr>
+          <p:cNvPr id="7" name="Text 4"/>
+          <p:cNvSpPr txBox="1"/>
+          <p:nvPr/>
+        </p:nvSpPr>
+        <p:spPr>
+          <a:xfrm>
+            <a:off x="8503920" y="2560320"/>
+            <a:ext cx="2834640" cy="3017520"/>
           </a:xfrm>
           <a:prstGeom prst="rect">
             <a:avLst/>
@@ -4527,28 +4616,57 @@
           <a:p>
             <a:pPr algn="l" indent="0" marL="0">
               <a:lnSpc>
-                <a:spcPct val="118000"/>
+                <a:spcPct val="125000"/>
               </a:lnSpc>
               <a:buNone/>
             </a:pPr>
             <a:r>
-              <a:rPr lang="en-US" sz="1100" dirty="0">
-                <a:solidFill>
-                  <a:srgbClr val="6C8089"/>
-                </a:solidFill>
-                <a:latin typeface="Calibri" pitchFamily="34" charset="0"/>
-                <a:ea typeface="Calibri" pitchFamily="34" charset="-122"/>
-                <a:cs typeface="Calibri" pitchFamily="34" charset="-120"/>
-              </a:rPr>
-              <a:t>Les deux produits se vendent séparément mais ont été conçus pour se renforcer : l'hydro-rétenteur prolonge la disponibilité de l'eau, le fertilisant valorise cette eau sans ajouter à la charge saline d'un sol déjà lessivé.</a:t>
-            </a:r>
-            <a:endParaRPr lang="en-US" sz="1100" dirty="0"/>
-          </a:p>
-        </p:txBody>
-      </p:sp>
-      <p:sp>
-        <p:nvSpPr>
-          <p:cNvPr id="10" name="Text 8"/>
+              <a:rPr lang="en-US" sz="1200" dirty="0">
+                <a:solidFill>
+                  <a:srgbClr val="31424A"/>
+                </a:solidFill>
+                <a:latin typeface="Calibri" pitchFamily="34" charset="0"/>
+                <a:ea typeface="Calibri" pitchFamily="34" charset="-122"/>
+                <a:cs typeface="Calibri" pitchFamily="34" charset="-120"/>
+              </a:rPr>
+              <a:t>Fourchettes retenues par notre calculateur de dose, pour une culture conduite normalement avec EVERGREEN® à la plantation.</a:t>
+            </a:r>
+            <a:endParaRPr lang="en-US" sz="1200" dirty="0"/>
+          </a:p>
+          <a:p>
+            <a:pPr algn="l" indent="0" marL="0">
+              <a:lnSpc>
+                <a:spcPct val="125000"/>
+              </a:lnSpc>
+              <a:buNone/>
+            </a:pPr>
+            <a:endParaRPr lang="en-US" sz="1200" dirty="0"/>
+          </a:p>
+          <a:p>
+            <a:pPr algn="l" indent="0" marL="0">
+              <a:lnSpc>
+                <a:spcPct val="125000"/>
+              </a:lnSpc>
+              <a:buNone/>
+            </a:pPr>
+            <a:r>
+              <a:rPr lang="en-US" sz="1200" dirty="0">
+                <a:solidFill>
+                  <a:srgbClr val="31424A"/>
+                </a:solidFill>
+                <a:latin typeface="Calibri" pitchFamily="34" charset="0"/>
+                <a:ea typeface="Calibri" pitchFamily="34" charset="-122"/>
+                <a:cs typeface="Calibri" pitchFamily="34" charset="-120"/>
+              </a:rPr>
+              <a:t>Le résultat réel dépend du sol, du climat et de la conduite. Pour les céréales, aucun gain n'est avancé sans essai de terrain.</a:t>
+            </a:r>
+            <a:endParaRPr lang="en-US" sz="1200" dirty="0"/>
+          </a:p>
+        </p:txBody>
+      </p:sp>
+      <p:sp>
+        <p:nvSpPr>
+          <p:cNvPr id="8" name="Text 5"/>
           <p:cNvSpPr txBox="1"/>
           <p:nvPr/>
         </p:nvSpPr>
@@ -4589,7 +4707,7 @@
       </p:sp>
       <p:sp>
         <p:nvSpPr>
-          <p:cNvPr id="11" name="Text 9"/>
+          <p:cNvPr id="9" name="Text 6"/>
           <p:cNvSpPr txBox="1"/>
           <p:nvPr/>
         </p:nvSpPr>
@@ -4693,7 +4811,7 @@
                 <a:ea typeface="Calibri" pitchFamily="34" charset="-122"/>
                 <a:cs typeface="Calibri" pitchFamily="34" charset="-120"/>
               </a:rPr>
-              <a:t>Le reste de la gamme</a:t>
+              <a:t>NOTRE RÉPONSE</a:t>
             </a:r>
             <a:endParaRPr lang="en-US" sz="1150" dirty="0"/>
           </a:p>
@@ -4732,7 +4850,7 @@
                 <a:ea typeface="Cambria" pitchFamily="34" charset="-122"/>
                 <a:cs typeface="Cambria" pitchFamily="34" charset="-120"/>
               </a:rPr>
-              <a:t>Protéger les cultures, fixer les sols</a:t>
+              <a:t>Retenir l'eau, nourrir sans lessiver</a:t>
             </a:r>
             <a:endParaRPr lang="en-US" sz="3000" dirty="0"/>
           </a:p>
@@ -4771,7 +4889,7 @@
                 <a:ea typeface="Cambria" pitchFamily="34" charset="-122"/>
                 <a:cs typeface="Cambria" pitchFamily="34" charset="-120"/>
               </a:rPr>
-              <a:t>NAPEMA® — protéger sans résidu</a:t>
+              <a:t>EVERGREEN® — retenir l'eau</a:t>
             </a:r>
             <a:endParaRPr lang="en-US" sz="1600" dirty="0"/>
           </a:p>
@@ -4817,7 +4935,7 @@
                 <a:ea typeface="Calibri" pitchFamily="34" charset="-122"/>
                 <a:cs typeface="Calibri" pitchFamily="34" charset="-120"/>
               </a:rPr>
-              <a:t>Lutte contre maladies, parasites, champignons et ravageurs, sans molécule de synthèse.</a:t>
+              <a:t>Hydro-rétenteur à base de potassium, placé dans la zone racinaire à la plantation ou à la reprise.</a:t>
             </a:r>
             <a:endParaRPr lang="en-US" sz="1350" dirty="0"/>
           </a:p>
@@ -4841,7 +4959,7 @@
                 <a:ea typeface="Calibri" pitchFamily="34" charset="-122"/>
                 <a:cs typeface="Calibri" pitchFamily="34" charset="-120"/>
               </a:rPr>
-              <a:t>Pulvérisation foliaire et racinaire, à effet préventif comme curatif.</a:t>
+              <a:t>Capte l'eau de pluie ou d'irrigation et la restitue progressivement, ce qui lisse l'écart entre une averse tropicale et quatre mois sans pluie.</a:t>
             </a:r>
             <a:endParaRPr lang="en-US" sz="1350" dirty="0"/>
           </a:p>
@@ -4865,7 +4983,7 @@
                 <a:ea typeface="Calibri" pitchFamily="34" charset="-122"/>
                 <a:cs typeface="Calibri" pitchFamily="34" charset="-120"/>
               </a:rPr>
-              <a:t>Aucun résidu dans le sol, la plante ou l'air : pollinisateurs et auxiliaires préservés.</a:t>
+              <a:t>Capacité d'absorption de l'ordre de 300 fois son poids ; durée d'effet utile de 3 à 4 ans dans le sol.</a:t>
             </a:r>
             <a:endParaRPr lang="en-US" sz="1350" dirty="0"/>
           </a:p>
@@ -4889,7 +5007,7 @@
                 <a:ea typeface="Calibri" pitchFamily="34" charset="-122"/>
                 <a:cs typeface="Calibri" pitchFamily="34" charset="-120"/>
               </a:rPr>
-              <a:t>Formulé sur mesure pour un problème précis : cochenille, HLB des agrumes, nématodes.</a:t>
+              <a:t>Se dégrade de 20 à 25 % par an, sans accumulation ni risque de surdosage.</a:t>
             </a:r>
             <a:endParaRPr lang="en-US" sz="1350" dirty="0"/>
           </a:p>
@@ -4928,7 +5046,7 @@
                 <a:ea typeface="Cambria" pitchFamily="34" charset="-122"/>
                 <a:cs typeface="Cambria" pitchFamily="34" charset="-120"/>
               </a:rPr>
-              <a:t>Paulownia ALTIFOLIA® — l'arbre des régions chaudes</a:t>
+              <a:t>ECOFERT® — nourrir sans épuiser</a:t>
             </a:r>
             <a:endParaRPr lang="en-US" sz="1600" dirty="0"/>
           </a:p>
@@ -4974,7 +5092,7 @@
                 <a:ea typeface="Calibri" pitchFamily="34" charset="-122"/>
                 <a:cs typeface="Calibri" pitchFamily="34" charset="-120"/>
               </a:rPr>
-              <a:t>13 à 15 m en six à huit ans, avec un tronc de gros diamètre.</a:t>
+              <a:t>Fertilisant en microdoses d'acides aminés, azote, phosphore et potassium, issu de ressources renouvelables.</a:t>
             </a:r>
             <a:endParaRPr lang="en-US" sz="1350" dirty="0"/>
           </a:p>
@@ -4998,7 +5116,7 @@
                 <a:ea typeface="Calibri" pitchFamily="34" charset="-122"/>
                 <a:cs typeface="Calibri" pitchFamily="34" charset="-120"/>
               </a:rPr>
-              <a:t>Associé à 100 g d'EVERGREEN® par plant, l'irrigation nécessaire diminue de 50 %.</a:t>
+              <a:t>Non chélatant : il n'appauvrit pas le complexe argilo-humique, déjà fragile sur sols ferralitiques acides.</a:t>
             </a:r>
             <a:endParaRPr lang="en-US" sz="1350" dirty="0"/>
           </a:p>
@@ -5022,7 +5140,7 @@
                 <a:ea typeface="Calibri" pitchFamily="34" charset="-122"/>
                 <a:cs typeface="Calibri" pitchFamily="34" charset="-120"/>
               </a:rPr>
-              <a:t>Résiste de −25 °C à +45 °C ; son bois ne s'enflamme qu'à partir de 426 °C.</a:t>
+              <a:t>Certifié SOHISCERT et EU Bio, utilisé dans 60 pays — argument utile pour les filières palme et hévéa exportatrices.</a:t>
             </a:r>
             <a:endParaRPr lang="en-US" sz="1350" dirty="0"/>
           </a:p>
@@ -5046,7 +5164,7 @@
                 <a:ea typeface="Calibri" pitchFamily="34" charset="-122"/>
                 <a:cs typeface="Calibri" pitchFamily="34" charset="-120"/>
               </a:rPr>
-              <a:t>Brise-vent, protection des sols contre l'érosion, 400 à 700 kg de miel par hectare.</a:t>
+              <a:t>1 à 4 flacons de 140 ml par hectare, compatibles avec un pulvérisateur à dos comme avec la fertirrigation.</a:t>
             </a:r>
             <a:endParaRPr lang="en-US" sz="1350" dirty="0"/>
           </a:p>
@@ -5115,7 +5233,7 @@
                 <a:ea typeface="Calibri" pitchFamily="34" charset="-122"/>
                 <a:cs typeface="Calibri" pitchFamily="34" charset="-120"/>
               </a:rPr>
-              <a:t>Plants livrés en pot (25 à 30 cm), certifiés indemnes de maladies et remplacés sous garantie en cas de perte. Première coupe à la fin de la sixième année, bois valorisé autour de 400 à 450 € le m³.</a:t>
+              <a:t>Les deux produits se vendent séparément mais ont été conçus pour se renforcer : l'hydro-rétenteur prolonge la disponibilité de l'eau, le fertilisant valorise cette eau sans ajouter à la charge saline d'un sol déjà lessivé.</a:t>
             </a:r>
             <a:endParaRPr lang="en-US" sz="1100" dirty="0"/>
           </a:p>
@@ -5268,7 +5386,7 @@
                 <a:ea typeface="Calibri" pitchFamily="34" charset="-122"/>
                 <a:cs typeface="Calibri" pitchFamily="34" charset="-120"/>
               </a:rPr>
-              <a:t>ORDRES DE GRANDEUR</a:t>
+              <a:t>Le reste de la gamme</a:t>
             </a:r>
             <a:endParaRPr lang="en-US" sz="1150" dirty="0"/>
           </a:p>
@@ -5307,42 +5425,340 @@
                 <a:ea typeface="Cambria" pitchFamily="34" charset="-122"/>
                 <a:cs typeface="Cambria" pitchFamily="34" charset="-120"/>
               </a:rPr>
-              <a:t>Économie d'eau attendue selon le mode d'arrosage</a:t>
+              <a:t>Protéger les cultures, fixer les sols</a:t>
             </a:r>
             <a:endParaRPr lang="en-US" sz="3000" dirty="0"/>
           </a:p>
         </p:txBody>
       </p:sp>
-      <p:graphicFrame>
-        <p:nvGraphicFramePr>
-          <p:cNvPr id="4" name="Chart 0" descr=""/>
-          <p:cNvGraphicFramePr/>
-          <p:nvPr/>
-        </p:nvGraphicFramePr>
-        <p:xfrm>
-          <a:off x="594360" y="1783080"/>
-          <a:ext cx="7360920" cy="3977640"/>
-        </p:xfrm>
-        <a:graphic xmlns:a="http://schemas.openxmlformats.org/drawingml/2006/main">
-          <a:graphicData uri="http://schemas.openxmlformats.org/drawingml/2006/chart">
-            <c:chart xmlns:c="http://schemas.openxmlformats.org/drawingml/2006/chart" r:id="rId1"/>
-          </a:graphicData>
-        </a:graphic>
-      </p:graphicFrame>
-      <p:sp>
-        <p:nvSpPr>
-          <p:cNvPr id="5" name="Shape 2"/>
+      <p:sp>
+        <p:nvSpPr>
+          <p:cNvPr id="4" name="Text 2"/>
+          <p:cNvSpPr txBox="1"/>
+          <p:nvPr/>
+        </p:nvSpPr>
+        <p:spPr>
+          <a:xfrm>
+            <a:off x="594360" y="1783080"/>
+            <a:ext cx="5227168" cy="411480"/>
+          </a:xfrm>
+          <a:prstGeom prst="rect">
+            <a:avLst/>
+          </a:prstGeom>
+          <a:noFill/>
+          <a:ln/>
+        </p:spPr>
+        <p:txBody>
+          <a:bodyPr wrap="square" lIns="0" tIns="0" rIns="0" bIns="0" rtlCol="0" anchor="ctr"/>
+          <a:lstStyle/>
+          <a:p>
+            <a:pPr algn="l" indent="0" marL="0">
+              <a:buNone/>
+            </a:pPr>
+            <a:r>
+              <a:rPr lang="en-US" sz="1600" b="1" dirty="0">
+                <a:solidFill>
+                  <a:srgbClr val="1C5A73"/>
+                </a:solidFill>
+                <a:latin typeface="Cambria" pitchFamily="34" charset="0"/>
+                <a:ea typeface="Cambria" pitchFamily="34" charset="-122"/>
+                <a:cs typeface="Cambria" pitchFamily="34" charset="-120"/>
+              </a:rPr>
+              <a:t>NAPEMA® — protéger sans résidu</a:t>
+            </a:r>
+            <a:endParaRPr lang="en-US" sz="1600" dirty="0"/>
+          </a:p>
+        </p:txBody>
+      </p:sp>
+      <p:sp>
+        <p:nvSpPr>
+          <p:cNvPr id="5" name="Text 3"/>
+          <p:cNvSpPr txBox="1"/>
+          <p:nvPr/>
+        </p:nvSpPr>
+        <p:spPr>
+          <a:xfrm>
+            <a:off x="594360" y="2286000"/>
+            <a:ext cx="5227168" cy="2468880"/>
+          </a:xfrm>
+          <a:prstGeom prst="rect">
+            <a:avLst/>
+          </a:prstGeom>
+          <a:noFill/>
+          <a:ln/>
+        </p:spPr>
+        <p:txBody>
+          <a:bodyPr wrap="square" lIns="0" tIns="0" rIns="0" bIns="0" rtlCol="0" anchor="t"/>
+          <a:lstStyle/>
+          <a:p>
+            <a:pPr algn="l" marL="342900" indent="-342900">
+              <a:lnSpc>
+                <a:spcPct val="122000"/>
+              </a:lnSpc>
+              <a:spcAft>
+                <a:spcPts val="1000"/>
+              </a:spcAft>
+              <a:buSzPct val="100000"/>
+              <a:buChar char="•"/>
+            </a:pPr>
+            <a:r>
+              <a:rPr lang="en-US" sz="1350" dirty="0">
+                <a:solidFill>
+                  <a:srgbClr val="31424A"/>
+                </a:solidFill>
+                <a:latin typeface="Calibri" pitchFamily="34" charset="0"/>
+                <a:ea typeface="Calibri" pitchFamily="34" charset="-122"/>
+                <a:cs typeface="Calibri" pitchFamily="34" charset="-120"/>
+              </a:rPr>
+              <a:t>Lutte contre maladies, parasites, champignons et ravageurs, sans molécule de synthèse.</a:t>
+            </a:r>
+            <a:endParaRPr lang="en-US" sz="1350" dirty="0"/>
+          </a:p>
+          <a:p>
+            <a:pPr algn="l" marL="342900" indent="-342900">
+              <a:lnSpc>
+                <a:spcPct val="122000"/>
+              </a:lnSpc>
+              <a:spcAft>
+                <a:spcPts val="1000"/>
+              </a:spcAft>
+              <a:buSzPct val="100000"/>
+              <a:buChar char="•"/>
+            </a:pPr>
+            <a:r>
+              <a:rPr lang="en-US" sz="1350" dirty="0">
+                <a:solidFill>
+                  <a:srgbClr val="31424A"/>
+                </a:solidFill>
+                <a:latin typeface="Calibri" pitchFamily="34" charset="0"/>
+                <a:ea typeface="Calibri" pitchFamily="34" charset="-122"/>
+                <a:cs typeface="Calibri" pitchFamily="34" charset="-120"/>
+              </a:rPr>
+              <a:t>Pulvérisation foliaire et racinaire, à effet préventif comme curatif.</a:t>
+            </a:r>
+            <a:endParaRPr lang="en-US" sz="1350" dirty="0"/>
+          </a:p>
+          <a:p>
+            <a:pPr algn="l" marL="342900" indent="-342900">
+              <a:lnSpc>
+                <a:spcPct val="122000"/>
+              </a:lnSpc>
+              <a:spcAft>
+                <a:spcPts val="1000"/>
+              </a:spcAft>
+              <a:buSzPct val="100000"/>
+              <a:buChar char="•"/>
+            </a:pPr>
+            <a:r>
+              <a:rPr lang="en-US" sz="1350" dirty="0">
+                <a:solidFill>
+                  <a:srgbClr val="31424A"/>
+                </a:solidFill>
+                <a:latin typeface="Calibri" pitchFamily="34" charset="0"/>
+                <a:ea typeface="Calibri" pitchFamily="34" charset="-122"/>
+                <a:cs typeface="Calibri" pitchFamily="34" charset="-120"/>
+              </a:rPr>
+              <a:t>Aucun résidu dans le sol, la plante ou l'air : pollinisateurs et auxiliaires préservés.</a:t>
+            </a:r>
+            <a:endParaRPr lang="en-US" sz="1350" dirty="0"/>
+          </a:p>
+          <a:p>
+            <a:pPr algn="l" marL="342900" indent="-342900">
+              <a:lnSpc>
+                <a:spcPct val="122000"/>
+              </a:lnSpc>
+              <a:spcAft>
+                <a:spcPts val="1000"/>
+              </a:spcAft>
+              <a:buSzPct val="100000"/>
+              <a:buChar char="•"/>
+            </a:pPr>
+            <a:r>
+              <a:rPr lang="en-US" sz="1350" dirty="0">
+                <a:solidFill>
+                  <a:srgbClr val="31424A"/>
+                </a:solidFill>
+                <a:latin typeface="Calibri" pitchFamily="34" charset="0"/>
+                <a:ea typeface="Calibri" pitchFamily="34" charset="-122"/>
+                <a:cs typeface="Calibri" pitchFamily="34" charset="-120"/>
+              </a:rPr>
+              <a:t>Formulé sur mesure pour un problème précis : cochenille, HLB des agrumes, nématodes.</a:t>
+            </a:r>
+            <a:endParaRPr lang="en-US" sz="1350" dirty="0"/>
+          </a:p>
+        </p:txBody>
+      </p:sp>
+      <p:sp>
+        <p:nvSpPr>
+          <p:cNvPr id="6" name="Text 4"/>
+          <p:cNvSpPr txBox="1"/>
+          <p:nvPr/>
+        </p:nvSpPr>
+        <p:spPr>
+          <a:xfrm>
+            <a:off x="6370168" y="1783080"/>
+            <a:ext cx="5227168" cy="411480"/>
+          </a:xfrm>
+          <a:prstGeom prst="rect">
+            <a:avLst/>
+          </a:prstGeom>
+          <a:noFill/>
+          <a:ln/>
+        </p:spPr>
+        <p:txBody>
+          <a:bodyPr wrap="square" lIns="0" tIns="0" rIns="0" bIns="0" rtlCol="0" anchor="ctr"/>
+          <a:lstStyle/>
+          <a:p>
+            <a:pPr algn="l" indent="0" marL="0">
+              <a:buNone/>
+            </a:pPr>
+            <a:r>
+              <a:rPr lang="en-US" sz="1600" b="1" dirty="0">
+                <a:solidFill>
+                  <a:srgbClr val="1C5A73"/>
+                </a:solidFill>
+                <a:latin typeface="Cambria" pitchFamily="34" charset="0"/>
+                <a:ea typeface="Cambria" pitchFamily="34" charset="-122"/>
+                <a:cs typeface="Cambria" pitchFamily="34" charset="-120"/>
+              </a:rPr>
+              <a:t>Paulownia ALTIFOLIA® — l'arbre des régions chaudes</a:t>
+            </a:r>
+            <a:endParaRPr lang="en-US" sz="1600" dirty="0"/>
+          </a:p>
+        </p:txBody>
+      </p:sp>
+      <p:sp>
+        <p:nvSpPr>
+          <p:cNvPr id="7" name="Text 5"/>
+          <p:cNvSpPr txBox="1"/>
+          <p:nvPr/>
+        </p:nvSpPr>
+        <p:spPr>
+          <a:xfrm>
+            <a:off x="6370168" y="2286000"/>
+            <a:ext cx="5227168" cy="2468880"/>
+          </a:xfrm>
+          <a:prstGeom prst="rect">
+            <a:avLst/>
+          </a:prstGeom>
+          <a:noFill/>
+          <a:ln/>
+        </p:spPr>
+        <p:txBody>
+          <a:bodyPr wrap="square" lIns="0" tIns="0" rIns="0" bIns="0" rtlCol="0" anchor="t"/>
+          <a:lstStyle/>
+          <a:p>
+            <a:pPr algn="l" marL="342900" indent="-342900">
+              <a:lnSpc>
+                <a:spcPct val="122000"/>
+              </a:lnSpc>
+              <a:spcAft>
+                <a:spcPts val="1000"/>
+              </a:spcAft>
+              <a:buSzPct val="100000"/>
+              <a:buChar char="•"/>
+            </a:pPr>
+            <a:r>
+              <a:rPr lang="en-US" sz="1350" dirty="0">
+                <a:solidFill>
+                  <a:srgbClr val="31424A"/>
+                </a:solidFill>
+                <a:latin typeface="Calibri" pitchFamily="34" charset="0"/>
+                <a:ea typeface="Calibri" pitchFamily="34" charset="-122"/>
+                <a:cs typeface="Calibri" pitchFamily="34" charset="-120"/>
+              </a:rPr>
+              <a:t>13 à 15 m en six à huit ans, avec un tronc de gros diamètre.</a:t>
+            </a:r>
+            <a:endParaRPr lang="en-US" sz="1350" dirty="0"/>
+          </a:p>
+          <a:p>
+            <a:pPr algn="l" marL="342900" indent="-342900">
+              <a:lnSpc>
+                <a:spcPct val="122000"/>
+              </a:lnSpc>
+              <a:spcAft>
+                <a:spcPts val="1000"/>
+              </a:spcAft>
+              <a:buSzPct val="100000"/>
+              <a:buChar char="•"/>
+            </a:pPr>
+            <a:r>
+              <a:rPr lang="en-US" sz="1350" dirty="0">
+                <a:solidFill>
+                  <a:srgbClr val="31424A"/>
+                </a:solidFill>
+                <a:latin typeface="Calibri" pitchFamily="34" charset="0"/>
+                <a:ea typeface="Calibri" pitchFamily="34" charset="-122"/>
+                <a:cs typeface="Calibri" pitchFamily="34" charset="-120"/>
+              </a:rPr>
+              <a:t>Associé à 100 g d'EVERGREEN® par plant, l'irrigation nécessaire diminue de 50 %.</a:t>
+            </a:r>
+            <a:endParaRPr lang="en-US" sz="1350" dirty="0"/>
+          </a:p>
+          <a:p>
+            <a:pPr algn="l" marL="342900" indent="-342900">
+              <a:lnSpc>
+                <a:spcPct val="122000"/>
+              </a:lnSpc>
+              <a:spcAft>
+                <a:spcPts val="1000"/>
+              </a:spcAft>
+              <a:buSzPct val="100000"/>
+              <a:buChar char="•"/>
+            </a:pPr>
+            <a:r>
+              <a:rPr lang="en-US" sz="1350" dirty="0">
+                <a:solidFill>
+                  <a:srgbClr val="31424A"/>
+                </a:solidFill>
+                <a:latin typeface="Calibri" pitchFamily="34" charset="0"/>
+                <a:ea typeface="Calibri" pitchFamily="34" charset="-122"/>
+                <a:cs typeface="Calibri" pitchFamily="34" charset="-120"/>
+              </a:rPr>
+              <a:t>Résiste de −25 °C à +45 °C ; son bois ne s'enflamme qu'à partir de 426 °C.</a:t>
+            </a:r>
+            <a:endParaRPr lang="en-US" sz="1350" dirty="0"/>
+          </a:p>
+          <a:p>
+            <a:pPr algn="l" marL="342900" indent="-342900">
+              <a:lnSpc>
+                <a:spcPct val="122000"/>
+              </a:lnSpc>
+              <a:spcAft>
+                <a:spcPts val="1000"/>
+              </a:spcAft>
+              <a:buSzPct val="100000"/>
+              <a:buChar char="•"/>
+            </a:pPr>
+            <a:r>
+              <a:rPr lang="en-US" sz="1350" dirty="0">
+                <a:solidFill>
+                  <a:srgbClr val="31424A"/>
+                </a:solidFill>
+                <a:latin typeface="Calibri" pitchFamily="34" charset="0"/>
+                <a:ea typeface="Calibri" pitchFamily="34" charset="-122"/>
+                <a:cs typeface="Calibri" pitchFamily="34" charset="-120"/>
+              </a:rPr>
+              <a:t>Brise-vent, protection des sols contre l'érosion, 400 à 700 kg de miel par hectare.</a:t>
+            </a:r>
+            <a:endParaRPr lang="en-US" sz="1350" dirty="0"/>
+          </a:p>
+        </p:txBody>
+      </p:sp>
+      <p:sp>
+        <p:nvSpPr>
+          <p:cNvPr id="8" name="Shape 6"/>
           <p:cNvSpPr/>
           <p:nvPr/>
         </p:nvSpPr>
         <p:spPr>
           <a:xfrm>
-            <a:off x="8275320" y="1783080"/>
-            <a:ext cx="3291840" cy="3977640"/>
+            <a:off x="594360" y="4846320"/>
+            <a:ext cx="11002975" cy="960120"/>
           </a:xfrm>
           <a:prstGeom prst="roundRect">
             <a:avLst>
-              <a:gd name="adj" fmla="val 2778"/>
+              <a:gd name="adj" fmla="val 7619"/>
             </a:avLst>
           </a:prstGeom>
           <a:solidFill>
@@ -5358,53 +5774,14 @@
       </p:sp>
       <p:sp>
         <p:nvSpPr>
-          <p:cNvPr id="6" name="Text 3"/>
-          <p:cNvSpPr txBox="1"/>
-          <p:nvPr/>
-        </p:nvSpPr>
-        <p:spPr>
-          <a:xfrm>
-            <a:off x="8503920" y="2011680"/>
-            <a:ext cx="2834640" cy="457200"/>
-          </a:xfrm>
-          <a:prstGeom prst="rect">
-            <a:avLst/>
-          </a:prstGeom>
-          <a:noFill/>
-          <a:ln/>
-        </p:spPr>
-        <p:txBody>
-          <a:bodyPr wrap="square" lIns="0" tIns="0" rIns="0" bIns="0" rtlCol="0" anchor="ctr"/>
-          <a:lstStyle/>
-          <a:p>
-            <a:pPr algn="l" indent="0" marL="0">
-              <a:buNone/>
-            </a:pPr>
-            <a:r>
-              <a:rPr lang="en-US" sz="1300" b="1" dirty="0">
-                <a:solidFill>
-                  <a:srgbClr val="1C5A73"/>
-                </a:solidFill>
-                <a:latin typeface="Cambria" pitchFamily="34" charset="0"/>
-                <a:ea typeface="Cambria" pitchFamily="34" charset="-122"/>
-                <a:cs typeface="Cambria" pitchFamily="34" charset="-120"/>
-              </a:rPr>
-              <a:t>À lire avec prudence</a:t>
-            </a:r>
-            <a:endParaRPr lang="en-US" sz="1300" dirty="0"/>
-          </a:p>
-        </p:txBody>
-      </p:sp>
-      <p:sp>
-        <p:nvSpPr>
-          <p:cNvPr id="7" name="Text 4"/>
-          <p:cNvSpPr txBox="1"/>
-          <p:nvPr/>
-        </p:nvSpPr>
-        <p:spPr>
-          <a:xfrm>
-            <a:off x="8503920" y="2560320"/>
-            <a:ext cx="2834640" cy="3017520"/>
+          <p:cNvPr id="9" name="Text 7"/>
+          <p:cNvSpPr txBox="1"/>
+          <p:nvPr/>
+        </p:nvSpPr>
+        <p:spPr>
+          <a:xfrm>
+            <a:off x="822960" y="4983480"/>
+            <a:ext cx="10545775" cy="713232"/>
           </a:xfrm>
           <a:prstGeom prst="rect">
             <a:avLst/>
@@ -5418,57 +5795,28 @@
           <a:p>
             <a:pPr algn="l" indent="0" marL="0">
               <a:lnSpc>
-                <a:spcPct val="125000"/>
+                <a:spcPct val="118000"/>
               </a:lnSpc>
               <a:buNone/>
             </a:pPr>
             <a:r>
-              <a:rPr lang="en-US" sz="1200" dirty="0">
-                <a:solidFill>
-                  <a:srgbClr val="31424A"/>
-                </a:solidFill>
-                <a:latin typeface="Calibri" pitchFamily="34" charset="0"/>
-                <a:ea typeface="Calibri" pitchFamily="34" charset="-122"/>
-                <a:cs typeface="Calibri" pitchFamily="34" charset="-120"/>
-              </a:rPr>
-              <a:t>Ces fourchettes sont indicatives et fondées sur les gains documentés de nos hydro-rétenteurs.</a:t>
-            </a:r>
-            <a:endParaRPr lang="en-US" sz="1200" dirty="0"/>
-          </a:p>
-          <a:p>
-            <a:pPr algn="l" indent="0" marL="0">
-              <a:lnSpc>
-                <a:spcPct val="125000"/>
-              </a:lnSpc>
-              <a:buNone/>
-            </a:pPr>
-            <a:endParaRPr lang="en-US" sz="1200" dirty="0"/>
-          </a:p>
-          <a:p>
-            <a:pPr algn="l" indent="0" marL="0">
-              <a:lnSpc>
-                <a:spcPct val="125000"/>
-              </a:lnSpc>
-              <a:buNone/>
-            </a:pPr>
-            <a:r>
-              <a:rPr lang="en-US" sz="1200" dirty="0">
-                <a:solidFill>
-                  <a:srgbClr val="31424A"/>
-                </a:solidFill>
-                <a:latin typeface="Calibri" pitchFamily="34" charset="0"/>
-                <a:ea typeface="Calibri" pitchFamily="34" charset="-122"/>
-                <a:cs typeface="Calibri" pitchFamily="34" charset="-120"/>
-              </a:rPr>
-              <a:t>Le résultat réel dépend du sol, du climat et de la culture. Ces chiffres donnent un ordre de grandeur : ils ne constituent en aucun cas une valeur garantie, contractuelle ou absolue.</a:t>
-            </a:r>
-            <a:endParaRPr lang="en-US" sz="1200" dirty="0"/>
-          </a:p>
-        </p:txBody>
-      </p:sp>
-      <p:sp>
-        <p:nvSpPr>
-          <p:cNvPr id="8" name="Text 5"/>
+              <a:rPr lang="en-US" sz="1100" dirty="0">
+                <a:solidFill>
+                  <a:srgbClr val="6C8089"/>
+                </a:solidFill>
+                <a:latin typeface="Calibri" pitchFamily="34" charset="0"/>
+                <a:ea typeface="Calibri" pitchFamily="34" charset="-122"/>
+                <a:cs typeface="Calibri" pitchFamily="34" charset="-120"/>
+              </a:rPr>
+              <a:t>Plants livrés en pot (25 à 30 cm), certifiés indemnes de maladies et remplacés sous garantie en cas de perte. Première coupe à la fin de la sixième année, bois valorisé autour de 400 à 450 € le m³.</a:t>
+            </a:r>
+            <a:endParaRPr lang="en-US" sz="1100" dirty="0"/>
+          </a:p>
+        </p:txBody>
+      </p:sp>
+      <p:sp>
+        <p:nvSpPr>
+          <p:cNvPr id="10" name="Text 8"/>
           <p:cNvSpPr txBox="1"/>
           <p:nvPr/>
         </p:nvSpPr>
@@ -5509,7 +5857,7 @@
       </p:sp>
       <p:sp>
         <p:nvSpPr>
-          <p:cNvPr id="9" name="Text 6"/>
+          <p:cNvPr id="11" name="Text 9"/>
           <p:cNvSpPr txBox="1"/>
           <p:nvPr/>
         </p:nvSpPr>
@@ -5613,7 +5961,7 @@
                 <a:ea typeface="Calibri" pitchFamily="34" charset="-122"/>
                 <a:cs typeface="Calibri" pitchFamily="34" charset="-120"/>
               </a:rPr>
-              <a:t>TROIS TERRAINS PRIORITAIRES</a:t>
+              <a:t>ORDRES DE GRANDEUR</a:t>
             </a:r>
             <a:endParaRPr lang="en-US" sz="1150" dirty="0"/>
           </a:p>
@@ -5652,26 +6000,42 @@
                 <a:ea typeface="Cambria" pitchFamily="34" charset="-122"/>
                 <a:cs typeface="Cambria" pitchFamily="34" charset="-120"/>
               </a:rPr>
-              <a:t>Où engager les premiers essais</a:t>
+              <a:t>Économie d'eau attendue selon le mode d'arrosage</a:t>
             </a:r>
             <a:endParaRPr lang="en-US" sz="3000" dirty="0"/>
           </a:p>
         </p:txBody>
       </p:sp>
-      <p:sp>
-        <p:nvSpPr>
-          <p:cNvPr id="4" name="Shape 2"/>
+      <p:graphicFrame>
+        <p:nvGraphicFramePr>
+          <p:cNvPr id="4" name="Chart 0" descr=""/>
+          <p:cNvGraphicFramePr/>
+          <p:nvPr/>
+        </p:nvGraphicFramePr>
+        <p:xfrm>
+          <a:off x="594360" y="1783080"/>
+          <a:ext cx="7360920" cy="3977640"/>
+        </p:xfrm>
+        <a:graphic xmlns:a="http://schemas.openxmlformats.org/drawingml/2006/main">
+          <a:graphicData uri="http://schemas.openxmlformats.org/drawingml/2006/chart">
+            <c:chart xmlns:c="http://schemas.openxmlformats.org/drawingml/2006/chart" r:id="rId1"/>
+          </a:graphicData>
+        </a:graphic>
+      </p:graphicFrame>
+      <p:sp>
+        <p:nvSpPr>
+          <p:cNvPr id="5" name="Shape 2"/>
           <p:cNvSpPr/>
           <p:nvPr/>
         </p:nvSpPr>
         <p:spPr>
           <a:xfrm>
-            <a:off x="594360" y="1783080"/>
-            <a:ext cx="3472586" cy="4069080"/>
+            <a:off x="8275320" y="1783080"/>
+            <a:ext cx="3291840" cy="3977640"/>
           </a:xfrm>
           <a:prstGeom prst="roundRect">
             <a:avLst>
-              <a:gd name="adj" fmla="val 2633"/>
+              <a:gd name="adj" fmla="val 2778"/>
             </a:avLst>
           </a:prstGeom>
           <a:solidFill>
@@ -5685,30 +6049,6 @@
           </a:ln>
         </p:spPr>
       </p:sp>
-      <p:pic>
-        <p:nvPicPr>
-          <p:cNvPr id="5" name="Image 0" descr="preencoded.png">    </p:cNvPr>
-          <p:cNvPicPr>
-            <a:picLocks noChangeAspect="1"/>
-          </p:cNvPicPr>
-          <p:nvPr/>
-        </p:nvPicPr>
-        <p:blipFill>
-          <a:blip r:embed="rId1"/>
-          <a:stretch>
-            <a:fillRect/>
-          </a:stretch>
-        </p:blipFill>
-        <p:spPr>
-          <a:xfrm>
-            <a:off x="594360" y="1783080"/>
-            <a:ext cx="3472586" cy="1691640"/>
-          </a:xfrm>
-          <a:prstGeom prst="rect">
-            <a:avLst/>
-          </a:prstGeom>
-        </p:spPr>
-      </p:pic>
       <p:sp>
         <p:nvSpPr>
           <p:cNvPr id="6" name="Text 3"/>
@@ -5717,8 +6057,8 @@
         </p:nvSpPr>
         <p:spPr>
           <a:xfrm>
-            <a:off x="795528" y="3639312"/>
-            <a:ext cx="3070250" cy="384048"/>
+            <a:off x="8503920" y="2011680"/>
+            <a:ext cx="2834640" cy="457200"/>
           </a:xfrm>
           <a:prstGeom prst="rect">
             <a:avLst/>
@@ -5734,7 +6074,7 @@
               <a:buNone/>
             </a:pPr>
             <a:r>
-              <a:rPr lang="en-US" sz="1500" b="1" dirty="0">
+              <a:rPr lang="en-US" sz="1300" b="1" dirty="0">
                 <a:solidFill>
                   <a:srgbClr val="1C5A73"/>
                 </a:solidFill>
@@ -5742,9 +6082,9 @@
                 <a:ea typeface="Cambria" pitchFamily="34" charset="-122"/>
                 <a:cs typeface="Cambria" pitchFamily="34" charset="-120"/>
               </a:rPr>
-              <a:t>Estuaire — Libreville</a:t>
-            </a:r>
-            <a:endParaRPr lang="en-US" sz="1500" dirty="0"/>
+              <a:t>À lire avec prudence</a:t>
+            </a:r>
+            <a:endParaRPr lang="en-US" sz="1300" dirty="0"/>
           </a:p>
         </p:txBody>
       </p:sp>
@@ -5756,580 +6096,72 @@
         </p:nvSpPr>
         <p:spPr>
           <a:xfrm>
-            <a:off x="795528" y="4041648"/>
-            <a:ext cx="3070250" cy="329184"/>
-          </a:xfrm>
-          <a:prstGeom prst="rect">
-            <a:avLst/>
-          </a:prstGeom>
-          <a:noFill/>
-          <a:ln/>
-        </p:spPr>
-        <p:txBody>
-          <a:bodyPr wrap="square" lIns="0" tIns="0" rIns="0" bIns="0" rtlCol="0" anchor="ctr"/>
+            <a:off x="8503920" y="2560320"/>
+            <a:ext cx="2834640" cy="3017520"/>
+          </a:xfrm>
+          <a:prstGeom prst="rect">
+            <a:avLst/>
+          </a:prstGeom>
+          <a:noFill/>
+          <a:ln/>
+        </p:spPr>
+        <p:txBody>
+          <a:bodyPr wrap="square" lIns="0" tIns="0" rIns="0" bIns="0" rtlCol="0" anchor="t"/>
           <a:lstStyle/>
           <a:p>
             <a:pPr algn="l" indent="0" marL="0">
-              <a:buNone/>
-            </a:pPr>
-            <a:r>
-              <a:rPr lang="en-US" sz="1250" b="1" dirty="0">
-                <a:solidFill>
-                  <a:srgbClr val="A3701A"/>
-                </a:solidFill>
-                <a:latin typeface="Calibri" pitchFamily="34" charset="0"/>
-                <a:ea typeface="Calibri" pitchFamily="34" charset="-122"/>
-                <a:cs typeface="Calibri" pitchFamily="34" charset="-120"/>
-              </a:rPr>
-              <a:t>≈ 900 000 consommateurs</a:t>
-            </a:r>
-            <a:endParaRPr lang="en-US" sz="1250" dirty="0"/>
+              <a:lnSpc>
+                <a:spcPct val="125000"/>
+              </a:lnSpc>
+              <a:buNone/>
+            </a:pPr>
+            <a:r>
+              <a:rPr lang="en-US" sz="1200" dirty="0">
+                <a:solidFill>
+                  <a:srgbClr val="31424A"/>
+                </a:solidFill>
+                <a:latin typeface="Calibri" pitchFamily="34" charset="0"/>
+                <a:ea typeface="Calibri" pitchFamily="34" charset="-122"/>
+                <a:cs typeface="Calibri" pitchFamily="34" charset="-120"/>
+              </a:rPr>
+              <a:t>Ces fourchettes sont indicatives et fondées sur les gains documentés de nos hydro-rétenteurs.</a:t>
+            </a:r>
+            <a:endParaRPr lang="en-US" sz="1200" dirty="0"/>
+          </a:p>
+          <a:p>
+            <a:pPr algn="l" indent="0" marL="0">
+              <a:lnSpc>
+                <a:spcPct val="125000"/>
+              </a:lnSpc>
+              <a:buNone/>
+            </a:pPr>
+            <a:endParaRPr lang="en-US" sz="1200" dirty="0"/>
+          </a:p>
+          <a:p>
+            <a:pPr algn="l" indent="0" marL="0">
+              <a:lnSpc>
+                <a:spcPct val="125000"/>
+              </a:lnSpc>
+              <a:buNone/>
+            </a:pPr>
+            <a:r>
+              <a:rPr lang="en-US" sz="1200" dirty="0">
+                <a:solidFill>
+                  <a:srgbClr val="31424A"/>
+                </a:solidFill>
+                <a:latin typeface="Calibri" pitchFamily="34" charset="0"/>
+                <a:ea typeface="Calibri" pitchFamily="34" charset="-122"/>
+                <a:cs typeface="Calibri" pitchFamily="34" charset="-120"/>
+              </a:rPr>
+              <a:t>Le résultat réel dépend du sol, du climat et de la culture. Ces chiffres donnent un ordre de grandeur : ils ne constituent en aucun cas une valeur garantie, contractuelle ou absolue.</a:t>
+            </a:r>
+            <a:endParaRPr lang="en-US" sz="1200" dirty="0"/>
           </a:p>
         </p:txBody>
       </p:sp>
       <p:sp>
         <p:nvSpPr>
           <p:cNvPr id="8" name="Text 5"/>
-          <p:cNvSpPr txBox="1"/>
-          <p:nvPr/>
-        </p:nvSpPr>
-        <p:spPr>
-          <a:xfrm>
-            <a:off x="795528" y="4407408"/>
-            <a:ext cx="3070250" cy="1280160"/>
-          </a:xfrm>
-          <a:prstGeom prst="rect">
-            <a:avLst/>
-          </a:prstGeom>
-          <a:noFill/>
-          <a:ln/>
-        </p:spPr>
-        <p:txBody>
-          <a:bodyPr wrap="square" lIns="0" tIns="0" rIns="0" bIns="0" rtlCol="0" anchor="t"/>
-          <a:lstStyle/>
-          <a:p>
-            <a:pPr algn="l" marL="342900" indent="-342900">
-              <a:lnSpc>
-                <a:spcPct val="116000"/>
-              </a:lnSpc>
-              <a:spcAft>
-                <a:spcPts val="700"/>
-              </a:spcAft>
-              <a:buSzPct val="100000"/>
-              <a:buChar char="•"/>
-            </a:pPr>
-            <a:r>
-              <a:rPr lang="en-US" sz="1150" dirty="0">
-                <a:solidFill>
-                  <a:srgbClr val="31424A"/>
-                </a:solidFill>
-                <a:latin typeface="Calibri" pitchFamily="34" charset="0"/>
-                <a:ea typeface="Calibri" pitchFamily="34" charset="-122"/>
-                <a:cs typeface="Calibri" pitchFamily="34" charset="-120"/>
-              </a:rPr>
-              <a:t>Ceinture maraîchère de Ntoum et Kango, qui approvisionne la capitale toute l'année.</a:t>
-            </a:r>
-            <a:endParaRPr lang="en-US" sz="1150" dirty="0"/>
-          </a:p>
-          <a:p>
-            <a:pPr algn="l" marL="342900" indent="-342900">
-              <a:lnSpc>
-                <a:spcPct val="116000"/>
-              </a:lnSpc>
-              <a:spcAft>
-                <a:spcPts val="700"/>
-              </a:spcAft>
-              <a:buSzPct val="100000"/>
-              <a:buChar char="•"/>
-            </a:pPr>
-            <a:r>
-              <a:rPr lang="en-US" sz="1150" dirty="0">
-                <a:solidFill>
-                  <a:srgbClr val="31424A"/>
-                </a:solidFill>
-                <a:latin typeface="Calibri" pitchFamily="34" charset="0"/>
-                <a:ea typeface="Calibri" pitchFamily="34" charset="-122"/>
-                <a:cs typeface="Calibri" pitchFamily="34" charset="-120"/>
-              </a:rPr>
-              <a:t>Sols sableux littoraux, arrosage manuel ou goutte-à-goutte : l'eau y coûte cher en main-d'œuvre.</a:t>
-            </a:r>
-            <a:endParaRPr lang="en-US" sz="1150" dirty="0"/>
-          </a:p>
-          <a:p>
-            <a:pPr algn="l" marL="342900" indent="-342900">
-              <a:lnSpc>
-                <a:spcPct val="116000"/>
-              </a:lnSpc>
-              <a:spcAft>
-                <a:spcPts val="700"/>
-              </a:spcAft>
-              <a:buSzPct val="100000"/>
-              <a:buChar char="•"/>
-            </a:pPr>
-            <a:r>
-              <a:rPr lang="en-US" sz="1150" dirty="0">
-                <a:solidFill>
-                  <a:srgbClr val="31424A"/>
-                </a:solidFill>
-                <a:latin typeface="Calibri" pitchFamily="34" charset="0"/>
-                <a:ea typeface="Calibri" pitchFamily="34" charset="-122"/>
-                <a:cs typeface="Calibri" pitchFamily="34" charset="-120"/>
-              </a:rPr>
-              <a:t>Cultures à cycle court et à forte valeur, où un essai se conclut en une saison.</a:t>
-            </a:r>
-            <a:endParaRPr lang="en-US" sz="1150" dirty="0"/>
-          </a:p>
-        </p:txBody>
-      </p:sp>
-      <p:sp>
-        <p:nvSpPr>
-          <p:cNvPr id="9" name="Shape 6"/>
-          <p:cNvSpPr/>
-          <p:nvPr/>
-        </p:nvSpPr>
-        <p:spPr>
-          <a:xfrm>
-            <a:off x="4359554" y="1783080"/>
-            <a:ext cx="3472586" cy="4069080"/>
-          </a:xfrm>
-          <a:prstGeom prst="roundRect">
-            <a:avLst>
-              <a:gd name="adj" fmla="val 2633"/>
-            </a:avLst>
-          </a:prstGeom>
-          <a:solidFill>
-            <a:srgbClr val="EDF3F5"/>
-          </a:solidFill>
-          <a:ln w="9525">
-            <a:solidFill>
-              <a:srgbClr val="D6E2E7"/>
-            </a:solidFill>
-            <a:prstDash val="solid"/>
-          </a:ln>
-        </p:spPr>
-      </p:sp>
-      <p:pic>
-        <p:nvPicPr>
-          <p:cNvPr id="10" name="Image 1" descr="preencoded.png">    </p:cNvPr>
-          <p:cNvPicPr>
-            <a:picLocks noChangeAspect="1"/>
-          </p:cNvPicPr>
-          <p:nvPr/>
-        </p:nvPicPr>
-        <p:blipFill>
-          <a:blip r:embed="rId2"/>
-          <a:stretch>
-            <a:fillRect/>
-          </a:stretch>
-        </p:blipFill>
-        <p:spPr>
-          <a:xfrm>
-            <a:off x="4359554" y="1783080"/>
-            <a:ext cx="3472586" cy="1691640"/>
-          </a:xfrm>
-          <a:prstGeom prst="rect">
-            <a:avLst/>
-          </a:prstGeom>
-        </p:spPr>
-      </p:pic>
-      <p:sp>
-        <p:nvSpPr>
-          <p:cNvPr id="11" name="Text 7"/>
-          <p:cNvSpPr txBox="1"/>
-          <p:nvPr/>
-        </p:nvSpPr>
-        <p:spPr>
-          <a:xfrm>
-            <a:off x="4560722" y="3639312"/>
-            <a:ext cx="3070250" cy="384048"/>
-          </a:xfrm>
-          <a:prstGeom prst="rect">
-            <a:avLst/>
-          </a:prstGeom>
-          <a:noFill/>
-          <a:ln/>
-        </p:spPr>
-        <p:txBody>
-          <a:bodyPr wrap="square" lIns="0" tIns="0" rIns="0" bIns="0" rtlCol="0" anchor="ctr"/>
-          <a:lstStyle/>
-          <a:p>
-            <a:pPr algn="l" indent="0" marL="0">
-              <a:buNone/>
-            </a:pPr>
-            <a:r>
-              <a:rPr lang="en-US" sz="1500" b="1" dirty="0">
-                <a:solidFill>
-                  <a:srgbClr val="1C5A73"/>
-                </a:solidFill>
-                <a:latin typeface="Cambria" pitchFamily="34" charset="0"/>
-                <a:ea typeface="Cambria" pitchFamily="34" charset="-122"/>
-                <a:cs typeface="Cambria" pitchFamily="34" charset="-120"/>
-              </a:rPr>
-              <a:t>Woleu-Ntem — Oyem</a:t>
-            </a:r>
-            <a:endParaRPr lang="en-US" sz="1500" dirty="0"/>
-          </a:p>
-        </p:txBody>
-      </p:sp>
-      <p:sp>
-        <p:nvSpPr>
-          <p:cNvPr id="12" name="Text 8"/>
-          <p:cNvSpPr txBox="1"/>
-          <p:nvPr/>
-        </p:nvSpPr>
-        <p:spPr>
-          <a:xfrm>
-            <a:off x="4560722" y="4041648"/>
-            <a:ext cx="3070250" cy="329184"/>
-          </a:xfrm>
-          <a:prstGeom prst="rect">
-            <a:avLst/>
-          </a:prstGeom>
-          <a:noFill/>
-          <a:ln/>
-        </p:spPr>
-        <p:txBody>
-          <a:bodyPr wrap="square" lIns="0" tIns="0" rIns="0" bIns="0" rtlCol="0" anchor="ctr"/>
-          <a:lstStyle/>
-          <a:p>
-            <a:pPr algn="l" indent="0" marL="0">
-              <a:buNone/>
-            </a:pPr>
-            <a:r>
-              <a:rPr lang="en-US" sz="1250" b="1" dirty="0">
-                <a:solidFill>
-                  <a:srgbClr val="A3701A"/>
-                </a:solidFill>
-                <a:latin typeface="Calibri" pitchFamily="34" charset="0"/>
-                <a:ea typeface="Calibri" pitchFamily="34" charset="-122"/>
-                <a:cs typeface="Calibri" pitchFamily="34" charset="-120"/>
-              </a:rPr>
-              <a:t>Premier bassin vivrier</a:t>
-            </a:r>
-            <a:endParaRPr lang="en-US" sz="1250" dirty="0"/>
-          </a:p>
-        </p:txBody>
-      </p:sp>
-      <p:sp>
-        <p:nvSpPr>
-          <p:cNvPr id="13" name="Text 9"/>
-          <p:cNvSpPr txBox="1"/>
-          <p:nvPr/>
-        </p:nvSpPr>
-        <p:spPr>
-          <a:xfrm>
-            <a:off x="4560722" y="4407408"/>
-            <a:ext cx="3070250" cy="1280160"/>
-          </a:xfrm>
-          <a:prstGeom prst="rect">
-            <a:avLst/>
-          </a:prstGeom>
-          <a:noFill/>
-          <a:ln/>
-        </p:spPr>
-        <p:txBody>
-          <a:bodyPr wrap="square" lIns="0" tIns="0" rIns="0" bIns="0" rtlCol="0" anchor="t"/>
-          <a:lstStyle/>
-          <a:p>
-            <a:pPr algn="l" marL="342900" indent="-342900">
-              <a:lnSpc>
-                <a:spcPct val="116000"/>
-              </a:lnSpc>
-              <a:spcAft>
-                <a:spcPts val="700"/>
-              </a:spcAft>
-              <a:buSzPct val="100000"/>
-              <a:buChar char="•"/>
-            </a:pPr>
-            <a:r>
-              <a:rPr lang="en-US" sz="1150" dirty="0">
-                <a:solidFill>
-                  <a:srgbClr val="31424A"/>
-                </a:solidFill>
-                <a:latin typeface="Calibri" pitchFamily="34" charset="0"/>
-                <a:ea typeface="Calibri" pitchFamily="34" charset="-122"/>
-                <a:cs typeface="Calibri" pitchFamily="34" charset="-120"/>
-              </a:rPr>
-              <a:t>Manioc, banane plantain et arachide sur de petites parcelles familiales, presque toutes pluviales.</a:t>
-            </a:r>
-            <a:endParaRPr lang="en-US" sz="1150" dirty="0"/>
-          </a:p>
-          <a:p>
-            <a:pPr algn="l" marL="342900" indent="-342900">
-              <a:lnSpc>
-                <a:spcPct val="116000"/>
-              </a:lnSpc>
-              <a:spcAft>
-                <a:spcPts val="700"/>
-              </a:spcAft>
-              <a:buSzPct val="100000"/>
-              <a:buChar char="•"/>
-            </a:pPr>
-            <a:r>
-              <a:rPr lang="en-US" sz="1150" dirty="0">
-                <a:solidFill>
-                  <a:srgbClr val="31424A"/>
-                </a:solidFill>
-                <a:latin typeface="Calibri" pitchFamily="34" charset="0"/>
-                <a:ea typeface="Calibri" pitchFamily="34" charset="-122"/>
-                <a:cs typeface="Calibri" pitchFamily="34" charset="-120"/>
-              </a:rPr>
-              <a:t>Cacaoyers et caféiers en replantation, cultures pérennes où l'effet de 3 à 4 ans est décisif à la reprise.</a:t>
-            </a:r>
-            <a:endParaRPr lang="en-US" sz="1150" dirty="0"/>
-          </a:p>
-          <a:p>
-            <a:pPr algn="l" marL="342900" indent="-342900">
-              <a:lnSpc>
-                <a:spcPct val="116000"/>
-              </a:lnSpc>
-              <a:spcAft>
-                <a:spcPts val="700"/>
-              </a:spcAft>
-              <a:buSzPct val="100000"/>
-              <a:buChar char="•"/>
-            </a:pPr>
-            <a:r>
-              <a:rPr lang="en-US" sz="1150" dirty="0">
-                <a:solidFill>
-                  <a:srgbClr val="31424A"/>
-                </a:solidFill>
-                <a:latin typeface="Calibri" pitchFamily="34" charset="0"/>
-                <a:ea typeface="Calibri" pitchFamily="34" charset="-122"/>
-                <a:cs typeface="Calibri" pitchFamily="34" charset="-120"/>
-              </a:rPr>
-              <a:t>Coopératives déjà structurées : la décision d'achat peut être groupée.</a:t>
-            </a:r>
-            <a:endParaRPr lang="en-US" sz="1150" dirty="0"/>
-          </a:p>
-        </p:txBody>
-      </p:sp>
-      <p:sp>
-        <p:nvSpPr>
-          <p:cNvPr id="14" name="Shape 10"/>
-          <p:cNvSpPr/>
-          <p:nvPr/>
-        </p:nvSpPr>
-        <p:spPr>
-          <a:xfrm>
-            <a:off x="8124749" y="1783080"/>
-            <a:ext cx="3472586" cy="4069080"/>
-          </a:xfrm>
-          <a:prstGeom prst="roundRect">
-            <a:avLst>
-              <a:gd name="adj" fmla="val 2633"/>
-            </a:avLst>
-          </a:prstGeom>
-          <a:solidFill>
-            <a:srgbClr val="EDF3F5"/>
-          </a:solidFill>
-          <a:ln w="9525">
-            <a:solidFill>
-              <a:srgbClr val="D6E2E7"/>
-            </a:solidFill>
-            <a:prstDash val="solid"/>
-          </a:ln>
-        </p:spPr>
-      </p:sp>
-      <p:pic>
-        <p:nvPicPr>
-          <p:cNvPr id="15" name="Image 2" descr="preencoded.png">    </p:cNvPr>
-          <p:cNvPicPr>
-            <a:picLocks noChangeAspect="1"/>
-          </p:cNvPicPr>
-          <p:nvPr/>
-        </p:nvPicPr>
-        <p:blipFill>
-          <a:blip r:embed="rId3"/>
-          <a:stretch>
-            <a:fillRect/>
-          </a:stretch>
-        </p:blipFill>
-        <p:spPr>
-          <a:xfrm>
-            <a:off x="8124749" y="1783080"/>
-            <a:ext cx="3472586" cy="1691640"/>
-          </a:xfrm>
-          <a:prstGeom prst="rect">
-            <a:avLst/>
-          </a:prstGeom>
-        </p:spPr>
-      </p:pic>
-      <p:sp>
-        <p:nvSpPr>
-          <p:cNvPr id="16" name="Text 11"/>
-          <p:cNvSpPr txBox="1"/>
-          <p:nvPr/>
-        </p:nvSpPr>
-        <p:spPr>
-          <a:xfrm>
-            <a:off x="8325917" y="3639312"/>
-            <a:ext cx="3070250" cy="384048"/>
-          </a:xfrm>
-          <a:prstGeom prst="rect">
-            <a:avLst/>
-          </a:prstGeom>
-          <a:noFill/>
-          <a:ln/>
-        </p:spPr>
-        <p:txBody>
-          <a:bodyPr wrap="square" lIns="0" tIns="0" rIns="0" bIns="0" rtlCol="0" anchor="ctr"/>
-          <a:lstStyle/>
-          <a:p>
-            <a:pPr algn="l" indent="0" marL="0">
-              <a:buNone/>
-            </a:pPr>
-            <a:r>
-              <a:rPr lang="en-US" sz="1500" b="1" dirty="0">
-                <a:solidFill>
-                  <a:srgbClr val="1C5A73"/>
-                </a:solidFill>
-                <a:latin typeface="Cambria" pitchFamily="34" charset="0"/>
-                <a:ea typeface="Cambria" pitchFamily="34" charset="-122"/>
-                <a:cs typeface="Cambria" pitchFamily="34" charset="-120"/>
-              </a:rPr>
-              <a:t>Ngounié — Mouila</a:t>
-            </a:r>
-            <a:endParaRPr lang="en-US" sz="1500" dirty="0"/>
-          </a:p>
-        </p:txBody>
-      </p:sp>
-      <p:sp>
-        <p:nvSpPr>
-          <p:cNvPr id="17" name="Text 12"/>
-          <p:cNvSpPr txBox="1"/>
-          <p:nvPr/>
-        </p:nvSpPr>
-        <p:spPr>
-          <a:xfrm>
-            <a:off x="8325917" y="4041648"/>
-            <a:ext cx="3070250" cy="329184"/>
-          </a:xfrm>
-          <a:prstGeom prst="rect">
-            <a:avLst/>
-          </a:prstGeom>
-          <a:noFill/>
-          <a:ln/>
-        </p:spPr>
-        <p:txBody>
-          <a:bodyPr wrap="square" lIns="0" tIns="0" rIns="0" bIns="0" rtlCol="0" anchor="ctr"/>
-          <a:lstStyle/>
-          <a:p>
-            <a:pPr algn="l" indent="0" marL="0">
-              <a:buNone/>
-            </a:pPr>
-            <a:r>
-              <a:rPr lang="en-US" sz="1250" b="1" dirty="0">
-                <a:solidFill>
-                  <a:srgbClr val="A3701A"/>
-                </a:solidFill>
-                <a:latin typeface="Calibri" pitchFamily="34" charset="0"/>
-                <a:ea typeface="Calibri" pitchFamily="34" charset="-122"/>
-                <a:cs typeface="Calibri" pitchFamily="34" charset="-120"/>
-              </a:rPr>
-              <a:t>≈ 40 000 ha de palmier</a:t>
-            </a:r>
-            <a:endParaRPr lang="en-US" sz="1250" dirty="0"/>
-          </a:p>
-        </p:txBody>
-      </p:sp>
-      <p:sp>
-        <p:nvSpPr>
-          <p:cNvPr id="18" name="Text 13"/>
-          <p:cNvSpPr txBox="1"/>
-          <p:nvPr/>
-        </p:nvSpPr>
-        <p:spPr>
-          <a:xfrm>
-            <a:off x="8325917" y="4407408"/>
-            <a:ext cx="3070250" cy="1280160"/>
-          </a:xfrm>
-          <a:prstGeom prst="rect">
-            <a:avLst/>
-          </a:prstGeom>
-          <a:noFill/>
-          <a:ln/>
-        </p:spPr>
-        <p:txBody>
-          <a:bodyPr wrap="square" lIns="0" tIns="0" rIns="0" bIns="0" rtlCol="0" anchor="t"/>
-          <a:lstStyle/>
-          <a:p>
-            <a:pPr algn="l" marL="342900" indent="-342900">
-              <a:lnSpc>
-                <a:spcPct val="116000"/>
-              </a:lnSpc>
-              <a:spcAft>
-                <a:spcPts val="700"/>
-              </a:spcAft>
-              <a:buSzPct val="100000"/>
-              <a:buChar char="•"/>
-            </a:pPr>
-            <a:r>
-              <a:rPr lang="en-US" sz="1150" dirty="0">
-                <a:solidFill>
-                  <a:srgbClr val="31424A"/>
-                </a:solidFill>
-                <a:latin typeface="Calibri" pitchFamily="34" charset="0"/>
-                <a:ea typeface="Calibri" pitchFamily="34" charset="-122"/>
-                <a:cs typeface="Calibri" pitchFamily="34" charset="-120"/>
-              </a:rPr>
-              <a:t>Plantations industrielles de palmier à huile, suivies agronomiquement bloc par bloc.</a:t>
-            </a:r>
-            <a:endParaRPr lang="en-US" sz="1150" dirty="0"/>
-          </a:p>
-          <a:p>
-            <a:pPr algn="l" marL="342900" indent="-342900">
-              <a:lnSpc>
-                <a:spcPct val="116000"/>
-              </a:lnSpc>
-              <a:spcAft>
-                <a:spcPts val="700"/>
-              </a:spcAft>
-              <a:buSzPct val="100000"/>
-              <a:buChar char="•"/>
-            </a:pPr>
-            <a:r>
-              <a:rPr lang="en-US" sz="1150" dirty="0">
-                <a:solidFill>
-                  <a:srgbClr val="31424A"/>
-                </a:solidFill>
-                <a:latin typeface="Calibri" pitchFamily="34" charset="0"/>
-                <a:ea typeface="Calibri" pitchFamily="34" charset="-122"/>
-                <a:cs typeface="Calibri" pitchFamily="34" charset="-120"/>
-              </a:rPr>
-              <a:t>Forte mortalité des jeunes plants en saison sèche : l'hydro-rétenteur se juge au taux de reprise.</a:t>
-            </a:r>
-            <a:endParaRPr lang="en-US" sz="1150" dirty="0"/>
-          </a:p>
-          <a:p>
-            <a:pPr algn="l" marL="342900" indent="-342900">
-              <a:lnSpc>
-                <a:spcPct val="116000"/>
-              </a:lnSpc>
-              <a:spcAft>
-                <a:spcPts val="700"/>
-              </a:spcAft>
-              <a:buSzPct val="100000"/>
-              <a:buChar char="•"/>
-            </a:pPr>
-            <a:r>
-              <a:rPr lang="en-US" sz="1150" dirty="0">
-                <a:solidFill>
-                  <a:srgbClr val="31424A"/>
-                </a:solidFill>
-                <a:latin typeface="Calibri" pitchFamily="34" charset="0"/>
-                <a:ea typeface="Calibri" pitchFamily="34" charset="-122"/>
-                <a:cs typeface="Calibri" pitchFamily="34" charset="-120"/>
-              </a:rPr>
-              <a:t>Volumes contractualisables et protocole d'essai facile à tenir sur un bloc homogène.</a:t>
-            </a:r>
-            <a:endParaRPr lang="en-US" sz="1150" dirty="0"/>
-          </a:p>
-        </p:txBody>
-      </p:sp>
-      <p:sp>
-        <p:nvSpPr>
-          <p:cNvPr id="19" name="Text 14"/>
           <p:cNvSpPr txBox="1"/>
           <p:nvPr/>
         </p:nvSpPr>
@@ -6370,7 +6202,7 @@
       </p:sp>
       <p:sp>
         <p:nvSpPr>
-          <p:cNvPr id="20" name="Text 15"/>
+          <p:cNvPr id="9" name="Text 6"/>
           <p:cNvSpPr txBox="1"/>
           <p:nvPr/>
         </p:nvSpPr>
@@ -6474,7 +6306,7 @@
                 <a:ea typeface="Calibri" pitchFamily="34" charset="-122"/>
                 <a:cs typeface="Calibri" pitchFamily="34" charset="-120"/>
               </a:rPr>
-              <a:t>COMMENT NOUS PROCÉDONS</a:t>
+              <a:t>TROIS TERRAINS PRIORITAIRES</a:t>
             </a:r>
             <a:endParaRPr lang="en-US" sz="1150" dirty="0"/>
           </a:p>
@@ -6513,7 +6345,7 @@
                 <a:ea typeface="Cambria" pitchFamily="34" charset="-122"/>
                 <a:cs typeface="Cambria" pitchFamily="34" charset="-120"/>
               </a:rPr>
-              <a:t>Un déploiement par étapes, mesuré à chaque palier</a:t>
+              <a:t>Où engager les premiers essais</a:t>
             </a:r>
             <a:endParaRPr lang="en-US" sz="3000" dirty="0"/>
           </a:p>
@@ -6527,12 +6359,12 @@
         </p:nvSpPr>
         <p:spPr>
           <a:xfrm>
-            <a:off x="594360" y="1874520"/>
-            <a:ext cx="2545004" cy="2834640"/>
+            <a:off x="594360" y="1783080"/>
+            <a:ext cx="3472586" cy="4069080"/>
           </a:xfrm>
           <a:prstGeom prst="roundRect">
             <a:avLst>
-              <a:gd name="adj" fmla="val 3593"/>
+              <a:gd name="adj" fmla="val 2633"/>
             </a:avLst>
           </a:prstGeom>
           <a:solidFill>
@@ -6546,36 +6378,40 @@
           </a:ln>
         </p:spPr>
       </p:sp>
-      <p:sp>
-        <p:nvSpPr>
-          <p:cNvPr id="5" name="Shape 3"/>
-          <p:cNvSpPr/>
-          <p:nvPr/>
-        </p:nvSpPr>
-        <p:spPr>
-          <a:xfrm>
-            <a:off x="822960" y="2103120"/>
-            <a:ext cx="566928" cy="566928"/>
-          </a:xfrm>
-          <a:prstGeom prst="ellipse">
-            <a:avLst/>
-          </a:prstGeom>
-          <a:solidFill>
-            <a:srgbClr val="1C5A73"/>
-          </a:solidFill>
-          <a:ln/>
-        </p:spPr>
-      </p:sp>
-      <p:sp>
-        <p:nvSpPr>
-          <p:cNvPr id="6" name="Text 4"/>
-          <p:cNvSpPr txBox="1"/>
-          <p:nvPr/>
-        </p:nvSpPr>
-        <p:spPr>
-          <a:xfrm>
-            <a:off x="822960" y="2103120"/>
-            <a:ext cx="566928" cy="566928"/>
+      <p:pic>
+        <p:nvPicPr>
+          <p:cNvPr id="5" name="Image 0" descr="preencoded.png">    </p:cNvPr>
+          <p:cNvPicPr>
+            <a:picLocks noChangeAspect="1"/>
+          </p:cNvPicPr>
+          <p:nvPr/>
+        </p:nvPicPr>
+        <p:blipFill>
+          <a:blip r:embed="rId1"/>
+          <a:stretch>
+            <a:fillRect/>
+          </a:stretch>
+        </p:blipFill>
+        <p:spPr>
+          <a:xfrm>
+            <a:off x="594360" y="1783080"/>
+            <a:ext cx="3472586" cy="1691640"/>
+          </a:xfrm>
+          <a:prstGeom prst="rect">
+            <a:avLst/>
+          </a:prstGeom>
+        </p:spPr>
+      </p:pic>
+      <p:sp>
+        <p:nvSpPr>
+          <p:cNvPr id="6" name="Text 3"/>
+          <p:cNvSpPr txBox="1"/>
+          <p:nvPr/>
+        </p:nvSpPr>
+        <p:spPr>
+          <a:xfrm>
+            <a:off x="795528" y="3639312"/>
+            <a:ext cx="3070250" cy="384048"/>
           </a:xfrm>
           <a:prstGeom prst="rect">
             <a:avLst/>
@@ -6587,34 +6423,34 @@
           <a:bodyPr wrap="square" lIns="0" tIns="0" rIns="0" bIns="0" rtlCol="0" anchor="ctr"/>
           <a:lstStyle/>
           <a:p>
-            <a:pPr algn="ctr" indent="0" marL="0">
-              <a:buNone/>
-            </a:pPr>
-            <a:r>
-              <a:rPr lang="en-US" sz="1600" b="1" dirty="0">
-                <a:solidFill>
-                  <a:srgbClr val="FFFFFF"/>
+            <a:pPr algn="l" indent="0" marL="0">
+              <a:buNone/>
+            </a:pPr>
+            <a:r>
+              <a:rPr lang="en-US" sz="1500" b="1" dirty="0">
+                <a:solidFill>
+                  <a:srgbClr val="1C5A73"/>
                 </a:solidFill>
                 <a:latin typeface="Cambria" pitchFamily="34" charset="0"/>
                 <a:ea typeface="Cambria" pitchFamily="34" charset="-122"/>
                 <a:cs typeface="Cambria" pitchFamily="34" charset="-120"/>
               </a:rPr>
-              <a:t>1</a:t>
-            </a:r>
-            <a:endParaRPr lang="en-US" sz="1600" dirty="0"/>
-          </a:p>
-        </p:txBody>
-      </p:sp>
-      <p:sp>
-        <p:nvSpPr>
-          <p:cNvPr id="7" name="Text 5"/>
-          <p:cNvSpPr txBox="1"/>
-          <p:nvPr/>
-        </p:nvSpPr>
-        <p:spPr>
-          <a:xfrm>
-            <a:off x="822960" y="2788920"/>
-            <a:ext cx="2087804" cy="457200"/>
+              <a:t>Estuaire — Libreville</a:t>
+            </a:r>
+            <a:endParaRPr lang="en-US" sz="1500" dirty="0"/>
+          </a:p>
+        </p:txBody>
+      </p:sp>
+      <p:sp>
+        <p:nvSpPr>
+          <p:cNvPr id="7" name="Text 4"/>
+          <p:cNvSpPr txBox="1"/>
+          <p:nvPr/>
+        </p:nvSpPr>
+        <p:spPr>
+          <a:xfrm>
+            <a:off x="795528" y="4041648"/>
+            <a:ext cx="3070250" cy="329184"/>
           </a:xfrm>
           <a:prstGeom prst="rect">
             <a:avLst/>
@@ -6630,30 +6466,30 @@
               <a:buNone/>
             </a:pPr>
             <a:r>
-              <a:rPr lang="en-US" sz="1400" b="1" dirty="0">
-                <a:solidFill>
-                  <a:srgbClr val="1C5A73"/>
-                </a:solidFill>
-                <a:latin typeface="Cambria" pitchFamily="34" charset="0"/>
-                <a:ea typeface="Cambria" pitchFamily="34" charset="-122"/>
-                <a:cs typeface="Cambria" pitchFamily="34" charset="-120"/>
-              </a:rPr>
-              <a:t>Diagnostic</a:t>
-            </a:r>
-            <a:endParaRPr lang="en-US" sz="1400" dirty="0"/>
-          </a:p>
-        </p:txBody>
-      </p:sp>
-      <p:sp>
-        <p:nvSpPr>
-          <p:cNvPr id="8" name="Text 6"/>
-          <p:cNvSpPr txBox="1"/>
-          <p:nvPr/>
-        </p:nvSpPr>
-        <p:spPr>
-          <a:xfrm>
-            <a:off x="822960" y="3291840"/>
-            <a:ext cx="2087804" cy="1234440"/>
+              <a:rPr lang="en-US" sz="1250" b="1" dirty="0">
+                <a:solidFill>
+                  <a:srgbClr val="A3701A"/>
+                </a:solidFill>
+                <a:latin typeface="Calibri" pitchFamily="34" charset="0"/>
+                <a:ea typeface="Calibri" pitchFamily="34" charset="-122"/>
+                <a:cs typeface="Calibri" pitchFamily="34" charset="-120"/>
+              </a:rPr>
+              <a:t>≈ 900 000 consommateurs</a:t>
+            </a:r>
+            <a:endParaRPr lang="en-US" sz="1250" dirty="0"/>
+          </a:p>
+        </p:txBody>
+      </p:sp>
+      <p:sp>
+        <p:nvSpPr>
+          <p:cNvPr id="8" name="Text 5"/>
+          <p:cNvSpPr txBox="1"/>
+          <p:nvPr/>
+        </p:nvSpPr>
+        <p:spPr>
+          <a:xfrm>
+            <a:off x="795528" y="4407408"/>
+            <a:ext cx="3070250" cy="1280160"/>
           </a:xfrm>
           <a:prstGeom prst="rect">
             <a:avLst/>
@@ -6665,14 +6501,18 @@
           <a:bodyPr wrap="square" lIns="0" tIns="0" rIns="0" bIns="0" rtlCol="0" anchor="t"/>
           <a:lstStyle/>
           <a:p>
-            <a:pPr algn="l" indent="0" marL="0">
+            <a:pPr algn="l" marL="342900" indent="-342900">
               <a:lnSpc>
-                <a:spcPct val="120000"/>
+                <a:spcPct val="116000"/>
               </a:lnSpc>
-              <a:buNone/>
-            </a:pPr>
-            <a:r>
-              <a:rPr lang="en-US" sz="1200" dirty="0">
+              <a:spcAft>
+                <a:spcPts val="700"/>
+              </a:spcAft>
+              <a:buSzPct val="100000"/>
+              <a:buChar char="•"/>
+            </a:pPr>
+            <a:r>
+              <a:rPr lang="en-US" sz="1150" dirty="0">
                 <a:solidFill>
                   <a:srgbClr val="31424A"/>
                 </a:solidFill>
@@ -6680,26 +6520,74 @@
                 <a:ea typeface="Calibri" pitchFamily="34" charset="-122"/>
                 <a:cs typeface="Calibri" pitchFamily="34" charset="-120"/>
               </a:rPr>
-              <a:t>Analyse du sol, du mode d'arrosage et de la culture. Aucun engagement à ce stade.</a:t>
-            </a:r>
-            <a:endParaRPr lang="en-US" sz="1200" dirty="0"/>
-          </a:p>
-        </p:txBody>
-      </p:sp>
-      <p:sp>
-        <p:nvSpPr>
-          <p:cNvPr id="9" name="Shape 7"/>
+              <a:t>Ceinture maraîchère de Ntoum et Kango, qui approvisionne la capitale toute l'année.</a:t>
+            </a:r>
+            <a:endParaRPr lang="en-US" sz="1150" dirty="0"/>
+          </a:p>
+          <a:p>
+            <a:pPr algn="l" marL="342900" indent="-342900">
+              <a:lnSpc>
+                <a:spcPct val="116000"/>
+              </a:lnSpc>
+              <a:spcAft>
+                <a:spcPts val="700"/>
+              </a:spcAft>
+              <a:buSzPct val="100000"/>
+              <a:buChar char="•"/>
+            </a:pPr>
+            <a:r>
+              <a:rPr lang="en-US" sz="1150" dirty="0">
+                <a:solidFill>
+                  <a:srgbClr val="31424A"/>
+                </a:solidFill>
+                <a:latin typeface="Calibri" pitchFamily="34" charset="0"/>
+                <a:ea typeface="Calibri" pitchFamily="34" charset="-122"/>
+                <a:cs typeface="Calibri" pitchFamily="34" charset="-120"/>
+              </a:rPr>
+              <a:t>Sols sableux littoraux, arrosage manuel ou goutte-à-goutte : l'eau y coûte cher en main-d'œuvre.</a:t>
+            </a:r>
+            <a:endParaRPr lang="en-US" sz="1150" dirty="0"/>
+          </a:p>
+          <a:p>
+            <a:pPr algn="l" marL="342900" indent="-342900">
+              <a:lnSpc>
+                <a:spcPct val="116000"/>
+              </a:lnSpc>
+              <a:spcAft>
+                <a:spcPts val="700"/>
+              </a:spcAft>
+              <a:buSzPct val="100000"/>
+              <a:buChar char="•"/>
+            </a:pPr>
+            <a:r>
+              <a:rPr lang="en-US" sz="1150" dirty="0">
+                <a:solidFill>
+                  <a:srgbClr val="31424A"/>
+                </a:solidFill>
+                <a:latin typeface="Calibri" pitchFamily="34" charset="0"/>
+                <a:ea typeface="Calibri" pitchFamily="34" charset="-122"/>
+                <a:cs typeface="Calibri" pitchFamily="34" charset="-120"/>
+              </a:rPr>
+              <a:t>Cultures à cycle court et à forte valeur, où un essai se conclut en une saison.</a:t>
+            </a:r>
+            <a:endParaRPr lang="en-US" sz="1150" dirty="0"/>
+          </a:p>
+        </p:txBody>
+      </p:sp>
+      <p:sp>
+        <p:nvSpPr>
+          <p:cNvPr id="9" name="Shape 6"/>
           <p:cNvSpPr/>
           <p:nvPr/>
         </p:nvSpPr>
         <p:spPr>
           <a:xfrm>
-            <a:off x="3413684" y="1874520"/>
-            <a:ext cx="2545004" cy="2834640"/>
+            <a:off x="4359554" y="1783080"/>
+            <a:ext cx="3472586" cy="4069080"/>
           </a:xfrm>
           <a:prstGeom prst="roundRect">
             <a:avLst>
-              <a:gd name="adj" fmla="val 3593"/>
+              <a:gd name="adj" fmla="val 2633"/>
             </a:avLst>
           </a:prstGeom>
           <a:solidFill>
@@ -6713,36 +6601,40 @@
           </a:ln>
         </p:spPr>
       </p:sp>
-      <p:sp>
-        <p:nvSpPr>
-          <p:cNvPr id="10" name="Shape 8"/>
-          <p:cNvSpPr/>
-          <p:nvPr/>
-        </p:nvSpPr>
-        <p:spPr>
-          <a:xfrm>
-            <a:off x="3642284" y="2103120"/>
-            <a:ext cx="566928" cy="566928"/>
-          </a:xfrm>
-          <a:prstGeom prst="ellipse">
-            <a:avLst/>
-          </a:prstGeom>
-          <a:solidFill>
-            <a:srgbClr val="1C5A73"/>
-          </a:solidFill>
-          <a:ln/>
-        </p:spPr>
-      </p:sp>
-      <p:sp>
-        <p:nvSpPr>
-          <p:cNvPr id="11" name="Text 9"/>
-          <p:cNvSpPr txBox="1"/>
-          <p:nvPr/>
-        </p:nvSpPr>
-        <p:spPr>
-          <a:xfrm>
-            <a:off x="3642284" y="2103120"/>
-            <a:ext cx="566928" cy="566928"/>
+      <p:pic>
+        <p:nvPicPr>
+          <p:cNvPr id="10" name="Image 1" descr="preencoded.png">    </p:cNvPr>
+          <p:cNvPicPr>
+            <a:picLocks noChangeAspect="1"/>
+          </p:cNvPicPr>
+          <p:nvPr/>
+        </p:nvPicPr>
+        <p:blipFill>
+          <a:blip r:embed="rId2"/>
+          <a:stretch>
+            <a:fillRect/>
+          </a:stretch>
+        </p:blipFill>
+        <p:spPr>
+          <a:xfrm>
+            <a:off x="4359554" y="1783080"/>
+            <a:ext cx="3472586" cy="1691640"/>
+          </a:xfrm>
+          <a:prstGeom prst="rect">
+            <a:avLst/>
+          </a:prstGeom>
+        </p:spPr>
+      </p:pic>
+      <p:sp>
+        <p:nvSpPr>
+          <p:cNvPr id="11" name="Text 7"/>
+          <p:cNvSpPr txBox="1"/>
+          <p:nvPr/>
+        </p:nvSpPr>
+        <p:spPr>
+          <a:xfrm>
+            <a:off x="4560722" y="3639312"/>
+            <a:ext cx="3070250" cy="384048"/>
           </a:xfrm>
           <a:prstGeom prst="rect">
             <a:avLst/>
@@ -6754,34 +6646,34 @@
           <a:bodyPr wrap="square" lIns="0" tIns="0" rIns="0" bIns="0" rtlCol="0" anchor="ctr"/>
           <a:lstStyle/>
           <a:p>
-            <a:pPr algn="ctr" indent="0" marL="0">
-              <a:buNone/>
-            </a:pPr>
-            <a:r>
-              <a:rPr lang="en-US" sz="1600" b="1" dirty="0">
-                <a:solidFill>
-                  <a:srgbClr val="FFFFFF"/>
+            <a:pPr algn="l" indent="0" marL="0">
+              <a:buNone/>
+            </a:pPr>
+            <a:r>
+              <a:rPr lang="en-US" sz="1500" b="1" dirty="0">
+                <a:solidFill>
+                  <a:srgbClr val="1C5A73"/>
                 </a:solidFill>
                 <a:latin typeface="Cambria" pitchFamily="34" charset="0"/>
                 <a:ea typeface="Cambria" pitchFamily="34" charset="-122"/>
                 <a:cs typeface="Cambria" pitchFamily="34" charset="-120"/>
               </a:rPr>
-              <a:t>2</a:t>
-            </a:r>
-            <a:endParaRPr lang="en-US" sz="1600" dirty="0"/>
-          </a:p>
-        </p:txBody>
-      </p:sp>
-      <p:sp>
-        <p:nvSpPr>
-          <p:cNvPr id="12" name="Text 10"/>
-          <p:cNvSpPr txBox="1"/>
-          <p:nvPr/>
-        </p:nvSpPr>
-        <p:spPr>
-          <a:xfrm>
-            <a:off x="3642284" y="2788920"/>
-            <a:ext cx="2087804" cy="457200"/>
+              <a:t>Woleu-Ntem — Oyem</a:t>
+            </a:r>
+            <a:endParaRPr lang="en-US" sz="1500" dirty="0"/>
+          </a:p>
+        </p:txBody>
+      </p:sp>
+      <p:sp>
+        <p:nvSpPr>
+          <p:cNvPr id="12" name="Text 8"/>
+          <p:cNvSpPr txBox="1"/>
+          <p:nvPr/>
+        </p:nvSpPr>
+        <p:spPr>
+          <a:xfrm>
+            <a:off x="4560722" y="4041648"/>
+            <a:ext cx="3070250" cy="329184"/>
           </a:xfrm>
           <a:prstGeom prst="rect">
             <a:avLst/>
@@ -6797,30 +6689,30 @@
               <a:buNone/>
             </a:pPr>
             <a:r>
-              <a:rPr lang="en-US" sz="1400" b="1" dirty="0">
-                <a:solidFill>
-                  <a:srgbClr val="1C5A73"/>
-                </a:solidFill>
-                <a:latin typeface="Cambria" pitchFamily="34" charset="0"/>
-                <a:ea typeface="Cambria" pitchFamily="34" charset="-122"/>
-                <a:cs typeface="Cambria" pitchFamily="34" charset="-120"/>
-              </a:rPr>
-              <a:t>Parcelle témoin</a:t>
-            </a:r>
-            <a:endParaRPr lang="en-US" sz="1400" dirty="0"/>
-          </a:p>
-        </p:txBody>
-      </p:sp>
-      <p:sp>
-        <p:nvSpPr>
-          <p:cNvPr id="13" name="Text 11"/>
-          <p:cNvSpPr txBox="1"/>
-          <p:nvPr/>
-        </p:nvSpPr>
-        <p:spPr>
-          <a:xfrm>
-            <a:off x="3642284" y="3291840"/>
-            <a:ext cx="2087804" cy="1234440"/>
+              <a:rPr lang="en-US" sz="1250" b="1" dirty="0">
+                <a:solidFill>
+                  <a:srgbClr val="A3701A"/>
+                </a:solidFill>
+                <a:latin typeface="Calibri" pitchFamily="34" charset="0"/>
+                <a:ea typeface="Calibri" pitchFamily="34" charset="-122"/>
+                <a:cs typeface="Calibri" pitchFamily="34" charset="-120"/>
+              </a:rPr>
+              <a:t>Premier bassin vivrier</a:t>
+            </a:r>
+            <a:endParaRPr lang="en-US" sz="1250" dirty="0"/>
+          </a:p>
+        </p:txBody>
+      </p:sp>
+      <p:sp>
+        <p:nvSpPr>
+          <p:cNvPr id="13" name="Text 9"/>
+          <p:cNvSpPr txBox="1"/>
+          <p:nvPr/>
+        </p:nvSpPr>
+        <p:spPr>
+          <a:xfrm>
+            <a:off x="4560722" y="4407408"/>
+            <a:ext cx="3070250" cy="1280160"/>
           </a:xfrm>
           <a:prstGeom prst="rect">
             <a:avLst/>
@@ -6832,14 +6724,18 @@
           <a:bodyPr wrap="square" lIns="0" tIns="0" rIns="0" bIns="0" rtlCol="0" anchor="t"/>
           <a:lstStyle/>
           <a:p>
-            <a:pPr algn="l" indent="0" marL="0">
+            <a:pPr algn="l" marL="342900" indent="-342900">
               <a:lnSpc>
-                <a:spcPct val="120000"/>
+                <a:spcPct val="116000"/>
               </a:lnSpc>
-              <a:buNone/>
-            </a:pPr>
-            <a:r>
-              <a:rPr lang="en-US" sz="1200" dirty="0">
+              <a:spcAft>
+                <a:spcPts val="700"/>
+              </a:spcAft>
+              <a:buSzPct val="100000"/>
+              <a:buChar char="•"/>
+            </a:pPr>
+            <a:r>
+              <a:rPr lang="en-US" sz="1150" dirty="0">
                 <a:solidFill>
                   <a:srgbClr val="31424A"/>
                 </a:solidFill>
@@ -6847,26 +6743,74 @@
                 <a:ea typeface="Calibri" pitchFamily="34" charset="-122"/>
                 <a:cs typeface="Calibri" pitchFamily="34" charset="-120"/>
               </a:rPr>
-              <a:t>Un essai comparatif sur un bloc, avec parcelle témoin conduite à l'identique.</a:t>
-            </a:r>
-            <a:endParaRPr lang="en-US" sz="1200" dirty="0"/>
-          </a:p>
-        </p:txBody>
-      </p:sp>
-      <p:sp>
-        <p:nvSpPr>
-          <p:cNvPr id="14" name="Shape 12"/>
+              <a:t>Manioc, banane plantain et arachide sur de petites parcelles familiales, presque toutes pluviales.</a:t>
+            </a:r>
+            <a:endParaRPr lang="en-US" sz="1150" dirty="0"/>
+          </a:p>
+          <a:p>
+            <a:pPr algn="l" marL="342900" indent="-342900">
+              <a:lnSpc>
+                <a:spcPct val="116000"/>
+              </a:lnSpc>
+              <a:spcAft>
+                <a:spcPts val="700"/>
+              </a:spcAft>
+              <a:buSzPct val="100000"/>
+              <a:buChar char="•"/>
+            </a:pPr>
+            <a:r>
+              <a:rPr lang="en-US" sz="1150" dirty="0">
+                <a:solidFill>
+                  <a:srgbClr val="31424A"/>
+                </a:solidFill>
+                <a:latin typeface="Calibri" pitchFamily="34" charset="0"/>
+                <a:ea typeface="Calibri" pitchFamily="34" charset="-122"/>
+                <a:cs typeface="Calibri" pitchFamily="34" charset="-120"/>
+              </a:rPr>
+              <a:t>Cacaoyers et caféiers en replantation, cultures pérennes où l'effet de 3 à 4 ans est décisif à la reprise.</a:t>
+            </a:r>
+            <a:endParaRPr lang="en-US" sz="1150" dirty="0"/>
+          </a:p>
+          <a:p>
+            <a:pPr algn="l" marL="342900" indent="-342900">
+              <a:lnSpc>
+                <a:spcPct val="116000"/>
+              </a:lnSpc>
+              <a:spcAft>
+                <a:spcPts val="700"/>
+              </a:spcAft>
+              <a:buSzPct val="100000"/>
+              <a:buChar char="•"/>
+            </a:pPr>
+            <a:r>
+              <a:rPr lang="en-US" sz="1150" dirty="0">
+                <a:solidFill>
+                  <a:srgbClr val="31424A"/>
+                </a:solidFill>
+                <a:latin typeface="Calibri" pitchFamily="34" charset="0"/>
+                <a:ea typeface="Calibri" pitchFamily="34" charset="-122"/>
+                <a:cs typeface="Calibri" pitchFamily="34" charset="-120"/>
+              </a:rPr>
+              <a:t>Coopératives déjà structurées : la décision d'achat peut être groupée.</a:t>
+            </a:r>
+            <a:endParaRPr lang="en-US" sz="1150" dirty="0"/>
+          </a:p>
+        </p:txBody>
+      </p:sp>
+      <p:sp>
+        <p:nvSpPr>
+          <p:cNvPr id="14" name="Shape 10"/>
           <p:cNvSpPr/>
           <p:nvPr/>
         </p:nvSpPr>
         <p:spPr>
           <a:xfrm>
-            <a:off x="6233008" y="1874520"/>
-            <a:ext cx="2545004" cy="2834640"/>
+            <a:off x="8124749" y="1783080"/>
+            <a:ext cx="3472586" cy="4069080"/>
           </a:xfrm>
           <a:prstGeom prst="roundRect">
             <a:avLst>
-              <a:gd name="adj" fmla="val 3593"/>
+              <a:gd name="adj" fmla="val 2633"/>
             </a:avLst>
           </a:prstGeom>
           <a:solidFill>
@@ -6880,36 +6824,40 @@
           </a:ln>
         </p:spPr>
       </p:sp>
-      <p:sp>
-        <p:nvSpPr>
-          <p:cNvPr id="15" name="Shape 13"/>
-          <p:cNvSpPr/>
-          <p:nvPr/>
-        </p:nvSpPr>
-        <p:spPr>
-          <a:xfrm>
-            <a:off x="6461608" y="2103120"/>
-            <a:ext cx="566928" cy="566928"/>
-          </a:xfrm>
-          <a:prstGeom prst="ellipse">
-            <a:avLst/>
-          </a:prstGeom>
-          <a:solidFill>
-            <a:srgbClr val="1C5A73"/>
-          </a:solidFill>
-          <a:ln/>
-        </p:spPr>
-      </p:sp>
-      <p:sp>
-        <p:nvSpPr>
-          <p:cNvPr id="16" name="Text 14"/>
-          <p:cNvSpPr txBox="1"/>
-          <p:nvPr/>
-        </p:nvSpPr>
-        <p:spPr>
-          <a:xfrm>
-            <a:off x="6461608" y="2103120"/>
-            <a:ext cx="566928" cy="566928"/>
+      <p:pic>
+        <p:nvPicPr>
+          <p:cNvPr id="15" name="Image 2" descr="preencoded.png">    </p:cNvPr>
+          <p:cNvPicPr>
+            <a:picLocks noChangeAspect="1"/>
+          </p:cNvPicPr>
+          <p:nvPr/>
+        </p:nvPicPr>
+        <p:blipFill>
+          <a:blip r:embed="rId3"/>
+          <a:stretch>
+            <a:fillRect/>
+          </a:stretch>
+        </p:blipFill>
+        <p:spPr>
+          <a:xfrm>
+            <a:off x="8124749" y="1783080"/>
+            <a:ext cx="3472586" cy="1691640"/>
+          </a:xfrm>
+          <a:prstGeom prst="rect">
+            <a:avLst/>
+          </a:prstGeom>
+        </p:spPr>
+      </p:pic>
+      <p:sp>
+        <p:nvSpPr>
+          <p:cNvPr id="16" name="Text 11"/>
+          <p:cNvSpPr txBox="1"/>
+          <p:nvPr/>
+        </p:nvSpPr>
+        <p:spPr>
+          <a:xfrm>
+            <a:off x="8325917" y="3639312"/>
+            <a:ext cx="3070250" cy="384048"/>
           </a:xfrm>
           <a:prstGeom prst="rect">
             <a:avLst/>
@@ -6921,34 +6869,34 @@
           <a:bodyPr wrap="square" lIns="0" tIns="0" rIns="0" bIns="0" rtlCol="0" anchor="ctr"/>
           <a:lstStyle/>
           <a:p>
-            <a:pPr algn="ctr" indent="0" marL="0">
-              <a:buNone/>
-            </a:pPr>
-            <a:r>
-              <a:rPr lang="en-US" sz="1600" b="1" dirty="0">
-                <a:solidFill>
-                  <a:srgbClr val="FFFFFF"/>
+            <a:pPr algn="l" indent="0" marL="0">
+              <a:buNone/>
+            </a:pPr>
+            <a:r>
+              <a:rPr lang="en-US" sz="1500" b="1" dirty="0">
+                <a:solidFill>
+                  <a:srgbClr val="1C5A73"/>
                 </a:solidFill>
                 <a:latin typeface="Cambria" pitchFamily="34" charset="0"/>
                 <a:ea typeface="Cambria" pitchFamily="34" charset="-122"/>
                 <a:cs typeface="Cambria" pitchFamily="34" charset="-120"/>
               </a:rPr>
-              <a:t>3</a:t>
-            </a:r>
-            <a:endParaRPr lang="en-US" sz="1600" dirty="0"/>
-          </a:p>
-        </p:txBody>
-      </p:sp>
-      <p:sp>
-        <p:nvSpPr>
-          <p:cNvPr id="17" name="Text 15"/>
-          <p:cNvSpPr txBox="1"/>
-          <p:nvPr/>
-        </p:nvSpPr>
-        <p:spPr>
-          <a:xfrm>
-            <a:off x="6461608" y="2788920"/>
-            <a:ext cx="2087804" cy="457200"/>
+              <a:t>Ngounié — Mouila</a:t>
+            </a:r>
+            <a:endParaRPr lang="en-US" sz="1500" dirty="0"/>
+          </a:p>
+        </p:txBody>
+      </p:sp>
+      <p:sp>
+        <p:nvSpPr>
+          <p:cNvPr id="17" name="Text 12"/>
+          <p:cNvSpPr txBox="1"/>
+          <p:nvPr/>
+        </p:nvSpPr>
+        <p:spPr>
+          <a:xfrm>
+            <a:off x="8325917" y="4041648"/>
+            <a:ext cx="3070250" cy="329184"/>
           </a:xfrm>
           <a:prstGeom prst="rect">
             <a:avLst/>
@@ -6964,30 +6912,30 @@
               <a:buNone/>
             </a:pPr>
             <a:r>
-              <a:rPr lang="en-US" sz="1400" b="1" dirty="0">
-                <a:solidFill>
-                  <a:srgbClr val="1C5A73"/>
-                </a:solidFill>
-                <a:latin typeface="Cambria" pitchFamily="34" charset="0"/>
-                <a:ea typeface="Cambria" pitchFamily="34" charset="-122"/>
-                <a:cs typeface="Cambria" pitchFamily="34" charset="-120"/>
-              </a:rPr>
-              <a:t>Mesure</a:t>
-            </a:r>
-            <a:endParaRPr lang="en-US" sz="1400" dirty="0"/>
-          </a:p>
-        </p:txBody>
-      </p:sp>
-      <p:sp>
-        <p:nvSpPr>
-          <p:cNvPr id="18" name="Text 16"/>
-          <p:cNvSpPr txBox="1"/>
-          <p:nvPr/>
-        </p:nvSpPr>
-        <p:spPr>
-          <a:xfrm>
-            <a:off x="6461608" y="3291840"/>
-            <a:ext cx="2087804" cy="1234440"/>
+              <a:rPr lang="en-US" sz="1250" b="1" dirty="0">
+                <a:solidFill>
+                  <a:srgbClr val="A3701A"/>
+                </a:solidFill>
+                <a:latin typeface="Calibri" pitchFamily="34" charset="0"/>
+                <a:ea typeface="Calibri" pitchFamily="34" charset="-122"/>
+                <a:cs typeface="Calibri" pitchFamily="34" charset="-120"/>
+              </a:rPr>
+              <a:t>≈ 40 000 ha de palmier</a:t>
+            </a:r>
+            <a:endParaRPr lang="en-US" sz="1250" dirty="0"/>
+          </a:p>
+        </p:txBody>
+      </p:sp>
+      <p:sp>
+        <p:nvSpPr>
+          <p:cNvPr id="18" name="Text 13"/>
+          <p:cNvSpPr txBox="1"/>
+          <p:nvPr/>
+        </p:nvSpPr>
+        <p:spPr>
+          <a:xfrm>
+            <a:off x="8325917" y="4407408"/>
+            <a:ext cx="3070250" cy="1280160"/>
           </a:xfrm>
           <a:prstGeom prst="rect">
             <a:avLst/>
@@ -6999,14 +6947,18 @@
           <a:bodyPr wrap="square" lIns="0" tIns="0" rIns="0" bIns="0" rtlCol="0" anchor="t"/>
           <a:lstStyle/>
           <a:p>
-            <a:pPr algn="l" indent="0" marL="0">
+            <a:pPr algn="l" marL="342900" indent="-342900">
               <a:lnSpc>
-                <a:spcPct val="120000"/>
+                <a:spcPct val="116000"/>
               </a:lnSpc>
-              <a:buNone/>
-            </a:pPr>
-            <a:r>
-              <a:rPr lang="en-US" sz="1200" dirty="0">
+              <a:spcAft>
+                <a:spcPts val="700"/>
+              </a:spcAft>
+              <a:buSzPct val="100000"/>
+              <a:buChar char="•"/>
+            </a:pPr>
+            <a:r>
+              <a:rPr lang="en-US" sz="1150" dirty="0">
                 <a:solidFill>
                   <a:srgbClr val="31424A"/>
                 </a:solidFill>
@@ -7014,166 +6966,23 @@
                 <a:ea typeface="Calibri" pitchFamily="34" charset="-122"/>
                 <a:cs typeface="Calibri" pitchFamily="34" charset="-120"/>
               </a:rPr>
-              <a:t>Relevés de reprise, de consommation et de rendement à cheval sur la saison sèche.</a:t>
-            </a:r>
-            <a:endParaRPr lang="en-US" sz="1200" dirty="0"/>
-          </a:p>
-        </p:txBody>
-      </p:sp>
-      <p:sp>
-        <p:nvSpPr>
-          <p:cNvPr id="19" name="Shape 17"/>
-          <p:cNvSpPr/>
-          <p:nvPr/>
-        </p:nvSpPr>
-        <p:spPr>
-          <a:xfrm>
-            <a:off x="9052331" y="1874520"/>
-            <a:ext cx="2545004" cy="2834640"/>
-          </a:xfrm>
-          <a:prstGeom prst="roundRect">
-            <a:avLst>
-              <a:gd name="adj" fmla="val 3593"/>
-            </a:avLst>
-          </a:prstGeom>
-          <a:solidFill>
-            <a:srgbClr val="EDF3F5"/>
-          </a:solidFill>
-          <a:ln w="9525">
-            <a:solidFill>
-              <a:srgbClr val="D6E2E7"/>
-            </a:solidFill>
-            <a:prstDash val="solid"/>
-          </a:ln>
-        </p:spPr>
-      </p:sp>
-      <p:sp>
-        <p:nvSpPr>
-          <p:cNvPr id="20" name="Shape 18"/>
-          <p:cNvSpPr/>
-          <p:nvPr/>
-        </p:nvSpPr>
-        <p:spPr>
-          <a:xfrm>
-            <a:off x="9280931" y="2103120"/>
-            <a:ext cx="566928" cy="566928"/>
-          </a:xfrm>
-          <a:prstGeom prst="ellipse">
-            <a:avLst/>
-          </a:prstGeom>
-          <a:solidFill>
-            <a:srgbClr val="1C5A73"/>
-          </a:solidFill>
-          <a:ln/>
-        </p:spPr>
-      </p:sp>
-      <p:sp>
-        <p:nvSpPr>
-          <p:cNvPr id="21" name="Text 19"/>
-          <p:cNvSpPr txBox="1"/>
-          <p:nvPr/>
-        </p:nvSpPr>
-        <p:spPr>
-          <a:xfrm>
-            <a:off x="9280931" y="2103120"/>
-            <a:ext cx="566928" cy="566928"/>
-          </a:xfrm>
-          <a:prstGeom prst="rect">
-            <a:avLst/>
-          </a:prstGeom>
-          <a:noFill/>
-          <a:ln/>
-        </p:spPr>
-        <p:txBody>
-          <a:bodyPr wrap="square" lIns="0" tIns="0" rIns="0" bIns="0" rtlCol="0" anchor="ctr"/>
-          <a:lstStyle/>
-          <a:p>
-            <a:pPr algn="ctr" indent="0" marL="0">
-              <a:buNone/>
-            </a:pPr>
-            <a:r>
-              <a:rPr lang="en-US" sz="1600" b="1" dirty="0">
-                <a:solidFill>
-                  <a:srgbClr val="FFFFFF"/>
-                </a:solidFill>
-                <a:latin typeface="Cambria" pitchFamily="34" charset="0"/>
-                <a:ea typeface="Cambria" pitchFamily="34" charset="-122"/>
-                <a:cs typeface="Cambria" pitchFamily="34" charset="-120"/>
-              </a:rPr>
-              <a:t>4</a:t>
-            </a:r>
-            <a:endParaRPr lang="en-US" sz="1600" dirty="0"/>
-          </a:p>
-        </p:txBody>
-      </p:sp>
-      <p:sp>
-        <p:nvSpPr>
-          <p:cNvPr id="22" name="Text 20"/>
-          <p:cNvSpPr txBox="1"/>
-          <p:nvPr/>
-        </p:nvSpPr>
-        <p:spPr>
-          <a:xfrm>
-            <a:off x="9280931" y="2788920"/>
-            <a:ext cx="2087804" cy="457200"/>
-          </a:xfrm>
-          <a:prstGeom prst="rect">
-            <a:avLst/>
-          </a:prstGeom>
-          <a:noFill/>
-          <a:ln/>
-        </p:spPr>
-        <p:txBody>
-          <a:bodyPr wrap="square" lIns="0" tIns="0" rIns="0" bIns="0" rtlCol="0" anchor="ctr"/>
-          <a:lstStyle/>
-          <a:p>
-            <a:pPr algn="l" indent="0" marL="0">
-              <a:buNone/>
-            </a:pPr>
-            <a:r>
-              <a:rPr lang="en-US" sz="1400" b="1" dirty="0">
-                <a:solidFill>
-                  <a:srgbClr val="1C5A73"/>
-                </a:solidFill>
-                <a:latin typeface="Cambria" pitchFamily="34" charset="0"/>
-                <a:ea typeface="Cambria" pitchFamily="34" charset="-122"/>
-                <a:cs typeface="Cambria" pitchFamily="34" charset="-120"/>
-              </a:rPr>
-              <a:t>Extension</a:t>
-            </a:r>
-            <a:endParaRPr lang="en-US" sz="1400" dirty="0"/>
-          </a:p>
-        </p:txBody>
-      </p:sp>
-      <p:sp>
-        <p:nvSpPr>
-          <p:cNvPr id="23" name="Text 21"/>
-          <p:cNvSpPr txBox="1"/>
-          <p:nvPr/>
-        </p:nvSpPr>
-        <p:spPr>
-          <a:xfrm>
-            <a:off x="9280931" y="3291840"/>
-            <a:ext cx="2087804" cy="1234440"/>
-          </a:xfrm>
-          <a:prstGeom prst="rect">
-            <a:avLst/>
-          </a:prstGeom>
-          <a:noFill/>
-          <a:ln/>
-        </p:spPr>
-        <p:txBody>
-          <a:bodyPr wrap="square" lIns="0" tIns="0" rIns="0" bIns="0" rtlCol="0" anchor="t"/>
-          <a:lstStyle/>
-          <a:p>
-            <a:pPr algn="l" indent="0" marL="0">
+              <a:t>Plantations industrielles de palmier à huile, suivies agronomiquement bloc par bloc.</a:t>
+            </a:r>
+            <a:endParaRPr lang="en-US" sz="1150" dirty="0"/>
+          </a:p>
+          <a:p>
+            <a:pPr algn="l" marL="342900" indent="-342900">
               <a:lnSpc>
-                <a:spcPct val="120000"/>
+                <a:spcPct val="116000"/>
               </a:lnSpc>
-              <a:buNone/>
-            </a:pPr>
-            <a:r>
-              <a:rPr lang="en-US" sz="1200" dirty="0">
+              <a:spcAft>
+                <a:spcPts val="700"/>
+              </a:spcAft>
+              <a:buSzPct val="100000"/>
+              <a:buChar char="•"/>
+            </a:pPr>
+            <a:r>
+              <a:rPr lang="en-US" sz="1150" dirty="0">
                 <a:solidFill>
                   <a:srgbClr val="31424A"/>
                 </a:solidFill>
@@ -7181,57 +6990,39 @@
                 <a:ea typeface="Calibri" pitchFamily="34" charset="-122"/>
                 <a:cs typeface="Calibri" pitchFamily="34" charset="-120"/>
               </a:rPr>
-              <a:t>Généralisation progressive aux autres parcelles sur la base des résultats constatés.</a:t>
-            </a:r>
-            <a:endParaRPr lang="en-US" sz="1200" dirty="0"/>
-          </a:p>
-        </p:txBody>
-      </p:sp>
-      <p:sp>
-        <p:nvSpPr>
-          <p:cNvPr id="24" name="Text 22"/>
-          <p:cNvSpPr txBox="1"/>
-          <p:nvPr/>
-        </p:nvSpPr>
-        <p:spPr>
-          <a:xfrm>
-            <a:off x="594360" y="4983480"/>
-            <a:ext cx="11002975" cy="822960"/>
-          </a:xfrm>
-          <a:prstGeom prst="rect">
-            <a:avLst/>
-          </a:prstGeom>
-          <a:noFill/>
-          <a:ln/>
-        </p:spPr>
-        <p:txBody>
-          <a:bodyPr wrap="square" lIns="0" tIns="0" rIns="0" bIns="0" rtlCol="0" anchor="t"/>
-          <a:lstStyle/>
-          <a:p>
-            <a:pPr algn="l" indent="0" marL="0">
+              <a:t>Forte mortalité des jeunes plants en saison sèche : l'hydro-rétenteur se juge au taux de reprise.</a:t>
+            </a:r>
+            <a:endParaRPr lang="en-US" sz="1150" dirty="0"/>
+          </a:p>
+          <a:p>
+            <a:pPr algn="l" marL="342900" indent="-342900">
               <a:lnSpc>
-                <a:spcPct val="125000"/>
+                <a:spcPct val="116000"/>
               </a:lnSpc>
-              <a:buNone/>
-            </a:pPr>
-            <a:r>
-              <a:rPr lang="en-US" sz="1250" i="1" dirty="0">
-                <a:solidFill>
-                  <a:srgbClr val="6C8089"/>
-                </a:solidFill>
-                <a:latin typeface="Calibri" pitchFamily="34" charset="0"/>
-                <a:ea typeface="Calibri" pitchFamily="34" charset="-122"/>
-                <a:cs typeface="Calibri" pitchFamily="34" charset="-120"/>
-              </a:rPr>
-              <a:t>La règle de dosage est la même partout : 3 grammes par litre de terre utile. Ce qui change d'un terrain à l'autre, c'est le volume de terre effectivement exploré par les racines.</a:t>
-            </a:r>
-            <a:endParaRPr lang="en-US" sz="1250" dirty="0"/>
-          </a:p>
-        </p:txBody>
-      </p:sp>
-      <p:sp>
-        <p:nvSpPr>
-          <p:cNvPr id="25" name="Text 23"/>
+              <a:spcAft>
+                <a:spcPts val="700"/>
+              </a:spcAft>
+              <a:buSzPct val="100000"/>
+              <a:buChar char="•"/>
+            </a:pPr>
+            <a:r>
+              <a:rPr lang="en-US" sz="1150" dirty="0">
+                <a:solidFill>
+                  <a:srgbClr val="31424A"/>
+                </a:solidFill>
+                <a:latin typeface="Calibri" pitchFamily="34" charset="0"/>
+                <a:ea typeface="Calibri" pitchFamily="34" charset="-122"/>
+                <a:cs typeface="Calibri" pitchFamily="34" charset="-120"/>
+              </a:rPr>
+              <a:t>Volumes contractualisables et protocole d'essai facile à tenir sur un bloc homogène.</a:t>
+            </a:r>
+            <a:endParaRPr lang="en-US" sz="1150" dirty="0"/>
+          </a:p>
+        </p:txBody>
+      </p:sp>
+      <p:sp>
+        <p:nvSpPr>
+          <p:cNvPr id="19" name="Text 14"/>
           <p:cNvSpPr txBox="1"/>
           <p:nvPr/>
         </p:nvSpPr>
@@ -7272,7 +7063,7 @@
       </p:sp>
       <p:sp>
         <p:nvSpPr>
-          <p:cNvPr id="26" name="Text 24"/>
+          <p:cNvPr id="20" name="Text 15"/>
           <p:cNvSpPr txBox="1"/>
           <p:nvPr/>
         </p:nvSpPr>
@@ -7376,7 +7167,7 @@
                 <a:ea typeface="Calibri" pitchFamily="34" charset="-122"/>
                 <a:cs typeface="Calibri" pitchFamily="34" charset="-120"/>
               </a:rPr>
-              <a:t>Travailler ensemble</a:t>
+              <a:t>COMMENT NOUS PROCÉDONS</a:t>
             </a:r>
             <a:endParaRPr lang="en-US" sz="1150" dirty="0"/>
           </a:p>
@@ -7415,7 +7206,7 @@
                 <a:ea typeface="Cambria" pitchFamily="34" charset="-122"/>
                 <a:cs typeface="Cambria" pitchFamily="34" charset="-120"/>
               </a:rPr>
-              <a:t>Un partenaire local pour le Gabon</a:t>
+              <a:t>Un déploiement par étapes, mesuré à chaque palier</a:t>
             </a:r>
             <a:endParaRPr lang="en-US" sz="3000" dirty="0"/>
           </a:p>
@@ -7540,7 +7331,7 @@
                 <a:ea typeface="Cambria" pitchFamily="34" charset="-122"/>
                 <a:cs typeface="Cambria" pitchFamily="34" charset="-120"/>
               </a:rPr>
-              <a:t>Distribution</a:t>
+              <a:t>Diagnostic</a:t>
             </a:r>
             <a:endParaRPr lang="en-US" sz="1400" dirty="0"/>
           </a:p>
@@ -7582,7 +7373,7 @@
                 <a:ea typeface="Calibri" pitchFamily="34" charset="-122"/>
                 <a:cs typeface="Calibri" pitchFamily="34" charset="-120"/>
               </a:rPr>
-              <a:t>Exclusivité territoriale et stock de lancement pour la première saison commerciale.</a:t>
+              <a:t>Analyse du sol, du mode d'arrosage et de la culture. Aucun engagement à ce stade.</a:t>
             </a:r>
             <a:endParaRPr lang="en-US" sz="1200" dirty="0"/>
           </a:p>
@@ -7707,7 +7498,7 @@
                 <a:ea typeface="Cambria" pitchFamily="34" charset="-122"/>
                 <a:cs typeface="Cambria" pitchFamily="34" charset="-120"/>
               </a:rPr>
-              <a:t>Formation</a:t>
+              <a:t>Parcelle témoin</a:t>
             </a:r>
             <a:endParaRPr lang="en-US" sz="1400" dirty="0"/>
           </a:p>
@@ -7749,7 +7540,7 @@
                 <a:ea typeface="Calibri" pitchFamily="34" charset="-122"/>
                 <a:cs typeface="Calibri" pitchFamily="34" charset="-120"/>
               </a:rPr>
-              <a:t>Formation technique des équipes, protocoles de dosage et mises à jour à chaque saison.</a:t>
+              <a:t>Un essai comparatif sur un bloc, avec parcelle témoin conduite à l'identique.</a:t>
             </a:r>
             <a:endParaRPr lang="en-US" sz="1200" dirty="0"/>
           </a:p>
@@ -7874,7 +7665,7 @@
                 <a:ea typeface="Cambria" pitchFamily="34" charset="-122"/>
                 <a:cs typeface="Cambria" pitchFamily="34" charset="-120"/>
               </a:rPr>
-              <a:t>Essais conjoints</a:t>
+              <a:t>Mesure</a:t>
             </a:r>
             <a:endParaRPr lang="en-US" sz="1400" dirty="0"/>
           </a:p>
@@ -7916,7 +7707,7 @@
                 <a:ea typeface="Calibri" pitchFamily="34" charset="-122"/>
                 <a:cs typeface="Calibri" pitchFamily="34" charset="-120"/>
               </a:rPr>
-              <a:t>Parcelles de démonstration avec témoin, résultats partagés avec les producteurs.</a:t>
+              <a:t>Relevés de reprise, de consommation et de rendement à cheval sur la saison sèche.</a:t>
             </a:r>
             <a:endParaRPr lang="en-US" sz="1200" dirty="0"/>
           </a:p>
@@ -8041,7 +7832,7 @@
                 <a:ea typeface="Cambria" pitchFamily="34" charset="-122"/>
                 <a:cs typeface="Cambria" pitchFamily="34" charset="-120"/>
               </a:rPr>
-              <a:t>Institutions</a:t>
+              <a:t>Extension</a:t>
             </a:r>
             <a:endParaRPr lang="en-US" sz="1400" dirty="0"/>
           </a:p>
@@ -8083,7 +7874,7 @@
                 <a:ea typeface="Calibri" pitchFamily="34" charset="-122"/>
                 <a:cs typeface="Calibri" pitchFamily="34" charset="-120"/>
               </a:rPr>
-              <a:t>Dialogue avec le ministère de l'Agriculture et les programmes de sécurité alimentaire.</a:t>
+              <a:t>Généralisation progressive aux autres parcelles sur la base des résultats constatés.</a:t>
             </a:r>
             <a:endParaRPr lang="en-US" sz="1200" dirty="0"/>
           </a:p>
@@ -8125,7 +7916,7 @@
                 <a:ea typeface="Calibri" pitchFamily="34" charset="-122"/>
                 <a:cs typeface="Calibri" pitchFamily="34" charset="-120"/>
               </a:rPr>
-              <a:t>Le cadre s'adapte au territoire : un importateur, un distributeur d'intrants ou un groupement de producteurs peut porter le partenariat.</a:t>
+              <a:t>La règle de dosage est la même partout : 3 grammes par litre de terre utile. Ce qui change d'un terrain à l'autre, c'est le volume de terre effectivement exploré par les racines.</a:t>
             </a:r>
             <a:endParaRPr lang="en-US" sz="1250" dirty="0"/>
           </a:p>
@@ -8278,7 +8069,7 @@
                 <a:ea typeface="Calibri" pitchFamily="34" charset="-122"/>
                 <a:cs typeface="Calibri" pitchFamily="34" charset="-120"/>
               </a:rPr>
-              <a:t>CE QU'IL FAUT ANTICIPER</a:t>
+              <a:t>Travailler ensemble</a:t>
             </a:r>
             <a:endParaRPr lang="en-US" sz="1150" dirty="0"/>
           </a:p>
@@ -8317,7 +8108,7 @@
                 <a:ea typeface="Cambria" pitchFamily="34" charset="-122"/>
                 <a:cs typeface="Cambria" pitchFamily="34" charset="-120"/>
               </a:rPr>
-              <a:t>Risques identifiés et réponses</a:t>
+              <a:t>Un partenaire local pour le Gabon</a:t>
             </a:r>
             <a:endParaRPr lang="en-US" sz="3000" dirty="0"/>
           </a:p>
@@ -8325,332 +8116,18 @@
       </p:sp>
       <p:sp>
         <p:nvSpPr>
-          <p:cNvPr id="4" name="Text 2"/>
-          <p:cNvSpPr txBox="1"/>
-          <p:nvPr/>
-        </p:nvSpPr>
-        <p:spPr>
-          <a:xfrm>
-            <a:off x="594360" y="1783080"/>
-            <a:ext cx="5227168" cy="411480"/>
-          </a:xfrm>
-          <a:prstGeom prst="rect">
-            <a:avLst/>
-          </a:prstGeom>
-          <a:noFill/>
-          <a:ln/>
-        </p:spPr>
-        <p:txBody>
-          <a:bodyPr wrap="square" lIns="0" tIns="0" rIns="0" bIns="0" rtlCol="0" anchor="ctr"/>
-          <a:lstStyle/>
-          <a:p>
-            <a:pPr algn="l" indent="0" marL="0">
-              <a:buNone/>
-            </a:pPr>
-            <a:r>
-              <a:rPr lang="en-US" sz="1600" b="1" dirty="0">
-                <a:solidFill>
-                  <a:srgbClr val="1C5A73"/>
-                </a:solidFill>
-                <a:latin typeface="Cambria" pitchFamily="34" charset="0"/>
-                <a:ea typeface="Cambria" pitchFamily="34" charset="-122"/>
-                <a:cs typeface="Cambria" pitchFamily="34" charset="-120"/>
-              </a:rPr>
-              <a:t>Risques</a:t>
-            </a:r>
-            <a:endParaRPr lang="en-US" sz="1600" dirty="0"/>
-          </a:p>
-        </p:txBody>
-      </p:sp>
-      <p:sp>
-        <p:nvSpPr>
-          <p:cNvPr id="5" name="Text 3"/>
-          <p:cNvSpPr txBox="1"/>
-          <p:nvPr/>
-        </p:nvSpPr>
-        <p:spPr>
-          <a:xfrm>
-            <a:off x="594360" y="2286000"/>
-            <a:ext cx="5227168" cy="2468880"/>
-          </a:xfrm>
-          <a:prstGeom prst="rect">
-            <a:avLst/>
-          </a:prstGeom>
-          <a:noFill/>
-          <a:ln/>
-        </p:spPr>
-        <p:txBody>
-          <a:bodyPr wrap="square" lIns="0" tIns="0" rIns="0" bIns="0" rtlCol="0" anchor="t"/>
-          <a:lstStyle/>
-          <a:p>
-            <a:pPr algn="l" marL="342900" indent="-342900">
-              <a:lnSpc>
-                <a:spcPct val="122000"/>
-              </a:lnSpc>
-              <a:spcAft>
-                <a:spcPts val="1000"/>
-              </a:spcAft>
-              <a:buSzPct val="100000"/>
-              <a:buChar char="•"/>
-            </a:pPr>
-            <a:r>
-              <a:rPr lang="en-US" sz="1350" dirty="0">
-                <a:solidFill>
-                  <a:srgbClr val="31424A"/>
-                </a:solidFill>
-                <a:latin typeface="Calibri" pitchFamily="34" charset="0"/>
-                <a:ea typeface="Calibri" pitchFamily="34" charset="-122"/>
-                <a:cs typeface="Calibri" pitchFamily="34" charset="-120"/>
-              </a:rPr>
-              <a:t>Marché intérieur étroit : environ 2,4 millions d'habitants et des exploitations vivrières de très petite taille.</a:t>
-            </a:r>
-            <a:endParaRPr lang="en-US" sz="1350" dirty="0"/>
-          </a:p>
-          <a:p>
-            <a:pPr algn="l" marL="342900" indent="-342900">
-              <a:lnSpc>
-                <a:spcPct val="122000"/>
-              </a:lnSpc>
-              <a:spcAft>
-                <a:spcPts val="1000"/>
-              </a:spcAft>
-              <a:buSzPct val="100000"/>
-              <a:buChar char="•"/>
-            </a:pPr>
-            <a:r>
-              <a:rPr lang="en-US" sz="1350" dirty="0">
-                <a:solidFill>
-                  <a:srgbClr val="31424A"/>
-                </a:solidFill>
-                <a:latin typeface="Calibri" pitchFamily="34" charset="0"/>
-                <a:ea typeface="Calibri" pitchFamily="34" charset="-122"/>
-                <a:cs typeface="Calibri" pitchFamily="34" charset="-120"/>
-              </a:rPr>
-              <a:t>Logistique intérieure difficile en saison des pluies, qui renchérit la distribution hors des axes principaux.</a:t>
-            </a:r>
-            <a:endParaRPr lang="en-US" sz="1350" dirty="0"/>
-          </a:p>
-          <a:p>
-            <a:pPr algn="l" marL="342900" indent="-342900">
-              <a:lnSpc>
-                <a:spcPct val="122000"/>
-              </a:lnSpc>
-              <a:spcAft>
-                <a:spcPts val="1000"/>
-              </a:spcAft>
-              <a:buSzPct val="100000"/>
-              <a:buChar char="•"/>
-            </a:pPr>
-            <a:r>
-              <a:rPr lang="en-US" sz="1350" dirty="0">
-                <a:solidFill>
-                  <a:srgbClr val="31424A"/>
-                </a:solidFill>
-                <a:latin typeface="Calibri" pitchFamily="34" charset="0"/>
-                <a:ea typeface="Calibri" pitchFamily="34" charset="-122"/>
-                <a:cs typeface="Calibri" pitchFamily="34" charset="-120"/>
-              </a:rPr>
-              <a:t>Pluviométrie abondante : un essai conduit hors saison sèche masque l'intérêt du produit.</a:t>
-            </a:r>
-            <a:endParaRPr lang="en-US" sz="1350" dirty="0"/>
-          </a:p>
-          <a:p>
-            <a:pPr algn="l" marL="342900" indent="-342900">
-              <a:lnSpc>
-                <a:spcPct val="122000"/>
-              </a:lnSpc>
-              <a:spcAft>
-                <a:spcPts val="1000"/>
-              </a:spcAft>
-              <a:buSzPct val="100000"/>
-              <a:buChar char="•"/>
-            </a:pPr>
-            <a:r>
-              <a:rPr lang="en-US" sz="1350" dirty="0">
-                <a:solidFill>
-                  <a:srgbClr val="31424A"/>
-                </a:solidFill>
-                <a:latin typeface="Calibri" pitchFamily="34" charset="0"/>
-                <a:ea typeface="Calibri" pitchFamily="34" charset="-122"/>
-                <a:cs typeface="Calibri" pitchFamily="34" charset="-120"/>
-              </a:rPr>
-              <a:t>Produit peu connu, parfois confondu avec les polymères à base de sodium vendus en jardinerie.</a:t>
-            </a:r>
-            <a:endParaRPr lang="en-US" sz="1350" dirty="0"/>
-          </a:p>
-        </p:txBody>
-      </p:sp>
-      <p:sp>
-        <p:nvSpPr>
-          <p:cNvPr id="6" name="Text 4"/>
-          <p:cNvSpPr txBox="1"/>
-          <p:nvPr/>
-        </p:nvSpPr>
-        <p:spPr>
-          <a:xfrm>
-            <a:off x="6370168" y="1783080"/>
-            <a:ext cx="5227168" cy="411480"/>
-          </a:xfrm>
-          <a:prstGeom prst="rect">
-            <a:avLst/>
-          </a:prstGeom>
-          <a:noFill/>
-          <a:ln/>
-        </p:spPr>
-        <p:txBody>
-          <a:bodyPr wrap="square" lIns="0" tIns="0" rIns="0" bIns="0" rtlCol="0" anchor="ctr"/>
-          <a:lstStyle/>
-          <a:p>
-            <a:pPr algn="l" indent="0" marL="0">
-              <a:buNone/>
-            </a:pPr>
-            <a:r>
-              <a:rPr lang="en-US" sz="1600" b="1" dirty="0">
-                <a:solidFill>
-                  <a:srgbClr val="1C5A73"/>
-                </a:solidFill>
-                <a:latin typeface="Cambria" pitchFamily="34" charset="0"/>
-                <a:ea typeface="Cambria" pitchFamily="34" charset="-122"/>
-                <a:cs typeface="Cambria" pitchFamily="34" charset="-120"/>
-              </a:rPr>
-              <a:t>Réponses</a:t>
-            </a:r>
-            <a:endParaRPr lang="en-US" sz="1600" dirty="0"/>
-          </a:p>
-        </p:txBody>
-      </p:sp>
-      <p:sp>
-        <p:nvSpPr>
-          <p:cNvPr id="7" name="Text 5"/>
-          <p:cNvSpPr txBox="1"/>
-          <p:nvPr/>
-        </p:nvSpPr>
-        <p:spPr>
-          <a:xfrm>
-            <a:off x="6370168" y="2286000"/>
-            <a:ext cx="5227168" cy="2468880"/>
-          </a:xfrm>
-          <a:prstGeom prst="rect">
-            <a:avLst/>
-          </a:prstGeom>
-          <a:noFill/>
-          <a:ln/>
-        </p:spPr>
-        <p:txBody>
-          <a:bodyPr wrap="square" lIns="0" tIns="0" rIns="0" bIns="0" rtlCol="0" anchor="t"/>
-          <a:lstStyle/>
-          <a:p>
-            <a:pPr algn="l" marL="342900" indent="-342900">
-              <a:lnSpc>
-                <a:spcPct val="122000"/>
-              </a:lnSpc>
-              <a:spcAft>
-                <a:spcPts val="1000"/>
-              </a:spcAft>
-              <a:buSzPct val="100000"/>
-              <a:buChar char="•"/>
-            </a:pPr>
-            <a:r>
-              <a:rPr lang="en-US" sz="1350" dirty="0">
-                <a:solidFill>
-                  <a:srgbClr val="31424A"/>
-                </a:solidFill>
-                <a:latin typeface="Calibri" pitchFamily="34" charset="0"/>
-                <a:ea typeface="Calibri" pitchFamily="34" charset="-122"/>
-                <a:cs typeface="Calibri" pitchFamily="34" charset="-120"/>
-              </a:rPr>
-              <a:t>Concentrer les premiers volumes sur les plantations industrielles et les coopératives maraîchères péri-urbaines.</a:t>
-            </a:r>
-            <a:endParaRPr lang="en-US" sz="1350" dirty="0"/>
-          </a:p>
-          <a:p>
-            <a:pPr algn="l" marL="342900" indent="-342900">
-              <a:lnSpc>
-                <a:spcPct val="122000"/>
-              </a:lnSpc>
-              <a:spcAft>
-                <a:spcPts val="1000"/>
-              </a:spcAft>
-              <a:buSzPct val="100000"/>
-              <a:buChar char="•"/>
-            </a:pPr>
-            <a:r>
-              <a:rPr lang="en-US" sz="1350" dirty="0">
-                <a:solidFill>
-                  <a:srgbClr val="31424A"/>
-                </a:solidFill>
-                <a:latin typeface="Calibri" pitchFamily="34" charset="0"/>
-                <a:ea typeface="Calibri" pitchFamily="34" charset="-122"/>
-                <a:cs typeface="Calibri" pitchFamily="34" charset="-120"/>
-              </a:rPr>
-              <a:t>Grouper les commandes sur un conteneur via le port d'Owendo, avec un stock tampon à Libreville.</a:t>
-            </a:r>
-            <a:endParaRPr lang="en-US" sz="1350" dirty="0"/>
-          </a:p>
-          <a:p>
-            <a:pPr algn="l" marL="342900" indent="-342900">
-              <a:lnSpc>
-                <a:spcPct val="122000"/>
-              </a:lnSpc>
-              <a:spcAft>
-                <a:spcPts val="1000"/>
-              </a:spcAft>
-              <a:buSzPct val="100000"/>
-              <a:buChar char="•"/>
-            </a:pPr>
-            <a:r>
-              <a:rPr lang="en-US" sz="1350" dirty="0">
-                <a:solidFill>
-                  <a:srgbClr val="31424A"/>
-                </a:solidFill>
-                <a:latin typeface="Calibri" pitchFamily="34" charset="0"/>
-                <a:ea typeface="Calibri" pitchFamily="34" charset="-122"/>
-                <a:cs typeface="Calibri" pitchFamily="34" charset="-120"/>
-              </a:rPr>
-              <a:t>Programmer systématiquement l'essai de mai à octobre, pour couvrir la grande saison sèche.</a:t>
-            </a:r>
-            <a:endParaRPr lang="en-US" sz="1350" dirty="0"/>
-          </a:p>
-          <a:p>
-            <a:pPr algn="l" marL="342900" indent="-342900">
-              <a:lnSpc>
-                <a:spcPct val="122000"/>
-              </a:lnSpc>
-              <a:spcAft>
-                <a:spcPts val="1000"/>
-              </a:spcAft>
-              <a:buSzPct val="100000"/>
-              <a:buChar char="•"/>
-            </a:pPr>
-            <a:r>
-              <a:rPr lang="en-US" sz="1350" dirty="0">
-                <a:solidFill>
-                  <a:srgbClr val="31424A"/>
-                </a:solidFill>
-                <a:latin typeface="Calibri" pitchFamily="34" charset="0"/>
-                <a:ea typeface="Calibri" pitchFamily="34" charset="-122"/>
-                <a:cs typeface="Calibri" pitchFamily="34" charset="-120"/>
-              </a:rPr>
-              <a:t>Documenter la formulation potassique, sans sodium, compatible avec les cultures alimentaires.</a:t>
-            </a:r>
-            <a:endParaRPr lang="en-US" sz="1350" dirty="0"/>
-          </a:p>
-        </p:txBody>
-      </p:sp>
-      <p:sp>
-        <p:nvSpPr>
-          <p:cNvPr id="8" name="Shape 6"/>
+          <p:cNvPr id="4" name="Shape 2"/>
           <p:cNvSpPr/>
           <p:nvPr/>
         </p:nvSpPr>
         <p:spPr>
           <a:xfrm>
-            <a:off x="594360" y="4846320"/>
-            <a:ext cx="11002975" cy="960120"/>
+            <a:off x="594360" y="1874520"/>
+            <a:ext cx="2545004" cy="2834640"/>
           </a:xfrm>
           <a:prstGeom prst="roundRect">
             <a:avLst>
-              <a:gd name="adj" fmla="val 7619"/>
+              <a:gd name="adj" fmla="val 3593"/>
             </a:avLst>
           </a:prstGeom>
           <a:solidFill>
@@ -8666,14 +8143,112 @@
       </p:sp>
       <p:sp>
         <p:nvSpPr>
-          <p:cNvPr id="9" name="Text 7"/>
-          <p:cNvSpPr txBox="1"/>
-          <p:nvPr/>
-        </p:nvSpPr>
-        <p:spPr>
-          <a:xfrm>
-            <a:off x="822960" y="4983480"/>
-            <a:ext cx="10545775" cy="713232"/>
+          <p:cNvPr id="5" name="Shape 3"/>
+          <p:cNvSpPr/>
+          <p:nvPr/>
+        </p:nvSpPr>
+        <p:spPr>
+          <a:xfrm>
+            <a:off x="822960" y="2103120"/>
+            <a:ext cx="566928" cy="566928"/>
+          </a:xfrm>
+          <a:prstGeom prst="ellipse">
+            <a:avLst/>
+          </a:prstGeom>
+          <a:solidFill>
+            <a:srgbClr val="1C5A73"/>
+          </a:solidFill>
+          <a:ln/>
+        </p:spPr>
+      </p:sp>
+      <p:sp>
+        <p:nvSpPr>
+          <p:cNvPr id="6" name="Text 4"/>
+          <p:cNvSpPr txBox="1"/>
+          <p:nvPr/>
+        </p:nvSpPr>
+        <p:spPr>
+          <a:xfrm>
+            <a:off x="822960" y="2103120"/>
+            <a:ext cx="566928" cy="566928"/>
+          </a:xfrm>
+          <a:prstGeom prst="rect">
+            <a:avLst/>
+          </a:prstGeom>
+          <a:noFill/>
+          <a:ln/>
+        </p:spPr>
+        <p:txBody>
+          <a:bodyPr wrap="square" lIns="0" tIns="0" rIns="0" bIns="0" rtlCol="0" anchor="ctr"/>
+          <a:lstStyle/>
+          <a:p>
+            <a:pPr algn="ctr" indent="0" marL="0">
+              <a:buNone/>
+            </a:pPr>
+            <a:r>
+              <a:rPr lang="en-US" sz="1600" b="1" dirty="0">
+                <a:solidFill>
+                  <a:srgbClr val="FFFFFF"/>
+                </a:solidFill>
+                <a:latin typeface="Cambria" pitchFamily="34" charset="0"/>
+                <a:ea typeface="Cambria" pitchFamily="34" charset="-122"/>
+                <a:cs typeface="Cambria" pitchFamily="34" charset="-120"/>
+              </a:rPr>
+              <a:t>1</a:t>
+            </a:r>
+            <a:endParaRPr lang="en-US" sz="1600" dirty="0"/>
+          </a:p>
+        </p:txBody>
+      </p:sp>
+      <p:sp>
+        <p:nvSpPr>
+          <p:cNvPr id="7" name="Text 5"/>
+          <p:cNvSpPr txBox="1"/>
+          <p:nvPr/>
+        </p:nvSpPr>
+        <p:spPr>
+          <a:xfrm>
+            <a:off x="822960" y="2788920"/>
+            <a:ext cx="2087804" cy="457200"/>
+          </a:xfrm>
+          <a:prstGeom prst="rect">
+            <a:avLst/>
+          </a:prstGeom>
+          <a:noFill/>
+          <a:ln/>
+        </p:spPr>
+        <p:txBody>
+          <a:bodyPr wrap="square" lIns="0" tIns="0" rIns="0" bIns="0" rtlCol="0" anchor="ctr"/>
+          <a:lstStyle/>
+          <a:p>
+            <a:pPr algn="l" indent="0" marL="0">
+              <a:buNone/>
+            </a:pPr>
+            <a:r>
+              <a:rPr lang="en-US" sz="1400" b="1" dirty="0">
+                <a:solidFill>
+                  <a:srgbClr val="1C5A73"/>
+                </a:solidFill>
+                <a:latin typeface="Cambria" pitchFamily="34" charset="0"/>
+                <a:ea typeface="Cambria" pitchFamily="34" charset="-122"/>
+                <a:cs typeface="Cambria" pitchFamily="34" charset="-120"/>
+              </a:rPr>
+              <a:t>Distribution</a:t>
+            </a:r>
+            <a:endParaRPr lang="en-US" sz="1400" dirty="0"/>
+          </a:p>
+        </p:txBody>
+      </p:sp>
+      <p:sp>
+        <p:nvSpPr>
+          <p:cNvPr id="8" name="Text 6"/>
+          <p:cNvSpPr txBox="1"/>
+          <p:nvPr/>
+        </p:nvSpPr>
+        <p:spPr>
+          <a:xfrm>
+            <a:off x="822960" y="3291840"/>
+            <a:ext cx="2087804" cy="1234440"/>
           </a:xfrm>
           <a:prstGeom prst="rect">
             <a:avLst/>
@@ -8687,12 +8262,555 @@
           <a:p>
             <a:pPr algn="l" indent="0" marL="0">
               <a:lnSpc>
-                <a:spcPct val="118000"/>
+                <a:spcPct val="120000"/>
               </a:lnSpc>
               <a:buNone/>
             </a:pPr>
             <a:r>
-              <a:rPr lang="en-US" sz="1100" dirty="0">
+              <a:rPr lang="en-US" sz="1200" dirty="0">
+                <a:solidFill>
+                  <a:srgbClr val="31424A"/>
+                </a:solidFill>
+                <a:latin typeface="Calibri" pitchFamily="34" charset="0"/>
+                <a:ea typeface="Calibri" pitchFamily="34" charset="-122"/>
+                <a:cs typeface="Calibri" pitchFamily="34" charset="-120"/>
+              </a:rPr>
+              <a:t>Exclusivité territoriale et stock de lancement pour la première saison commerciale.</a:t>
+            </a:r>
+            <a:endParaRPr lang="en-US" sz="1200" dirty="0"/>
+          </a:p>
+        </p:txBody>
+      </p:sp>
+      <p:sp>
+        <p:nvSpPr>
+          <p:cNvPr id="9" name="Shape 7"/>
+          <p:cNvSpPr/>
+          <p:nvPr/>
+        </p:nvSpPr>
+        <p:spPr>
+          <a:xfrm>
+            <a:off x="3413684" y="1874520"/>
+            <a:ext cx="2545004" cy="2834640"/>
+          </a:xfrm>
+          <a:prstGeom prst="roundRect">
+            <a:avLst>
+              <a:gd name="adj" fmla="val 3593"/>
+            </a:avLst>
+          </a:prstGeom>
+          <a:solidFill>
+            <a:srgbClr val="EDF3F5"/>
+          </a:solidFill>
+          <a:ln w="9525">
+            <a:solidFill>
+              <a:srgbClr val="D6E2E7"/>
+            </a:solidFill>
+            <a:prstDash val="solid"/>
+          </a:ln>
+        </p:spPr>
+      </p:sp>
+      <p:sp>
+        <p:nvSpPr>
+          <p:cNvPr id="10" name="Shape 8"/>
+          <p:cNvSpPr/>
+          <p:nvPr/>
+        </p:nvSpPr>
+        <p:spPr>
+          <a:xfrm>
+            <a:off x="3642284" y="2103120"/>
+            <a:ext cx="566928" cy="566928"/>
+          </a:xfrm>
+          <a:prstGeom prst="ellipse">
+            <a:avLst/>
+          </a:prstGeom>
+          <a:solidFill>
+            <a:srgbClr val="1C5A73"/>
+          </a:solidFill>
+          <a:ln/>
+        </p:spPr>
+      </p:sp>
+      <p:sp>
+        <p:nvSpPr>
+          <p:cNvPr id="11" name="Text 9"/>
+          <p:cNvSpPr txBox="1"/>
+          <p:nvPr/>
+        </p:nvSpPr>
+        <p:spPr>
+          <a:xfrm>
+            <a:off x="3642284" y="2103120"/>
+            <a:ext cx="566928" cy="566928"/>
+          </a:xfrm>
+          <a:prstGeom prst="rect">
+            <a:avLst/>
+          </a:prstGeom>
+          <a:noFill/>
+          <a:ln/>
+        </p:spPr>
+        <p:txBody>
+          <a:bodyPr wrap="square" lIns="0" tIns="0" rIns="0" bIns="0" rtlCol="0" anchor="ctr"/>
+          <a:lstStyle/>
+          <a:p>
+            <a:pPr algn="ctr" indent="0" marL="0">
+              <a:buNone/>
+            </a:pPr>
+            <a:r>
+              <a:rPr lang="en-US" sz="1600" b="1" dirty="0">
+                <a:solidFill>
+                  <a:srgbClr val="FFFFFF"/>
+                </a:solidFill>
+                <a:latin typeface="Cambria" pitchFamily="34" charset="0"/>
+                <a:ea typeface="Cambria" pitchFamily="34" charset="-122"/>
+                <a:cs typeface="Cambria" pitchFamily="34" charset="-120"/>
+              </a:rPr>
+              <a:t>2</a:t>
+            </a:r>
+            <a:endParaRPr lang="en-US" sz="1600" dirty="0"/>
+          </a:p>
+        </p:txBody>
+      </p:sp>
+      <p:sp>
+        <p:nvSpPr>
+          <p:cNvPr id="12" name="Text 10"/>
+          <p:cNvSpPr txBox="1"/>
+          <p:nvPr/>
+        </p:nvSpPr>
+        <p:spPr>
+          <a:xfrm>
+            <a:off x="3642284" y="2788920"/>
+            <a:ext cx="2087804" cy="457200"/>
+          </a:xfrm>
+          <a:prstGeom prst="rect">
+            <a:avLst/>
+          </a:prstGeom>
+          <a:noFill/>
+          <a:ln/>
+        </p:spPr>
+        <p:txBody>
+          <a:bodyPr wrap="square" lIns="0" tIns="0" rIns="0" bIns="0" rtlCol="0" anchor="ctr"/>
+          <a:lstStyle/>
+          <a:p>
+            <a:pPr algn="l" indent="0" marL="0">
+              <a:buNone/>
+            </a:pPr>
+            <a:r>
+              <a:rPr lang="en-US" sz="1400" b="1" dirty="0">
+                <a:solidFill>
+                  <a:srgbClr val="1C5A73"/>
+                </a:solidFill>
+                <a:latin typeface="Cambria" pitchFamily="34" charset="0"/>
+                <a:ea typeface="Cambria" pitchFamily="34" charset="-122"/>
+                <a:cs typeface="Cambria" pitchFamily="34" charset="-120"/>
+              </a:rPr>
+              <a:t>Formation</a:t>
+            </a:r>
+            <a:endParaRPr lang="en-US" sz="1400" dirty="0"/>
+          </a:p>
+        </p:txBody>
+      </p:sp>
+      <p:sp>
+        <p:nvSpPr>
+          <p:cNvPr id="13" name="Text 11"/>
+          <p:cNvSpPr txBox="1"/>
+          <p:nvPr/>
+        </p:nvSpPr>
+        <p:spPr>
+          <a:xfrm>
+            <a:off x="3642284" y="3291840"/>
+            <a:ext cx="2087804" cy="1234440"/>
+          </a:xfrm>
+          <a:prstGeom prst="rect">
+            <a:avLst/>
+          </a:prstGeom>
+          <a:noFill/>
+          <a:ln/>
+        </p:spPr>
+        <p:txBody>
+          <a:bodyPr wrap="square" lIns="0" tIns="0" rIns="0" bIns="0" rtlCol="0" anchor="t"/>
+          <a:lstStyle/>
+          <a:p>
+            <a:pPr algn="l" indent="0" marL="0">
+              <a:lnSpc>
+                <a:spcPct val="120000"/>
+              </a:lnSpc>
+              <a:buNone/>
+            </a:pPr>
+            <a:r>
+              <a:rPr lang="en-US" sz="1200" dirty="0">
+                <a:solidFill>
+                  <a:srgbClr val="31424A"/>
+                </a:solidFill>
+                <a:latin typeface="Calibri" pitchFamily="34" charset="0"/>
+                <a:ea typeface="Calibri" pitchFamily="34" charset="-122"/>
+                <a:cs typeface="Calibri" pitchFamily="34" charset="-120"/>
+              </a:rPr>
+              <a:t>Formation technique des équipes, protocoles de dosage et mises à jour à chaque saison.</a:t>
+            </a:r>
+            <a:endParaRPr lang="en-US" sz="1200" dirty="0"/>
+          </a:p>
+        </p:txBody>
+      </p:sp>
+      <p:sp>
+        <p:nvSpPr>
+          <p:cNvPr id="14" name="Shape 12"/>
+          <p:cNvSpPr/>
+          <p:nvPr/>
+        </p:nvSpPr>
+        <p:spPr>
+          <a:xfrm>
+            <a:off x="6233008" y="1874520"/>
+            <a:ext cx="2545004" cy="2834640"/>
+          </a:xfrm>
+          <a:prstGeom prst="roundRect">
+            <a:avLst>
+              <a:gd name="adj" fmla="val 3593"/>
+            </a:avLst>
+          </a:prstGeom>
+          <a:solidFill>
+            <a:srgbClr val="EDF3F5"/>
+          </a:solidFill>
+          <a:ln w="9525">
+            <a:solidFill>
+              <a:srgbClr val="D6E2E7"/>
+            </a:solidFill>
+            <a:prstDash val="solid"/>
+          </a:ln>
+        </p:spPr>
+      </p:sp>
+      <p:sp>
+        <p:nvSpPr>
+          <p:cNvPr id="15" name="Shape 13"/>
+          <p:cNvSpPr/>
+          <p:nvPr/>
+        </p:nvSpPr>
+        <p:spPr>
+          <a:xfrm>
+            <a:off x="6461608" y="2103120"/>
+            <a:ext cx="566928" cy="566928"/>
+          </a:xfrm>
+          <a:prstGeom prst="ellipse">
+            <a:avLst/>
+          </a:prstGeom>
+          <a:solidFill>
+            <a:srgbClr val="1C5A73"/>
+          </a:solidFill>
+          <a:ln/>
+        </p:spPr>
+      </p:sp>
+      <p:sp>
+        <p:nvSpPr>
+          <p:cNvPr id="16" name="Text 14"/>
+          <p:cNvSpPr txBox="1"/>
+          <p:nvPr/>
+        </p:nvSpPr>
+        <p:spPr>
+          <a:xfrm>
+            <a:off x="6461608" y="2103120"/>
+            <a:ext cx="566928" cy="566928"/>
+          </a:xfrm>
+          <a:prstGeom prst="rect">
+            <a:avLst/>
+          </a:prstGeom>
+          <a:noFill/>
+          <a:ln/>
+        </p:spPr>
+        <p:txBody>
+          <a:bodyPr wrap="square" lIns="0" tIns="0" rIns="0" bIns="0" rtlCol="0" anchor="ctr"/>
+          <a:lstStyle/>
+          <a:p>
+            <a:pPr algn="ctr" indent="0" marL="0">
+              <a:buNone/>
+            </a:pPr>
+            <a:r>
+              <a:rPr lang="en-US" sz="1600" b="1" dirty="0">
+                <a:solidFill>
+                  <a:srgbClr val="FFFFFF"/>
+                </a:solidFill>
+                <a:latin typeface="Cambria" pitchFamily="34" charset="0"/>
+                <a:ea typeface="Cambria" pitchFamily="34" charset="-122"/>
+                <a:cs typeface="Cambria" pitchFamily="34" charset="-120"/>
+              </a:rPr>
+              <a:t>3</a:t>
+            </a:r>
+            <a:endParaRPr lang="en-US" sz="1600" dirty="0"/>
+          </a:p>
+        </p:txBody>
+      </p:sp>
+      <p:sp>
+        <p:nvSpPr>
+          <p:cNvPr id="17" name="Text 15"/>
+          <p:cNvSpPr txBox="1"/>
+          <p:nvPr/>
+        </p:nvSpPr>
+        <p:spPr>
+          <a:xfrm>
+            <a:off x="6461608" y="2788920"/>
+            <a:ext cx="2087804" cy="457200"/>
+          </a:xfrm>
+          <a:prstGeom prst="rect">
+            <a:avLst/>
+          </a:prstGeom>
+          <a:noFill/>
+          <a:ln/>
+        </p:spPr>
+        <p:txBody>
+          <a:bodyPr wrap="square" lIns="0" tIns="0" rIns="0" bIns="0" rtlCol="0" anchor="ctr"/>
+          <a:lstStyle/>
+          <a:p>
+            <a:pPr algn="l" indent="0" marL="0">
+              <a:buNone/>
+            </a:pPr>
+            <a:r>
+              <a:rPr lang="en-US" sz="1400" b="1" dirty="0">
+                <a:solidFill>
+                  <a:srgbClr val="1C5A73"/>
+                </a:solidFill>
+                <a:latin typeface="Cambria" pitchFamily="34" charset="0"/>
+                <a:ea typeface="Cambria" pitchFamily="34" charset="-122"/>
+                <a:cs typeface="Cambria" pitchFamily="34" charset="-120"/>
+              </a:rPr>
+              <a:t>Essais conjoints</a:t>
+            </a:r>
+            <a:endParaRPr lang="en-US" sz="1400" dirty="0"/>
+          </a:p>
+        </p:txBody>
+      </p:sp>
+      <p:sp>
+        <p:nvSpPr>
+          <p:cNvPr id="18" name="Text 16"/>
+          <p:cNvSpPr txBox="1"/>
+          <p:nvPr/>
+        </p:nvSpPr>
+        <p:spPr>
+          <a:xfrm>
+            <a:off x="6461608" y="3291840"/>
+            <a:ext cx="2087804" cy="1234440"/>
+          </a:xfrm>
+          <a:prstGeom prst="rect">
+            <a:avLst/>
+          </a:prstGeom>
+          <a:noFill/>
+          <a:ln/>
+        </p:spPr>
+        <p:txBody>
+          <a:bodyPr wrap="square" lIns="0" tIns="0" rIns="0" bIns="0" rtlCol="0" anchor="t"/>
+          <a:lstStyle/>
+          <a:p>
+            <a:pPr algn="l" indent="0" marL="0">
+              <a:lnSpc>
+                <a:spcPct val="120000"/>
+              </a:lnSpc>
+              <a:buNone/>
+            </a:pPr>
+            <a:r>
+              <a:rPr lang="en-US" sz="1200" dirty="0">
+                <a:solidFill>
+                  <a:srgbClr val="31424A"/>
+                </a:solidFill>
+                <a:latin typeface="Calibri" pitchFamily="34" charset="0"/>
+                <a:ea typeface="Calibri" pitchFamily="34" charset="-122"/>
+                <a:cs typeface="Calibri" pitchFamily="34" charset="-120"/>
+              </a:rPr>
+              <a:t>Parcelles de démonstration avec témoin, résultats partagés avec les producteurs.</a:t>
+            </a:r>
+            <a:endParaRPr lang="en-US" sz="1200" dirty="0"/>
+          </a:p>
+        </p:txBody>
+      </p:sp>
+      <p:sp>
+        <p:nvSpPr>
+          <p:cNvPr id="19" name="Shape 17"/>
+          <p:cNvSpPr/>
+          <p:nvPr/>
+        </p:nvSpPr>
+        <p:spPr>
+          <a:xfrm>
+            <a:off x="9052331" y="1874520"/>
+            <a:ext cx="2545004" cy="2834640"/>
+          </a:xfrm>
+          <a:prstGeom prst="roundRect">
+            <a:avLst>
+              <a:gd name="adj" fmla="val 3593"/>
+            </a:avLst>
+          </a:prstGeom>
+          <a:solidFill>
+            <a:srgbClr val="EDF3F5"/>
+          </a:solidFill>
+          <a:ln w="9525">
+            <a:solidFill>
+              <a:srgbClr val="D6E2E7"/>
+            </a:solidFill>
+            <a:prstDash val="solid"/>
+          </a:ln>
+        </p:spPr>
+      </p:sp>
+      <p:sp>
+        <p:nvSpPr>
+          <p:cNvPr id="20" name="Shape 18"/>
+          <p:cNvSpPr/>
+          <p:nvPr/>
+        </p:nvSpPr>
+        <p:spPr>
+          <a:xfrm>
+            <a:off x="9280931" y="2103120"/>
+            <a:ext cx="566928" cy="566928"/>
+          </a:xfrm>
+          <a:prstGeom prst="ellipse">
+            <a:avLst/>
+          </a:prstGeom>
+          <a:solidFill>
+            <a:srgbClr val="1C5A73"/>
+          </a:solidFill>
+          <a:ln/>
+        </p:spPr>
+      </p:sp>
+      <p:sp>
+        <p:nvSpPr>
+          <p:cNvPr id="21" name="Text 19"/>
+          <p:cNvSpPr txBox="1"/>
+          <p:nvPr/>
+        </p:nvSpPr>
+        <p:spPr>
+          <a:xfrm>
+            <a:off x="9280931" y="2103120"/>
+            <a:ext cx="566928" cy="566928"/>
+          </a:xfrm>
+          <a:prstGeom prst="rect">
+            <a:avLst/>
+          </a:prstGeom>
+          <a:noFill/>
+          <a:ln/>
+        </p:spPr>
+        <p:txBody>
+          <a:bodyPr wrap="square" lIns="0" tIns="0" rIns="0" bIns="0" rtlCol="0" anchor="ctr"/>
+          <a:lstStyle/>
+          <a:p>
+            <a:pPr algn="ctr" indent="0" marL="0">
+              <a:buNone/>
+            </a:pPr>
+            <a:r>
+              <a:rPr lang="en-US" sz="1600" b="1" dirty="0">
+                <a:solidFill>
+                  <a:srgbClr val="FFFFFF"/>
+                </a:solidFill>
+                <a:latin typeface="Cambria" pitchFamily="34" charset="0"/>
+                <a:ea typeface="Cambria" pitchFamily="34" charset="-122"/>
+                <a:cs typeface="Cambria" pitchFamily="34" charset="-120"/>
+              </a:rPr>
+              <a:t>4</a:t>
+            </a:r>
+            <a:endParaRPr lang="en-US" sz="1600" dirty="0"/>
+          </a:p>
+        </p:txBody>
+      </p:sp>
+      <p:sp>
+        <p:nvSpPr>
+          <p:cNvPr id="22" name="Text 20"/>
+          <p:cNvSpPr txBox="1"/>
+          <p:nvPr/>
+        </p:nvSpPr>
+        <p:spPr>
+          <a:xfrm>
+            <a:off x="9280931" y="2788920"/>
+            <a:ext cx="2087804" cy="457200"/>
+          </a:xfrm>
+          <a:prstGeom prst="rect">
+            <a:avLst/>
+          </a:prstGeom>
+          <a:noFill/>
+          <a:ln/>
+        </p:spPr>
+        <p:txBody>
+          <a:bodyPr wrap="square" lIns="0" tIns="0" rIns="0" bIns="0" rtlCol="0" anchor="ctr"/>
+          <a:lstStyle/>
+          <a:p>
+            <a:pPr algn="l" indent="0" marL="0">
+              <a:buNone/>
+            </a:pPr>
+            <a:r>
+              <a:rPr lang="en-US" sz="1400" b="1" dirty="0">
+                <a:solidFill>
+                  <a:srgbClr val="1C5A73"/>
+                </a:solidFill>
+                <a:latin typeface="Cambria" pitchFamily="34" charset="0"/>
+                <a:ea typeface="Cambria" pitchFamily="34" charset="-122"/>
+                <a:cs typeface="Cambria" pitchFamily="34" charset="-120"/>
+              </a:rPr>
+              <a:t>Institutions</a:t>
+            </a:r>
+            <a:endParaRPr lang="en-US" sz="1400" dirty="0"/>
+          </a:p>
+        </p:txBody>
+      </p:sp>
+      <p:sp>
+        <p:nvSpPr>
+          <p:cNvPr id="23" name="Text 21"/>
+          <p:cNvSpPr txBox="1"/>
+          <p:nvPr/>
+        </p:nvSpPr>
+        <p:spPr>
+          <a:xfrm>
+            <a:off x="9280931" y="3291840"/>
+            <a:ext cx="2087804" cy="1234440"/>
+          </a:xfrm>
+          <a:prstGeom prst="rect">
+            <a:avLst/>
+          </a:prstGeom>
+          <a:noFill/>
+          <a:ln/>
+        </p:spPr>
+        <p:txBody>
+          <a:bodyPr wrap="square" lIns="0" tIns="0" rIns="0" bIns="0" rtlCol="0" anchor="t"/>
+          <a:lstStyle/>
+          <a:p>
+            <a:pPr algn="l" indent="0" marL="0">
+              <a:lnSpc>
+                <a:spcPct val="120000"/>
+              </a:lnSpc>
+              <a:buNone/>
+            </a:pPr>
+            <a:r>
+              <a:rPr lang="en-US" sz="1200" dirty="0">
+                <a:solidFill>
+                  <a:srgbClr val="31424A"/>
+                </a:solidFill>
+                <a:latin typeface="Calibri" pitchFamily="34" charset="0"/>
+                <a:ea typeface="Calibri" pitchFamily="34" charset="-122"/>
+                <a:cs typeface="Calibri" pitchFamily="34" charset="-120"/>
+              </a:rPr>
+              <a:t>Dialogue avec le ministère de l'Agriculture et les programmes de sécurité alimentaire.</a:t>
+            </a:r>
+            <a:endParaRPr lang="en-US" sz="1200" dirty="0"/>
+          </a:p>
+        </p:txBody>
+      </p:sp>
+      <p:sp>
+        <p:nvSpPr>
+          <p:cNvPr id="24" name="Text 22"/>
+          <p:cNvSpPr txBox="1"/>
+          <p:nvPr/>
+        </p:nvSpPr>
+        <p:spPr>
+          <a:xfrm>
+            <a:off x="594360" y="4983480"/>
+            <a:ext cx="11002975" cy="822960"/>
+          </a:xfrm>
+          <a:prstGeom prst="rect">
+            <a:avLst/>
+          </a:prstGeom>
+          <a:noFill/>
+          <a:ln/>
+        </p:spPr>
+        <p:txBody>
+          <a:bodyPr wrap="square" lIns="0" tIns="0" rIns="0" bIns="0" rtlCol="0" anchor="t"/>
+          <a:lstStyle/>
+          <a:p>
+            <a:pPr algn="l" indent="0" marL="0">
+              <a:lnSpc>
+                <a:spcPct val="125000"/>
+              </a:lnSpc>
+              <a:buNone/>
+            </a:pPr>
+            <a:r>
+              <a:rPr lang="en-US" sz="1250" i="1" dirty="0">
                 <a:solidFill>
                   <a:srgbClr val="6C8089"/>
                 </a:solidFill>
@@ -8700,15 +8818,15 @@
                 <a:ea typeface="Calibri" pitchFamily="34" charset="-122"/>
                 <a:cs typeface="Calibri" pitchFamily="34" charset="-120"/>
               </a:rPr>
-              <a:t>Analyse acrylamide (laboratoire Polymex, ISO 9001, teneur inférieure à 3,0 µg/g) et screening REACH / SVHC (SGS) disponibles sur demande, ainsi que le certificat SOHISCERT valable jusqu'au 4 septembre 2027.</a:t>
-            </a:r>
-            <a:endParaRPr lang="en-US" sz="1100" dirty="0"/>
-          </a:p>
-        </p:txBody>
-      </p:sp>
-      <p:sp>
-        <p:nvSpPr>
-          <p:cNvPr id="10" name="Text 8"/>
+              <a:t>Le cadre s'adapte au territoire : un importateur, un distributeur d'intrants ou un groupement de producteurs peut porter le partenariat.</a:t>
+            </a:r>
+            <a:endParaRPr lang="en-US" sz="1250" dirty="0"/>
+          </a:p>
+        </p:txBody>
+      </p:sp>
+      <p:sp>
+        <p:nvSpPr>
+          <p:cNvPr id="25" name="Text 23"/>
           <p:cNvSpPr txBox="1"/>
           <p:nvPr/>
         </p:nvSpPr>
@@ -8749,7 +8867,7 @@
       </p:sp>
       <p:sp>
         <p:nvSpPr>
-          <p:cNvPr id="11" name="Text 9"/>
+          <p:cNvPr id="26" name="Text 24"/>
           <p:cNvSpPr txBox="1"/>
           <p:nvPr/>
         </p:nvSpPr>
@@ -8853,7 +8971,7 @@
                 <a:ea typeface="Calibri" pitchFamily="34" charset="-122"/>
                 <a:cs typeface="Calibri" pitchFamily="34" charset="-120"/>
               </a:rPr>
-              <a:t>Sources</a:t>
+              <a:t>CE QU'IL FAUT ANTICIPER</a:t>
             </a:r>
             <a:endParaRPr lang="en-US" sz="1150" dirty="0"/>
           </a:p>
@@ -8892,7 +9010,7 @@
                 <a:ea typeface="Cambria" pitchFamily="34" charset="-122"/>
                 <a:cs typeface="Cambria" pitchFamily="34" charset="-120"/>
               </a:rPr>
-              <a:t>Sources et hypothèses de travail</a:t>
+              <a:t>Risques identifiés et réponses</a:t>
             </a:r>
             <a:endParaRPr lang="en-US" sz="3000" dirty="0"/>
           </a:p>
@@ -8931,7 +9049,7 @@
                 <a:ea typeface="Cambria" pitchFamily="34" charset="-122"/>
                 <a:cs typeface="Cambria" pitchFamily="34" charset="-120"/>
               </a:rPr>
-              <a:t>Sources principales</a:t>
+              <a:t>Risques</a:t>
             </a:r>
             <a:endParaRPr lang="en-US" sz="1600" dirty="0"/>
           </a:p>
@@ -8977,7 +9095,7 @@
                 <a:ea typeface="Calibri" pitchFamily="34" charset="-122"/>
                 <a:cs typeface="Calibri" pitchFamily="34" charset="-120"/>
               </a:rPr>
-              <a:t>Direction générale de la statistique : comptes nationaux, commerce extérieur.</a:t>
+              <a:t>Marché intérieur étroit : environ 2,4 millions d'habitants et des exploitations vivrières de très petite taille.</a:t>
             </a:r>
             <a:endParaRPr lang="en-US" sz="1350" dirty="0"/>
           </a:p>
@@ -9001,7 +9119,7 @@
                 <a:ea typeface="Calibri" pitchFamily="34" charset="-122"/>
                 <a:cs typeface="Calibri" pitchFamily="34" charset="-120"/>
               </a:rPr>
-              <a:t>Ministère de l'Agriculture : programme GRAINE, statistiques agricoles.</a:t>
+              <a:t>Logistique intérieure difficile en saison des pluies, qui renchérit la distribution hors des axes principaux.</a:t>
             </a:r>
             <a:endParaRPr lang="en-US" sz="1350" dirty="0"/>
           </a:p>
@@ -9025,7 +9143,7 @@
                 <a:ea typeface="Calibri" pitchFamily="34" charset="-122"/>
                 <a:cs typeface="Calibri" pitchFamily="34" charset="-120"/>
               </a:rPr>
-              <a:t>Banque africaine de développement : profil agricole du Gabon.</a:t>
+              <a:t>Pluviométrie abondante : un essai conduit hors saison sèche masque l'intérêt du produit.</a:t>
             </a:r>
             <a:endParaRPr lang="en-US" sz="1350" dirty="0"/>
           </a:p>
@@ -9049,10 +9167,71 @@
                 <a:ea typeface="Calibri" pitchFamily="34" charset="-122"/>
                 <a:cs typeface="Calibri" pitchFamily="34" charset="-120"/>
               </a:rPr>
-              <a:t>FAO (FAOSTAT, AQUASTAT) et Banque mondiale (WDI).</a:t>
+              <a:t>Produit peu connu, parfois confondu avec les polymères à base de sodium vendus en jardinerie.</a:t>
             </a:r>
             <a:endParaRPr lang="en-US" sz="1350" dirty="0"/>
           </a:p>
+        </p:txBody>
+      </p:sp>
+      <p:sp>
+        <p:nvSpPr>
+          <p:cNvPr id="6" name="Text 4"/>
+          <p:cNvSpPr txBox="1"/>
+          <p:nvPr/>
+        </p:nvSpPr>
+        <p:spPr>
+          <a:xfrm>
+            <a:off x="6370168" y="1783080"/>
+            <a:ext cx="5227168" cy="411480"/>
+          </a:xfrm>
+          <a:prstGeom prst="rect">
+            <a:avLst/>
+          </a:prstGeom>
+          <a:noFill/>
+          <a:ln/>
+        </p:spPr>
+        <p:txBody>
+          <a:bodyPr wrap="square" lIns="0" tIns="0" rIns="0" bIns="0" rtlCol="0" anchor="ctr"/>
+          <a:lstStyle/>
+          <a:p>
+            <a:pPr algn="l" indent="0" marL="0">
+              <a:buNone/>
+            </a:pPr>
+            <a:r>
+              <a:rPr lang="en-US" sz="1600" b="1" dirty="0">
+                <a:solidFill>
+                  <a:srgbClr val="1C5A73"/>
+                </a:solidFill>
+                <a:latin typeface="Cambria" pitchFamily="34" charset="0"/>
+                <a:ea typeface="Cambria" pitchFamily="34" charset="-122"/>
+                <a:cs typeface="Cambria" pitchFamily="34" charset="-120"/>
+              </a:rPr>
+              <a:t>Réponses</a:t>
+            </a:r>
+            <a:endParaRPr lang="en-US" sz="1600" dirty="0"/>
+          </a:p>
+        </p:txBody>
+      </p:sp>
+      <p:sp>
+        <p:nvSpPr>
+          <p:cNvPr id="7" name="Text 5"/>
+          <p:cNvSpPr txBox="1"/>
+          <p:nvPr/>
+        </p:nvSpPr>
+        <p:spPr>
+          <a:xfrm>
+            <a:off x="6370168" y="2286000"/>
+            <a:ext cx="5227168" cy="2468880"/>
+          </a:xfrm>
+          <a:prstGeom prst="rect">
+            <a:avLst/>
+          </a:prstGeom>
+          <a:noFill/>
+          <a:ln/>
+        </p:spPr>
+        <p:txBody>
+          <a:bodyPr wrap="square" lIns="0" tIns="0" rIns="0" bIns="0" rtlCol="0" anchor="t"/>
+          <a:lstStyle/>
           <a:p>
             <a:pPr algn="l" marL="342900" indent="-342900">
               <a:lnSpc>
@@ -9073,71 +9252,10 @@
                 <a:ea typeface="Calibri" pitchFamily="34" charset="-122"/>
                 <a:cs typeface="Calibri" pitchFamily="34" charset="-120"/>
               </a:rPr>
-              <a:t>Photographies : Estrella230 (CC BY-SA 4.0) — via Wikimedia Commons.</a:t>
+              <a:t>Concentrer les premiers volumes sur les plantations industrielles et les coopératives maraîchères péri-urbaines.</a:t>
             </a:r>
             <a:endParaRPr lang="en-US" sz="1350" dirty="0"/>
           </a:p>
-        </p:txBody>
-      </p:sp>
-      <p:sp>
-        <p:nvSpPr>
-          <p:cNvPr id="6" name="Text 4"/>
-          <p:cNvSpPr txBox="1"/>
-          <p:nvPr/>
-        </p:nvSpPr>
-        <p:spPr>
-          <a:xfrm>
-            <a:off x="6370168" y="1783080"/>
-            <a:ext cx="5227168" cy="411480"/>
-          </a:xfrm>
-          <a:prstGeom prst="rect">
-            <a:avLst/>
-          </a:prstGeom>
-          <a:noFill/>
-          <a:ln/>
-        </p:spPr>
-        <p:txBody>
-          <a:bodyPr wrap="square" lIns="0" tIns="0" rIns="0" bIns="0" rtlCol="0" anchor="ctr"/>
-          <a:lstStyle/>
-          <a:p>
-            <a:pPr algn="l" indent="0" marL="0">
-              <a:buNone/>
-            </a:pPr>
-            <a:r>
-              <a:rPr lang="en-US" sz="1600" b="1" dirty="0">
-                <a:solidFill>
-                  <a:srgbClr val="1C5A73"/>
-                </a:solidFill>
-                <a:latin typeface="Cambria" pitchFamily="34" charset="0"/>
-                <a:ea typeface="Cambria" pitchFamily="34" charset="-122"/>
-                <a:cs typeface="Cambria" pitchFamily="34" charset="-120"/>
-              </a:rPr>
-              <a:t>Hypothèses de travail</a:t>
-            </a:r>
-            <a:endParaRPr lang="en-US" sz="1600" dirty="0"/>
-          </a:p>
-        </p:txBody>
-      </p:sp>
-      <p:sp>
-        <p:nvSpPr>
-          <p:cNvPr id="7" name="Text 5"/>
-          <p:cNvSpPr txBox="1"/>
-          <p:nvPr/>
-        </p:nvSpPr>
-        <p:spPr>
-          <a:xfrm>
-            <a:off x="6370168" y="2286000"/>
-            <a:ext cx="5227168" cy="2468880"/>
-          </a:xfrm>
-          <a:prstGeom prst="rect">
-            <a:avLst/>
-          </a:prstGeom>
-          <a:noFill/>
-          <a:ln/>
-        </p:spPr>
-        <p:txBody>
-          <a:bodyPr wrap="square" lIns="0" tIns="0" rIns="0" bIns="0" rtlCol="0" anchor="t"/>
-          <a:lstStyle/>
           <a:p>
             <a:pPr algn="l" marL="342900" indent="-342900">
               <a:lnSpc>
@@ -9158,7 +9276,7 @@
                 <a:ea typeface="Calibri" pitchFamily="34" charset="-122"/>
                 <a:cs typeface="Calibri" pitchFamily="34" charset="-120"/>
               </a:rPr>
-              <a:t>Les chiffres sont des ordres de grandeur arrondis, tirés des dernières données publiques disponibles.</a:t>
+              <a:t>Grouper les commandes sur un conteneur via le port d'Owendo, avec un stock tampon à Libreville.</a:t>
             </a:r>
             <a:endParaRPr lang="en-US" sz="1350" dirty="0"/>
           </a:p>
@@ -9182,7 +9300,7 @@
                 <a:ea typeface="Calibri" pitchFamily="34" charset="-122"/>
                 <a:cs typeface="Calibri" pitchFamily="34" charset="-120"/>
               </a:rPr>
-              <a:t>Les gains d'eau et de rendement sont indicatifs et varient selon le sol, le climat et la culture.</a:t>
+              <a:t>Programmer systématiquement l'essai de mai à octobre, pour couvrir la grande saison sèche.</a:t>
             </a:r>
             <a:endParaRPr lang="en-US" sz="1350" dirty="0"/>
           </a:p>
@@ -9206,7 +9324,7 @@
                 <a:ea typeface="Calibri" pitchFamily="34" charset="-122"/>
                 <a:cs typeface="Calibri" pitchFamily="34" charset="-120"/>
               </a:rPr>
-              <a:t>Document de travail commercial : chiffres à actualiser avant toute soumission officielle.</a:t>
+              <a:t>Documenter la formulation potassique, sans sodium, compatible avec les cultures alimentaires.</a:t>
             </a:r>
             <a:endParaRPr lang="en-US" sz="1350" dirty="0"/>
           </a:p>
@@ -9275,7 +9393,7 @@
                 <a:ea typeface="Calibri" pitchFamily="34" charset="-122"/>
                 <a:cs typeface="Calibri" pitchFamily="34" charset="-120"/>
               </a:rPr>
-              <a:t>Rapports d'essais, certificats (SOHISCERT, analyses Polymex et SGS) et fiches techniques : disponibles sur demande.</a:t>
+              <a:t>Analyse acrylamide (laboratoire Polymex, ISO 9001, teneur inférieure à 3,0 µg/g) et screening REACH / SVHC (SGS) disponibles sur demande, ainsi que le certificat SOHISCERT valable jusqu'au 4 septembre 2027.</a:t>
             </a:r>
             <a:endParaRPr lang="en-US" sz="1100" dirty="0"/>
           </a:p>
@@ -9374,6 +9492,605 @@
 <file path=ppt/slides/slide18.xml><?xml version="1.0" encoding="utf-8"?>
 <p:sld xmlns:a="http://schemas.openxmlformats.org/drawingml/2006/main" xmlns:r="http://schemas.openxmlformats.org/officeDocument/2006/relationships" xmlns:p="http://schemas.openxmlformats.org/presentationml/2006/main">
   <p:cSld name="Slide 18">
+    <p:bg>
+      <p:bgPr>
+        <a:solidFill>
+          <a:srgbClr val="FAFBFB"/>
+        </a:solidFill>
+      </p:bgPr>
+    </p:bg>
+    <p:spTree>
+      <p:nvGrpSpPr>
+        <p:cNvPr id="1" name=""/>
+        <p:cNvGrpSpPr/>
+        <p:nvPr/>
+      </p:nvGrpSpPr>
+      <p:grpSpPr>
+        <a:xfrm>
+          <a:off x="0" y="0"/>
+          <a:ext cx="0" cy="0"/>
+          <a:chOff x="0" y="0"/>
+          <a:chExt cx="0" cy="0"/>
+        </a:xfrm>
+      </p:grpSpPr>
+      <p:sp>
+        <p:nvSpPr>
+          <p:cNvPr id="2" name="Text 0"/>
+          <p:cNvSpPr txBox="1"/>
+          <p:nvPr/>
+        </p:nvSpPr>
+        <p:spPr>
+          <a:xfrm>
+            <a:off x="594360" y="411480"/>
+            <a:ext cx="10515600" cy="274320"/>
+          </a:xfrm>
+          <a:prstGeom prst="rect">
+            <a:avLst/>
+          </a:prstGeom>
+          <a:noFill/>
+          <a:ln/>
+        </p:spPr>
+        <p:txBody>
+          <a:bodyPr wrap="square" lIns="0" tIns="0" rIns="0" bIns="0" rtlCol="0" anchor="ctr"/>
+          <a:lstStyle/>
+          <a:p>
+            <a:pPr algn="l" indent="0" marL="0">
+              <a:buNone/>
+            </a:pPr>
+            <a:r>
+              <a:rPr lang="en-US" sz="1150" b="1" spc="200" kern="0" dirty="0">
+                <a:solidFill>
+                  <a:srgbClr val="E0A33E"/>
+                </a:solidFill>
+                <a:latin typeface="Calibri" pitchFamily="34" charset="0"/>
+                <a:ea typeface="Calibri" pitchFamily="34" charset="-122"/>
+                <a:cs typeface="Calibri" pitchFamily="34" charset="-120"/>
+              </a:rPr>
+              <a:t>Sources</a:t>
+            </a:r>
+            <a:endParaRPr lang="en-US" sz="1150" dirty="0"/>
+          </a:p>
+        </p:txBody>
+      </p:sp>
+      <p:sp>
+        <p:nvSpPr>
+          <p:cNvPr id="3" name="Text 1"/>
+          <p:cNvSpPr txBox="1"/>
+          <p:nvPr/>
+        </p:nvSpPr>
+        <p:spPr>
+          <a:xfrm>
+            <a:off x="594360" y="731520"/>
+            <a:ext cx="10881360" cy="731520"/>
+          </a:xfrm>
+          <a:prstGeom prst="rect">
+            <a:avLst/>
+          </a:prstGeom>
+          <a:noFill/>
+          <a:ln/>
+        </p:spPr>
+        <p:txBody>
+          <a:bodyPr wrap="square" lIns="0" tIns="0" rIns="0" bIns="0" rtlCol="0" anchor="ctr"/>
+          <a:lstStyle/>
+          <a:p>
+            <a:pPr algn="l" indent="0" marL="0">
+              <a:buNone/>
+            </a:pPr>
+            <a:r>
+              <a:rPr lang="en-US" sz="3000" b="1" dirty="0">
+                <a:solidFill>
+                  <a:srgbClr val="0E3546"/>
+                </a:solidFill>
+                <a:latin typeface="Cambria" pitchFamily="34" charset="0"/>
+                <a:ea typeface="Cambria" pitchFamily="34" charset="-122"/>
+                <a:cs typeface="Cambria" pitchFamily="34" charset="-120"/>
+              </a:rPr>
+              <a:t>Sources et hypothèses de travail</a:t>
+            </a:r>
+            <a:endParaRPr lang="en-US" sz="3000" dirty="0"/>
+          </a:p>
+        </p:txBody>
+      </p:sp>
+      <p:sp>
+        <p:nvSpPr>
+          <p:cNvPr id="4" name="Text 2"/>
+          <p:cNvSpPr txBox="1"/>
+          <p:nvPr/>
+        </p:nvSpPr>
+        <p:spPr>
+          <a:xfrm>
+            <a:off x="594360" y="1783080"/>
+            <a:ext cx="5227168" cy="411480"/>
+          </a:xfrm>
+          <a:prstGeom prst="rect">
+            <a:avLst/>
+          </a:prstGeom>
+          <a:noFill/>
+          <a:ln/>
+        </p:spPr>
+        <p:txBody>
+          <a:bodyPr wrap="square" lIns="0" tIns="0" rIns="0" bIns="0" rtlCol="0" anchor="ctr"/>
+          <a:lstStyle/>
+          <a:p>
+            <a:pPr algn="l" indent="0" marL="0">
+              <a:buNone/>
+            </a:pPr>
+            <a:r>
+              <a:rPr lang="en-US" sz="1600" b="1" dirty="0">
+                <a:solidFill>
+                  <a:srgbClr val="1C5A73"/>
+                </a:solidFill>
+                <a:latin typeface="Cambria" pitchFamily="34" charset="0"/>
+                <a:ea typeface="Cambria" pitchFamily="34" charset="-122"/>
+                <a:cs typeface="Cambria" pitchFamily="34" charset="-120"/>
+              </a:rPr>
+              <a:t>Sources principales</a:t>
+            </a:r>
+            <a:endParaRPr lang="en-US" sz="1600" dirty="0"/>
+          </a:p>
+        </p:txBody>
+      </p:sp>
+      <p:sp>
+        <p:nvSpPr>
+          <p:cNvPr id="5" name="Text 3"/>
+          <p:cNvSpPr txBox="1"/>
+          <p:nvPr/>
+        </p:nvSpPr>
+        <p:spPr>
+          <a:xfrm>
+            <a:off x="594360" y="2286000"/>
+            <a:ext cx="5227168" cy="2468880"/>
+          </a:xfrm>
+          <a:prstGeom prst="rect">
+            <a:avLst/>
+          </a:prstGeom>
+          <a:noFill/>
+          <a:ln/>
+        </p:spPr>
+        <p:txBody>
+          <a:bodyPr wrap="square" lIns="0" tIns="0" rIns="0" bIns="0" rtlCol="0" anchor="t"/>
+          <a:lstStyle/>
+          <a:p>
+            <a:pPr algn="l" marL="342900" indent="-342900">
+              <a:lnSpc>
+                <a:spcPct val="122000"/>
+              </a:lnSpc>
+              <a:spcAft>
+                <a:spcPts val="1000"/>
+              </a:spcAft>
+              <a:buSzPct val="100000"/>
+              <a:buChar char="•"/>
+            </a:pPr>
+            <a:r>
+              <a:rPr lang="en-US" sz="1350" dirty="0">
+                <a:solidFill>
+                  <a:srgbClr val="31424A"/>
+                </a:solidFill>
+                <a:latin typeface="Calibri" pitchFamily="34" charset="0"/>
+                <a:ea typeface="Calibri" pitchFamily="34" charset="-122"/>
+                <a:cs typeface="Calibri" pitchFamily="34" charset="-120"/>
+              </a:rPr>
+              <a:t>Direction générale de la statistique : comptes nationaux, commerce extérieur.</a:t>
+            </a:r>
+            <a:endParaRPr lang="en-US" sz="1350" dirty="0"/>
+          </a:p>
+          <a:p>
+            <a:pPr algn="l" marL="342900" indent="-342900">
+              <a:lnSpc>
+                <a:spcPct val="122000"/>
+              </a:lnSpc>
+              <a:spcAft>
+                <a:spcPts val="1000"/>
+              </a:spcAft>
+              <a:buSzPct val="100000"/>
+              <a:buChar char="•"/>
+            </a:pPr>
+            <a:r>
+              <a:rPr lang="en-US" sz="1350" dirty="0">
+                <a:solidFill>
+                  <a:srgbClr val="31424A"/>
+                </a:solidFill>
+                <a:latin typeface="Calibri" pitchFamily="34" charset="0"/>
+                <a:ea typeface="Calibri" pitchFamily="34" charset="-122"/>
+                <a:cs typeface="Calibri" pitchFamily="34" charset="-120"/>
+              </a:rPr>
+              <a:t>Ministère de l'Agriculture : programme GRAINE, statistiques agricoles.</a:t>
+            </a:r>
+            <a:endParaRPr lang="en-US" sz="1350" dirty="0"/>
+          </a:p>
+          <a:p>
+            <a:pPr algn="l" marL="342900" indent="-342900">
+              <a:lnSpc>
+                <a:spcPct val="122000"/>
+              </a:lnSpc>
+              <a:spcAft>
+                <a:spcPts val="1000"/>
+              </a:spcAft>
+              <a:buSzPct val="100000"/>
+              <a:buChar char="•"/>
+            </a:pPr>
+            <a:r>
+              <a:rPr lang="en-US" sz="1350" dirty="0">
+                <a:solidFill>
+                  <a:srgbClr val="31424A"/>
+                </a:solidFill>
+                <a:latin typeface="Calibri" pitchFamily="34" charset="0"/>
+                <a:ea typeface="Calibri" pitchFamily="34" charset="-122"/>
+                <a:cs typeface="Calibri" pitchFamily="34" charset="-120"/>
+              </a:rPr>
+              <a:t>Banque africaine de développement : profil agricole du Gabon.</a:t>
+            </a:r>
+            <a:endParaRPr lang="en-US" sz="1350" dirty="0"/>
+          </a:p>
+          <a:p>
+            <a:pPr algn="l" marL="342900" indent="-342900">
+              <a:lnSpc>
+                <a:spcPct val="122000"/>
+              </a:lnSpc>
+              <a:spcAft>
+                <a:spcPts val="1000"/>
+              </a:spcAft>
+              <a:buSzPct val="100000"/>
+              <a:buChar char="•"/>
+            </a:pPr>
+            <a:r>
+              <a:rPr lang="en-US" sz="1350" dirty="0">
+                <a:solidFill>
+                  <a:srgbClr val="31424A"/>
+                </a:solidFill>
+                <a:latin typeface="Calibri" pitchFamily="34" charset="0"/>
+                <a:ea typeface="Calibri" pitchFamily="34" charset="-122"/>
+                <a:cs typeface="Calibri" pitchFamily="34" charset="-120"/>
+              </a:rPr>
+              <a:t>FAO (FAOSTAT, AQUASTAT) et Banque mondiale (WDI).</a:t>
+            </a:r>
+            <a:endParaRPr lang="en-US" sz="1350" dirty="0"/>
+          </a:p>
+          <a:p>
+            <a:pPr algn="l" marL="342900" indent="-342900">
+              <a:lnSpc>
+                <a:spcPct val="122000"/>
+              </a:lnSpc>
+              <a:spcAft>
+                <a:spcPts val="1000"/>
+              </a:spcAft>
+              <a:buSzPct val="100000"/>
+              <a:buChar char="•"/>
+            </a:pPr>
+            <a:r>
+              <a:rPr lang="en-US" sz="1350" dirty="0">
+                <a:solidFill>
+                  <a:srgbClr val="31424A"/>
+                </a:solidFill>
+                <a:latin typeface="Calibri" pitchFamily="34" charset="0"/>
+                <a:ea typeface="Calibri" pitchFamily="34" charset="-122"/>
+                <a:cs typeface="Calibri" pitchFamily="34" charset="-120"/>
+              </a:rPr>
+              <a:t>UNCCD, Drought in Numbers 2022 : nombre et durée des sécheresses, +29 % depuis 2000 par rapport à 1980–1999.</a:t>
+            </a:r>
+            <a:endParaRPr lang="en-US" sz="1350" dirty="0"/>
+          </a:p>
+          <a:p>
+            <a:pPr algn="l" marL="342900" indent="-342900">
+              <a:lnSpc>
+                <a:spcPct val="122000"/>
+              </a:lnSpc>
+              <a:spcAft>
+                <a:spcPts val="1000"/>
+              </a:spcAft>
+              <a:buSzPct val="100000"/>
+              <a:buChar char="•"/>
+            </a:pPr>
+            <a:r>
+              <a:rPr lang="en-US" sz="1350" dirty="0">
+                <a:solidFill>
+                  <a:srgbClr val="31424A"/>
+                </a:solidFill>
+                <a:latin typeface="Calibri" pitchFamily="34" charset="0"/>
+                <a:ea typeface="Calibri" pitchFamily="34" charset="-122"/>
+                <a:cs typeface="Calibri" pitchFamily="34" charset="-120"/>
+              </a:rPr>
+              <a:t>ONU-Eau / FAO AQUASTAT, indicateur ODD 6.4.2 : définition et seuils du stress hydrique.</a:t>
+            </a:r>
+            <a:endParaRPr lang="en-US" sz="1350" dirty="0"/>
+          </a:p>
+        </p:txBody>
+      </p:sp>
+      <p:sp>
+        <p:nvSpPr>
+          <p:cNvPr id="6" name="Text 4"/>
+          <p:cNvSpPr txBox="1"/>
+          <p:nvPr/>
+        </p:nvSpPr>
+        <p:spPr>
+          <a:xfrm>
+            <a:off x="6370168" y="1783080"/>
+            <a:ext cx="5227168" cy="411480"/>
+          </a:xfrm>
+          <a:prstGeom prst="rect">
+            <a:avLst/>
+          </a:prstGeom>
+          <a:noFill/>
+          <a:ln/>
+        </p:spPr>
+        <p:txBody>
+          <a:bodyPr wrap="square" lIns="0" tIns="0" rIns="0" bIns="0" rtlCol="0" anchor="ctr"/>
+          <a:lstStyle/>
+          <a:p>
+            <a:pPr algn="l" indent="0" marL="0">
+              <a:buNone/>
+            </a:pPr>
+            <a:r>
+              <a:rPr lang="en-US" sz="1600" b="1" dirty="0">
+                <a:solidFill>
+                  <a:srgbClr val="1C5A73"/>
+                </a:solidFill>
+                <a:latin typeface="Cambria" pitchFamily="34" charset="0"/>
+                <a:ea typeface="Cambria" pitchFamily="34" charset="-122"/>
+                <a:cs typeface="Cambria" pitchFamily="34" charset="-120"/>
+              </a:rPr>
+              <a:t>Hypothèses de travail</a:t>
+            </a:r>
+            <a:endParaRPr lang="en-US" sz="1600" dirty="0"/>
+          </a:p>
+        </p:txBody>
+      </p:sp>
+      <p:sp>
+        <p:nvSpPr>
+          <p:cNvPr id="7" name="Text 5"/>
+          <p:cNvSpPr txBox="1"/>
+          <p:nvPr/>
+        </p:nvSpPr>
+        <p:spPr>
+          <a:xfrm>
+            <a:off x="6370168" y="2286000"/>
+            <a:ext cx="5227168" cy="2468880"/>
+          </a:xfrm>
+          <a:prstGeom prst="rect">
+            <a:avLst/>
+          </a:prstGeom>
+          <a:noFill/>
+          <a:ln/>
+        </p:spPr>
+        <p:txBody>
+          <a:bodyPr wrap="square" lIns="0" tIns="0" rIns="0" bIns="0" rtlCol="0" anchor="t"/>
+          <a:lstStyle/>
+          <a:p>
+            <a:pPr algn="l" marL="342900" indent="-342900">
+              <a:lnSpc>
+                <a:spcPct val="122000"/>
+              </a:lnSpc>
+              <a:spcAft>
+                <a:spcPts val="1000"/>
+              </a:spcAft>
+              <a:buSzPct val="100000"/>
+              <a:buChar char="•"/>
+            </a:pPr>
+            <a:r>
+              <a:rPr lang="en-US" sz="1350" dirty="0">
+                <a:solidFill>
+                  <a:srgbClr val="31424A"/>
+                </a:solidFill>
+                <a:latin typeface="Calibri" pitchFamily="34" charset="0"/>
+                <a:ea typeface="Calibri" pitchFamily="34" charset="-122"/>
+                <a:cs typeface="Calibri" pitchFamily="34" charset="-120"/>
+              </a:rPr>
+              <a:t>Les chiffres sont des ordres de grandeur arrondis, tirés des dernières données publiques disponibles.</a:t>
+            </a:r>
+            <a:endParaRPr lang="en-US" sz="1350" dirty="0"/>
+          </a:p>
+          <a:p>
+            <a:pPr algn="l" marL="342900" indent="-342900">
+              <a:lnSpc>
+                <a:spcPct val="122000"/>
+              </a:lnSpc>
+              <a:spcAft>
+                <a:spcPts val="1000"/>
+              </a:spcAft>
+              <a:buSzPct val="100000"/>
+              <a:buChar char="•"/>
+            </a:pPr>
+            <a:r>
+              <a:rPr lang="en-US" sz="1350" dirty="0">
+                <a:solidFill>
+                  <a:srgbClr val="31424A"/>
+                </a:solidFill>
+                <a:latin typeface="Calibri" pitchFamily="34" charset="0"/>
+                <a:ea typeface="Calibri" pitchFamily="34" charset="-122"/>
+                <a:cs typeface="Calibri" pitchFamily="34" charset="-120"/>
+              </a:rPr>
+              <a:t>Les gains d'eau et de rendement sont indicatifs et varient selon le sol, le climat et la culture.</a:t>
+            </a:r>
+            <a:endParaRPr lang="en-US" sz="1350" dirty="0"/>
+          </a:p>
+          <a:p>
+            <a:pPr algn="l" marL="342900" indent="-342900">
+              <a:lnSpc>
+                <a:spcPct val="122000"/>
+              </a:lnSpc>
+              <a:spcAft>
+                <a:spcPts val="1000"/>
+              </a:spcAft>
+              <a:buSzPct val="100000"/>
+              <a:buChar char="•"/>
+            </a:pPr>
+            <a:r>
+              <a:rPr lang="en-US" sz="1350" dirty="0">
+                <a:solidFill>
+                  <a:srgbClr val="31424A"/>
+                </a:solidFill>
+                <a:latin typeface="Calibri" pitchFamily="34" charset="0"/>
+                <a:ea typeface="Calibri" pitchFamily="34" charset="-122"/>
+                <a:cs typeface="Calibri" pitchFamily="34" charset="-120"/>
+              </a:rPr>
+              <a:t>Document de travail commercial : chiffres à actualiser avant toute soumission officielle.</a:t>
+            </a:r>
+            <a:endParaRPr lang="en-US" sz="1350" dirty="0"/>
+          </a:p>
+        </p:txBody>
+      </p:sp>
+      <p:sp>
+        <p:nvSpPr>
+          <p:cNvPr id="8" name="Shape 6"/>
+          <p:cNvSpPr/>
+          <p:nvPr/>
+        </p:nvSpPr>
+        <p:spPr>
+          <a:xfrm>
+            <a:off x="594360" y="4846320"/>
+            <a:ext cx="11002975" cy="960120"/>
+          </a:xfrm>
+          <a:prstGeom prst="roundRect">
+            <a:avLst>
+              <a:gd name="adj" fmla="val 7619"/>
+            </a:avLst>
+          </a:prstGeom>
+          <a:solidFill>
+            <a:srgbClr val="EDF3F5"/>
+          </a:solidFill>
+          <a:ln w="9525">
+            <a:solidFill>
+              <a:srgbClr val="D6E2E7"/>
+            </a:solidFill>
+            <a:prstDash val="solid"/>
+          </a:ln>
+        </p:spPr>
+      </p:sp>
+      <p:sp>
+        <p:nvSpPr>
+          <p:cNvPr id="9" name="Text 7"/>
+          <p:cNvSpPr txBox="1"/>
+          <p:nvPr/>
+        </p:nvSpPr>
+        <p:spPr>
+          <a:xfrm>
+            <a:off x="822960" y="4983480"/>
+            <a:ext cx="10545775" cy="713232"/>
+          </a:xfrm>
+          <a:prstGeom prst="rect">
+            <a:avLst/>
+          </a:prstGeom>
+          <a:noFill/>
+          <a:ln/>
+        </p:spPr>
+        <p:txBody>
+          <a:bodyPr wrap="square" lIns="0" tIns="0" rIns="0" bIns="0" rtlCol="0" anchor="t"/>
+          <a:lstStyle/>
+          <a:p>
+            <a:pPr algn="l" indent="0" marL="0">
+              <a:lnSpc>
+                <a:spcPct val="118000"/>
+              </a:lnSpc>
+              <a:buNone/>
+            </a:pPr>
+            <a:r>
+              <a:rPr lang="en-US" sz="1100" dirty="0">
+                <a:solidFill>
+                  <a:srgbClr val="6C8089"/>
+                </a:solidFill>
+                <a:latin typeface="Calibri" pitchFamily="34" charset="0"/>
+                <a:ea typeface="Calibri" pitchFamily="34" charset="-122"/>
+                <a:cs typeface="Calibri" pitchFamily="34" charset="-120"/>
+              </a:rPr>
+              <a:t>Rapports d'essais, certificats (SOHISCERT, analyses Polymex et SGS) et fiches techniques : disponibles sur demande.</a:t>
+            </a:r>
+            <a:endParaRPr lang="en-US" sz="1100" dirty="0"/>
+          </a:p>
+        </p:txBody>
+      </p:sp>
+      <p:sp>
+        <p:nvSpPr>
+          <p:cNvPr id="10" name="Text 8"/>
+          <p:cNvSpPr txBox="1"/>
+          <p:nvPr/>
+        </p:nvSpPr>
+        <p:spPr>
+          <a:xfrm>
+            <a:off x="502920" y="6382512"/>
+            <a:ext cx="8229600" cy="274320"/>
+          </a:xfrm>
+          <a:prstGeom prst="rect">
+            <a:avLst/>
+          </a:prstGeom>
+          <a:noFill/>
+          <a:ln/>
+        </p:spPr>
+        <p:txBody>
+          <a:bodyPr wrap="square" lIns="0" tIns="0" rIns="0" bIns="0" rtlCol="0" anchor="ctr"/>
+          <a:lstStyle/>
+          <a:p>
+            <a:pPr algn="l" indent="0" marL="0">
+              <a:buNone/>
+            </a:pPr>
+            <a:r>
+              <a:rPr lang="en-US" sz="950" dirty="0">
+                <a:solidFill>
+                  <a:srgbClr val="6C8089">
+                    <a:alpha val="80000"/>
+                  </a:srgbClr>
+                </a:solidFill>
+                <a:latin typeface="Calibri" pitchFamily="34" charset="0"/>
+                <a:ea typeface="Calibri" pitchFamily="34" charset="-122"/>
+                <a:cs typeface="Calibri" pitchFamily="34" charset="-120"/>
+              </a:rPr>
+              <a:t>Green Solutions · Dossier marché Gabon</a:t>
+            </a:r>
+            <a:endParaRPr lang="en-US" sz="950" dirty="0"/>
+          </a:p>
+        </p:txBody>
+      </p:sp>
+      <p:sp>
+        <p:nvSpPr>
+          <p:cNvPr id="11" name="Text 9"/>
+          <p:cNvSpPr txBox="1"/>
+          <p:nvPr/>
+        </p:nvSpPr>
+        <p:spPr>
+          <a:xfrm>
+            <a:off x="11140135" y="6382512"/>
+            <a:ext cx="548640" cy="274320"/>
+          </a:xfrm>
+          <a:prstGeom prst="rect">
+            <a:avLst/>
+          </a:prstGeom>
+          <a:noFill/>
+          <a:ln/>
+        </p:spPr>
+        <p:txBody>
+          <a:bodyPr wrap="square" lIns="0" tIns="0" rIns="0" bIns="0" rtlCol="0" anchor="ctr"/>
+          <a:lstStyle/>
+          <a:p>
+            <a:pPr algn="r" indent="0" marL="0">
+              <a:buNone/>
+            </a:pPr>
+            <a:r>
+              <a:rPr lang="en-US" sz="950" dirty="0">
+                <a:solidFill>
+                  <a:srgbClr val="6C8089">
+                    <a:alpha val="80000"/>
+                  </a:srgbClr>
+                </a:solidFill>
+                <a:latin typeface="Calibri" pitchFamily="34" charset="0"/>
+                <a:ea typeface="Calibri" pitchFamily="34" charset="-122"/>
+                <a:cs typeface="Calibri" pitchFamily="34" charset="-120"/>
+              </a:rPr>
+              <a:t>17</a:t>
+            </a:r>
+            <a:endParaRPr lang="en-US" sz="950" dirty="0"/>
+          </a:p>
+        </p:txBody>
+      </p:sp>
+    </p:spTree>
+  </p:cSld>
+  <p:clrMapOvr>
+    <a:masterClrMapping/>
+  </p:clrMapOvr>
+</p:sld>
+</file>
+
+<file path=ppt/slides/slide19.xml><?xml version="1.0" encoding="utf-8"?>
+<p:sld xmlns:a="http://schemas.openxmlformats.org/drawingml/2006/main" xmlns:r="http://schemas.openxmlformats.org/officeDocument/2006/relationships" xmlns:p="http://schemas.openxmlformats.org/presentationml/2006/main">
+  <p:cSld name="Slide 19">
     <p:spTree>
       <p:nvGrpSpPr>
         <p:cNvPr id="1" name=""/>
@@ -9567,7 +10284,7 @@
       </p:sp>
       <p:pic>
         <p:nvPicPr>
-          <p:cNvPr id="6" name="Image 1" descr="C:\Users\Utilisateur\dev\green-solutions-web\scripts\dossiers\sceau-aim-clair.png">    </p:cNvPr>
+          <p:cNvPr id="6" name="Image 1" descr="/workspace/scratch/50eb4f7d8e13/green-solutions-web/scripts/dossiers/sceau-aim-clair.png">    </p:cNvPr>
           <p:cNvPicPr>
             <a:picLocks noChangeAspect="1"/>
           </p:cNvPicPr>
@@ -9667,7 +10384,7 @@
                 <a:ea typeface="Calibri" pitchFamily="34" charset="-122"/>
                 <a:cs typeface="Calibri" pitchFamily="34" charset="-120"/>
               </a:rPr>
-              <a:t>17</a:t>
+              <a:t>18</a:t>
             </a:r>
             <a:endParaRPr lang="en-US" sz="950" dirty="0"/>
           </a:p>
@@ -10801,7 +11518,7 @@
                 <a:ea typeface="Calibri" pitchFamily="34" charset="-122"/>
                 <a:cs typeface="Calibri" pitchFamily="34" charset="-120"/>
               </a:rPr>
-              <a:t>OÙ PART L'EAU</a:t>
+              <a:t>SÉCHERESSE ET STRESS HYDRIQUE</a:t>
             </a:r>
             <a:endParaRPr lang="en-US" sz="1150" dirty="0"/>
           </a:p>
@@ -10840,7 +11557,7 @@
                 <a:ea typeface="Cambria" pitchFamily="34" charset="-122"/>
                 <a:cs typeface="Cambria" pitchFamily="34" charset="-120"/>
               </a:rPr>
-              <a:t>L'agriculture n'est pas le premier usage de l'eau</a:t>
+              <a:t>La pression augmente, mais le risque se lit localement</a:t>
             </a:r>
             <a:endParaRPr lang="en-US" sz="3000" dirty="0"/>
           </a:p>
@@ -10922,7 +11639,7 @@
                 <a:ea typeface="Cambria" pitchFamily="34" charset="-122"/>
                 <a:cs typeface="Cambria" pitchFamily="34" charset="-120"/>
               </a:rPr>
-              <a:t>Ce que cela implique</a:t>
+              <a:t>Deux indicateurs, pas un raccourci</a:t>
             </a:r>
             <a:endParaRPr lang="en-US" sz="1300" dirty="0"/>
           </a:p>
@@ -10964,7 +11681,7 @@
                 <a:ea typeface="Calibri" pitchFamily="34" charset="-122"/>
                 <a:cs typeface="Calibri" pitchFamily="34" charset="-120"/>
               </a:rPr>
-              <a:t>Le Gabon n'est pas en pénurie d'eau : la ressource est abondante et l'agriculture n'en prélève qu'une part limitée.</a:t>
+              <a:t>À l’échelle mondiale, le nombre et la durée des sécheresses ont augmenté de 29 % depuis 2000 par rapport aux deux décennies précédentes.</a:t>
             </a:r>
             <a:endParaRPr lang="en-US" sz="1200" dirty="0"/>
           </a:p>
@@ -10993,7 +11710,7 @@
                 <a:ea typeface="Calibri" pitchFamily="34" charset="-122"/>
                 <a:cs typeface="Calibri" pitchFamily="34" charset="-120"/>
               </a:rPr>
-              <a:t>L'argument n'est donc pas d'économiser un volume national, mais de maintenir l'eau disponible à la racine pendant la saison sèche, et de réduire le coût du pompage.</a:t>
+              <a:t>Le stress hydrique mesure autre chose : les prélèvements rapportés aux ressources renouvelables disponibles après les besoins environnementaux. Ce signal mondial n’est donc pas une prévision nationale ; il doit être confronté aux pluies, aux nappes, aux saisons et aux usages locaux.</a:t>
             </a:r>
             <a:endParaRPr lang="en-US" sz="1200" dirty="0"/>
           </a:p>
@@ -11146,7 +11863,7 @@
                 <a:ea typeface="Calibri" pitchFamily="34" charset="-122"/>
                 <a:cs typeface="Calibri" pitchFamily="34" charset="-120"/>
               </a:rPr>
-              <a:t>ÉCONOMIE ET SÉCURITÉ ALIMENTAIRE</a:t>
+              <a:t>OÙ PART L'EAU</a:t>
             </a:r>
             <a:endParaRPr lang="en-US" sz="1150" dirty="0"/>
           </a:p>
@@ -11185,26 +11902,42 @@
                 <a:ea typeface="Cambria" pitchFamily="34" charset="-122"/>
                 <a:cs typeface="Cambria" pitchFamily="34" charset="-120"/>
               </a:rPr>
-              <a:t>Une économie pétrolière qui veut nourrir ses villes</a:t>
+              <a:t>L'agriculture n'est pas le premier usage de l'eau</a:t>
             </a:r>
             <a:endParaRPr lang="en-US" sz="3000" dirty="0"/>
           </a:p>
         </p:txBody>
       </p:sp>
-      <p:sp>
-        <p:nvSpPr>
-          <p:cNvPr id="4" name="Shape 2"/>
+      <p:graphicFrame>
+        <p:nvGraphicFramePr>
+          <p:cNvPr id="4" name="Chart 0" descr=""/>
+          <p:cNvGraphicFramePr/>
+          <p:nvPr/>
+        </p:nvGraphicFramePr>
+        <p:xfrm>
+          <a:off x="594360" y="1783080"/>
+          <a:ext cx="7360920" cy="3977640"/>
+        </p:xfrm>
+        <a:graphic xmlns:a="http://schemas.openxmlformats.org/drawingml/2006/main">
+          <a:graphicData uri="http://schemas.openxmlformats.org/drawingml/2006/chart">
+            <c:chart xmlns:c="http://schemas.openxmlformats.org/drawingml/2006/chart" r:id="rId1"/>
+          </a:graphicData>
+        </a:graphic>
+      </p:graphicFrame>
+      <p:sp>
+        <p:nvSpPr>
+          <p:cNvPr id="5" name="Shape 2"/>
           <p:cNvSpPr/>
           <p:nvPr/>
         </p:nvSpPr>
         <p:spPr>
           <a:xfrm>
-            <a:off x="594360" y="1874520"/>
-            <a:ext cx="2545004" cy="2514600"/>
+            <a:off x="8275320" y="1783080"/>
+            <a:ext cx="3291840" cy="3977640"/>
           </a:xfrm>
           <a:prstGeom prst="roundRect">
             <a:avLst>
-              <a:gd name="adj" fmla="val 3636"/>
+              <a:gd name="adj" fmla="val 2778"/>
             </a:avLst>
           </a:prstGeom>
           <a:solidFill>
@@ -11220,14 +11953,14 @@
       </p:sp>
       <p:sp>
         <p:nvSpPr>
-          <p:cNvPr id="5" name="Text 3"/>
-          <p:cNvSpPr txBox="1"/>
-          <p:nvPr/>
-        </p:nvSpPr>
-        <p:spPr>
-          <a:xfrm>
-            <a:off x="777240" y="2148840"/>
-            <a:ext cx="2179244" cy="960120"/>
+          <p:cNvPr id="6" name="Text 3"/>
+          <p:cNvSpPr txBox="1"/>
+          <p:nvPr/>
+        </p:nvSpPr>
+        <p:spPr>
+          <a:xfrm>
+            <a:off x="8503920" y="2011680"/>
+            <a:ext cx="2834640" cy="457200"/>
           </a:xfrm>
           <a:prstGeom prst="rect">
             <a:avLst/>
@@ -11239,11 +11972,11 @@
           <a:bodyPr wrap="square" lIns="0" tIns="0" rIns="0" bIns="0" rtlCol="0" anchor="ctr"/>
           <a:lstStyle/>
           <a:p>
-            <a:pPr algn="ctr" indent="0" marL="0">
-              <a:buNone/>
-            </a:pPr>
-            <a:r>
-              <a:rPr lang="en-US" sz="3800" b="1" dirty="0">
+            <a:pPr algn="l" indent="0" marL="0">
+              <a:buNone/>
+            </a:pPr>
+            <a:r>
+              <a:rPr lang="en-US" sz="1300" b="1" dirty="0">
                 <a:solidFill>
                   <a:srgbClr val="1C5A73"/>
                 </a:solidFill>
@@ -11251,388 +11984,22 @@
                 <a:ea typeface="Cambria" pitchFamily="34" charset="-122"/>
                 <a:cs typeface="Cambria" pitchFamily="34" charset="-120"/>
               </a:rPr>
-              <a:t>≈ 90 %</a:t>
-            </a:r>
-            <a:endParaRPr lang="en-US" sz="3800" dirty="0"/>
-          </a:p>
-        </p:txBody>
-      </p:sp>
-      <p:sp>
-        <p:nvSpPr>
-          <p:cNvPr id="6" name="Text 4"/>
-          <p:cNvSpPr txBox="1"/>
-          <p:nvPr/>
-        </p:nvSpPr>
-        <p:spPr>
-          <a:xfrm>
-            <a:off x="795528" y="3154680"/>
-            <a:ext cx="2142668" cy="1051560"/>
-          </a:xfrm>
-          <a:prstGeom prst="rect">
-            <a:avLst/>
-          </a:prstGeom>
-          <a:noFill/>
-          <a:ln/>
-        </p:spPr>
-        <p:txBody>
-          <a:bodyPr wrap="square" lIns="0" tIns="0" rIns="0" bIns="0" rtlCol="0" anchor="t"/>
-          <a:lstStyle/>
-          <a:p>
-            <a:pPr algn="ctr" indent="0" marL="0">
-              <a:lnSpc>
-                <a:spcPct val="118000"/>
-              </a:lnSpc>
-              <a:buNone/>
-            </a:pPr>
-            <a:r>
-              <a:rPr lang="en-US" sz="1250" dirty="0">
-                <a:solidFill>
-                  <a:srgbClr val="31424A"/>
-                </a:solidFill>
-                <a:latin typeface="Calibri" pitchFamily="34" charset="0"/>
-                <a:ea typeface="Calibri" pitchFamily="34" charset="-122"/>
-                <a:cs typeface="Calibri" pitchFamily="34" charset="-120"/>
-              </a:rPr>
-              <a:t>de la population vit en ville, près de la moitié à Libreville</a:t>
-            </a:r>
-            <a:endParaRPr lang="en-US" sz="1250" dirty="0"/>
-          </a:p>
-        </p:txBody>
-      </p:sp>
-      <p:sp>
-        <p:nvSpPr>
-          <p:cNvPr id="7" name="Shape 5"/>
-          <p:cNvSpPr/>
-          <p:nvPr/>
-        </p:nvSpPr>
-        <p:spPr>
-          <a:xfrm>
-            <a:off x="3413684" y="1874520"/>
-            <a:ext cx="2545004" cy="2514600"/>
-          </a:xfrm>
-          <a:prstGeom prst="roundRect">
-            <a:avLst>
-              <a:gd name="adj" fmla="val 3636"/>
-            </a:avLst>
-          </a:prstGeom>
-          <a:solidFill>
-            <a:srgbClr val="EDF3F5"/>
-          </a:solidFill>
-          <a:ln w="9525">
-            <a:solidFill>
-              <a:srgbClr val="D6E2E7"/>
-            </a:solidFill>
-            <a:prstDash val="solid"/>
-          </a:ln>
-        </p:spPr>
-      </p:sp>
-      <p:sp>
-        <p:nvSpPr>
-          <p:cNvPr id="8" name="Text 6"/>
-          <p:cNvSpPr txBox="1"/>
-          <p:nvPr/>
-        </p:nvSpPr>
-        <p:spPr>
-          <a:xfrm>
-            <a:off x="3596564" y="2148840"/>
-            <a:ext cx="2179244" cy="960120"/>
-          </a:xfrm>
-          <a:prstGeom prst="rect">
-            <a:avLst/>
-          </a:prstGeom>
-          <a:noFill/>
-          <a:ln/>
-        </p:spPr>
-        <p:txBody>
-          <a:bodyPr wrap="square" lIns="0" tIns="0" rIns="0" bIns="0" rtlCol="0" anchor="ctr"/>
-          <a:lstStyle/>
-          <a:p>
-            <a:pPr algn="ctr" indent="0" marL="0">
-              <a:buNone/>
-            </a:pPr>
-            <a:r>
-              <a:rPr lang="en-US" sz="3800" b="1" dirty="0">
-                <a:solidFill>
-                  <a:srgbClr val="1C5A73"/>
-                </a:solidFill>
-                <a:latin typeface="Cambria" pitchFamily="34" charset="0"/>
-                <a:ea typeface="Cambria" pitchFamily="34" charset="-122"/>
-                <a:cs typeface="Cambria" pitchFamily="34" charset="-120"/>
-              </a:rPr>
-              <a:t>≈ 88 %</a:t>
-            </a:r>
-            <a:endParaRPr lang="en-US" sz="3800" dirty="0"/>
-          </a:p>
-        </p:txBody>
-      </p:sp>
-      <p:sp>
-        <p:nvSpPr>
-          <p:cNvPr id="9" name="Text 7"/>
-          <p:cNvSpPr txBox="1"/>
-          <p:nvPr/>
-        </p:nvSpPr>
-        <p:spPr>
-          <a:xfrm>
-            <a:off x="3614852" y="3154680"/>
-            <a:ext cx="2142668" cy="1051560"/>
-          </a:xfrm>
-          <a:prstGeom prst="rect">
-            <a:avLst/>
-          </a:prstGeom>
-          <a:noFill/>
-          <a:ln/>
-        </p:spPr>
-        <p:txBody>
-          <a:bodyPr wrap="square" lIns="0" tIns="0" rIns="0" bIns="0" rtlCol="0" anchor="t"/>
-          <a:lstStyle/>
-          <a:p>
-            <a:pPr algn="ctr" indent="0" marL="0">
-              <a:lnSpc>
-                <a:spcPct val="118000"/>
-              </a:lnSpc>
-              <a:buNone/>
-            </a:pPr>
-            <a:r>
-              <a:rPr lang="en-US" sz="1250" dirty="0">
-                <a:solidFill>
-                  <a:srgbClr val="31424A"/>
-                </a:solidFill>
-                <a:latin typeface="Calibri" pitchFamily="34" charset="0"/>
-                <a:ea typeface="Calibri" pitchFamily="34" charset="-122"/>
-                <a:cs typeface="Calibri" pitchFamily="34" charset="-120"/>
-              </a:rPr>
-              <a:t>du territoire couvert par la forêt</a:t>
-            </a:r>
-            <a:endParaRPr lang="en-US" sz="1250" dirty="0"/>
-          </a:p>
-        </p:txBody>
-      </p:sp>
-      <p:sp>
-        <p:nvSpPr>
-          <p:cNvPr id="10" name="Shape 8"/>
-          <p:cNvSpPr/>
-          <p:nvPr/>
-        </p:nvSpPr>
-        <p:spPr>
-          <a:xfrm>
-            <a:off x="6233008" y="1874520"/>
-            <a:ext cx="2545004" cy="2514600"/>
-          </a:xfrm>
-          <a:prstGeom prst="roundRect">
-            <a:avLst>
-              <a:gd name="adj" fmla="val 3636"/>
-            </a:avLst>
-          </a:prstGeom>
-          <a:solidFill>
-            <a:srgbClr val="EDF3F5"/>
-          </a:solidFill>
-          <a:ln w="9525">
-            <a:solidFill>
-              <a:srgbClr val="D6E2E7"/>
-            </a:solidFill>
-            <a:prstDash val="solid"/>
-          </a:ln>
-        </p:spPr>
-      </p:sp>
-      <p:sp>
-        <p:nvSpPr>
-          <p:cNvPr id="11" name="Text 9"/>
-          <p:cNvSpPr txBox="1"/>
-          <p:nvPr/>
-        </p:nvSpPr>
-        <p:spPr>
-          <a:xfrm>
-            <a:off x="6415888" y="2148840"/>
-            <a:ext cx="2179244" cy="960120"/>
-          </a:xfrm>
-          <a:prstGeom prst="rect">
-            <a:avLst/>
-          </a:prstGeom>
-          <a:noFill/>
-          <a:ln/>
-        </p:spPr>
-        <p:txBody>
-          <a:bodyPr wrap="square" lIns="0" tIns="0" rIns="0" bIns="0" rtlCol="0" anchor="ctr"/>
-          <a:lstStyle/>
-          <a:p>
-            <a:pPr algn="ctr" indent="0" marL="0">
-              <a:buNone/>
-            </a:pPr>
-            <a:r>
-              <a:rPr lang="en-US" sz="3800" b="1" dirty="0">
-                <a:solidFill>
-                  <a:srgbClr val="1C5A73"/>
-                </a:solidFill>
-                <a:latin typeface="Cambria" pitchFamily="34" charset="0"/>
-                <a:ea typeface="Cambria" pitchFamily="34" charset="-122"/>
-                <a:cs typeface="Cambria" pitchFamily="34" charset="-120"/>
-              </a:rPr>
-              <a:t>≈ 500 Md</a:t>
-            </a:r>
-            <a:endParaRPr lang="en-US" sz="3800" dirty="0"/>
-          </a:p>
-        </p:txBody>
-      </p:sp>
-      <p:sp>
-        <p:nvSpPr>
-          <p:cNvPr id="12" name="Text 10"/>
-          <p:cNvSpPr txBox="1"/>
-          <p:nvPr/>
-        </p:nvSpPr>
-        <p:spPr>
-          <a:xfrm>
-            <a:off x="6434176" y="3154680"/>
-            <a:ext cx="2142668" cy="1051560"/>
-          </a:xfrm>
-          <a:prstGeom prst="rect">
-            <a:avLst/>
-          </a:prstGeom>
-          <a:noFill/>
-          <a:ln/>
-        </p:spPr>
-        <p:txBody>
-          <a:bodyPr wrap="square" lIns="0" tIns="0" rIns="0" bIns="0" rtlCol="0" anchor="t"/>
-          <a:lstStyle/>
-          <a:p>
-            <a:pPr algn="ctr" indent="0" marL="0">
-              <a:lnSpc>
-                <a:spcPct val="118000"/>
-              </a:lnSpc>
-              <a:buNone/>
-            </a:pPr>
-            <a:r>
-              <a:rPr lang="en-US" sz="1250" dirty="0">
-                <a:solidFill>
-                  <a:srgbClr val="31424A"/>
-                </a:solidFill>
-                <a:latin typeface="Calibri" pitchFamily="34" charset="0"/>
-                <a:ea typeface="Calibri" pitchFamily="34" charset="-122"/>
-                <a:cs typeface="Calibri" pitchFamily="34" charset="-120"/>
-              </a:rPr>
-              <a:t>de francs CFA d'importations alimentaires par an</a:t>
-            </a:r>
-            <a:endParaRPr lang="en-US" sz="1250" dirty="0"/>
-          </a:p>
-        </p:txBody>
-      </p:sp>
-      <p:sp>
-        <p:nvSpPr>
-          <p:cNvPr id="13" name="Shape 11"/>
-          <p:cNvSpPr/>
-          <p:nvPr/>
-        </p:nvSpPr>
-        <p:spPr>
-          <a:xfrm>
-            <a:off x="9052331" y="1874520"/>
-            <a:ext cx="2545004" cy="2514600"/>
-          </a:xfrm>
-          <a:prstGeom prst="roundRect">
-            <a:avLst>
-              <a:gd name="adj" fmla="val 3636"/>
-            </a:avLst>
-          </a:prstGeom>
-          <a:solidFill>
-            <a:srgbClr val="EDF3F5"/>
-          </a:solidFill>
-          <a:ln w="9525">
-            <a:solidFill>
-              <a:srgbClr val="D6E2E7"/>
-            </a:solidFill>
-            <a:prstDash val="solid"/>
-          </a:ln>
-        </p:spPr>
-      </p:sp>
-      <p:sp>
-        <p:nvSpPr>
-          <p:cNvPr id="14" name="Text 12"/>
-          <p:cNvSpPr txBox="1"/>
-          <p:nvPr/>
-        </p:nvSpPr>
-        <p:spPr>
-          <a:xfrm>
-            <a:off x="9235211" y="2148840"/>
-            <a:ext cx="2179244" cy="960120"/>
-          </a:xfrm>
-          <a:prstGeom prst="rect">
-            <a:avLst/>
-          </a:prstGeom>
-          <a:noFill/>
-          <a:ln/>
-        </p:spPr>
-        <p:txBody>
-          <a:bodyPr wrap="square" lIns="0" tIns="0" rIns="0" bIns="0" rtlCol="0" anchor="ctr"/>
-          <a:lstStyle/>
-          <a:p>
-            <a:pPr algn="ctr" indent="0" marL="0">
-              <a:buNone/>
-            </a:pPr>
-            <a:r>
-              <a:rPr lang="en-US" sz="3800" b="1" dirty="0">
-                <a:solidFill>
-                  <a:srgbClr val="1C5A73"/>
-                </a:solidFill>
-                <a:latin typeface="Cambria" pitchFamily="34" charset="0"/>
-                <a:ea typeface="Cambria" pitchFamily="34" charset="-122"/>
-                <a:cs typeface="Cambria" pitchFamily="34" charset="-120"/>
-              </a:rPr>
-              <a:t>2014</a:t>
-            </a:r>
-            <a:endParaRPr lang="en-US" sz="3800" dirty="0"/>
-          </a:p>
-        </p:txBody>
-      </p:sp>
-      <p:sp>
-        <p:nvSpPr>
-          <p:cNvPr id="15" name="Text 13"/>
-          <p:cNvSpPr txBox="1"/>
-          <p:nvPr/>
-        </p:nvSpPr>
-        <p:spPr>
-          <a:xfrm>
-            <a:off x="9253499" y="3154680"/>
-            <a:ext cx="2142668" cy="1051560"/>
-          </a:xfrm>
-          <a:prstGeom prst="rect">
-            <a:avLst/>
-          </a:prstGeom>
-          <a:noFill/>
-          <a:ln/>
-        </p:spPr>
-        <p:txBody>
-          <a:bodyPr wrap="square" lIns="0" tIns="0" rIns="0" bIns="0" rtlCol="0" anchor="t"/>
-          <a:lstStyle/>
-          <a:p>
-            <a:pPr algn="ctr" indent="0" marL="0">
-              <a:lnSpc>
-                <a:spcPct val="118000"/>
-              </a:lnSpc>
-              <a:buNone/>
-            </a:pPr>
-            <a:r>
-              <a:rPr lang="en-US" sz="1250" dirty="0">
-                <a:solidFill>
-                  <a:srgbClr val="31424A"/>
-                </a:solidFill>
-                <a:latin typeface="Calibri" pitchFamily="34" charset="0"/>
-                <a:ea typeface="Calibri" pitchFamily="34" charset="-122"/>
-                <a:cs typeface="Calibri" pitchFamily="34" charset="-120"/>
-              </a:rPr>
-              <a:t>lancement du programme GRAINE de relance agricole</a:t>
-            </a:r>
-            <a:endParaRPr lang="en-US" sz="1250" dirty="0"/>
-          </a:p>
-        </p:txBody>
-      </p:sp>
-      <p:sp>
-        <p:nvSpPr>
-          <p:cNvPr id="16" name="Text 14"/>
-          <p:cNvSpPr txBox="1"/>
-          <p:nvPr/>
-        </p:nvSpPr>
-        <p:spPr>
-          <a:xfrm>
-            <a:off x="594360" y="4709160"/>
-            <a:ext cx="11002975" cy="1097280"/>
+              <a:t>Ce que cela implique</a:t>
+            </a:r>
+            <a:endParaRPr lang="en-US" sz="1300" dirty="0"/>
+          </a:p>
+        </p:txBody>
+      </p:sp>
+      <p:sp>
+        <p:nvSpPr>
+          <p:cNvPr id="7" name="Text 4"/>
+          <p:cNvSpPr txBox="1"/>
+          <p:nvPr/>
+        </p:nvSpPr>
+        <p:spPr>
+          <a:xfrm>
+            <a:off x="8503920" y="2560320"/>
+            <a:ext cx="2834640" cy="3017520"/>
           </a:xfrm>
           <a:prstGeom prst="rect">
             <a:avLst/>
@@ -11646,12 +12013,12 @@
           <a:p>
             <a:pPr algn="l" indent="0" marL="0">
               <a:lnSpc>
-                <a:spcPct val="130000"/>
+                <a:spcPct val="125000"/>
               </a:lnSpc>
               <a:buNone/>
             </a:pPr>
             <a:r>
-              <a:rPr lang="en-US" sz="1350" dirty="0">
+              <a:rPr lang="en-US" sz="1200" dirty="0">
                 <a:solidFill>
                   <a:srgbClr val="31424A"/>
                 </a:solidFill>
@@ -11659,15 +12026,44 @@
                 <a:ea typeface="Calibri" pitchFamily="34" charset="-122"/>
                 <a:cs typeface="Calibri" pitchFamily="34" charset="-120"/>
               </a:rPr>
-              <a:t>Le pétrole, le manganèse et le bois font l'essentiel des exportations, tandis que l'assiette des Gabonais vient largement de l'étranger. Les plans de diversification et le programme GRAINE misent sur une agriculture vivrière et périurbaine capable de réduire cette dépendance.</a:t>
-            </a:r>
-            <a:endParaRPr lang="en-US" sz="1350" dirty="0"/>
-          </a:p>
-        </p:txBody>
-      </p:sp>
-      <p:sp>
-        <p:nvSpPr>
-          <p:cNvPr id="17" name="Text 15"/>
+              <a:t>Le Gabon n'est pas en pénurie d'eau : la ressource est abondante et l'agriculture n'en prélève qu'une part limitée.</a:t>
+            </a:r>
+            <a:endParaRPr lang="en-US" sz="1200" dirty="0"/>
+          </a:p>
+          <a:p>
+            <a:pPr algn="l" indent="0" marL="0">
+              <a:lnSpc>
+                <a:spcPct val="125000"/>
+              </a:lnSpc>
+              <a:buNone/>
+            </a:pPr>
+            <a:endParaRPr lang="en-US" sz="1200" dirty="0"/>
+          </a:p>
+          <a:p>
+            <a:pPr algn="l" indent="0" marL="0">
+              <a:lnSpc>
+                <a:spcPct val="125000"/>
+              </a:lnSpc>
+              <a:buNone/>
+            </a:pPr>
+            <a:r>
+              <a:rPr lang="en-US" sz="1200" dirty="0">
+                <a:solidFill>
+                  <a:srgbClr val="31424A"/>
+                </a:solidFill>
+                <a:latin typeface="Calibri" pitchFamily="34" charset="0"/>
+                <a:ea typeface="Calibri" pitchFamily="34" charset="-122"/>
+                <a:cs typeface="Calibri" pitchFamily="34" charset="-120"/>
+              </a:rPr>
+              <a:t>L'argument n'est donc pas d'économiser un volume national, mais de maintenir l'eau disponible à la racine pendant la saison sèche, et de réduire le coût du pompage.</a:t>
+            </a:r>
+            <a:endParaRPr lang="en-US" sz="1200" dirty="0"/>
+          </a:p>
+        </p:txBody>
+      </p:sp>
+      <p:sp>
+        <p:nvSpPr>
+          <p:cNvPr id="8" name="Text 5"/>
           <p:cNvSpPr txBox="1"/>
           <p:nvPr/>
         </p:nvSpPr>
@@ -11708,7 +12104,7 @@
       </p:sp>
       <p:sp>
         <p:nvSpPr>
-          <p:cNvPr id="18" name="Text 16"/>
+          <p:cNvPr id="9" name="Text 6"/>
           <p:cNvSpPr txBox="1"/>
           <p:nvPr/>
         </p:nvSpPr>
@@ -11812,7 +12208,7 @@
                 <a:ea typeface="Calibri" pitchFamily="34" charset="-122"/>
                 <a:cs typeface="Calibri" pitchFamily="34" charset="-120"/>
               </a:rPr>
-              <a:t>LES FILIÈRES</a:t>
+              <a:t>ÉCONOMIE ET SÉCURITÉ ALIMENTAIRE</a:t>
             </a:r>
             <a:endParaRPr lang="en-US" sz="1150" dirty="0"/>
           </a:p>
@@ -11851,42 +12247,26 @@
                 <a:ea typeface="Cambria" pitchFamily="34" charset="-122"/>
                 <a:cs typeface="Cambria" pitchFamily="34" charset="-120"/>
               </a:rPr>
-              <a:t>Cinq productions structurent l'offre nationale</a:t>
+              <a:t>Une économie pétrolière qui veut nourrir ses villes</a:t>
             </a:r>
             <a:endParaRPr lang="en-US" sz="3000" dirty="0"/>
           </a:p>
         </p:txBody>
       </p:sp>
-      <p:graphicFrame>
-        <p:nvGraphicFramePr>
-          <p:cNvPr id="4" name="Chart 0" descr=""/>
-          <p:cNvGraphicFramePr/>
-          <p:nvPr/>
-        </p:nvGraphicFramePr>
-        <p:xfrm>
-          <a:off x="594360" y="1783080"/>
-          <a:ext cx="7360920" cy="3977640"/>
-        </p:xfrm>
-        <a:graphic xmlns:a="http://schemas.openxmlformats.org/drawingml/2006/main">
-          <a:graphicData uri="http://schemas.openxmlformats.org/drawingml/2006/chart">
-            <c:chart xmlns:c="http://schemas.openxmlformats.org/drawingml/2006/chart" r:id="rId1"/>
-          </a:graphicData>
-        </a:graphic>
-      </p:graphicFrame>
-      <p:sp>
-        <p:nvSpPr>
-          <p:cNvPr id="5" name="Shape 2"/>
+      <p:sp>
+        <p:nvSpPr>
+          <p:cNvPr id="4" name="Shape 2"/>
           <p:cNvSpPr/>
           <p:nvPr/>
         </p:nvSpPr>
         <p:spPr>
           <a:xfrm>
-            <a:off x="8275320" y="1783080"/>
-            <a:ext cx="3291840" cy="3977640"/>
+            <a:off x="594360" y="1874520"/>
+            <a:ext cx="2545004" cy="2514600"/>
           </a:xfrm>
           <a:prstGeom prst="roundRect">
             <a:avLst>
-              <a:gd name="adj" fmla="val 2778"/>
+              <a:gd name="adj" fmla="val 3636"/>
             </a:avLst>
           </a:prstGeom>
           <a:solidFill>
@@ -11902,14 +12282,14 @@
       </p:sp>
       <p:sp>
         <p:nvSpPr>
-          <p:cNvPr id="6" name="Text 3"/>
-          <p:cNvSpPr txBox="1"/>
-          <p:nvPr/>
-        </p:nvSpPr>
-        <p:spPr>
-          <a:xfrm>
-            <a:off x="8503920" y="2011680"/>
-            <a:ext cx="2834640" cy="457200"/>
+          <p:cNvPr id="5" name="Text 3"/>
+          <p:cNvSpPr txBox="1"/>
+          <p:nvPr/>
+        </p:nvSpPr>
+        <p:spPr>
+          <a:xfrm>
+            <a:off x="777240" y="2148840"/>
+            <a:ext cx="2179244" cy="960120"/>
           </a:xfrm>
           <a:prstGeom prst="rect">
             <a:avLst/>
@@ -11921,11 +12301,11 @@
           <a:bodyPr wrap="square" lIns="0" tIns="0" rIns="0" bIns="0" rtlCol="0" anchor="ctr"/>
           <a:lstStyle/>
           <a:p>
-            <a:pPr algn="l" indent="0" marL="0">
-              <a:buNone/>
-            </a:pPr>
-            <a:r>
-              <a:rPr lang="en-US" sz="1300" b="1" dirty="0">
+            <a:pPr algn="ctr" indent="0" marL="0">
+              <a:buNone/>
+            </a:pPr>
+            <a:r>
+              <a:rPr lang="en-US" sz="3800" b="1" dirty="0">
                 <a:solidFill>
                   <a:srgbClr val="1C5A73"/>
                 </a:solidFill>
@@ -11933,22 +12313,388 @@
                 <a:ea typeface="Cambria" pitchFamily="34" charset="-122"/>
                 <a:cs typeface="Cambria" pitchFamily="34" charset="-120"/>
               </a:rPr>
-              <a:t>Lecture</a:t>
-            </a:r>
-            <a:endParaRPr lang="en-US" sz="1300" dirty="0"/>
-          </a:p>
-        </p:txBody>
-      </p:sp>
-      <p:sp>
-        <p:nvSpPr>
-          <p:cNvPr id="7" name="Text 4"/>
-          <p:cNvSpPr txBox="1"/>
-          <p:nvPr/>
-        </p:nvSpPr>
-        <p:spPr>
-          <a:xfrm>
-            <a:off x="8503920" y="2560320"/>
-            <a:ext cx="2834640" cy="3017520"/>
+              <a:t>≈ 90 %</a:t>
+            </a:r>
+            <a:endParaRPr lang="en-US" sz="3800" dirty="0"/>
+          </a:p>
+        </p:txBody>
+      </p:sp>
+      <p:sp>
+        <p:nvSpPr>
+          <p:cNvPr id="6" name="Text 4"/>
+          <p:cNvSpPr txBox="1"/>
+          <p:nvPr/>
+        </p:nvSpPr>
+        <p:spPr>
+          <a:xfrm>
+            <a:off x="795528" y="3154680"/>
+            <a:ext cx="2142668" cy="1051560"/>
+          </a:xfrm>
+          <a:prstGeom prst="rect">
+            <a:avLst/>
+          </a:prstGeom>
+          <a:noFill/>
+          <a:ln/>
+        </p:spPr>
+        <p:txBody>
+          <a:bodyPr wrap="square" lIns="0" tIns="0" rIns="0" bIns="0" rtlCol="0" anchor="t"/>
+          <a:lstStyle/>
+          <a:p>
+            <a:pPr algn="ctr" indent="0" marL="0">
+              <a:lnSpc>
+                <a:spcPct val="118000"/>
+              </a:lnSpc>
+              <a:buNone/>
+            </a:pPr>
+            <a:r>
+              <a:rPr lang="en-US" sz="1250" dirty="0">
+                <a:solidFill>
+                  <a:srgbClr val="31424A"/>
+                </a:solidFill>
+                <a:latin typeface="Calibri" pitchFamily="34" charset="0"/>
+                <a:ea typeface="Calibri" pitchFamily="34" charset="-122"/>
+                <a:cs typeface="Calibri" pitchFamily="34" charset="-120"/>
+              </a:rPr>
+              <a:t>de la population vit en ville, près de la moitié à Libreville</a:t>
+            </a:r>
+            <a:endParaRPr lang="en-US" sz="1250" dirty="0"/>
+          </a:p>
+        </p:txBody>
+      </p:sp>
+      <p:sp>
+        <p:nvSpPr>
+          <p:cNvPr id="7" name="Shape 5"/>
+          <p:cNvSpPr/>
+          <p:nvPr/>
+        </p:nvSpPr>
+        <p:spPr>
+          <a:xfrm>
+            <a:off x="3413684" y="1874520"/>
+            <a:ext cx="2545004" cy="2514600"/>
+          </a:xfrm>
+          <a:prstGeom prst="roundRect">
+            <a:avLst>
+              <a:gd name="adj" fmla="val 3636"/>
+            </a:avLst>
+          </a:prstGeom>
+          <a:solidFill>
+            <a:srgbClr val="EDF3F5"/>
+          </a:solidFill>
+          <a:ln w="9525">
+            <a:solidFill>
+              <a:srgbClr val="D6E2E7"/>
+            </a:solidFill>
+            <a:prstDash val="solid"/>
+          </a:ln>
+        </p:spPr>
+      </p:sp>
+      <p:sp>
+        <p:nvSpPr>
+          <p:cNvPr id="8" name="Text 6"/>
+          <p:cNvSpPr txBox="1"/>
+          <p:nvPr/>
+        </p:nvSpPr>
+        <p:spPr>
+          <a:xfrm>
+            <a:off x="3596564" y="2148840"/>
+            <a:ext cx="2179244" cy="960120"/>
+          </a:xfrm>
+          <a:prstGeom prst="rect">
+            <a:avLst/>
+          </a:prstGeom>
+          <a:noFill/>
+          <a:ln/>
+        </p:spPr>
+        <p:txBody>
+          <a:bodyPr wrap="square" lIns="0" tIns="0" rIns="0" bIns="0" rtlCol="0" anchor="ctr"/>
+          <a:lstStyle/>
+          <a:p>
+            <a:pPr algn="ctr" indent="0" marL="0">
+              <a:buNone/>
+            </a:pPr>
+            <a:r>
+              <a:rPr lang="en-US" sz="3800" b="1" dirty="0">
+                <a:solidFill>
+                  <a:srgbClr val="1C5A73"/>
+                </a:solidFill>
+                <a:latin typeface="Cambria" pitchFamily="34" charset="0"/>
+                <a:ea typeface="Cambria" pitchFamily="34" charset="-122"/>
+                <a:cs typeface="Cambria" pitchFamily="34" charset="-120"/>
+              </a:rPr>
+              <a:t>≈ 88 %</a:t>
+            </a:r>
+            <a:endParaRPr lang="en-US" sz="3800" dirty="0"/>
+          </a:p>
+        </p:txBody>
+      </p:sp>
+      <p:sp>
+        <p:nvSpPr>
+          <p:cNvPr id="9" name="Text 7"/>
+          <p:cNvSpPr txBox="1"/>
+          <p:nvPr/>
+        </p:nvSpPr>
+        <p:spPr>
+          <a:xfrm>
+            <a:off x="3614852" y="3154680"/>
+            <a:ext cx="2142668" cy="1051560"/>
+          </a:xfrm>
+          <a:prstGeom prst="rect">
+            <a:avLst/>
+          </a:prstGeom>
+          <a:noFill/>
+          <a:ln/>
+        </p:spPr>
+        <p:txBody>
+          <a:bodyPr wrap="square" lIns="0" tIns="0" rIns="0" bIns="0" rtlCol="0" anchor="t"/>
+          <a:lstStyle/>
+          <a:p>
+            <a:pPr algn="ctr" indent="0" marL="0">
+              <a:lnSpc>
+                <a:spcPct val="118000"/>
+              </a:lnSpc>
+              <a:buNone/>
+            </a:pPr>
+            <a:r>
+              <a:rPr lang="en-US" sz="1250" dirty="0">
+                <a:solidFill>
+                  <a:srgbClr val="31424A"/>
+                </a:solidFill>
+                <a:latin typeface="Calibri" pitchFamily="34" charset="0"/>
+                <a:ea typeface="Calibri" pitchFamily="34" charset="-122"/>
+                <a:cs typeface="Calibri" pitchFamily="34" charset="-120"/>
+              </a:rPr>
+              <a:t>du territoire couvert par la forêt</a:t>
+            </a:r>
+            <a:endParaRPr lang="en-US" sz="1250" dirty="0"/>
+          </a:p>
+        </p:txBody>
+      </p:sp>
+      <p:sp>
+        <p:nvSpPr>
+          <p:cNvPr id="10" name="Shape 8"/>
+          <p:cNvSpPr/>
+          <p:nvPr/>
+        </p:nvSpPr>
+        <p:spPr>
+          <a:xfrm>
+            <a:off x="6233008" y="1874520"/>
+            <a:ext cx="2545004" cy="2514600"/>
+          </a:xfrm>
+          <a:prstGeom prst="roundRect">
+            <a:avLst>
+              <a:gd name="adj" fmla="val 3636"/>
+            </a:avLst>
+          </a:prstGeom>
+          <a:solidFill>
+            <a:srgbClr val="EDF3F5"/>
+          </a:solidFill>
+          <a:ln w="9525">
+            <a:solidFill>
+              <a:srgbClr val="D6E2E7"/>
+            </a:solidFill>
+            <a:prstDash val="solid"/>
+          </a:ln>
+        </p:spPr>
+      </p:sp>
+      <p:sp>
+        <p:nvSpPr>
+          <p:cNvPr id="11" name="Text 9"/>
+          <p:cNvSpPr txBox="1"/>
+          <p:nvPr/>
+        </p:nvSpPr>
+        <p:spPr>
+          <a:xfrm>
+            <a:off x="6415888" y="2148840"/>
+            <a:ext cx="2179244" cy="960120"/>
+          </a:xfrm>
+          <a:prstGeom prst="rect">
+            <a:avLst/>
+          </a:prstGeom>
+          <a:noFill/>
+          <a:ln/>
+        </p:spPr>
+        <p:txBody>
+          <a:bodyPr wrap="square" lIns="0" tIns="0" rIns="0" bIns="0" rtlCol="0" anchor="ctr"/>
+          <a:lstStyle/>
+          <a:p>
+            <a:pPr algn="ctr" indent="0" marL="0">
+              <a:buNone/>
+            </a:pPr>
+            <a:r>
+              <a:rPr lang="en-US" sz="3800" b="1" dirty="0">
+                <a:solidFill>
+                  <a:srgbClr val="1C5A73"/>
+                </a:solidFill>
+                <a:latin typeface="Cambria" pitchFamily="34" charset="0"/>
+                <a:ea typeface="Cambria" pitchFamily="34" charset="-122"/>
+                <a:cs typeface="Cambria" pitchFamily="34" charset="-120"/>
+              </a:rPr>
+              <a:t>≈ 500 Md</a:t>
+            </a:r>
+            <a:endParaRPr lang="en-US" sz="3800" dirty="0"/>
+          </a:p>
+        </p:txBody>
+      </p:sp>
+      <p:sp>
+        <p:nvSpPr>
+          <p:cNvPr id="12" name="Text 10"/>
+          <p:cNvSpPr txBox="1"/>
+          <p:nvPr/>
+        </p:nvSpPr>
+        <p:spPr>
+          <a:xfrm>
+            <a:off x="6434176" y="3154680"/>
+            <a:ext cx="2142668" cy="1051560"/>
+          </a:xfrm>
+          <a:prstGeom prst="rect">
+            <a:avLst/>
+          </a:prstGeom>
+          <a:noFill/>
+          <a:ln/>
+        </p:spPr>
+        <p:txBody>
+          <a:bodyPr wrap="square" lIns="0" tIns="0" rIns="0" bIns="0" rtlCol="0" anchor="t"/>
+          <a:lstStyle/>
+          <a:p>
+            <a:pPr algn="ctr" indent="0" marL="0">
+              <a:lnSpc>
+                <a:spcPct val="118000"/>
+              </a:lnSpc>
+              <a:buNone/>
+            </a:pPr>
+            <a:r>
+              <a:rPr lang="en-US" sz="1250" dirty="0">
+                <a:solidFill>
+                  <a:srgbClr val="31424A"/>
+                </a:solidFill>
+                <a:latin typeface="Calibri" pitchFamily="34" charset="0"/>
+                <a:ea typeface="Calibri" pitchFamily="34" charset="-122"/>
+                <a:cs typeface="Calibri" pitchFamily="34" charset="-120"/>
+              </a:rPr>
+              <a:t>de francs CFA d'importations alimentaires par an</a:t>
+            </a:r>
+            <a:endParaRPr lang="en-US" sz="1250" dirty="0"/>
+          </a:p>
+        </p:txBody>
+      </p:sp>
+      <p:sp>
+        <p:nvSpPr>
+          <p:cNvPr id="13" name="Shape 11"/>
+          <p:cNvSpPr/>
+          <p:nvPr/>
+        </p:nvSpPr>
+        <p:spPr>
+          <a:xfrm>
+            <a:off x="9052331" y="1874520"/>
+            <a:ext cx="2545004" cy="2514600"/>
+          </a:xfrm>
+          <a:prstGeom prst="roundRect">
+            <a:avLst>
+              <a:gd name="adj" fmla="val 3636"/>
+            </a:avLst>
+          </a:prstGeom>
+          <a:solidFill>
+            <a:srgbClr val="EDF3F5"/>
+          </a:solidFill>
+          <a:ln w="9525">
+            <a:solidFill>
+              <a:srgbClr val="D6E2E7"/>
+            </a:solidFill>
+            <a:prstDash val="solid"/>
+          </a:ln>
+        </p:spPr>
+      </p:sp>
+      <p:sp>
+        <p:nvSpPr>
+          <p:cNvPr id="14" name="Text 12"/>
+          <p:cNvSpPr txBox="1"/>
+          <p:nvPr/>
+        </p:nvSpPr>
+        <p:spPr>
+          <a:xfrm>
+            <a:off x="9235211" y="2148840"/>
+            <a:ext cx="2179244" cy="960120"/>
+          </a:xfrm>
+          <a:prstGeom prst="rect">
+            <a:avLst/>
+          </a:prstGeom>
+          <a:noFill/>
+          <a:ln/>
+        </p:spPr>
+        <p:txBody>
+          <a:bodyPr wrap="square" lIns="0" tIns="0" rIns="0" bIns="0" rtlCol="0" anchor="ctr"/>
+          <a:lstStyle/>
+          <a:p>
+            <a:pPr algn="ctr" indent="0" marL="0">
+              <a:buNone/>
+            </a:pPr>
+            <a:r>
+              <a:rPr lang="en-US" sz="3800" b="1" dirty="0">
+                <a:solidFill>
+                  <a:srgbClr val="1C5A73"/>
+                </a:solidFill>
+                <a:latin typeface="Cambria" pitchFamily="34" charset="0"/>
+                <a:ea typeface="Cambria" pitchFamily="34" charset="-122"/>
+                <a:cs typeface="Cambria" pitchFamily="34" charset="-120"/>
+              </a:rPr>
+              <a:t>2014</a:t>
+            </a:r>
+            <a:endParaRPr lang="en-US" sz="3800" dirty="0"/>
+          </a:p>
+        </p:txBody>
+      </p:sp>
+      <p:sp>
+        <p:nvSpPr>
+          <p:cNvPr id="15" name="Text 13"/>
+          <p:cNvSpPr txBox="1"/>
+          <p:nvPr/>
+        </p:nvSpPr>
+        <p:spPr>
+          <a:xfrm>
+            <a:off x="9253499" y="3154680"/>
+            <a:ext cx="2142668" cy="1051560"/>
+          </a:xfrm>
+          <a:prstGeom prst="rect">
+            <a:avLst/>
+          </a:prstGeom>
+          <a:noFill/>
+          <a:ln/>
+        </p:spPr>
+        <p:txBody>
+          <a:bodyPr wrap="square" lIns="0" tIns="0" rIns="0" bIns="0" rtlCol="0" anchor="t"/>
+          <a:lstStyle/>
+          <a:p>
+            <a:pPr algn="ctr" indent="0" marL="0">
+              <a:lnSpc>
+                <a:spcPct val="118000"/>
+              </a:lnSpc>
+              <a:buNone/>
+            </a:pPr>
+            <a:r>
+              <a:rPr lang="en-US" sz="1250" dirty="0">
+                <a:solidFill>
+                  <a:srgbClr val="31424A"/>
+                </a:solidFill>
+                <a:latin typeface="Calibri" pitchFamily="34" charset="0"/>
+                <a:ea typeface="Calibri" pitchFamily="34" charset="-122"/>
+                <a:cs typeface="Calibri" pitchFamily="34" charset="-120"/>
+              </a:rPr>
+              <a:t>lancement du programme GRAINE de relance agricole</a:t>
+            </a:r>
+            <a:endParaRPr lang="en-US" sz="1250" dirty="0"/>
+          </a:p>
+        </p:txBody>
+      </p:sp>
+      <p:sp>
+        <p:nvSpPr>
+          <p:cNvPr id="16" name="Text 14"/>
+          <p:cNvSpPr txBox="1"/>
+          <p:nvPr/>
+        </p:nvSpPr>
+        <p:spPr>
+          <a:xfrm>
+            <a:off x="594360" y="4709160"/>
+            <a:ext cx="11002975" cy="1097280"/>
           </a:xfrm>
           <a:prstGeom prst="rect">
             <a:avLst/>
@@ -11962,12 +12708,12 @@
           <a:p>
             <a:pPr algn="l" indent="0" marL="0">
               <a:lnSpc>
-                <a:spcPct val="125000"/>
+                <a:spcPct val="130000"/>
               </a:lnSpc>
               <a:buNone/>
             </a:pPr>
             <a:r>
-              <a:rPr lang="en-US" sz="1200" dirty="0">
+              <a:rPr lang="en-US" sz="1350" dirty="0">
                 <a:solidFill>
                   <a:srgbClr val="31424A"/>
                 </a:solidFill>
@@ -11975,44 +12721,15 @@
                 <a:ea typeface="Calibri" pitchFamily="34" charset="-122"/>
                 <a:cs typeface="Calibri" pitchFamily="34" charset="-120"/>
               </a:rPr>
-              <a:t>Manioc et banane plantain forment la base alimentaire, cultivés en petites parcelles pluviales.</a:t>
-            </a:r>
-            <a:endParaRPr lang="en-US" sz="1200" dirty="0"/>
-          </a:p>
-          <a:p>
-            <a:pPr algn="l" indent="0" marL="0">
-              <a:lnSpc>
-                <a:spcPct val="125000"/>
-              </a:lnSpc>
-              <a:buNone/>
-            </a:pPr>
-            <a:endParaRPr lang="en-US" sz="1200" dirty="0"/>
-          </a:p>
-          <a:p>
-            <a:pPr algn="l" indent="0" marL="0">
-              <a:lnSpc>
-                <a:spcPct val="125000"/>
-              </a:lnSpc>
-              <a:buNone/>
-            </a:pPr>
-            <a:r>
-              <a:rPr lang="en-US" sz="1200" dirty="0">
-                <a:solidFill>
-                  <a:srgbClr val="31424A"/>
-                </a:solidFill>
-                <a:latin typeface="Calibri" pitchFamily="34" charset="0"/>
-                <a:ea typeface="Calibri" pitchFamily="34" charset="-122"/>
-                <a:cs typeface="Calibri" pitchFamily="34" charset="-120"/>
-              </a:rPr>
-              <a:t>Huile de palme, canne et hévéa sont conduits en plantations industrielles, sur des périmètres suivis et équipés : ce sont les interlocuteurs les plus rapides à convaincre par la mesure.</a:t>
-            </a:r>
-            <a:endParaRPr lang="en-US" sz="1200" dirty="0"/>
-          </a:p>
-        </p:txBody>
-      </p:sp>
-      <p:sp>
-        <p:nvSpPr>
-          <p:cNvPr id="8" name="Text 5"/>
+              <a:t>Le pétrole, le manganèse et le bois font l'essentiel des exportations, tandis que l'assiette des Gabonais vient largement de l'étranger. Les plans de diversification et le programme GRAINE misent sur une agriculture vivrière et périurbaine capable de réduire cette dépendance.</a:t>
+            </a:r>
+            <a:endParaRPr lang="en-US" sz="1350" dirty="0"/>
+          </a:p>
+        </p:txBody>
+      </p:sp>
+      <p:sp>
+        <p:nvSpPr>
+          <p:cNvPr id="17" name="Text 15"/>
           <p:cNvSpPr txBox="1"/>
           <p:nvPr/>
         </p:nvSpPr>
@@ -12053,7 +12770,7 @@
       </p:sp>
       <p:sp>
         <p:nvSpPr>
-          <p:cNvPr id="9" name="Text 6"/>
+          <p:cNvPr id="18" name="Text 16"/>
           <p:cNvSpPr txBox="1"/>
           <p:nvPr/>
         </p:nvSpPr>
@@ -12157,7 +12874,7 @@
                 <a:ea typeface="Calibri" pitchFamily="34" charset="-122"/>
                 <a:cs typeface="Calibri" pitchFamily="34" charset="-120"/>
               </a:rPr>
-              <a:t>PREMIÈRE FILIÈRE</a:t>
+              <a:t>LES FILIÈRES</a:t>
             </a:r>
             <a:endParaRPr lang="en-US" sz="1150" dirty="0"/>
           </a:p>
@@ -12196,46 +12913,104 @@
                 <a:ea typeface="Cambria" pitchFamily="34" charset="-122"/>
                 <a:cs typeface="Cambria" pitchFamily="34" charset="-120"/>
               </a:rPr>
-              <a:t>Banane plantain et manioc : la base de l'assiette</a:t>
+              <a:t>Cinq productions structurent l'offre nationale</a:t>
             </a:r>
             <a:endParaRPr lang="en-US" sz="3000" dirty="0"/>
           </a:p>
         </p:txBody>
       </p:sp>
-      <p:pic>
-        <p:nvPicPr>
-          <p:cNvPr id="4" name="Image 0" descr="preencoded.png">    </p:cNvPr>
-          <p:cNvPicPr>
-            <a:picLocks noChangeAspect="1"/>
-          </p:cNvPicPr>
-          <p:nvPr/>
-        </p:nvPicPr>
-        <p:blipFill>
-          <a:blip r:embed="rId1"/>
-          <a:stretch>
-            <a:fillRect/>
-          </a:stretch>
-        </p:blipFill>
-        <p:spPr>
-          <a:xfrm>
-            <a:off x="6522415" y="1783080"/>
-            <a:ext cx="5074920" cy="3794760"/>
-          </a:xfrm>
-          <a:prstGeom prst="rect">
-            <a:avLst/>
-          </a:prstGeom>
-        </p:spPr>
-      </p:pic>
-      <p:sp>
-        <p:nvSpPr>
-          <p:cNvPr id="5" name="Text 2"/>
-          <p:cNvSpPr txBox="1"/>
-          <p:nvPr/>
-        </p:nvSpPr>
-        <p:spPr>
-          <a:xfrm>
-            <a:off x="594360" y="1783080"/>
-            <a:ext cx="5379415" cy="4251960"/>
+      <p:graphicFrame>
+        <p:nvGraphicFramePr>
+          <p:cNvPr id="4" name="Chart 0" descr=""/>
+          <p:cNvGraphicFramePr/>
+          <p:nvPr/>
+        </p:nvGraphicFramePr>
+        <p:xfrm>
+          <a:off x="594360" y="1783080"/>
+          <a:ext cx="7360920" cy="3977640"/>
+        </p:xfrm>
+        <a:graphic xmlns:a="http://schemas.openxmlformats.org/drawingml/2006/main">
+          <a:graphicData uri="http://schemas.openxmlformats.org/drawingml/2006/chart">
+            <c:chart xmlns:c="http://schemas.openxmlformats.org/drawingml/2006/chart" r:id="rId1"/>
+          </a:graphicData>
+        </a:graphic>
+      </p:graphicFrame>
+      <p:sp>
+        <p:nvSpPr>
+          <p:cNvPr id="5" name="Shape 2"/>
+          <p:cNvSpPr/>
+          <p:nvPr/>
+        </p:nvSpPr>
+        <p:spPr>
+          <a:xfrm>
+            <a:off x="8275320" y="1783080"/>
+            <a:ext cx="3291840" cy="3977640"/>
+          </a:xfrm>
+          <a:prstGeom prst="roundRect">
+            <a:avLst>
+              <a:gd name="adj" fmla="val 2778"/>
+            </a:avLst>
+          </a:prstGeom>
+          <a:solidFill>
+            <a:srgbClr val="EDF3F5"/>
+          </a:solidFill>
+          <a:ln w="9525">
+            <a:solidFill>
+              <a:srgbClr val="D6E2E7"/>
+            </a:solidFill>
+            <a:prstDash val="solid"/>
+          </a:ln>
+        </p:spPr>
+      </p:sp>
+      <p:sp>
+        <p:nvSpPr>
+          <p:cNvPr id="6" name="Text 3"/>
+          <p:cNvSpPr txBox="1"/>
+          <p:nvPr/>
+        </p:nvSpPr>
+        <p:spPr>
+          <a:xfrm>
+            <a:off x="8503920" y="2011680"/>
+            <a:ext cx="2834640" cy="457200"/>
+          </a:xfrm>
+          <a:prstGeom prst="rect">
+            <a:avLst/>
+          </a:prstGeom>
+          <a:noFill/>
+          <a:ln/>
+        </p:spPr>
+        <p:txBody>
+          <a:bodyPr wrap="square" lIns="0" tIns="0" rIns="0" bIns="0" rtlCol="0" anchor="ctr"/>
+          <a:lstStyle/>
+          <a:p>
+            <a:pPr algn="l" indent="0" marL="0">
+              <a:buNone/>
+            </a:pPr>
+            <a:r>
+              <a:rPr lang="en-US" sz="1300" b="1" dirty="0">
+                <a:solidFill>
+                  <a:srgbClr val="1C5A73"/>
+                </a:solidFill>
+                <a:latin typeface="Cambria" pitchFamily="34" charset="0"/>
+                <a:ea typeface="Cambria" pitchFamily="34" charset="-122"/>
+                <a:cs typeface="Cambria" pitchFamily="34" charset="-120"/>
+              </a:rPr>
+              <a:t>Lecture</a:t>
+            </a:r>
+            <a:endParaRPr lang="en-US" sz="1300" dirty="0"/>
+          </a:p>
+        </p:txBody>
+      </p:sp>
+      <p:sp>
+        <p:nvSpPr>
+          <p:cNvPr id="7" name="Text 4"/>
+          <p:cNvSpPr txBox="1"/>
+          <p:nvPr/>
+        </p:nvSpPr>
+        <p:spPr>
+          <a:xfrm>
+            <a:off x="8503920" y="2560320"/>
+            <a:ext cx="2834640" cy="3017520"/>
           </a:xfrm>
           <a:prstGeom prst="rect">
             <a:avLst/>
@@ -12247,18 +13022,14 @@
           <a:bodyPr wrap="square" lIns="0" tIns="0" rIns="0" bIns="0" rtlCol="0" anchor="t"/>
           <a:lstStyle/>
           <a:p>
-            <a:pPr algn="l" marL="342900" indent="-342900">
+            <a:pPr algn="l" indent="0" marL="0">
               <a:lnSpc>
-                <a:spcPct val="122000"/>
+                <a:spcPct val="125000"/>
               </a:lnSpc>
-              <a:spcAft>
-                <a:spcPts val="1100"/>
-              </a:spcAft>
-              <a:buSzPct val="100000"/>
-              <a:buChar char="•"/>
-            </a:pPr>
-            <a:r>
-              <a:rPr lang="en-US" sz="1400" dirty="0">
+              <a:buNone/>
+            </a:pPr>
+            <a:r>
+              <a:rPr lang="en-US" sz="1200" dirty="0">
                 <a:solidFill>
                   <a:srgbClr val="31424A"/>
                 </a:solidFill>
@@ -12266,23 +13037,28 @@
                 <a:ea typeface="Calibri" pitchFamily="34" charset="-122"/>
                 <a:cs typeface="Calibri" pitchFamily="34" charset="-120"/>
               </a:rPr>
-              <a:t>Manioc et banane plantain sont les deux aliments de base, cultivés surtout en petites parcelles familiales.</a:t>
-            </a:r>
-            <a:endParaRPr lang="en-US" sz="1400" dirty="0"/>
-          </a:p>
-          <a:p>
-            <a:pPr algn="l" marL="342900" indent="-342900">
+              <a:t>Manioc et banane plantain forment la base alimentaire, cultivés en petites parcelles pluviales.</a:t>
+            </a:r>
+            <a:endParaRPr lang="en-US" sz="1200" dirty="0"/>
+          </a:p>
+          <a:p>
+            <a:pPr algn="l" indent="0" marL="0">
               <a:lnSpc>
-                <a:spcPct val="122000"/>
+                <a:spcPct val="125000"/>
               </a:lnSpc>
-              <a:spcAft>
-                <a:spcPts val="1100"/>
-              </a:spcAft>
-              <a:buSzPct val="100000"/>
-              <a:buChar char="•"/>
-            </a:pPr>
-            <a:r>
-              <a:rPr lang="en-US" sz="1400" dirty="0">
+              <a:buNone/>
+            </a:pPr>
+            <a:endParaRPr lang="en-US" sz="1200" dirty="0"/>
+          </a:p>
+          <a:p>
+            <a:pPr algn="l" indent="0" marL="0">
+              <a:lnSpc>
+                <a:spcPct val="125000"/>
+              </a:lnSpc>
+              <a:buNone/>
+            </a:pPr>
+            <a:r>
+              <a:rPr lang="en-US" sz="1200" dirty="0">
                 <a:solidFill>
                   <a:srgbClr val="31424A"/>
                 </a:solidFill>
@@ -12290,87 +13066,15 @@
                 <a:ea typeface="Calibri" pitchFamily="34" charset="-122"/>
                 <a:cs typeface="Calibri" pitchFamily="34" charset="-120"/>
               </a:rPr>
-              <a:t>Les sols ferralitiques, lessivés par les fortes pluies, retiennent mal l'eau et les éléments nutritifs.</a:t>
-            </a:r>
-            <a:endParaRPr lang="en-US" sz="1400" dirty="0"/>
-          </a:p>
-          <a:p>
-            <a:pPr algn="l" marL="342900" indent="-342900">
-              <a:lnSpc>
-                <a:spcPct val="122000"/>
-              </a:lnSpc>
-              <a:spcAft>
-                <a:spcPts val="1100"/>
-              </a:spcAft>
-              <a:buSzPct val="100000"/>
-              <a:buChar char="•"/>
-            </a:pPr>
-            <a:r>
-              <a:rPr lang="en-US" sz="1400" dirty="0">
-                <a:solidFill>
-                  <a:srgbClr val="31424A"/>
-                </a:solidFill>
-                <a:latin typeface="Calibri" pitchFamily="34" charset="0"/>
-                <a:ea typeface="Calibri" pitchFamily="34" charset="-122"/>
-                <a:cs typeface="Calibri" pitchFamily="34" charset="-120"/>
-              </a:rPr>
-              <a:t>La saison sèche, de juin à septembre, suffit à faire chuter la production des parcelles non arrosées.</a:t>
-            </a:r>
-            <a:endParaRPr lang="en-US" sz="1400" dirty="0"/>
-          </a:p>
-          <a:p>
-            <a:pPr algn="l" marL="342900" indent="-342900">
-              <a:lnSpc>
-                <a:spcPct val="122000"/>
-              </a:lnSpc>
-              <a:spcAft>
-                <a:spcPts val="1100"/>
-              </a:spcAft>
-              <a:buSzPct val="100000"/>
-              <a:buChar char="•"/>
-            </a:pPr>
-            <a:r>
-              <a:rPr lang="en-US" sz="1400" dirty="0">
-                <a:solidFill>
-                  <a:srgbClr val="31424A"/>
-                </a:solidFill>
-                <a:latin typeface="Calibri" pitchFamily="34" charset="0"/>
-                <a:ea typeface="Calibri" pitchFamily="34" charset="-122"/>
-                <a:cs typeface="Calibri" pitchFamily="34" charset="-120"/>
-              </a:rPr>
-              <a:t>Une part importante de la banane plantain vendue à Libreville arrive encore du Cameroun.</a:t>
-            </a:r>
-            <a:endParaRPr lang="en-US" sz="1400" dirty="0"/>
-          </a:p>
-          <a:p>
-            <a:pPr algn="l" marL="342900" indent="-342900">
-              <a:lnSpc>
-                <a:spcPct val="122000"/>
-              </a:lnSpc>
-              <a:spcAft>
-                <a:spcPts val="1100"/>
-              </a:spcAft>
-              <a:buSzPct val="100000"/>
-              <a:buChar char="•"/>
-            </a:pPr>
-            <a:r>
-              <a:rPr lang="en-US" sz="1400" dirty="0">
-                <a:solidFill>
-                  <a:srgbClr val="31424A"/>
-                </a:solidFill>
-                <a:latin typeface="Calibri" pitchFamily="34" charset="0"/>
-                <a:ea typeface="Calibri" pitchFamily="34" charset="-122"/>
-                <a:cs typeface="Calibri" pitchFamily="34" charset="-120"/>
-              </a:rPr>
-              <a:t>EVERGREEN® à la plantation garde l'humidité au pied pendant la saison sèche ; ECOFERT® apporte ce que la pluie emporte.</a:t>
-            </a:r>
-            <a:endParaRPr lang="en-US" sz="1400" dirty="0"/>
-          </a:p>
-        </p:txBody>
-      </p:sp>
-      <p:sp>
-        <p:nvSpPr>
-          <p:cNvPr id="6" name="Text 3"/>
+              <a:t>Huile de palme, canne et hévéa sont conduits en plantations industrielles, sur des périmètres suivis et équipés : ce sont les interlocuteurs les plus rapides à convaincre par la mesure.</a:t>
+            </a:r>
+            <a:endParaRPr lang="en-US" sz="1200" dirty="0"/>
+          </a:p>
+        </p:txBody>
+      </p:sp>
+      <p:sp>
+        <p:nvSpPr>
+          <p:cNvPr id="8" name="Text 5"/>
           <p:cNvSpPr txBox="1"/>
           <p:nvPr/>
         </p:nvSpPr>
@@ -12411,7 +13115,7 @@
       </p:sp>
       <p:sp>
         <p:nvSpPr>
-          <p:cNvPr id="7" name="Text 4"/>
+          <p:cNvPr id="9" name="Text 6"/>
           <p:cNvSpPr txBox="1"/>
           <p:nvPr/>
         </p:nvSpPr>
@@ -12515,7 +13219,7 @@
                 <a:ea typeface="Calibri" pitchFamily="34" charset="-122"/>
                 <a:cs typeface="Calibri" pitchFamily="34" charset="-120"/>
               </a:rPr>
-              <a:t>DEUXIÈME FILIÈRE</a:t>
+              <a:t>PREMIÈRE FILIÈRE</a:t>
             </a:r>
             <a:endParaRPr lang="en-US" sz="1150" dirty="0"/>
           </a:p>
@@ -12554,7 +13258,7 @@
                 <a:ea typeface="Cambria" pitchFamily="34" charset="-122"/>
                 <a:cs typeface="Cambria" pitchFamily="34" charset="-120"/>
               </a:rPr>
-              <a:t>Maraîchage autour de Libreville : produire là où l'on mange</a:t>
+              <a:t>Banane plantain et manioc : la base de l'assiette</a:t>
             </a:r>
             <a:endParaRPr lang="en-US" sz="3000" dirty="0"/>
           </a:p>
@@ -12576,23 +13280,23 @@
         </p:blipFill>
         <p:spPr>
           <a:xfrm>
+            <a:off x="6522415" y="1783080"/>
+            <a:ext cx="5074920" cy="3794760"/>
+          </a:xfrm>
+          <a:prstGeom prst="rect">
+            <a:avLst/>
+          </a:prstGeom>
+        </p:spPr>
+      </p:pic>
+      <p:sp>
+        <p:nvSpPr>
+          <p:cNvPr id="5" name="Text 2"/>
+          <p:cNvSpPr txBox="1"/>
+          <p:nvPr/>
+        </p:nvSpPr>
+        <p:spPr>
+          <a:xfrm>
             <a:off x="594360" y="1783080"/>
-            <a:ext cx="5074920" cy="3794760"/>
-          </a:xfrm>
-          <a:prstGeom prst="rect">
-            <a:avLst/>
-          </a:prstGeom>
-        </p:spPr>
-      </p:pic>
-      <p:sp>
-        <p:nvSpPr>
-          <p:cNvPr id="5" name="Text 2"/>
-          <p:cNvSpPr txBox="1"/>
-          <p:nvPr/>
-        </p:nvSpPr>
-        <p:spPr>
-          <a:xfrm>
-            <a:off x="6217920" y="1783080"/>
             <a:ext cx="5379415" cy="4251960"/>
           </a:xfrm>
           <a:prstGeom prst="rect">
@@ -12624,7 +13328,7 @@
                 <a:ea typeface="Calibri" pitchFamily="34" charset="-122"/>
                 <a:cs typeface="Calibri" pitchFamily="34" charset="-120"/>
               </a:rPr>
-              <a:t>Tomates, piments, oseille et légumes-feuilles sont cultivés en ceinture de Libreville, d'Owendo et de Ntoum.</a:t>
+              <a:t>Manioc et banane plantain sont les deux aliments de base, cultivés surtout en petites parcelles familiales.</a:t>
             </a:r>
             <a:endParaRPr lang="en-US" sz="1400" dirty="0"/>
           </a:p>
@@ -12648,7 +13352,7 @@
                 <a:ea typeface="Calibri" pitchFamily="34" charset="-122"/>
                 <a:cs typeface="Calibri" pitchFamily="34" charset="-120"/>
               </a:rPr>
-              <a:t>Les légumes importés arrivent chers et souvent abîmés : la production locale a un marché immédiat.</a:t>
+              <a:t>Les sols ferralitiques, lessivés par les fortes pluies, retiennent mal l'eau et les éléments nutritifs.</a:t>
             </a:r>
             <a:endParaRPr lang="en-US" sz="1400" dirty="0"/>
           </a:p>
@@ -12672,7 +13376,7 @@
                 <a:ea typeface="Calibri" pitchFamily="34" charset="-122"/>
                 <a:cs typeface="Calibri" pitchFamily="34" charset="-120"/>
               </a:rPr>
-              <a:t>Sur sol sableux ou très lessivé, l'arrosage manuel ne suffit plus dès que la pluie s'interrompt quelques jours.</a:t>
+              <a:t>La saison sèche, de juin à septembre, suffit à faire chuter la production des parcelles non arrosées.</a:t>
             </a:r>
             <a:endParaRPr lang="en-US" sz="1400" dirty="0"/>
           </a:p>
@@ -12696,7 +13400,7 @@
                 <a:ea typeface="Calibri" pitchFamily="34" charset="-122"/>
                 <a:cs typeface="Calibri" pitchFamily="34" charset="-120"/>
               </a:rPr>
-              <a:t>Les maladies fongiques profitent de l'humidité : NAPEMA® les traite sans résidu sur des légumes vendus frais.</a:t>
+              <a:t>Une part importante de la banane plantain vendue à Libreville arrive encore du Cameroun.</a:t>
             </a:r>
             <a:endParaRPr lang="en-US" sz="1400" dirty="0"/>
           </a:p>
@@ -12720,7 +13424,7 @@
                 <a:ea typeface="Calibri" pitchFamily="34" charset="-122"/>
                 <a:cs typeface="Calibri" pitchFamily="34" charset="-120"/>
               </a:rPr>
-              <a:t>Retenir l'eau au niveau des racines réduit les arrosages et stabilise les récoltes entre deux pluies.</a:t>
+              <a:t>EVERGREEN® à la plantation garde l'humidité au pied pendant la saison sèche ; ECOFERT® apporte ce que la pluie emporte.</a:t>
             </a:r>
             <a:endParaRPr lang="en-US" sz="1400" dirty="0"/>
           </a:p>
@@ -12873,7 +13577,7 @@
                 <a:ea typeface="Calibri" pitchFamily="34" charset="-122"/>
                 <a:cs typeface="Calibri" pitchFamily="34" charset="-120"/>
               </a:rPr>
-              <a:t>Potentiel de rendement</a:t>
+              <a:t>DEUXIÈME FILIÈRE</a:t>
             </a:r>
             <a:endParaRPr lang="en-US" sz="1150" dirty="0"/>
           </a:p>
@@ -12912,168 +13616,181 @@
                 <a:ea typeface="Cambria" pitchFamily="34" charset="-122"/>
                 <a:cs typeface="Cambria" pitchFamily="34" charset="-120"/>
               </a:rPr>
-              <a:t>Gain de rendement attendu par culture</a:t>
+              <a:t>Maraîchage autour de Libreville : produire là où l'on mange</a:t>
             </a:r>
             <a:endParaRPr lang="en-US" sz="3000" dirty="0"/>
           </a:p>
         </p:txBody>
       </p:sp>
-      <p:graphicFrame>
-        <p:nvGraphicFramePr>
-          <p:cNvPr id="4" name="Chart 0" descr=""/>
-          <p:cNvGraphicFramePr/>
-          <p:nvPr/>
-        </p:nvGraphicFramePr>
-        <p:xfrm>
-          <a:off x="594360" y="1783080"/>
-          <a:ext cx="7360920" cy="3977640"/>
-        </p:xfrm>
-        <a:graphic xmlns:a="http://schemas.openxmlformats.org/drawingml/2006/main">
-          <a:graphicData uri="http://schemas.openxmlformats.org/drawingml/2006/chart">
-            <c:chart xmlns:c="http://schemas.openxmlformats.org/drawingml/2006/chart" r:id="rId1"/>
-          </a:graphicData>
-        </a:graphic>
-      </p:graphicFrame>
-      <p:sp>
-        <p:nvSpPr>
-          <p:cNvPr id="5" name="Shape 2"/>
-          <p:cNvSpPr/>
-          <p:nvPr/>
-        </p:nvSpPr>
-        <p:spPr>
-          <a:xfrm>
-            <a:off x="8275320" y="1783080"/>
-            <a:ext cx="3291840" cy="3977640"/>
-          </a:xfrm>
-          <a:prstGeom prst="roundRect">
-            <a:avLst>
-              <a:gd name="adj" fmla="val 2778"/>
-            </a:avLst>
-          </a:prstGeom>
-          <a:solidFill>
-            <a:srgbClr val="EDF3F5"/>
-          </a:solidFill>
-          <a:ln w="9525">
-            <a:solidFill>
-              <a:srgbClr val="D6E2E7"/>
-            </a:solidFill>
-            <a:prstDash val="solid"/>
-          </a:ln>
-        </p:spPr>
+      <p:pic>
+        <p:nvPicPr>
+          <p:cNvPr id="4" name="Image 0" descr="preencoded.png">    </p:cNvPr>
+          <p:cNvPicPr>
+            <a:picLocks noChangeAspect="1"/>
+          </p:cNvPicPr>
+          <p:nvPr/>
+        </p:nvPicPr>
+        <p:blipFill>
+          <a:blip r:embed="rId1"/>
+          <a:stretch>
+            <a:fillRect/>
+          </a:stretch>
+        </p:blipFill>
+        <p:spPr>
+          <a:xfrm>
+            <a:off x="594360" y="1783080"/>
+            <a:ext cx="5074920" cy="3794760"/>
+          </a:xfrm>
+          <a:prstGeom prst="rect">
+            <a:avLst/>
+          </a:prstGeom>
+        </p:spPr>
+      </p:pic>
+      <p:sp>
+        <p:nvSpPr>
+          <p:cNvPr id="5" name="Text 2"/>
+          <p:cNvSpPr txBox="1"/>
+          <p:nvPr/>
+        </p:nvSpPr>
+        <p:spPr>
+          <a:xfrm>
+            <a:off x="6217920" y="1783080"/>
+            <a:ext cx="5379415" cy="4251960"/>
+          </a:xfrm>
+          <a:prstGeom prst="rect">
+            <a:avLst/>
+          </a:prstGeom>
+          <a:noFill/>
+          <a:ln/>
+        </p:spPr>
+        <p:txBody>
+          <a:bodyPr wrap="square" lIns="0" tIns="0" rIns="0" bIns="0" rtlCol="0" anchor="t"/>
+          <a:lstStyle/>
+          <a:p>
+            <a:pPr algn="l" marL="342900" indent="-342900">
+              <a:lnSpc>
+                <a:spcPct val="122000"/>
+              </a:lnSpc>
+              <a:spcAft>
+                <a:spcPts val="1100"/>
+              </a:spcAft>
+              <a:buSzPct val="100000"/>
+              <a:buChar char="•"/>
+            </a:pPr>
+            <a:r>
+              <a:rPr lang="en-US" sz="1400" dirty="0">
+                <a:solidFill>
+                  <a:srgbClr val="31424A"/>
+                </a:solidFill>
+                <a:latin typeface="Calibri" pitchFamily="34" charset="0"/>
+                <a:ea typeface="Calibri" pitchFamily="34" charset="-122"/>
+                <a:cs typeface="Calibri" pitchFamily="34" charset="-120"/>
+              </a:rPr>
+              <a:t>Tomates, piments, oseille et légumes-feuilles sont cultivés en ceinture de Libreville, d'Owendo et de Ntoum.</a:t>
+            </a:r>
+            <a:endParaRPr lang="en-US" sz="1400" dirty="0"/>
+          </a:p>
+          <a:p>
+            <a:pPr algn="l" marL="342900" indent="-342900">
+              <a:lnSpc>
+                <a:spcPct val="122000"/>
+              </a:lnSpc>
+              <a:spcAft>
+                <a:spcPts val="1100"/>
+              </a:spcAft>
+              <a:buSzPct val="100000"/>
+              <a:buChar char="•"/>
+            </a:pPr>
+            <a:r>
+              <a:rPr lang="en-US" sz="1400" dirty="0">
+                <a:solidFill>
+                  <a:srgbClr val="31424A"/>
+                </a:solidFill>
+                <a:latin typeface="Calibri" pitchFamily="34" charset="0"/>
+                <a:ea typeface="Calibri" pitchFamily="34" charset="-122"/>
+                <a:cs typeface="Calibri" pitchFamily="34" charset="-120"/>
+              </a:rPr>
+              <a:t>Les légumes importés arrivent chers et souvent abîmés : la production locale a un marché immédiat.</a:t>
+            </a:r>
+            <a:endParaRPr lang="en-US" sz="1400" dirty="0"/>
+          </a:p>
+          <a:p>
+            <a:pPr algn="l" marL="342900" indent="-342900">
+              <a:lnSpc>
+                <a:spcPct val="122000"/>
+              </a:lnSpc>
+              <a:spcAft>
+                <a:spcPts val="1100"/>
+              </a:spcAft>
+              <a:buSzPct val="100000"/>
+              <a:buChar char="•"/>
+            </a:pPr>
+            <a:r>
+              <a:rPr lang="en-US" sz="1400" dirty="0">
+                <a:solidFill>
+                  <a:srgbClr val="31424A"/>
+                </a:solidFill>
+                <a:latin typeface="Calibri" pitchFamily="34" charset="0"/>
+                <a:ea typeface="Calibri" pitchFamily="34" charset="-122"/>
+                <a:cs typeface="Calibri" pitchFamily="34" charset="-120"/>
+              </a:rPr>
+              <a:t>Sur sol sableux ou très lessivé, l'arrosage manuel ne suffit plus dès que la pluie s'interrompt quelques jours.</a:t>
+            </a:r>
+            <a:endParaRPr lang="en-US" sz="1400" dirty="0"/>
+          </a:p>
+          <a:p>
+            <a:pPr algn="l" marL="342900" indent="-342900">
+              <a:lnSpc>
+                <a:spcPct val="122000"/>
+              </a:lnSpc>
+              <a:spcAft>
+                <a:spcPts val="1100"/>
+              </a:spcAft>
+              <a:buSzPct val="100000"/>
+              <a:buChar char="•"/>
+            </a:pPr>
+            <a:r>
+              <a:rPr lang="en-US" sz="1400" dirty="0">
+                <a:solidFill>
+                  <a:srgbClr val="31424A"/>
+                </a:solidFill>
+                <a:latin typeface="Calibri" pitchFamily="34" charset="0"/>
+                <a:ea typeface="Calibri" pitchFamily="34" charset="-122"/>
+                <a:cs typeface="Calibri" pitchFamily="34" charset="-120"/>
+              </a:rPr>
+              <a:t>Les maladies fongiques profitent de l'humidité : NAPEMA® les traite sans résidu sur des légumes vendus frais.</a:t>
+            </a:r>
+            <a:endParaRPr lang="en-US" sz="1400" dirty="0"/>
+          </a:p>
+          <a:p>
+            <a:pPr algn="l" marL="342900" indent="-342900">
+              <a:lnSpc>
+                <a:spcPct val="122000"/>
+              </a:lnSpc>
+              <a:spcAft>
+                <a:spcPts val="1100"/>
+              </a:spcAft>
+              <a:buSzPct val="100000"/>
+              <a:buChar char="•"/>
+            </a:pPr>
+            <a:r>
+              <a:rPr lang="en-US" sz="1400" dirty="0">
+                <a:solidFill>
+                  <a:srgbClr val="31424A"/>
+                </a:solidFill>
+                <a:latin typeface="Calibri" pitchFamily="34" charset="0"/>
+                <a:ea typeface="Calibri" pitchFamily="34" charset="-122"/>
+                <a:cs typeface="Calibri" pitchFamily="34" charset="-120"/>
+              </a:rPr>
+              <a:t>Retenir l'eau au niveau des racines réduit les arrosages et stabilise les récoltes entre deux pluies.</a:t>
+            </a:r>
+            <a:endParaRPr lang="en-US" sz="1400" dirty="0"/>
+          </a:p>
+        </p:txBody>
       </p:sp>
       <p:sp>
         <p:nvSpPr>
           <p:cNvPr id="6" name="Text 3"/>
-          <p:cNvSpPr txBox="1"/>
-          <p:nvPr/>
-        </p:nvSpPr>
-        <p:spPr>
-          <a:xfrm>
-            <a:off x="8503920" y="2011680"/>
-            <a:ext cx="2834640" cy="457200"/>
-          </a:xfrm>
-          <a:prstGeom prst="rect">
-            <a:avLst/>
-          </a:prstGeom>
-          <a:noFill/>
-          <a:ln/>
-        </p:spPr>
-        <p:txBody>
-          <a:bodyPr wrap="square" lIns="0" tIns="0" rIns="0" bIns="0" rtlCol="0" anchor="ctr"/>
-          <a:lstStyle/>
-          <a:p>
-            <a:pPr algn="l" indent="0" marL="0">
-              <a:buNone/>
-            </a:pPr>
-            <a:r>
-              <a:rPr lang="en-US" sz="1300" b="1" dirty="0">
-                <a:solidFill>
-                  <a:srgbClr val="1C5A73"/>
-                </a:solidFill>
-                <a:latin typeface="Cambria" pitchFamily="34" charset="0"/>
-                <a:ea typeface="Cambria" pitchFamily="34" charset="-122"/>
-                <a:cs typeface="Cambria" pitchFamily="34" charset="-120"/>
-              </a:rPr>
-              <a:t>À lire avec prudence</a:t>
-            </a:r>
-            <a:endParaRPr lang="en-US" sz="1300" dirty="0"/>
-          </a:p>
-        </p:txBody>
-      </p:sp>
-      <p:sp>
-        <p:nvSpPr>
-          <p:cNvPr id="7" name="Text 4"/>
-          <p:cNvSpPr txBox="1"/>
-          <p:nvPr/>
-        </p:nvSpPr>
-        <p:spPr>
-          <a:xfrm>
-            <a:off x="8503920" y="2560320"/>
-            <a:ext cx="2834640" cy="3017520"/>
-          </a:xfrm>
-          <a:prstGeom prst="rect">
-            <a:avLst/>
-          </a:prstGeom>
-          <a:noFill/>
-          <a:ln/>
-        </p:spPr>
-        <p:txBody>
-          <a:bodyPr wrap="square" lIns="0" tIns="0" rIns="0" bIns="0" rtlCol="0" anchor="t"/>
-          <a:lstStyle/>
-          <a:p>
-            <a:pPr algn="l" indent="0" marL="0">
-              <a:lnSpc>
-                <a:spcPct val="125000"/>
-              </a:lnSpc>
-              <a:buNone/>
-            </a:pPr>
-            <a:r>
-              <a:rPr lang="en-US" sz="1200" dirty="0">
-                <a:solidFill>
-                  <a:srgbClr val="31424A"/>
-                </a:solidFill>
-                <a:latin typeface="Calibri" pitchFamily="34" charset="0"/>
-                <a:ea typeface="Calibri" pitchFamily="34" charset="-122"/>
-                <a:cs typeface="Calibri" pitchFamily="34" charset="-120"/>
-              </a:rPr>
-              <a:t>Fourchettes retenues par notre calculateur de dose, pour une culture conduite normalement avec EVERGREEN® à la plantation.</a:t>
-            </a:r>
-            <a:endParaRPr lang="en-US" sz="1200" dirty="0"/>
-          </a:p>
-          <a:p>
-            <a:pPr algn="l" indent="0" marL="0">
-              <a:lnSpc>
-                <a:spcPct val="125000"/>
-              </a:lnSpc>
-              <a:buNone/>
-            </a:pPr>
-            <a:endParaRPr lang="en-US" sz="1200" dirty="0"/>
-          </a:p>
-          <a:p>
-            <a:pPr algn="l" indent="0" marL="0">
-              <a:lnSpc>
-                <a:spcPct val="125000"/>
-              </a:lnSpc>
-              <a:buNone/>
-            </a:pPr>
-            <a:r>
-              <a:rPr lang="en-US" sz="1200" dirty="0">
-                <a:solidFill>
-                  <a:srgbClr val="31424A"/>
-                </a:solidFill>
-                <a:latin typeface="Calibri" pitchFamily="34" charset="0"/>
-                <a:ea typeface="Calibri" pitchFamily="34" charset="-122"/>
-                <a:cs typeface="Calibri" pitchFamily="34" charset="-120"/>
-              </a:rPr>
-              <a:t>Le résultat réel dépend du sol, du climat et de la conduite. Pour les céréales, aucun gain n'est avancé sans essai de terrain.</a:t>
-            </a:r>
-            <a:endParaRPr lang="en-US" sz="1200" dirty="0"/>
-          </a:p>
-        </p:txBody>
-      </p:sp>
-      <p:sp>
-        <p:nvSpPr>
-          <p:cNvPr id="8" name="Text 5"/>
           <p:cNvSpPr txBox="1"/>
           <p:nvPr/>
         </p:nvSpPr>
@@ -13114,7 +13831,7 @@
       </p:sp>
       <p:sp>
         <p:nvSpPr>
-          <p:cNvPr id="9" name="Text 6"/>
+          <p:cNvPr id="7" name="Text 4"/>
           <p:cNvSpPr txBox="1"/>
           <p:nvPr/>
         </p:nvSpPr>

--- a/public/documents/countries/gabon.pptx
+++ b/public/documents/countries/gabon.pptx
@@ -125,7 +125,7 @@
 </p:presentation>
 </file>
 
-<file path=ppt/charts/chart50.xml><?xml version="1.0" encoding="utf-8"?>
+<file path=ppt/charts/chart52.xml><?xml version="1.0" encoding="utf-8"?>
 <c:chartSpace xmlns:c="http://schemas.openxmlformats.org/drawingml/2006/chart" xmlns:a="http://schemas.openxmlformats.org/drawingml/2006/main" xmlns:r="http://schemas.openxmlformats.org/officeDocument/2006/relationships">
   <c:date1904 val="0"/>
   <c:roundedCorners val="1"/>
@@ -384,7 +384,7 @@
 </c:chartSpace>
 </file>
 
-<file path=ppt/charts/chart51.xml><?xml version="1.0" encoding="utf-8"?>
+<file path=ppt/charts/chart53.xml><?xml version="1.0" encoding="utf-8"?>
 <c:chartSpace xmlns:c="http://schemas.openxmlformats.org/drawingml/2006/chart" xmlns:a="http://schemas.openxmlformats.org/drawingml/2006/main" xmlns:r="http://schemas.openxmlformats.org/officeDocument/2006/relationships">
   <c:date1904 val="0"/>
   <c:roundedCorners val="1"/>
@@ -629,7 +629,7 @@
 </c:chartSpace>
 </file>
 
-<file path=ppt/charts/chart52.xml><?xml version="1.0" encoding="utf-8"?>
+<file path=ppt/charts/chart54.xml><?xml version="1.0" encoding="utf-8"?>
 <c:chartSpace xmlns:c="http://schemas.openxmlformats.org/drawingml/2006/chart" xmlns:a="http://schemas.openxmlformats.org/drawingml/2006/main" xmlns:r="http://schemas.openxmlformats.org/officeDocument/2006/relationships">
   <c:date1904 val="0"/>
   <c:roundedCorners val="1"/>
@@ -937,7 +937,7 @@
 </c:chartSpace>
 </file>
 
-<file path=ppt/charts/chart53.xml><?xml version="1.0" encoding="utf-8"?>
+<file path=ppt/charts/chart55.xml><?xml version="1.0" encoding="utf-8"?>
 <c:chartSpace xmlns:c="http://schemas.openxmlformats.org/drawingml/2006/chart" xmlns:a="http://schemas.openxmlformats.org/drawingml/2006/main" xmlns:r="http://schemas.openxmlformats.org/officeDocument/2006/relationships">
   <c:date1904 val="0"/>
   <c:roundedCorners val="1"/>
@@ -1302,7 +1302,7 @@
 </c:chartSpace>
 </file>
 
-<file path=ppt/charts/chart54.xml><?xml version="1.0" encoding="utf-8"?>
+<file path=ppt/charts/chart56.xml><?xml version="1.0" encoding="utf-8"?>
 <c:chartSpace xmlns:c="http://schemas.openxmlformats.org/drawingml/2006/chart" xmlns:a="http://schemas.openxmlformats.org/drawingml/2006/main" xmlns:r="http://schemas.openxmlformats.org/officeDocument/2006/relationships">
   <c:date1904 val="0"/>
   <c:roundedCorners val="1"/>
@@ -4092,7 +4092,7 @@
       </p:sp>
       <p:pic>
         <p:nvPicPr>
-          <p:cNvPr id="5" name="Image 1" descr="/workspace/scratch/50eb4f7d8e13/green-solutions-web/public/images/logo-icon.png">    </p:cNvPr>
+          <p:cNvPr id="5" name="Image 1" descr="/home/claude/green-solutions-web/public/images/logo-icon.png">    </p:cNvPr>
           <p:cNvPicPr>
             <a:picLocks noChangeAspect="1"/>
           </p:cNvPicPr>
@@ -4116,7 +4116,7 @@
       </p:pic>
       <p:pic>
         <p:nvPicPr>
-          <p:cNvPr id="6" name="Image 2" descr="/workspace/scratch/50eb4f7d8e13/green-solutions-web/scripts/dossiers/drapeaux/gabon.png">    </p:cNvPr>
+          <p:cNvPr id="6" name="Image 2" descr="/home/claude/green-solutions-web/scripts/dossiers/drapeaux/gabon.png">    </p:cNvPr>
           <p:cNvPicPr>
             <a:picLocks noChangeAspect="1"/>
           </p:cNvPicPr>
@@ -10276,7 +10276,7 @@
                 <a:ea typeface="Calibri" pitchFamily="34" charset="-122"/>
                 <a:cs typeface="Calibri" pitchFamily="34" charset="-120"/>
               </a:rPr>
-              <a:t>contact@evergreen-ecosorb.com · Green Solutions Groupe AIM SA, 46, route de la Condémine, 1475 Forel, Suisse</a:t>
+              <a:t>contact@green-solutions-group.com · Green Solutions Groupe AIM SA, 46, route de la Condémine, 1475 Forel, Suisse</a:t>
             </a:r>
             <a:endParaRPr lang="en-US" sz="1400" dirty="0"/>
           </a:p>
@@ -10284,7 +10284,7 @@
       </p:sp>
       <p:pic>
         <p:nvPicPr>
-          <p:cNvPr id="6" name="Image 1" descr="/workspace/scratch/50eb4f7d8e13/green-solutions-web/scripts/dossiers/sceau-aim-clair.png">    </p:cNvPr>
+          <p:cNvPr id="6" name="Image 1" descr="/home/claude/green-solutions-web/scripts/dossiers/sceau-aim-clair.png">    </p:cNvPr>
           <p:cNvPicPr>
             <a:picLocks noChangeAspect="1"/>
           </p:cNvPicPr>
